--- a/第三週(09-24)/第三週_第1節_簡報.pptx
+++ b/第三週(09-24)/第三週_第1節_簡報.pptx
@@ -10035,7 +10035,7 @@
                 <a:ea typeface="微軟正黑體" pitchFamily="34" charset="-122"/>
                 <a:cs typeface="微軟正黑體" pitchFamily="34" charset="-120"/>
               </a:rPr>
-              <a:t>它是唯一不看外面的一種。前面有什麼，它一無所知。</a:t>
+              <a:t>它是唯一不看外面的一種。前面有什麼東西，它完全不知道。</a:t>
             </a:r>
             <a:endParaRPr lang="en-US" sz="1200" dirty="0"/>
           </a:p>
@@ -18377,7 +18377,7 @@
                 <a:ea typeface="微軟正黑體" pitchFamily="34" charset="-122"/>
                 <a:cs typeface="微軟正黑體" pitchFamily="34" charset="-120"/>
               </a:rPr>
-              <a:t>Waymo 第六代裝了 13 顆相機。沒有一家敢不裝相機。</a:t>
+              <a:t>Waymo 第六代裝了 13 顆相機。到目前為止，沒有一家自駕公司不裝相機。</a:t>
             </a:r>
             <a:endParaRPr lang="en-US" sz="1200" dirty="0"/>
           </a:p>

--- a/第三週(09-24)/第三週_第1節_簡報.pptx
+++ b/第三週(09-24)/第三週_第1節_簡報.pptx
@@ -11107,57 +11107,8 @@
         </p:nvSpPr>
         <p:spPr>
           <a:xfrm>
-            <a:off x="789310" y="1620683"/>
-            <a:ext cx="908548" cy="434523"/>
-          </a:xfrm>
-          <a:prstGeom prst="ellipse">
-            <a:avLst/>
-          </a:prstGeom>
-          <a:solidFill>
-            <a:srgbClr val="FF7A59">
-              <a:alpha val="28000"/>
-            </a:srgbClr>
-          </a:solidFill>
-          <a:ln/>
-        </p:spPr>
-      </p:sp>
-      <p:sp>
-        <p:nvSpPr>
-          <p:cNvPr id="5" name="Shape 3"/>
-          <p:cNvSpPr/>
-          <p:nvPr/>
-        </p:nvSpPr>
-        <p:spPr>
-          <a:xfrm>
-            <a:off x="789310" y="1620683"/>
-            <a:ext cx="908548" cy="434523"/>
-          </a:xfrm>
-          <a:prstGeom prst="ellipse">
-            <a:avLst/>
-          </a:prstGeom>
-          <a:solidFill>
-            <a:srgbClr val="FFFFFF">
-              <a:alpha val="0"/>
-            </a:srgbClr>
-          </a:solidFill>
-          <a:ln w="31750">
-            <a:solidFill>
-              <a:srgbClr val="FF7A59"/>
-            </a:solidFill>
-            <a:prstDash val="solid"/>
-          </a:ln>
-        </p:spPr>
-      </p:sp>
-      <p:sp>
-        <p:nvSpPr>
-          <p:cNvPr id="6" name="Shape 4"/>
-          <p:cNvSpPr/>
-          <p:nvPr/>
-        </p:nvSpPr>
-        <p:spPr>
-          <a:xfrm>
-            <a:off x="1105327" y="1670060"/>
-            <a:ext cx="276515" cy="335768"/>
+            <a:off x="1125078" y="1403421"/>
+            <a:ext cx="237012" cy="237012"/>
           </a:xfrm>
           <a:prstGeom prst="ellipse">
             <a:avLst/>
@@ -11170,20 +11121,62 @@
       </p:sp>
       <p:sp>
         <p:nvSpPr>
+          <p:cNvPr id="5" name="Shape 3"/>
+          <p:cNvSpPr/>
+          <p:nvPr/>
+        </p:nvSpPr>
+        <p:spPr>
+          <a:xfrm>
+            <a:off x="1085576" y="1670060"/>
+            <a:ext cx="316017" cy="355519"/>
+          </a:xfrm>
+          <a:prstGeom prst="roundRect">
+            <a:avLst>
+              <a:gd name="adj" fmla="val 86805"/>
+            </a:avLst>
+          </a:prstGeom>
+          <a:solidFill>
+            <a:srgbClr val="FF7A59"/>
+          </a:solidFill>
+          <a:ln/>
+        </p:spPr>
+      </p:sp>
+      <p:sp>
+        <p:nvSpPr>
+          <p:cNvPr id="6" name="Shape 4"/>
+          <p:cNvSpPr/>
+          <p:nvPr/>
+        </p:nvSpPr>
+        <p:spPr>
+          <a:xfrm rot="480000">
+            <a:off x="1105327" y="2015703"/>
+            <a:ext cx="88880" cy="256764"/>
+          </a:xfrm>
+          <a:prstGeom prst="rect">
+            <a:avLst/>
+          </a:prstGeom>
+          <a:solidFill>
+            <a:srgbClr val="FF7A59"/>
+          </a:solidFill>
+          <a:ln/>
+        </p:spPr>
+      </p:sp>
+      <p:sp>
+        <p:nvSpPr>
           <p:cNvPr id="7" name="Shape 5"/>
           <p:cNvSpPr/>
           <p:nvPr/>
         </p:nvSpPr>
         <p:spPr>
-          <a:xfrm>
-            <a:off x="1184331" y="1749064"/>
-            <a:ext cx="118506" cy="158008"/>
-          </a:xfrm>
-          <a:prstGeom prst="ellipse">
+          <a:xfrm rot="-480000">
+            <a:off x="1292962" y="2015703"/>
+            <a:ext cx="88880" cy="256764"/>
+          </a:xfrm>
+          <a:prstGeom prst="rect">
             <a:avLst/>
           </a:prstGeom>
           <a:solidFill>
-            <a:srgbClr val="FFFFFF"/>
+            <a:srgbClr val="FF7A59"/>
           </a:solidFill>
           <a:ln/>
         </p:spPr>
@@ -13526,8 +13519,154 @@
         </p:nvSpPr>
         <p:spPr>
           <a:xfrm>
-            <a:off x="502920" y="420624"/>
-            <a:ext cx="8138160" cy="274320"/>
+            <a:off x="502920" y="292608"/>
+            <a:ext cx="8138160" cy="841248"/>
+          </a:xfrm>
+          <a:prstGeom prst="rect">
+            <a:avLst/>
+          </a:prstGeom>
+          <a:noFill/>
+          <a:ln/>
+        </p:spPr>
+        <p:txBody>
+          <a:bodyPr wrap="square" lIns="0" tIns="0" rIns="0" bIns="0" rtlCol="0" anchor="t"/>
+          <a:lstStyle/>
+          <a:p>
+            <a:pPr indent="0" marL="0">
+              <a:lnSpc>
+                <a:spcPct val="116000"/>
+              </a:lnSpc>
+              <a:buNone/>
+            </a:pPr>
+            <a:r>
+              <a:rPr lang="en-US" sz="2200" b="1" dirty="0">
+                <a:solidFill>
+                  <a:srgbClr val="0B1F3A"/>
+                </a:solidFill>
+                <a:latin typeface="Arial" pitchFamily="34" charset="0"/>
+                <a:ea typeface="Arial" pitchFamily="34" charset="-122"/>
+                <a:cs typeface="Arial" pitchFamily="34" charset="-120"/>
+              </a:rPr>
+              <a:t>Đo được khoảng cách không có nghĩa là biết đó là cái gì</a:t>
+            </a:r>
+            <a:endParaRPr lang="en-US" sz="2200" dirty="0"/>
+          </a:p>
+          <a:p>
+            <a:pPr indent="0" marL="0">
+              <a:lnSpc>
+                <a:spcPct val="116000"/>
+              </a:lnSpc>
+              <a:buNone/>
+            </a:pPr>
+            <a:r>
+              <a:rPr lang="en-US" sz="1350" dirty="0">
+                <a:solidFill>
+                  <a:srgbClr val="5F7183"/>
+                </a:solidFill>
+                <a:latin typeface="微軟正黑體" pitchFamily="34" charset="0"/>
+                <a:ea typeface="微軟正黑體" pitchFamily="34" charset="-122"/>
+                <a:cs typeface="微軟正黑體" pitchFamily="34" charset="-120"/>
+              </a:rPr>
+              <a:t>量得到距離，不等於知道那是什麼</a:t>
+            </a:r>
+            <a:endParaRPr lang="en-US" sz="2200" dirty="0"/>
+          </a:p>
+        </p:txBody>
+      </p:sp>
+      <p:sp>
+        <p:nvSpPr>
+          <p:cNvPr id="3" name="Shape 1"/>
+          <p:cNvSpPr/>
+          <p:nvPr/>
+        </p:nvSpPr>
+        <p:spPr>
+          <a:xfrm>
+            <a:off x="502920" y="1316736"/>
+            <a:ext cx="3566160" cy="2249424"/>
+          </a:xfrm>
+          <a:prstGeom prst="roundRect">
+            <a:avLst>
+              <a:gd name="adj" fmla="val 4065"/>
+            </a:avLst>
+          </a:prstGeom>
+          <a:solidFill>
+            <a:srgbClr val="0B1F3A"/>
+          </a:solidFill>
+          <a:ln/>
+        </p:spPr>
+      </p:sp>
+      <p:sp>
+        <p:nvSpPr>
+          <p:cNvPr id="4" name="Text 2"/>
+          <p:cNvSpPr txBox="1"/>
+          <p:nvPr/>
+        </p:nvSpPr>
+        <p:spPr>
+          <a:xfrm>
+            <a:off x="667512" y="1444752"/>
+            <a:ext cx="3236976" cy="329184"/>
+          </a:xfrm>
+          <a:prstGeom prst="rect">
+            <a:avLst/>
+          </a:prstGeom>
+          <a:noFill/>
+          <a:ln/>
+        </p:spPr>
+        <p:txBody>
+          <a:bodyPr wrap="square" lIns="0" tIns="0" rIns="0" bIns="0" rtlCol="0" anchor="t"/>
+          <a:lstStyle/>
+          <a:p>
+            <a:pPr indent="0" marL="0">
+              <a:lnSpc>
+                <a:spcPct val="104000"/>
+              </a:lnSpc>
+              <a:buNone/>
+            </a:pPr>
+            <a:r>
+              <a:rPr lang="en-US" sz="1050" b="1" dirty="0">
+                <a:solidFill>
+                  <a:srgbClr val="00A896"/>
+                </a:solidFill>
+                <a:latin typeface="Arial" pitchFamily="34" charset="0"/>
+                <a:ea typeface="Arial" pitchFamily="34" charset="-122"/>
+                <a:cs typeface="Arial" pitchFamily="34" charset="-120"/>
+              </a:rPr>
+              <a:t>LiDAR và radar đều trả lời rất chắc chắn</a:t>
+            </a:r>
+            <a:endParaRPr lang="en-US" sz="1050" dirty="0"/>
+          </a:p>
+          <a:p>
+            <a:pPr indent="0" marL="0">
+              <a:lnSpc>
+                <a:spcPct val="104000"/>
+              </a:lnSpc>
+              <a:buNone/>
+            </a:pPr>
+            <a:r>
+              <a:rPr lang="en-US" sz="950" dirty="0">
+                <a:solidFill>
+                  <a:srgbClr val="00A896"/>
+                </a:solidFill>
+                <a:latin typeface="微軟正黑體" pitchFamily="34" charset="0"/>
+                <a:ea typeface="微軟正黑體" pitchFamily="34" charset="-122"/>
+                <a:cs typeface="微軟正黑體" pitchFamily="34" charset="-120"/>
+              </a:rPr>
+              <a:t>光達和雷達都回答得非常肯定</a:t>
+            </a:r>
+            <a:endParaRPr lang="en-US" sz="1050" dirty="0"/>
+          </a:p>
+        </p:txBody>
+      </p:sp>
+      <p:sp>
+        <p:nvSpPr>
+          <p:cNvPr id="5" name="Text 3"/>
+          <p:cNvSpPr txBox="1"/>
+          <p:nvPr/>
+        </p:nvSpPr>
+        <p:spPr>
+          <a:xfrm>
+            <a:off x="667512" y="1847088"/>
+            <a:ext cx="3236976" cy="566928"/>
           </a:xfrm>
           <a:prstGeom prst="rect">
             <a:avLst/>
@@ -13543,42 +13682,182 @@
               <a:buNone/>
             </a:pPr>
             <a:r>
-              <a:rPr lang="en-US" sz="1250" b="1" dirty="0">
-                <a:solidFill>
-                  <a:srgbClr val="007F72"/>
+              <a:rPr lang="en-US" sz="2700" b="1" dirty="0">
+                <a:solidFill>
+                  <a:srgbClr val="FFFFFF"/>
                 </a:solidFill>
                 <a:latin typeface="Arial" pitchFamily="34" charset="0"/>
                 <a:ea typeface="Arial" pitchFamily="34" charset="-122"/>
                 <a:cs typeface="Arial" pitchFamily="34" charset="-120"/>
               </a:rPr>
-              <a:t>Câu quan trọng nhất hôm nay · 今天最重要的一句</a:t>
-            </a:r>
-            <a:endParaRPr lang="en-US" sz="1250" dirty="0"/>
+              <a:t>30.0 m</a:t>
+            </a:r>
+            <a:endParaRPr lang="en-US" sz="2700" dirty="0"/>
           </a:p>
         </p:txBody>
       </p:sp>
       <p:sp>
         <p:nvSpPr>
-          <p:cNvPr id="3" name="Shape 1"/>
+          <p:cNvPr id="6" name="Text 4"/>
+          <p:cNvSpPr txBox="1"/>
+          <p:nvPr/>
+        </p:nvSpPr>
+        <p:spPr>
+          <a:xfrm>
+            <a:off x="667512" y="2450592"/>
+            <a:ext cx="3236976" cy="402336"/>
+          </a:xfrm>
+          <a:prstGeom prst="rect">
+            <a:avLst/>
+          </a:prstGeom>
+          <a:noFill/>
+          <a:ln/>
+        </p:spPr>
+        <p:txBody>
+          <a:bodyPr wrap="square" lIns="0" tIns="0" rIns="0" bIns="0" rtlCol="0" anchor="t"/>
+          <a:lstStyle/>
+          <a:p>
+            <a:pPr indent="0" marL="0">
+              <a:lnSpc>
+                <a:spcPct val="108000"/>
+              </a:lnSpc>
+              <a:buNone/>
+            </a:pPr>
+            <a:r>
+              <a:rPr lang="en-US" sz="1150" b="1" dirty="0">
+                <a:solidFill>
+                  <a:srgbClr val="AFC3D4"/>
+                </a:solidFill>
+                <a:latin typeface="Arial" pitchFamily="34" charset="0"/>
+                <a:ea typeface="Arial" pitchFamily="34" charset="-122"/>
+                <a:cs typeface="Arial" pitchFamily="34" charset="-120"/>
+              </a:rPr>
+              <a:t>Vật cản chưa phân loại</a:t>
+            </a:r>
+            <a:endParaRPr lang="en-US" sz="1150" dirty="0"/>
+          </a:p>
+          <a:p>
+            <a:pPr indent="0" marL="0">
+              <a:lnSpc>
+                <a:spcPct val="108000"/>
+              </a:lnSpc>
+              <a:buNone/>
+            </a:pPr>
+            <a:r>
+              <a:rPr lang="en-US" sz="1050" dirty="0">
+                <a:solidFill>
+                  <a:srgbClr val="8AA0B4"/>
+                </a:solidFill>
+                <a:latin typeface="微軟正黑體" pitchFamily="34" charset="0"/>
+                <a:ea typeface="微軟正黑體" pitchFamily="34" charset="-122"/>
+                <a:cs typeface="微軟正黑體" pitchFamily="34" charset="-120"/>
+              </a:rPr>
+              <a:t>未分類障礙物</a:t>
+            </a:r>
+            <a:endParaRPr lang="en-US" sz="1150" dirty="0"/>
+          </a:p>
+        </p:txBody>
+      </p:sp>
+      <p:sp>
+        <p:nvSpPr>
+          <p:cNvPr id="7" name="Text 5"/>
+          <p:cNvSpPr txBox="1"/>
+          <p:nvPr/>
+        </p:nvSpPr>
+        <p:spPr>
+          <a:xfrm>
+            <a:off x="667512" y="3017520"/>
+            <a:ext cx="3236976" cy="402336"/>
+          </a:xfrm>
+          <a:prstGeom prst="rect">
+            <a:avLst/>
+          </a:prstGeom>
+          <a:noFill/>
+          <a:ln/>
+        </p:spPr>
+        <p:txBody>
+          <a:bodyPr wrap="square" lIns="0" tIns="0" rIns="0" bIns="0" rtlCol="0" anchor="t"/>
+          <a:lstStyle/>
+          <a:p>
+            <a:pPr indent="0" marL="0">
+              <a:lnSpc>
+                <a:spcPct val="104000"/>
+              </a:lnSpc>
+              <a:buNone/>
+            </a:pPr>
+            <a:r>
+              <a:rPr lang="en-US" sz="1000" b="1" dirty="0">
+                <a:solidFill>
+                  <a:srgbClr val="7E93A6"/>
+                </a:solidFill>
+                <a:latin typeface="Arial" pitchFamily="34" charset="0"/>
+                <a:ea typeface="Arial" pitchFamily="34" charset="-122"/>
+                <a:cs typeface="Arial" pitchFamily="34" charset="-120"/>
+              </a:rPr>
+              <a:t>Khoảng cách này chính xác tới từng centimet.</a:t>
+            </a:r>
+            <a:endParaRPr lang="en-US" sz="1000" dirty="0"/>
+          </a:p>
+          <a:p>
+            <a:pPr indent="0" marL="0">
+              <a:lnSpc>
+                <a:spcPct val="104000"/>
+              </a:lnSpc>
+              <a:buNone/>
+            </a:pPr>
+            <a:r>
+              <a:rPr lang="en-US" sz="900" dirty="0">
+                <a:solidFill>
+                  <a:srgbClr val="7E93A6"/>
+                </a:solidFill>
+                <a:latin typeface="微軟正黑體" pitchFamily="34" charset="0"/>
+                <a:ea typeface="微軟正黑體" pitchFamily="34" charset="-122"/>
+                <a:cs typeface="微軟正黑體" pitchFamily="34" charset="-120"/>
+              </a:rPr>
+              <a:t>這個距離準到公分，完全沒有問題。</a:t>
+            </a:r>
+            <a:endParaRPr lang="en-US" sz="1000" dirty="0"/>
+          </a:p>
+        </p:txBody>
+      </p:sp>
+      <p:sp>
+        <p:nvSpPr>
+          <p:cNvPr id="8" name="Shape 6"/>
           <p:cNvSpPr/>
           <p:nvPr/>
         </p:nvSpPr>
         <p:spPr>
           <a:xfrm>
-            <a:off x="502920" y="1101852"/>
-            <a:ext cx="2468880" cy="2514600"/>
-          </a:xfrm>
-          <a:prstGeom prst="roundRect">
-            <a:avLst>
-              <a:gd name="adj" fmla="val 4444"/>
-            </a:avLst>
+            <a:off x="4187952" y="2295144"/>
+            <a:ext cx="768096" cy="292608"/>
+          </a:xfrm>
+          <a:prstGeom prst="rightArrow">
+            <a:avLst/>
           </a:prstGeom>
           <a:solidFill>
-            <a:srgbClr val="F4F7FA"/>
+            <a:srgbClr val="C4CFD9"/>
           </a:solidFill>
-          <a:ln w="12700">
+          <a:ln/>
+        </p:spPr>
+      </p:sp>
+      <p:sp>
+        <p:nvSpPr>
+          <p:cNvPr id="9" name="Shape 7"/>
+          <p:cNvSpPr/>
+          <p:nvPr/>
+        </p:nvSpPr>
+        <p:spPr>
+          <a:xfrm flipH="1">
+            <a:off x="4370832" y="2240280"/>
+            <a:ext cx="402336" cy="402336"/>
+          </a:xfrm>
+          <a:prstGeom prst="line">
+            <a:avLst/>
+          </a:prstGeom>
+          <a:noFill/>
+          <a:ln w="44450">
             <a:solidFill>
-              <a:srgbClr val="DBE3EA"/>
+              <a:srgbClr val="D9463E"/>
             </a:solidFill>
             <a:prstDash val="solid"/>
           </a:ln>
@@ -13586,152 +13865,25 @@
       </p:sp>
       <p:sp>
         <p:nvSpPr>
-          <p:cNvPr id="4" name="Shape 2"/>
-          <p:cNvSpPr/>
-          <p:nvPr/>
-        </p:nvSpPr>
-        <p:spPr>
-          <a:xfrm rot="-2280000">
-            <a:off x="1286929" y="2039075"/>
-            <a:ext cx="323332" cy="34235"/>
-          </a:xfrm>
-          <a:prstGeom prst="rect">
-            <a:avLst/>
-          </a:prstGeom>
-          <a:solidFill>
-            <a:srgbClr val="0B1F3A">
-              <a:alpha val="45000"/>
-            </a:srgbClr>
-          </a:solidFill>
-          <a:ln/>
-        </p:spPr>
-      </p:sp>
-      <p:sp>
-        <p:nvSpPr>
-          <p:cNvPr id="5" name="Shape 3"/>
-          <p:cNvSpPr/>
-          <p:nvPr/>
-        </p:nvSpPr>
-        <p:spPr>
-          <a:xfrm rot="-1140000">
-            <a:off x="1349840" y="2154941"/>
-            <a:ext cx="323332" cy="34235"/>
-          </a:xfrm>
-          <a:prstGeom prst="rect">
-            <a:avLst/>
-          </a:prstGeom>
-          <a:solidFill>
-            <a:srgbClr val="0B1F3A">
-              <a:alpha val="45000"/>
-            </a:srgbClr>
-          </a:solidFill>
-          <a:ln/>
-        </p:spPr>
-      </p:sp>
-      <p:sp>
-        <p:nvSpPr>
-          <p:cNvPr id="6" name="Shape 4"/>
-          <p:cNvSpPr/>
-          <p:nvPr/>
-        </p:nvSpPr>
-        <p:spPr>
-          <a:xfrm>
-            <a:off x="1371600" y="2284976"/>
-            <a:ext cx="323332" cy="34235"/>
-          </a:xfrm>
-          <a:prstGeom prst="rect">
-            <a:avLst/>
-          </a:prstGeom>
-          <a:solidFill>
-            <a:srgbClr val="0B1F3A">
-              <a:alpha val="45000"/>
-            </a:srgbClr>
-          </a:solidFill>
-          <a:ln/>
-        </p:spPr>
-      </p:sp>
-      <p:sp>
-        <p:nvSpPr>
-          <p:cNvPr id="7" name="Shape 5"/>
-          <p:cNvSpPr/>
-          <p:nvPr/>
-        </p:nvSpPr>
-        <p:spPr>
-          <a:xfrm rot="1140000">
-            <a:off x="1349840" y="2415011"/>
-            <a:ext cx="323332" cy="34235"/>
-          </a:xfrm>
-          <a:prstGeom prst="rect">
-            <a:avLst/>
-          </a:prstGeom>
-          <a:solidFill>
-            <a:srgbClr val="0B1F3A">
-              <a:alpha val="45000"/>
-            </a:srgbClr>
-          </a:solidFill>
-          <a:ln/>
-        </p:spPr>
-      </p:sp>
-      <p:sp>
-        <p:nvSpPr>
-          <p:cNvPr id="8" name="Shape 6"/>
-          <p:cNvSpPr/>
-          <p:nvPr/>
-        </p:nvSpPr>
-        <p:spPr>
-          <a:xfrm rot="2280000">
-            <a:off x="1286929" y="2530877"/>
-            <a:ext cx="323332" cy="34235"/>
-          </a:xfrm>
-          <a:prstGeom prst="rect">
-            <a:avLst/>
-          </a:prstGeom>
-          <a:solidFill>
-            <a:srgbClr val="0B1F3A">
-              <a:alpha val="45000"/>
-            </a:srgbClr>
-          </a:solidFill>
-          <a:ln/>
-        </p:spPr>
-      </p:sp>
-      <p:sp>
-        <p:nvSpPr>
-          <p:cNvPr id="9" name="Shape 7"/>
-          <p:cNvSpPr/>
-          <p:nvPr/>
-        </p:nvSpPr>
-        <p:spPr>
-          <a:xfrm>
-            <a:off x="867583" y="2111898"/>
-            <a:ext cx="342351" cy="123627"/>
-          </a:xfrm>
-          <a:prstGeom prst="ellipse">
-            <a:avLst/>
-          </a:prstGeom>
-          <a:solidFill>
-            <a:srgbClr val="0B1F3A"/>
-          </a:solidFill>
-          <a:ln/>
-        </p:spPr>
-      </p:sp>
-      <p:sp>
-        <p:nvSpPr>
           <p:cNvPr id="10" name="Shape 8"/>
           <p:cNvSpPr/>
           <p:nvPr/>
         </p:nvSpPr>
         <p:spPr>
           <a:xfrm>
-            <a:off x="867583" y="2168957"/>
-            <a:ext cx="342351" cy="323332"/>
-          </a:xfrm>
-          <a:prstGeom prst="rect">
-            <a:avLst/>
-          </a:prstGeom>
-          <a:solidFill>
-            <a:srgbClr val="0B1F3A"/>
-          </a:solidFill>
-          <a:ln/>
+            <a:off x="4370832" y="2240280"/>
+            <a:ext cx="402336" cy="402336"/>
+          </a:xfrm>
+          <a:prstGeom prst="line">
+            <a:avLst/>
+          </a:prstGeom>
+          <a:noFill/>
+          <a:ln w="44450">
+            <a:solidFill>
+              <a:srgbClr val="D9463E"/>
+            </a:solidFill>
+            <a:prstDash val="solid"/>
+          </a:ln>
         </p:spPr>
       </p:sp>
       <p:sp>
@@ -13742,39 +13894,86 @@
         </p:nvSpPr>
         <p:spPr>
           <a:xfrm>
-            <a:off x="867583" y="2425720"/>
-            <a:ext cx="342351" cy="123627"/>
-          </a:xfrm>
-          <a:prstGeom prst="ellipse">
-            <a:avLst/>
+            <a:off x="5074920" y="1316736"/>
+            <a:ext cx="3566160" cy="2249424"/>
+          </a:xfrm>
+          <a:prstGeom prst="roundRect">
+            <a:avLst>
+              <a:gd name="adj" fmla="val 4065"/>
+            </a:avLst>
           </a:prstGeom>
           <a:solidFill>
-            <a:srgbClr val="0B1F3A"/>
+            <a:srgbClr val="FDECEC"/>
           </a:solidFill>
-          <a:ln/>
-        </p:spPr>
-      </p:sp>
-      <p:sp>
-        <p:nvSpPr>
-          <p:cNvPr id="12" name="Shape 10"/>
-          <p:cNvSpPr/>
-          <p:nvPr/>
-        </p:nvSpPr>
-        <p:spPr>
-          <a:xfrm>
-            <a:off x="867583" y="2264054"/>
-            <a:ext cx="342351" cy="66568"/>
-          </a:xfrm>
-          <a:prstGeom prst="rect">
-            <a:avLst/>
-          </a:prstGeom>
-          <a:solidFill>
-            <a:srgbClr val="FFFFFF">
-              <a:alpha val="65000"/>
-            </a:srgbClr>
-          </a:solidFill>
-          <a:ln/>
-        </p:spPr>
+          <a:ln w="15875">
+            <a:solidFill>
+              <a:srgbClr val="D9463E"/>
+            </a:solidFill>
+            <a:prstDash val="solid"/>
+          </a:ln>
+        </p:spPr>
+      </p:sp>
+      <p:sp>
+        <p:nvSpPr>
+          <p:cNvPr id="12" name="Text 10"/>
+          <p:cNvSpPr txBox="1"/>
+          <p:nvPr/>
+        </p:nvSpPr>
+        <p:spPr>
+          <a:xfrm>
+            <a:off x="5239512" y="1444752"/>
+            <a:ext cx="3236976" cy="329184"/>
+          </a:xfrm>
+          <a:prstGeom prst="rect">
+            <a:avLst/>
+          </a:prstGeom>
+          <a:noFill/>
+          <a:ln/>
+        </p:spPr>
+        <p:txBody>
+          <a:bodyPr wrap="square" lIns="0" tIns="0" rIns="0" bIns="0" rtlCol="0" anchor="t"/>
+          <a:lstStyle/>
+          <a:p>
+            <a:pPr indent="0" marL="0">
+              <a:lnSpc>
+                <a:spcPct val="104000"/>
+              </a:lnSpc>
+              <a:buNone/>
+            </a:pPr>
+            <a:r>
+              <a:rPr lang="en-US" sz="1050" b="1" dirty="0">
+                <a:solidFill>
+                  <a:srgbClr val="D9463E"/>
+                </a:solidFill>
+                <a:latin typeface="Arial" pitchFamily="34" charset="0"/>
+                <a:ea typeface="Arial" pitchFamily="34" charset="-122"/>
+                <a:cs typeface="Arial" pitchFamily="34" charset="-120"/>
+              </a:rPr>
+              <a:t>Nhưng điều cần biết là…</a:t>
+            </a:r>
+            <a:endParaRPr lang="en-US" sz="1050" dirty="0"/>
+          </a:p>
+          <a:p>
+            <a:pPr indent="0" marL="0">
+              <a:lnSpc>
+                <a:spcPct val="104000"/>
+              </a:lnSpc>
+              <a:buNone/>
+            </a:pPr>
+            <a:r>
+              <a:rPr lang="en-US" sz="950" dirty="0">
+                <a:solidFill>
+                  <a:srgbClr val="D9463E"/>
+                </a:solidFill>
+                <a:latin typeface="微軟正黑體" pitchFamily="34" charset="0"/>
+                <a:ea typeface="微軟正黑體" pitchFamily="34" charset="-122"/>
+                <a:cs typeface="微軟正黑體" pitchFamily="34" charset="-120"/>
+              </a:rPr>
+              <a:t>但真正要知道的是……</a:t>
+            </a:r>
+            <a:endParaRPr lang="en-US" sz="1050" dirty="0"/>
+          </a:p>
+        </p:txBody>
       </p:sp>
       <p:sp>
         <p:nvSpPr>
@@ -13784,30 +13983,132 @@
         </p:nvSpPr>
         <p:spPr>
           <a:xfrm>
-            <a:off x="981700" y="2549347"/>
-            <a:ext cx="114117" cy="133137"/>
-          </a:xfrm>
-          <a:prstGeom prst="rect">
+            <a:off x="5509809" y="2192000"/>
+            <a:ext cx="136063" cy="136063"/>
+          </a:xfrm>
+          <a:prstGeom prst="ellipse">
             <a:avLst/>
           </a:prstGeom>
           <a:solidFill>
-            <a:srgbClr val="0B1F3A">
-              <a:alpha val="60000"/>
-            </a:srgbClr>
+            <a:srgbClr val="9AA6B0"/>
           </a:solidFill>
           <a:ln/>
         </p:spPr>
       </p:sp>
       <p:sp>
         <p:nvSpPr>
-          <p:cNvPr id="14" name="Text 12"/>
+          <p:cNvPr id="14" name="Shape 12"/>
+          <p:cNvSpPr/>
+          <p:nvPr/>
+        </p:nvSpPr>
+        <p:spPr>
+          <a:xfrm>
+            <a:off x="5487132" y="2345070"/>
+            <a:ext cx="181417" cy="204094"/>
+          </a:xfrm>
+          <a:prstGeom prst="roundRect">
+            <a:avLst>
+              <a:gd name="adj" fmla="val 151210"/>
+            </a:avLst>
+          </a:prstGeom>
+          <a:solidFill>
+            <a:srgbClr val="9AA6B0"/>
+          </a:solidFill>
+          <a:ln/>
+        </p:spPr>
+      </p:sp>
+      <p:sp>
+        <p:nvSpPr>
+          <p:cNvPr id="15" name="Shape 13"/>
+          <p:cNvSpPr/>
+          <p:nvPr/>
+        </p:nvSpPr>
+        <p:spPr>
+          <a:xfrm rot="480000">
+            <a:off x="5498470" y="2543495"/>
+            <a:ext cx="51024" cy="147401"/>
+          </a:xfrm>
+          <a:prstGeom prst="rect">
+            <a:avLst/>
+          </a:prstGeom>
+          <a:solidFill>
+            <a:srgbClr val="9AA6B0"/>
+          </a:solidFill>
+          <a:ln/>
+        </p:spPr>
+      </p:sp>
+      <p:sp>
+        <p:nvSpPr>
+          <p:cNvPr id="16" name="Shape 14"/>
+          <p:cNvSpPr/>
+          <p:nvPr/>
+        </p:nvSpPr>
+        <p:spPr>
+          <a:xfrm rot="-480000">
+            <a:off x="5606186" y="2543495"/>
+            <a:ext cx="51024" cy="147401"/>
+          </a:xfrm>
+          <a:prstGeom prst="rect">
+            <a:avLst/>
+          </a:prstGeom>
+          <a:solidFill>
+            <a:srgbClr val="9AA6B0"/>
+          </a:solidFill>
+          <a:ln/>
+        </p:spPr>
+      </p:sp>
+      <p:sp>
+        <p:nvSpPr>
+          <p:cNvPr id="17" name="Shape 15"/>
+          <p:cNvSpPr/>
+          <p:nvPr/>
+        </p:nvSpPr>
+        <p:spPr>
+          <a:xfrm>
+            <a:off x="5916168" y="2286000"/>
+            <a:ext cx="384048" cy="438912"/>
+          </a:xfrm>
+          <a:prstGeom prst="roundRect">
+            <a:avLst>
+              <a:gd name="adj" fmla="val 11905"/>
+            </a:avLst>
+          </a:prstGeom>
+          <a:solidFill>
+            <a:srgbClr val="9AA6B0"/>
+          </a:solidFill>
+          <a:ln/>
+        </p:spPr>
+      </p:sp>
+      <p:sp>
+        <p:nvSpPr>
+          <p:cNvPr id="18" name="Shape 16"/>
+          <p:cNvSpPr/>
+          <p:nvPr/>
+        </p:nvSpPr>
+        <p:spPr>
+          <a:xfrm>
+            <a:off x="5870448" y="2221992"/>
+            <a:ext cx="475488" cy="73152"/>
+          </a:xfrm>
+          <a:prstGeom prst="rect">
+            <a:avLst/>
+          </a:prstGeom>
+          <a:solidFill>
+            <a:srgbClr val="8593A0"/>
+          </a:solidFill>
+          <a:ln/>
+        </p:spPr>
+      </p:sp>
+      <p:sp>
+        <p:nvSpPr>
+          <p:cNvPr id="19" name="Text 17"/>
           <p:cNvSpPr txBox="1"/>
           <p:nvPr/>
         </p:nvSpPr>
         <p:spPr>
           <a:xfrm>
-            <a:off x="1609344" y="2176272"/>
-            <a:ext cx="256032" cy="365760"/>
+            <a:off x="5513832" y="1865376"/>
+            <a:ext cx="457200" cy="402336"/>
           </a:xfrm>
           <a:prstGeom prst="rect">
             <a:avLst/>
@@ -13823,112 +14124,92 @@
               <a:buNone/>
             </a:pPr>
             <a:r>
-              <a:rPr lang="en-US" sz="1700" b="1" dirty="0">
-                <a:solidFill>
-                  <a:srgbClr val="5F7183"/>
+              <a:rPr lang="en-US" sz="2400" b="1" dirty="0">
+                <a:solidFill>
+                  <a:srgbClr val="D9463E"/>
+                </a:solidFill>
+                <a:latin typeface="Arial" pitchFamily="34" charset="0"/>
+                <a:ea typeface="Arial" pitchFamily="34" charset="-122"/>
+                <a:cs typeface="Arial" pitchFamily="34" charset="-120"/>
+              </a:rPr>
+              <a:t>?</a:t>
+            </a:r>
+            <a:endParaRPr lang="en-US" sz="2400" dirty="0"/>
+          </a:p>
+        </p:txBody>
+      </p:sp>
+      <p:sp>
+        <p:nvSpPr>
+          <p:cNvPr id="20" name="Text 18"/>
+          <p:cNvSpPr txBox="1"/>
+          <p:nvPr/>
+        </p:nvSpPr>
+        <p:spPr>
+          <a:xfrm>
+            <a:off x="6281928" y="1883664"/>
+            <a:ext cx="2194560" cy="731520"/>
+          </a:xfrm>
+          <a:prstGeom prst="rect">
+            <a:avLst/>
+          </a:prstGeom>
+          <a:noFill/>
+          <a:ln/>
+        </p:spPr>
+        <p:txBody>
+          <a:bodyPr wrap="square" lIns="0" tIns="0" rIns="0" bIns="0" rtlCol="0" anchor="t"/>
+          <a:lstStyle/>
+          <a:p>
+            <a:pPr indent="0" marL="0">
+              <a:lnSpc>
+                <a:spcPct val="112000"/>
+              </a:lnSpc>
+              <a:buNone/>
+            </a:pPr>
+            <a:r>
+              <a:rPr lang="en-US" sz="1300" b="1" dirty="0">
+                <a:solidFill>
+                  <a:srgbClr val="A32C25"/>
+                </a:solidFill>
+                <a:latin typeface="Arial" pitchFamily="34" charset="0"/>
+                <a:ea typeface="Arial" pitchFamily="34" charset="-122"/>
+                <a:cs typeface="Arial" pitchFamily="34" charset="-120"/>
+              </a:rPr>
+              <a:t>Người hay thùng rác?</a:t>
+            </a:r>
+            <a:endParaRPr lang="en-US" sz="1300" dirty="0"/>
+          </a:p>
+          <a:p>
+            <a:pPr indent="0" marL="0">
+              <a:lnSpc>
+                <a:spcPct val="112000"/>
+              </a:lnSpc>
+              <a:buNone/>
+            </a:pPr>
+            <a:r>
+              <a:rPr lang="en-US" sz="1100" dirty="0">
+                <a:solidFill>
+                  <a:srgbClr val="A32C25"/>
                 </a:solidFill>
                 <a:latin typeface="微軟正黑體" pitchFamily="34" charset="0"/>
                 <a:ea typeface="微軟正黑體" pitchFamily="34" charset="-122"/>
                 <a:cs typeface="微軟正黑體" pitchFamily="34" charset="-120"/>
               </a:rPr>
-              <a:t>≠</a:t>
-            </a:r>
-            <a:endParaRPr lang="en-US" sz="1700" dirty="0"/>
+              <a:t>那是人，還是垃圾桶？</a:t>
+            </a:r>
+            <a:endParaRPr lang="en-US" sz="1300" dirty="0"/>
           </a:p>
         </p:txBody>
       </p:sp>
       <p:sp>
         <p:nvSpPr>
-          <p:cNvPr id="15" name="Shape 13"/>
-          <p:cNvSpPr/>
-          <p:nvPr/>
-        </p:nvSpPr>
-        <p:spPr>
-          <a:xfrm>
-            <a:off x="2226747" y="1940723"/>
-            <a:ext cx="228234" cy="228234"/>
-          </a:xfrm>
-          <a:prstGeom prst="ellipse">
-            <a:avLst/>
-          </a:prstGeom>
-          <a:solidFill>
-            <a:srgbClr val="0B1F3A"/>
-          </a:solidFill>
-          <a:ln/>
-        </p:spPr>
-      </p:sp>
-      <p:sp>
-        <p:nvSpPr>
-          <p:cNvPr id="16" name="Shape 14"/>
-          <p:cNvSpPr/>
-          <p:nvPr/>
-        </p:nvSpPr>
-        <p:spPr>
-          <a:xfrm>
-            <a:off x="2188708" y="2197486"/>
-            <a:ext cx="304312" cy="342351"/>
-          </a:xfrm>
-          <a:prstGeom prst="roundRect">
-            <a:avLst>
-              <a:gd name="adj" fmla="val 90144"/>
-            </a:avLst>
-          </a:prstGeom>
-          <a:solidFill>
-            <a:srgbClr val="0B1F3A"/>
-          </a:solidFill>
-          <a:ln/>
-        </p:spPr>
-      </p:sp>
-      <p:sp>
-        <p:nvSpPr>
-          <p:cNvPr id="17" name="Shape 15"/>
-          <p:cNvSpPr/>
-          <p:nvPr/>
-        </p:nvSpPr>
-        <p:spPr>
-          <a:xfrm rot="480000">
-            <a:off x="2207727" y="2530328"/>
-            <a:ext cx="85588" cy="247254"/>
-          </a:xfrm>
-          <a:prstGeom prst="rect">
-            <a:avLst/>
-          </a:prstGeom>
-          <a:solidFill>
-            <a:srgbClr val="0B1F3A"/>
-          </a:solidFill>
-          <a:ln/>
-        </p:spPr>
-      </p:sp>
-      <p:sp>
-        <p:nvSpPr>
-          <p:cNvPr id="18" name="Shape 16"/>
-          <p:cNvSpPr/>
-          <p:nvPr/>
-        </p:nvSpPr>
-        <p:spPr>
-          <a:xfrm rot="-480000">
-            <a:off x="2388413" y="2530328"/>
-            <a:ext cx="85588" cy="247254"/>
-          </a:xfrm>
-          <a:prstGeom prst="rect">
-            <a:avLst/>
-          </a:prstGeom>
-          <a:solidFill>
-            <a:srgbClr val="0B1F3A"/>
-          </a:solidFill>
-          <a:ln/>
-        </p:spPr>
-      </p:sp>
-      <p:sp>
-        <p:nvSpPr>
-          <p:cNvPr id="19" name="Text 17"/>
+          <p:cNvPr id="21" name="Text 19"/>
           <p:cNvSpPr txBox="1"/>
           <p:nvPr/>
         </p:nvSpPr>
         <p:spPr>
           <a:xfrm>
-            <a:off x="3429000" y="1319005"/>
-            <a:ext cx="5212080" cy="1005611"/>
+            <a:off x="5239512" y="3017520"/>
+            <a:ext cx="3236976" cy="402336"/>
           </a:xfrm>
           <a:prstGeom prst="rect">
             <a:avLst/>
@@ -13942,121 +14223,59 @@
           <a:p>
             <a:pPr indent="0" marL="0">
               <a:lnSpc>
-                <a:spcPct val="120000"/>
-              </a:lnSpc>
-              <a:buNone/>
-            </a:pPr>
-            <a:r>
-              <a:rPr lang="en-US" sz="2300" b="1" dirty="0">
-                <a:solidFill>
-                  <a:srgbClr val="0B1F3A"/>
+                <a:spcPct val="104000"/>
+              </a:lnSpc>
+              <a:buNone/>
+            </a:pPr>
+            <a:r>
+              <a:rPr lang="en-US" sz="1000" b="1" dirty="0">
+                <a:solidFill>
+                  <a:srgbClr val="A32C25"/>
                 </a:solidFill>
                 <a:latin typeface="Arial" pitchFamily="34" charset="0"/>
                 <a:ea typeface="Arial" pitchFamily="34" charset="-122"/>
                 <a:cs typeface="Arial" pitchFamily="34" charset="-120"/>
               </a:rPr>
-              <a:t>Đo được khoảng cách không có nghĩa là biết đó là cái gì</a:t>
-            </a:r>
-            <a:endParaRPr lang="en-US" sz="2300" dirty="0"/>
-          </a:p>
-          <a:p>
-            <a:pPr indent="0" marL="0">
-              <a:lnSpc>
-                <a:spcPct val="120000"/>
-              </a:lnSpc>
-              <a:buNone/>
-            </a:pPr>
-            <a:r>
-              <a:rPr lang="en-US" sz="1400" dirty="0">
-                <a:solidFill>
-                  <a:srgbClr val="007F72"/>
+              <a:t>Muốn biết đó là gì thì phải hỏi camera hoặc ảnh nhiệt.</a:t>
+            </a:r>
+            <a:endParaRPr lang="en-US" sz="1000" dirty="0"/>
+          </a:p>
+          <a:p>
+            <a:pPr indent="0" marL="0">
+              <a:lnSpc>
+                <a:spcPct val="104000"/>
+              </a:lnSpc>
+              <a:buNone/>
+            </a:pPr>
+            <a:r>
+              <a:rPr lang="en-US" sz="900" dirty="0">
+                <a:solidFill>
+                  <a:srgbClr val="A32C25"/>
                 </a:solidFill>
                 <a:latin typeface="微軟正黑體" pitchFamily="34" charset="0"/>
                 <a:ea typeface="微軟正黑體" pitchFamily="34" charset="-122"/>
                 <a:cs typeface="微軟正黑體" pitchFamily="34" charset="-120"/>
               </a:rPr>
-              <a:t>量得到距離，不等於知道那是什麼</a:t>
-            </a:r>
-            <a:endParaRPr lang="en-US" sz="2300" dirty="0"/>
+              <a:t>要知道那是什麼，只能問相機或熱像。</a:t>
+            </a:r>
+            <a:endParaRPr lang="en-US" sz="1000" dirty="0"/>
           </a:p>
         </p:txBody>
       </p:sp>
       <p:sp>
         <p:nvSpPr>
-          <p:cNvPr id="20" name="Text 18"/>
-          <p:cNvSpPr txBox="1"/>
-          <p:nvPr/>
-        </p:nvSpPr>
-        <p:spPr>
-          <a:xfrm>
-            <a:off x="3429000" y="2416057"/>
-            <a:ext cx="5212080" cy="1074682"/>
-          </a:xfrm>
-          <a:prstGeom prst="rect">
-            <a:avLst/>
-          </a:prstGeom>
-          <a:noFill/>
-          <a:ln/>
-        </p:spPr>
-        <p:txBody>
-          <a:bodyPr wrap="square" lIns="0" tIns="0" rIns="0" bIns="0" rtlCol="0" anchor="t"/>
-          <a:lstStyle/>
-          <a:p>
-            <a:pPr indent="0" marL="0">
-              <a:lnSpc>
-                <a:spcPct val="128000"/>
-              </a:lnSpc>
-              <a:buNone/>
-            </a:pPr>
-            <a:r>
-              <a:rPr lang="en-US" sz="1250" dirty="0">
-                <a:solidFill>
-                  <a:srgbClr val="5F7183"/>
-                </a:solidFill>
-                <a:latin typeface="Arial" pitchFamily="34" charset="0"/>
-                <a:ea typeface="Arial" pitchFamily="34" charset="-122"/>
-                <a:cs typeface="Arial" pitchFamily="34" charset="-120"/>
-              </a:rPr>
-              <a:t>LiDAR và radar chỉ báo “có vật cản, cách 30 m”. Muốn biết đó là người thì cần camera hoặc ảnh nhiệt. Hai bên đo hai thứ khác nhau, chứ không phải cùng một thứ mà bên nào chính xác hơn.</a:t>
-            </a:r>
-            <a:endParaRPr lang="en-US" sz="1250" dirty="0"/>
-          </a:p>
-          <a:p>
-            <a:pPr indent="0" marL="0">
-              <a:lnSpc>
-                <a:spcPct val="128000"/>
-              </a:lnSpc>
-              <a:buNone/>
-            </a:pPr>
-            <a:r>
-              <a:rPr lang="en-US" sz="1150" dirty="0">
-                <a:solidFill>
-                  <a:srgbClr val="5F7183"/>
-                </a:solidFill>
-                <a:latin typeface="微軟正黑體" pitchFamily="34" charset="0"/>
-                <a:ea typeface="微軟正黑體" pitchFamily="34" charset="-122"/>
-                <a:cs typeface="微軟正黑體" pitchFamily="34" charset="-120"/>
-              </a:rPr>
-              <a:t>光達和雷達只會說「前面 30 公尺有障礙物」。要知道那是人，得靠相機或熱像。兩邊量的是不同的東西，不是同一件事誰比較準。</a:t>
-            </a:r>
-            <a:endParaRPr lang="en-US" sz="1250" dirty="0"/>
-          </a:p>
-        </p:txBody>
-      </p:sp>
-      <p:sp>
-        <p:nvSpPr>
-          <p:cNvPr id="21" name="Shape 19"/>
+          <p:cNvPr id="22" name="Shape 20"/>
           <p:cNvSpPr/>
           <p:nvPr/>
         </p:nvSpPr>
         <p:spPr>
           <a:xfrm>
             <a:off x="502920" y="3913632"/>
-            <a:ext cx="8138160" cy="621792"/>
+            <a:ext cx="8138160" cy="603504"/>
           </a:xfrm>
           <a:prstGeom prst="roundRect">
             <a:avLst>
-              <a:gd name="adj" fmla="val 13235"/>
+              <a:gd name="adj" fmla="val 13636"/>
             </a:avLst>
           </a:prstGeom>
           <a:solidFill>
@@ -14072,13 +14291,13 @@
       </p:sp>
       <p:sp>
         <p:nvSpPr>
-          <p:cNvPr id="22" name="Text 20"/>
+          <p:cNvPr id="23" name="Text 21"/>
           <p:cNvSpPr txBox="1"/>
           <p:nvPr/>
         </p:nvSpPr>
         <p:spPr>
           <a:xfrm>
-            <a:off x="685800" y="3986784"/>
+            <a:off x="685800" y="3977640"/>
             <a:ext cx="7772400" cy="493776"/>
           </a:xfrm>
           <a:prstGeom prst="rect">
@@ -14093,12 +14312,12 @@
           <a:p>
             <a:pPr indent="0" marL="0">
               <a:lnSpc>
-                <a:spcPct val="116000"/>
-              </a:lnSpc>
-              <a:buNone/>
-            </a:pPr>
-            <a:r>
-              <a:rPr lang="en-US" sz="1250" b="1" dirty="0">
+                <a:spcPct val="114000"/>
+              </a:lnSpc>
+              <a:buNone/>
+            </a:pPr>
+            <a:r>
+              <a:rPr lang="en-US" sz="1200" b="1" dirty="0">
                 <a:solidFill>
                   <a:srgbClr val="7A4E00"/>
                 </a:solidFill>
@@ -14106,19 +14325,19 @@
                 <a:ea typeface="Arial" pitchFamily="34" charset="-122"/>
                 <a:cs typeface="Arial" pitchFamily="34" charset="-120"/>
               </a:rPr>
-              <a:t>Vì sao cần biết đó là gì? Vì người có thể bước ra, thùng rác thì không.</a:t>
-            </a:r>
-            <a:endParaRPr lang="en-US" sz="1250" dirty="0"/>
-          </a:p>
-          <a:p>
-            <a:pPr indent="0" marL="0">
-              <a:lnSpc>
-                <a:spcPct val="116000"/>
-              </a:lnSpc>
-              <a:buNone/>
-            </a:pPr>
-            <a:r>
-              <a:rPr lang="en-US" sz="1150" dirty="0">
+              <a:t>Vì sao phải biết đó là gì? Vì người có thể bước ra, thùng rác thì không.</a:t>
+            </a:r>
+            <a:endParaRPr lang="en-US" sz="1200" dirty="0"/>
+          </a:p>
+          <a:p>
+            <a:pPr indent="0" marL="0">
+              <a:lnSpc>
+                <a:spcPct val="114000"/>
+              </a:lnSpc>
+              <a:buNone/>
+            </a:pPr>
+            <a:r>
+              <a:rPr lang="en-US" sz="1100" dirty="0">
                 <a:solidFill>
                   <a:srgbClr val="7A4E00"/>
                 </a:solidFill>
@@ -14128,13 +14347,13 @@
               </a:rPr>
               <a:t>為什麼要知道那是什麼？因為人會突然走出來，垃圾桶不會。</a:t>
             </a:r>
-            <a:endParaRPr lang="en-US" sz="1250" dirty="0"/>
+            <a:endParaRPr lang="en-US" sz="1200" dirty="0"/>
           </a:p>
         </p:txBody>
       </p:sp>
       <p:pic>
         <p:nvPicPr>
-          <p:cNvPr id="24" name="Image 0" descr="/Users/tsengchenghsun/Class/carClass/Claude outputs/第三週(9-24)/src/logo.png">    </p:cNvPr>
+          <p:cNvPr id="25" name="Image 0" descr="/Users/tsengchenghsun/Class/carClass/Claude outputs/第三週(9-24)/src/logo.png">    </p:cNvPr>
           <p:cNvPicPr>
             <a:picLocks noChangeAspect="1"/>
           </p:cNvPicPr>
@@ -14158,7 +14377,7 @@
       </p:pic>
       <p:sp>
         <p:nvSpPr>
-          <p:cNvPr id="25" name="Text 21"/>
+          <p:cNvPr id="26" name="Text 22"/>
           <p:cNvSpPr txBox="1"/>
           <p:nvPr/>
         </p:nvSpPr>
@@ -14197,7 +14416,7 @@
       </p:sp>
       <p:sp>
         <p:nvSpPr>
-          <p:cNvPr id="26" name="Text 22"/>
+          <p:cNvPr id="27" name="Text 23"/>
           <p:cNvSpPr txBox="1"/>
           <p:nvPr/>
         </p:nvSpPr>
@@ -18628,7 +18847,7 @@
             </a:avLst>
           </a:prstGeom>
           <a:solidFill>
-            <a:srgbClr val="F4F7FA"/>
+            <a:srgbClr val="5C7186"/>
           </a:solidFill>
           <a:ln w="12700">
             <a:solidFill>
@@ -18646,13 +18865,390 @@
         </p:nvSpPr>
         <p:spPr>
           <a:xfrm>
-            <a:off x="1851660" y="2093976"/>
-            <a:ext cx="1207008" cy="685800"/>
+            <a:off x="539496" y="2326599"/>
+            <a:ext cx="3831336" cy="1459017"/>
+          </a:xfrm>
+          <a:prstGeom prst="rect">
+            <a:avLst/>
+          </a:prstGeom>
+          <a:solidFill>
+            <a:srgbClr val="4A5763"/>
+          </a:solidFill>
+          <a:ln/>
+        </p:spPr>
+      </p:sp>
+      <p:sp>
+        <p:nvSpPr>
+          <p:cNvPr id="6" name="Shape 4"/>
+          <p:cNvSpPr/>
+          <p:nvPr/>
+        </p:nvSpPr>
+        <p:spPr>
+          <a:xfrm flipH="1">
+            <a:off x="815279" y="2326599"/>
+            <a:ext cx="1548445" cy="1440729"/>
+          </a:xfrm>
+          <a:prstGeom prst="line">
+            <a:avLst/>
+          </a:prstGeom>
+          <a:noFill/>
+          <a:ln w="25400">
+            <a:solidFill>
+              <a:srgbClr val="E8EDF2">
+                <a:alpha val="45000"/>
+              </a:srgbClr>
+            </a:solidFill>
+            <a:prstDash val="solid"/>
+          </a:ln>
+        </p:spPr>
+      </p:sp>
+      <p:sp>
+        <p:nvSpPr>
+          <p:cNvPr id="7" name="Shape 5"/>
+          <p:cNvSpPr/>
+          <p:nvPr/>
+        </p:nvSpPr>
+        <p:spPr>
+          <a:xfrm>
+            <a:off x="2546604" y="2326599"/>
+            <a:ext cx="1548445" cy="1440729"/>
+          </a:xfrm>
+          <a:prstGeom prst="line">
+            <a:avLst/>
+          </a:prstGeom>
+          <a:noFill/>
+          <a:ln w="25400">
+            <a:solidFill>
+              <a:srgbClr val="E8EDF2">
+                <a:alpha val="45000"/>
+              </a:srgbClr>
+            </a:solidFill>
+            <a:prstDash val="solid"/>
+          </a:ln>
+        </p:spPr>
+      </p:sp>
+      <p:sp>
+        <p:nvSpPr>
+          <p:cNvPr id="8" name="Shape 6"/>
+          <p:cNvSpPr/>
+          <p:nvPr/>
+        </p:nvSpPr>
+        <p:spPr>
+          <a:xfrm>
+            <a:off x="1263127" y="2575982"/>
+            <a:ext cx="164123" cy="164123"/>
+          </a:xfrm>
+          <a:prstGeom prst="ellipse">
+            <a:avLst/>
+          </a:prstGeom>
+          <a:solidFill>
+            <a:srgbClr val="D8E4EC"/>
+          </a:solidFill>
+          <a:ln/>
+        </p:spPr>
+      </p:sp>
+      <p:sp>
+        <p:nvSpPr>
+          <p:cNvPr id="9" name="Shape 7"/>
+          <p:cNvSpPr/>
+          <p:nvPr/>
+        </p:nvSpPr>
+        <p:spPr>
+          <a:xfrm>
+            <a:off x="1235773" y="2760620"/>
+            <a:ext cx="218831" cy="246185"/>
           </a:xfrm>
           <a:prstGeom prst="roundRect">
             <a:avLst>
-              <a:gd name="adj" fmla="val 18667"/>
+              <a:gd name="adj" fmla="val 125357"/>
             </a:avLst>
+          </a:prstGeom>
+          <a:solidFill>
+            <a:srgbClr val="D8E4EC"/>
+          </a:solidFill>
+          <a:ln/>
+        </p:spPr>
+      </p:sp>
+      <p:sp>
+        <p:nvSpPr>
+          <p:cNvPr id="10" name="Shape 8"/>
+          <p:cNvSpPr/>
+          <p:nvPr/>
+        </p:nvSpPr>
+        <p:spPr>
+          <a:xfrm rot="480000">
+            <a:off x="1249450" y="2999967"/>
+            <a:ext cx="61546" cy="177800"/>
+          </a:xfrm>
+          <a:prstGeom prst="rect">
+            <a:avLst/>
+          </a:prstGeom>
+          <a:solidFill>
+            <a:srgbClr val="D8E4EC"/>
+          </a:solidFill>
+          <a:ln/>
+        </p:spPr>
+      </p:sp>
+      <p:sp>
+        <p:nvSpPr>
+          <p:cNvPr id="11" name="Shape 9"/>
+          <p:cNvSpPr/>
+          <p:nvPr/>
+        </p:nvSpPr>
+        <p:spPr>
+          <a:xfrm rot="-480000">
+            <a:off x="1379381" y="2999967"/>
+            <a:ext cx="61546" cy="177800"/>
+          </a:xfrm>
+          <a:prstGeom prst="rect">
+            <a:avLst/>
+          </a:prstGeom>
+          <a:solidFill>
+            <a:srgbClr val="D8E4EC"/>
+          </a:solidFill>
+          <a:ln/>
+        </p:spPr>
+      </p:sp>
+      <p:sp>
+        <p:nvSpPr>
+          <p:cNvPr id="12" name="Shape 10"/>
+          <p:cNvSpPr/>
+          <p:nvPr/>
+        </p:nvSpPr>
+        <p:spPr>
+          <a:xfrm>
+            <a:off x="893369" y="2429744"/>
+            <a:ext cx="780898" cy="876727"/>
+          </a:xfrm>
+          <a:prstGeom prst="rect">
+            <a:avLst/>
+          </a:prstGeom>
+          <a:ln w="19050">
+            <a:solidFill>
+              <a:srgbClr val="6FD08C"/>
+            </a:solidFill>
+            <a:prstDash val="solid"/>
+          </a:ln>
+        </p:spPr>
+      </p:sp>
+      <p:sp>
+        <p:nvSpPr>
+          <p:cNvPr id="13" name="Shape 11"/>
+          <p:cNvSpPr/>
+          <p:nvPr/>
+        </p:nvSpPr>
+        <p:spPr>
+          <a:xfrm>
+            <a:off x="893369" y="2256008"/>
+            <a:ext cx="786384" cy="173736"/>
+          </a:xfrm>
+          <a:prstGeom prst="rect">
+            <a:avLst/>
+          </a:prstGeom>
+          <a:solidFill>
+            <a:srgbClr val="6FD08C"/>
+          </a:solidFill>
+          <a:ln/>
+        </p:spPr>
+      </p:sp>
+      <p:sp>
+        <p:nvSpPr>
+          <p:cNvPr id="14" name="Text 12"/>
+          <p:cNvSpPr txBox="1"/>
+          <p:nvPr/>
+        </p:nvSpPr>
+        <p:spPr>
+          <a:xfrm>
+            <a:off x="920801" y="2260580"/>
+            <a:ext cx="786384" cy="164592"/>
+          </a:xfrm>
+          <a:prstGeom prst="rect">
+            <a:avLst/>
+          </a:prstGeom>
+          <a:noFill/>
+          <a:ln/>
+        </p:spPr>
+        <p:txBody>
+          <a:bodyPr wrap="square" lIns="0" tIns="0" rIns="0" bIns="0" rtlCol="0" anchor="ctr"/>
+          <a:lstStyle/>
+          <a:p>
+            <a:pPr indent="0" marL="0">
+              <a:buNone/>
+            </a:pPr>
+            <a:r>
+              <a:rPr lang="en-US" sz="800" b="1" dirty="0">
+                <a:solidFill>
+                  <a:srgbClr val="0B1F3A"/>
+                </a:solidFill>
+                <a:latin typeface="Arial" pitchFamily="34" charset="0"/>
+                <a:ea typeface="Arial" pitchFamily="34" charset="-122"/>
+                <a:cs typeface="Arial" pitchFamily="34" charset="-120"/>
+              </a:rPr>
+              <a:t>người 行人 0.94</a:t>
+            </a:r>
+            <a:endParaRPr lang="en-US" sz="800" dirty="0"/>
+          </a:p>
+        </p:txBody>
+      </p:sp>
+      <p:sp>
+        <p:nvSpPr>
+          <p:cNvPr id="15" name="Shape 13"/>
+          <p:cNvSpPr/>
+          <p:nvPr/>
+        </p:nvSpPr>
+        <p:spPr>
+          <a:xfrm>
+            <a:off x="3129786" y="2891211"/>
+            <a:ext cx="555123" cy="168950"/>
+          </a:xfrm>
+          <a:prstGeom prst="roundRect">
+            <a:avLst>
+              <a:gd name="adj" fmla="val 162368"/>
+            </a:avLst>
+          </a:prstGeom>
+          <a:solidFill>
+            <a:srgbClr val="C8D3DE"/>
+          </a:solidFill>
+          <a:ln/>
+        </p:spPr>
+      </p:sp>
+      <p:sp>
+        <p:nvSpPr>
+          <p:cNvPr id="16" name="Shape 14"/>
+          <p:cNvSpPr/>
+          <p:nvPr/>
+        </p:nvSpPr>
+        <p:spPr>
+          <a:xfrm>
+            <a:off x="3250464" y="2770533"/>
+            <a:ext cx="301697" cy="132747"/>
+          </a:xfrm>
+          <a:prstGeom prst="trapezoid">
+            <a:avLst/>
+          </a:prstGeom>
+          <a:solidFill>
+            <a:srgbClr val="C8D3DE">
+              <a:alpha val="70000"/>
+            </a:srgbClr>
+          </a:solidFill>
+          <a:ln/>
+        </p:spPr>
+      </p:sp>
+      <p:sp>
+        <p:nvSpPr>
+          <p:cNvPr id="17" name="Shape 15"/>
+          <p:cNvSpPr/>
+          <p:nvPr/>
+        </p:nvSpPr>
+        <p:spPr>
+          <a:xfrm>
+            <a:off x="3202193" y="3023958"/>
+            <a:ext cx="120679" cy="120679"/>
+          </a:xfrm>
+          <a:prstGeom prst="ellipse">
+            <a:avLst/>
+          </a:prstGeom>
+          <a:solidFill>
+            <a:srgbClr val="C8D3DE"/>
+          </a:solidFill>
+          <a:ln/>
+        </p:spPr>
+      </p:sp>
+      <p:sp>
+        <p:nvSpPr>
+          <p:cNvPr id="18" name="Shape 16"/>
+          <p:cNvSpPr/>
+          <p:nvPr/>
+        </p:nvSpPr>
+        <p:spPr>
+          <a:xfrm>
+            <a:off x="3491822" y="3023958"/>
+            <a:ext cx="120679" cy="120679"/>
+          </a:xfrm>
+          <a:prstGeom prst="ellipse">
+            <a:avLst/>
+          </a:prstGeom>
+          <a:solidFill>
+            <a:srgbClr val="C8D3DE"/>
+          </a:solidFill>
+          <a:ln/>
+        </p:spPr>
+      </p:sp>
+      <p:sp>
+        <p:nvSpPr>
+          <p:cNvPr id="19" name="Shape 17"/>
+          <p:cNvSpPr/>
+          <p:nvPr/>
+        </p:nvSpPr>
+        <p:spPr>
+          <a:xfrm>
+            <a:off x="3232363" y="3054128"/>
+            <a:ext cx="60339" cy="60339"/>
+          </a:xfrm>
+          <a:prstGeom prst="ellipse">
+            <a:avLst/>
+          </a:prstGeom>
+          <a:solidFill>
+            <a:srgbClr val="FFFFFF"/>
+          </a:solidFill>
+          <a:ln/>
+        </p:spPr>
+      </p:sp>
+      <p:sp>
+        <p:nvSpPr>
+          <p:cNvPr id="20" name="Shape 18"/>
+          <p:cNvSpPr/>
+          <p:nvPr/>
+        </p:nvSpPr>
+        <p:spPr>
+          <a:xfrm>
+            <a:off x="3521992" y="3054128"/>
+            <a:ext cx="60339" cy="60339"/>
+          </a:xfrm>
+          <a:prstGeom prst="ellipse">
+            <a:avLst/>
+          </a:prstGeom>
+          <a:solidFill>
+            <a:srgbClr val="FFFFFF"/>
+          </a:solidFill>
+          <a:ln/>
+        </p:spPr>
+      </p:sp>
+      <p:sp>
+        <p:nvSpPr>
+          <p:cNvPr id="21" name="Shape 19"/>
+          <p:cNvSpPr/>
+          <p:nvPr/>
+        </p:nvSpPr>
+        <p:spPr>
+          <a:xfrm>
+            <a:off x="2767523" y="2532888"/>
+            <a:ext cx="1171346" cy="773582"/>
+          </a:xfrm>
+          <a:prstGeom prst="rect">
+            <a:avLst/>
+          </a:prstGeom>
+          <a:ln w="19050">
+            <a:solidFill>
+              <a:srgbClr val="4FA8FF"/>
+            </a:solidFill>
+            <a:prstDash val="solid"/>
+          </a:ln>
+        </p:spPr>
+      </p:sp>
+      <p:sp>
+        <p:nvSpPr>
+          <p:cNvPr id="22" name="Shape 20"/>
+          <p:cNvSpPr/>
+          <p:nvPr/>
+        </p:nvSpPr>
+        <p:spPr>
+          <a:xfrm>
+            <a:off x="2767523" y="2359152"/>
+            <a:ext cx="1171346" cy="173736"/>
+          </a:xfrm>
+          <a:prstGeom prst="rect">
+            <a:avLst/>
           </a:prstGeom>
           <a:solidFill>
             <a:srgbClr val="4FA8FF"/>
@@ -18662,63 +19258,223 @@
       </p:sp>
       <p:sp>
         <p:nvSpPr>
-          <p:cNvPr id="6" name="Shape 4"/>
+          <p:cNvPr id="23" name="Text 21"/>
+          <p:cNvSpPr txBox="1"/>
+          <p:nvPr/>
+        </p:nvSpPr>
+        <p:spPr>
+          <a:xfrm>
+            <a:off x="2794955" y="2363724"/>
+            <a:ext cx="1171346" cy="164592"/>
+          </a:xfrm>
+          <a:prstGeom prst="rect">
+            <a:avLst/>
+          </a:prstGeom>
+          <a:noFill/>
+          <a:ln/>
+        </p:spPr>
+        <p:txBody>
+          <a:bodyPr wrap="square" lIns="0" tIns="0" rIns="0" bIns="0" rtlCol="0" anchor="ctr"/>
+          <a:lstStyle/>
+          <a:p>
+            <a:pPr indent="0" marL="0">
+              <a:buNone/>
+            </a:pPr>
+            <a:r>
+              <a:rPr lang="en-US" sz="800" b="1" dirty="0">
+                <a:solidFill>
+                  <a:srgbClr val="0B1F3A"/>
+                </a:solidFill>
+                <a:latin typeface="Arial" pitchFamily="34" charset="0"/>
+                <a:ea typeface="Arial" pitchFamily="34" charset="-122"/>
+                <a:cs typeface="Arial" pitchFamily="34" charset="-120"/>
+              </a:rPr>
+              <a:t>ô tô 汽車 0.91</a:t>
+            </a:r>
+            <a:endParaRPr lang="en-US" sz="800" dirty="0"/>
+          </a:p>
+        </p:txBody>
+      </p:sp>
+      <p:sp>
+        <p:nvSpPr>
+          <p:cNvPr id="24" name="Shape 22"/>
           <p:cNvSpPr/>
           <p:nvPr/>
         </p:nvSpPr>
         <p:spPr>
           <a:xfrm>
-            <a:off x="2125980" y="1956816"/>
-            <a:ext cx="356616" cy="164592"/>
+            <a:off x="2145929" y="1537545"/>
+            <a:ext cx="345157" cy="443521"/>
           </a:xfrm>
           <a:prstGeom prst="roundRect">
             <a:avLst>
-              <a:gd name="adj" fmla="val 166667"/>
+              <a:gd name="adj" fmla="val 10597"/>
             </a:avLst>
           </a:prstGeom>
           <a:solidFill>
-            <a:srgbClr val="4FA8FF"/>
+            <a:srgbClr val="2B3945"/>
           </a:solidFill>
           <a:ln/>
         </p:spPr>
       </p:sp>
       <p:sp>
         <p:nvSpPr>
-          <p:cNvPr id="7" name="Shape 5"/>
+          <p:cNvPr id="25" name="Shape 23"/>
           <p:cNvSpPr/>
           <p:nvPr/>
         </p:nvSpPr>
         <p:spPr>
           <a:xfrm>
-            <a:off x="2235708" y="2203704"/>
-            <a:ext cx="438912" cy="438912"/>
+            <a:off x="2221863" y="1577462"/>
+            <a:ext cx="193288" cy="193288"/>
           </a:xfrm>
           <a:prstGeom prst="ellipse">
             <a:avLst/>
           </a:prstGeom>
           <a:solidFill>
-            <a:srgbClr val="FFFFFF"/>
+            <a:srgbClr val="FF5A4E"/>
           </a:solidFill>
           <a:ln/>
         </p:spPr>
       </p:sp>
       <p:sp>
         <p:nvSpPr>
-          <p:cNvPr id="8" name="Shape 6"/>
+          <p:cNvPr id="26" name="Shape 24"/>
           <p:cNvSpPr/>
           <p:nvPr/>
         </p:nvSpPr>
         <p:spPr>
           <a:xfrm>
-            <a:off x="2331720" y="2299716"/>
-            <a:ext cx="246888" cy="246888"/>
+            <a:off x="2221863" y="1710518"/>
+            <a:ext cx="193288" cy="193288"/>
           </a:xfrm>
           <a:prstGeom prst="ellipse">
             <a:avLst/>
           </a:prstGeom>
           <a:solidFill>
-            <a:srgbClr val="4FA8FF">
-              <a:alpha val="70000"/>
+            <a:srgbClr val="5F6B75"/>
+          </a:solidFill>
+          <a:ln/>
+        </p:spPr>
+      </p:sp>
+      <p:sp>
+        <p:nvSpPr>
+          <p:cNvPr id="27" name="Shape 25"/>
+          <p:cNvSpPr/>
+          <p:nvPr/>
+        </p:nvSpPr>
+        <p:spPr>
+          <a:xfrm>
+            <a:off x="2221863" y="1843575"/>
+            <a:ext cx="193288" cy="193288"/>
+          </a:xfrm>
+          <a:prstGeom prst="ellipse">
+            <a:avLst/>
+          </a:prstGeom>
+          <a:solidFill>
+            <a:srgbClr val="5F6B75"/>
+          </a:solidFill>
+          <a:ln/>
+        </p:spPr>
+      </p:sp>
+      <p:sp>
+        <p:nvSpPr>
+          <p:cNvPr id="28" name="Shape 26"/>
+          <p:cNvSpPr/>
+          <p:nvPr/>
+        </p:nvSpPr>
+        <p:spPr>
+          <a:xfrm>
+            <a:off x="1986625" y="1501445"/>
+            <a:ext cx="663763" cy="515722"/>
+          </a:xfrm>
+          <a:prstGeom prst="rect">
+            <a:avLst/>
+          </a:prstGeom>
+          <a:ln w="19050">
+            <a:solidFill>
+              <a:srgbClr val="FFB020"/>
+            </a:solidFill>
+            <a:prstDash val="solid"/>
+          </a:ln>
+        </p:spPr>
+      </p:sp>
+      <p:sp>
+        <p:nvSpPr>
+          <p:cNvPr id="29" name="Shape 27"/>
+          <p:cNvSpPr/>
+          <p:nvPr/>
+        </p:nvSpPr>
+        <p:spPr>
+          <a:xfrm>
+            <a:off x="1986625" y="1327709"/>
+            <a:ext cx="786384" cy="173736"/>
+          </a:xfrm>
+          <a:prstGeom prst="rect">
+            <a:avLst/>
+          </a:prstGeom>
+          <a:solidFill>
+            <a:srgbClr val="FFB020"/>
+          </a:solidFill>
+          <a:ln/>
+        </p:spPr>
+      </p:sp>
+      <p:sp>
+        <p:nvSpPr>
+          <p:cNvPr id="30" name="Text 28"/>
+          <p:cNvSpPr txBox="1"/>
+          <p:nvPr/>
+        </p:nvSpPr>
+        <p:spPr>
+          <a:xfrm>
+            <a:off x="2014057" y="1332281"/>
+            <a:ext cx="786384" cy="164592"/>
+          </a:xfrm>
+          <a:prstGeom prst="rect">
+            <a:avLst/>
+          </a:prstGeom>
+          <a:noFill/>
+          <a:ln/>
+        </p:spPr>
+        <p:txBody>
+          <a:bodyPr wrap="square" lIns="0" tIns="0" rIns="0" bIns="0" rtlCol="0" anchor="ctr"/>
+          <a:lstStyle/>
+          <a:p>
+            <a:pPr indent="0" marL="0">
+              <a:buNone/>
+            </a:pPr>
+            <a:r>
+              <a:rPr lang="en-US" sz="800" b="1" dirty="0">
+                <a:solidFill>
+                  <a:srgbClr val="0B1F3A"/>
+                </a:solidFill>
+                <a:latin typeface="Arial" pitchFamily="34" charset="0"/>
+                <a:ea typeface="Arial" pitchFamily="34" charset="-122"/>
+                <a:cs typeface="Arial" pitchFamily="34" charset="-120"/>
+              </a:rPr>
+              <a:t>đèn đỏ 紅燈</a:t>
+            </a:r>
+            <a:endParaRPr lang="en-US" sz="800" dirty="0"/>
+          </a:p>
+        </p:txBody>
+      </p:sp>
+      <p:sp>
+        <p:nvSpPr>
+          <p:cNvPr id="31" name="Shape 29"/>
+          <p:cNvSpPr/>
+          <p:nvPr/>
+        </p:nvSpPr>
+        <p:spPr>
+          <a:xfrm>
+            <a:off x="539496" y="3310128"/>
+            <a:ext cx="3831336" cy="475488"/>
+          </a:xfrm>
+          <a:prstGeom prst="rect">
+            <a:avLst/>
+          </a:prstGeom>
+          <a:solidFill>
+            <a:srgbClr val="0B1F3A">
+              <a:alpha val="78000"/>
             </a:srgbClr>
           </a:solidFill>
           <a:ln/>
@@ -18726,36 +19482,14 @@
       </p:sp>
       <p:sp>
         <p:nvSpPr>
-          <p:cNvPr id="9" name="Shape 7"/>
-          <p:cNvSpPr/>
-          <p:nvPr/>
-        </p:nvSpPr>
-        <p:spPr>
-          <a:xfrm>
-            <a:off x="2784348" y="2176272"/>
-            <a:ext cx="137160" cy="137160"/>
-          </a:xfrm>
-          <a:prstGeom prst="ellipse">
-            <a:avLst/>
-          </a:prstGeom>
-          <a:solidFill>
-            <a:srgbClr val="FFFFFF">
-              <a:alpha val="60000"/>
-            </a:srgbClr>
-          </a:solidFill>
-          <a:ln/>
-        </p:spPr>
-      </p:sp>
-      <p:sp>
-        <p:nvSpPr>
-          <p:cNvPr id="10" name="Text 8"/>
+          <p:cNvPr id="32" name="Text 30"/>
           <p:cNvSpPr txBox="1"/>
           <p:nvPr/>
         </p:nvSpPr>
         <p:spPr>
           <a:xfrm>
-            <a:off x="685800" y="3346704"/>
-            <a:ext cx="3538728" cy="365760"/>
+            <a:off x="630936" y="3346704"/>
+            <a:ext cx="3648456" cy="402336"/>
           </a:xfrm>
           <a:prstGeom prst="rect">
             <a:avLst/>
@@ -18767,42 +19501,42 @@
           <a:bodyPr wrap="square" lIns="0" tIns="0" rIns="0" bIns="0" rtlCol="0" anchor="t"/>
           <a:lstStyle/>
           <a:p>
-            <a:pPr algn="ctr" indent="0" marL="0">
-              <a:lnSpc>
-                <a:spcPct val="110000"/>
-              </a:lnSpc>
-              <a:buNone/>
-            </a:pPr>
-            <a:r>
-              <a:rPr lang="en-US" sz="1000" dirty="0">
-                <a:solidFill>
-                  <a:srgbClr val="5F7183"/>
+            <a:pPr indent="0" marL="0">
+              <a:lnSpc>
+                <a:spcPct val="106000"/>
+              </a:lnSpc>
+              <a:buNone/>
+            </a:pPr>
+            <a:r>
+              <a:rPr lang="en-US" sz="1000" b="1" dirty="0">
+                <a:solidFill>
+                  <a:srgbClr val="FFFFFF"/>
                 </a:solidFill>
                 <a:latin typeface="Arial" pitchFamily="34" charset="0"/>
                 <a:ea typeface="Arial" pitchFamily="34" charset="-122"/>
                 <a:cs typeface="Arial" pitchFamily="34" charset="-120"/>
               </a:rPr>
-              <a:t>Chưa có ảnh thiết bị</a:t>
+              <a:t>Đây là thứ chỉ camera mới dựng ra được: khung bao, tên loại, độ tin cậy.</a:t>
             </a:r>
             <a:endParaRPr lang="en-US" sz="1000" dirty="0"/>
           </a:p>
           <a:p>
-            <a:pPr algn="ctr" indent="0" marL="0">
-              <a:lnSpc>
-                <a:spcPct val="110000"/>
-              </a:lnSpc>
-              <a:buNone/>
-            </a:pPr>
-            <a:r>
-              <a:rPr lang="en-US" sz="950" dirty="0">
-                <a:solidFill>
-                  <a:srgbClr val="5F7183"/>
+            <a:pPr indent="0" marL="0">
+              <a:lnSpc>
+                <a:spcPct val="106000"/>
+              </a:lnSpc>
+              <a:buNone/>
+            </a:pPr>
+            <a:r>
+              <a:rPr lang="en-US" sz="900" dirty="0">
+                <a:solidFill>
+                  <a:srgbClr val="D8E4EC"/>
                 </a:solidFill>
                 <a:latin typeface="微軟正黑體" pitchFamily="34" charset="0"/>
                 <a:ea typeface="微軟正黑體" pitchFamily="34" charset="-122"/>
                 <a:cs typeface="微軟正黑體" pitchFamily="34" charset="-120"/>
               </a:rPr>
-              <a:t>尚未取得實體照片</a:t>
+              <a:t>這是只有相機做得出來的東西：框、類別的名字、還有信心分數。</a:t>
             </a:r>
             <a:endParaRPr lang="en-US" sz="1000" dirty="0"/>
           </a:p>
@@ -18810,7 +19544,7 @@
       </p:sp>
       <p:sp>
         <p:nvSpPr>
-          <p:cNvPr id="11" name="Shape 9"/>
+          <p:cNvPr id="33" name="Shape 31"/>
           <p:cNvSpPr/>
           <p:nvPr/>
         </p:nvSpPr>
@@ -18837,7 +19571,7 @@
       </p:sp>
       <p:sp>
         <p:nvSpPr>
-          <p:cNvPr id="12" name="Shape 10"/>
+          <p:cNvPr id="34" name="Shape 32"/>
           <p:cNvSpPr/>
           <p:nvPr/>
         </p:nvSpPr>
@@ -18857,7 +19591,7 @@
       </p:sp>
       <p:sp>
         <p:nvSpPr>
-          <p:cNvPr id="13" name="Text 11"/>
+          <p:cNvPr id="35" name="Text 33"/>
           <p:cNvSpPr txBox="1"/>
           <p:nvPr/>
         </p:nvSpPr>
@@ -18896,7 +19630,7 @@
       </p:sp>
       <p:sp>
         <p:nvSpPr>
-          <p:cNvPr id="14" name="Text 12"/>
+          <p:cNvPr id="36" name="Text 34"/>
           <p:cNvSpPr txBox="1"/>
           <p:nvPr/>
         </p:nvSpPr>
@@ -18935,7 +19669,7 @@
       </p:sp>
       <p:sp>
         <p:nvSpPr>
-          <p:cNvPr id="15" name="Text 13"/>
+          <p:cNvPr id="37" name="Text 35"/>
           <p:cNvSpPr txBox="1"/>
           <p:nvPr/>
         </p:nvSpPr>
@@ -18974,7 +19708,7 @@
       </p:sp>
       <p:sp>
         <p:nvSpPr>
-          <p:cNvPr id="16" name="Text 14">
+          <p:cNvPr id="38" name="Text 36">
             <a:hlinkClick r:id="rId1" tooltip=""/>
           </p:cNvPr>
           <p:cNvSpPr txBox="1"/>
@@ -19022,7 +19756,7 @@
       </p:sp>
       <p:sp>
         <p:nvSpPr>
-          <p:cNvPr id="17" name="Shape 15"/>
+          <p:cNvPr id="39" name="Shape 37"/>
           <p:cNvSpPr/>
           <p:nvPr/>
         </p:nvSpPr>
@@ -19042,7 +19776,7 @@
       </p:sp>
       <p:sp>
         <p:nvSpPr>
-          <p:cNvPr id="18" name="Text 16"/>
+          <p:cNvPr id="40" name="Text 38"/>
           <p:cNvSpPr txBox="1"/>
           <p:nvPr/>
         </p:nvSpPr>
@@ -19104,7 +19838,7 @@
       </p:sp>
       <p:sp>
         <p:nvSpPr>
-          <p:cNvPr id="19" name="Shape 17"/>
+          <p:cNvPr id="41" name="Shape 39"/>
           <p:cNvSpPr/>
           <p:nvPr/>
         </p:nvSpPr>
@@ -19124,7 +19858,7 @@
       </p:sp>
       <p:sp>
         <p:nvSpPr>
-          <p:cNvPr id="20" name="Text 18"/>
+          <p:cNvPr id="42" name="Text 40"/>
           <p:cNvSpPr txBox="1"/>
           <p:nvPr/>
         </p:nvSpPr>
@@ -19186,7 +19920,7 @@
       </p:sp>
       <p:sp>
         <p:nvSpPr>
-          <p:cNvPr id="21" name="Shape 19"/>
+          <p:cNvPr id="43" name="Shape 41"/>
           <p:cNvSpPr/>
           <p:nvPr/>
         </p:nvSpPr>
@@ -19206,7 +19940,7 @@
       </p:sp>
       <p:sp>
         <p:nvSpPr>
-          <p:cNvPr id="22" name="Text 20"/>
+          <p:cNvPr id="44" name="Text 42"/>
           <p:cNvSpPr txBox="1"/>
           <p:nvPr/>
         </p:nvSpPr>
@@ -19268,7 +20002,7 @@
       </p:sp>
       <p:sp>
         <p:nvSpPr>
-          <p:cNvPr id="23" name="Shape 21"/>
+          <p:cNvPr id="45" name="Shape 43"/>
           <p:cNvSpPr/>
           <p:nvPr/>
         </p:nvSpPr>
@@ -19295,7 +20029,7 @@
       </p:sp>
       <p:sp>
         <p:nvSpPr>
-          <p:cNvPr id="24" name="Text 22"/>
+          <p:cNvPr id="46" name="Text 44"/>
           <p:cNvSpPr txBox="1"/>
           <p:nvPr/>
         </p:nvSpPr>
@@ -19357,7 +20091,7 @@
       </p:sp>
       <p:pic>
         <p:nvPicPr>
-          <p:cNvPr id="26" name="Image 0" descr="/Users/tsengchenghsun/Class/carClass/Claude outputs/第三週(9-24)/src/logo.png">    </p:cNvPr>
+          <p:cNvPr id="48" name="Image 0" descr="/Users/tsengchenghsun/Class/carClass/Claude outputs/第三週(9-24)/src/logo.png">    </p:cNvPr>
           <p:cNvPicPr>
             <a:picLocks noChangeAspect="1"/>
           </p:cNvPicPr>
@@ -19381,7 +20115,7 @@
       </p:pic>
       <p:sp>
         <p:nvSpPr>
-          <p:cNvPr id="27" name="Text 23"/>
+          <p:cNvPr id="49" name="Text 45"/>
           <p:cNvSpPr txBox="1"/>
           <p:nvPr/>
         </p:nvSpPr>
@@ -19420,7 +20154,7 @@
       </p:sp>
       <p:sp>
         <p:nvSpPr>
-          <p:cNvPr id="28" name="Text 24"/>
+          <p:cNvPr id="50" name="Text 46"/>
           <p:cNvSpPr txBox="1"/>
           <p:nvPr/>
         </p:nvSpPr>
@@ -22333,7 +23067,7 @@
             </a:avLst>
           </a:prstGeom>
           <a:solidFill>
-            <a:srgbClr val="F4F7FA"/>
+            <a:srgbClr val="0B1F3A"/>
           </a:solidFill>
           <a:ln w="12700">
             <a:solidFill>
@@ -22351,35 +23085,120 @@
         </p:nvSpPr>
         <p:spPr>
           <a:xfrm>
-            <a:off x="1906524" y="2286000"/>
-            <a:ext cx="246888" cy="246888"/>
-          </a:xfrm>
-          <a:prstGeom prst="ellipse">
+            <a:off x="539496" y="2326599"/>
+            <a:ext cx="3831336" cy="1459017"/>
+          </a:xfrm>
+          <a:prstGeom prst="rect">
             <a:avLst/>
           </a:prstGeom>
           <a:solidFill>
-            <a:srgbClr val="FFB020"/>
+            <a:srgbClr val="12263A"/>
           </a:solidFill>
           <a:ln/>
         </p:spPr>
       </p:sp>
       <p:sp>
         <p:nvSpPr>
-          <p:cNvPr id="6" name="Shape 4"/>
+          <p:cNvPr id="6" name="Text 4"/>
+          <p:cNvSpPr txBox="1"/>
+          <p:nvPr/>
+        </p:nvSpPr>
+        <p:spPr>
+          <a:xfrm>
+            <a:off x="630936" y="1335024"/>
+            <a:ext cx="3648456" cy="310896"/>
+          </a:xfrm>
+          <a:prstGeom prst="rect">
+            <a:avLst/>
+          </a:prstGeom>
+          <a:noFill/>
+          <a:ln/>
+        </p:spPr>
+        <p:txBody>
+          <a:bodyPr wrap="square" lIns="0" tIns="0" rIns="0" bIns="0" rtlCol="0" anchor="t"/>
+          <a:lstStyle/>
+          <a:p>
+            <a:pPr indent="0" marL="0">
+              <a:lnSpc>
+                <a:spcPct val="104000"/>
+              </a:lnSpc>
+              <a:buNone/>
+            </a:pPr>
+            <a:r>
+              <a:rPr lang="en-US" sz="1050" b="1" dirty="0">
+                <a:solidFill>
+                  <a:srgbClr val="FF8A7A"/>
+                </a:solidFill>
+                <a:latin typeface="Arial" pitchFamily="34" charset="0"/>
+                <a:ea typeface="Arial" pitchFamily="34" charset="-122"/>
+                <a:cs typeface="Arial" pitchFamily="34" charset="-120"/>
+              </a:rPr>
+              <a:t>Xe đi TỚI: sóng dội về bị ép lại → tần số cao hơn</a:t>
+            </a:r>
+            <a:endParaRPr lang="en-US" sz="1050" dirty="0"/>
+          </a:p>
+          <a:p>
+            <a:pPr indent="0" marL="0">
+              <a:lnSpc>
+                <a:spcPct val="104000"/>
+              </a:lnSpc>
+              <a:buNone/>
+            </a:pPr>
+            <a:r>
+              <a:rPr lang="en-US" sz="950" dirty="0">
+                <a:solidFill>
+                  <a:srgbClr val="FF8A7A"/>
+                </a:solidFill>
+                <a:latin typeface="微軟正黑體" pitchFamily="34" charset="0"/>
+                <a:ea typeface="微軟正黑體" pitchFamily="34" charset="-122"/>
+                <a:cs typeface="微軟正黑體" pitchFamily="34" charset="-120"/>
+              </a:rPr>
+              <a:t>車子靠近：回來的波被擠密 → 頻率變高</a:t>
+            </a:r>
+            <a:endParaRPr lang="en-US" sz="1050" dirty="0"/>
+          </a:p>
+        </p:txBody>
+      </p:sp>
+      <p:sp>
+        <p:nvSpPr>
+          <p:cNvPr id="7" name="Shape 5"/>
           <p:cNvSpPr/>
           <p:nvPr/>
         </p:nvSpPr>
         <p:spPr>
           <a:xfrm>
-            <a:off x="2098548" y="2011680"/>
-            <a:ext cx="329184" cy="795528"/>
-          </a:xfrm>
-          <a:prstGeom prst="chevron">
-            <a:avLst/>
-          </a:prstGeom>
-          <a:ln w="31750">
+            <a:off x="685800" y="1819656"/>
+            <a:ext cx="274320" cy="237744"/>
+          </a:xfrm>
+          <a:prstGeom prst="roundRect">
+            <a:avLst>
+              <a:gd name="adj" fmla="val 19231"/>
+            </a:avLst>
+          </a:prstGeom>
+          <a:solidFill>
+            <a:srgbClr val="C8D3DE"/>
+          </a:solidFill>
+          <a:ln/>
+        </p:spPr>
+      </p:sp>
+      <p:sp>
+        <p:nvSpPr>
+          <p:cNvPr id="8" name="Shape 6"/>
+          <p:cNvSpPr/>
+          <p:nvPr/>
+        </p:nvSpPr>
+        <p:spPr>
+          <a:xfrm>
+            <a:off x="1069848" y="1737360"/>
+            <a:ext cx="0" cy="402336"/>
+          </a:xfrm>
+          <a:prstGeom prst="line">
+            <a:avLst/>
+          </a:prstGeom>
+          <a:noFill/>
+          <a:ln w="20320">
             <a:solidFill>
-              <a:srgbClr val="FFB020"/>
+              <a:srgbClr val="FF8A7A"/>
             </a:solidFill>
             <a:prstDash val="solid"/>
           </a:ln>
@@ -22387,23 +23206,22 @@
       </p:sp>
       <p:sp>
         <p:nvSpPr>
-          <p:cNvPr id="7" name="Shape 5"/>
+          <p:cNvPr id="9" name="Shape 7"/>
           <p:cNvSpPr/>
           <p:nvPr/>
         </p:nvSpPr>
         <p:spPr>
           <a:xfrm>
-            <a:off x="2372868" y="1901952"/>
-            <a:ext cx="356616" cy="1014984"/>
-          </a:xfrm>
-          <a:prstGeom prst="chevron">
-            <a:avLst/>
-          </a:prstGeom>
-          <a:ln w="31750">
+            <a:off x="1289304" y="1737360"/>
+            <a:ext cx="0" cy="402336"/>
+          </a:xfrm>
+          <a:prstGeom prst="line">
+            <a:avLst/>
+          </a:prstGeom>
+          <a:noFill/>
+          <a:ln w="20320">
             <a:solidFill>
-              <a:srgbClr val="FFB020">
-                <a:alpha val="75000"/>
-              </a:srgbClr>
+              <a:srgbClr val="FF8A7A"/>
             </a:solidFill>
             <a:prstDash val="solid"/>
           </a:ln>
@@ -22411,23 +23229,22 @@
       </p:sp>
       <p:sp>
         <p:nvSpPr>
-          <p:cNvPr id="8" name="Shape 6"/>
+          <p:cNvPr id="10" name="Shape 8"/>
           <p:cNvSpPr/>
           <p:nvPr/>
         </p:nvSpPr>
         <p:spPr>
           <a:xfrm>
-            <a:off x="2647188" y="1792224"/>
-            <a:ext cx="384048" cy="1234440"/>
-          </a:xfrm>
-          <a:prstGeom prst="chevron">
-            <a:avLst/>
-          </a:prstGeom>
-          <a:ln w="31750">
+            <a:off x="1508760" y="1737360"/>
+            <a:ext cx="0" cy="402336"/>
+          </a:xfrm>
+          <a:prstGeom prst="line">
+            <a:avLst/>
+          </a:prstGeom>
+          <a:noFill/>
+          <a:ln w="20320">
             <a:solidFill>
-              <a:srgbClr val="FFB020">
-                <a:alpha val="50000"/>
-              </a:srgbClr>
+              <a:srgbClr val="FF8A7A"/>
             </a:solidFill>
             <a:prstDash val="solid"/>
           </a:ln>
@@ -22435,14 +23252,296 @@
       </p:sp>
       <p:sp>
         <p:nvSpPr>
-          <p:cNvPr id="9" name="Text 7"/>
+          <p:cNvPr id="11" name="Shape 9"/>
+          <p:cNvSpPr/>
+          <p:nvPr/>
+        </p:nvSpPr>
+        <p:spPr>
+          <a:xfrm>
+            <a:off x="1728216" y="1737360"/>
+            <a:ext cx="0" cy="402336"/>
+          </a:xfrm>
+          <a:prstGeom prst="line">
+            <a:avLst/>
+          </a:prstGeom>
+          <a:noFill/>
+          <a:ln w="20320">
+            <a:solidFill>
+              <a:srgbClr val="FF8A7A"/>
+            </a:solidFill>
+            <a:prstDash val="solid"/>
+          </a:ln>
+        </p:spPr>
+      </p:sp>
+      <p:sp>
+        <p:nvSpPr>
+          <p:cNvPr id="12" name="Shape 10"/>
+          <p:cNvSpPr/>
+          <p:nvPr/>
+        </p:nvSpPr>
+        <p:spPr>
+          <a:xfrm>
+            <a:off x="1947672" y="1737360"/>
+            <a:ext cx="0" cy="402336"/>
+          </a:xfrm>
+          <a:prstGeom prst="line">
+            <a:avLst/>
+          </a:prstGeom>
+          <a:noFill/>
+          <a:ln w="20320">
+            <a:solidFill>
+              <a:srgbClr val="FF8A7A"/>
+            </a:solidFill>
+            <a:prstDash val="solid"/>
+          </a:ln>
+        </p:spPr>
+      </p:sp>
+      <p:sp>
+        <p:nvSpPr>
+          <p:cNvPr id="13" name="Shape 11"/>
+          <p:cNvSpPr/>
+          <p:nvPr/>
+        </p:nvSpPr>
+        <p:spPr>
+          <a:xfrm>
+            <a:off x="2167128" y="1737360"/>
+            <a:ext cx="0" cy="402336"/>
+          </a:xfrm>
+          <a:prstGeom prst="line">
+            <a:avLst/>
+          </a:prstGeom>
+          <a:noFill/>
+          <a:ln w="20320">
+            <a:solidFill>
+              <a:srgbClr val="FF8A7A"/>
+            </a:solidFill>
+            <a:prstDash val="solid"/>
+          </a:ln>
+        </p:spPr>
+      </p:sp>
+      <p:sp>
+        <p:nvSpPr>
+          <p:cNvPr id="14" name="Shape 12"/>
+          <p:cNvSpPr/>
+          <p:nvPr/>
+        </p:nvSpPr>
+        <p:spPr>
+          <a:xfrm>
+            <a:off x="2386584" y="1737360"/>
+            <a:ext cx="0" cy="402336"/>
+          </a:xfrm>
+          <a:prstGeom prst="line">
+            <a:avLst/>
+          </a:prstGeom>
+          <a:noFill/>
+          <a:ln w="20320">
+            <a:solidFill>
+              <a:srgbClr val="FF8A7A"/>
+            </a:solidFill>
+            <a:prstDash val="solid"/>
+          </a:ln>
+        </p:spPr>
+      </p:sp>
+      <p:sp>
+        <p:nvSpPr>
+          <p:cNvPr id="15" name="Shape 13"/>
+          <p:cNvSpPr/>
+          <p:nvPr/>
+        </p:nvSpPr>
+        <p:spPr>
+          <a:xfrm>
+            <a:off x="2606040" y="1737360"/>
+            <a:ext cx="0" cy="402336"/>
+          </a:xfrm>
+          <a:prstGeom prst="line">
+            <a:avLst/>
+          </a:prstGeom>
+          <a:noFill/>
+          <a:ln w="20320">
+            <a:solidFill>
+              <a:srgbClr val="FF8A7A"/>
+            </a:solidFill>
+            <a:prstDash val="solid"/>
+          </a:ln>
+        </p:spPr>
+      </p:sp>
+      <p:sp>
+        <p:nvSpPr>
+          <p:cNvPr id="16" name="Shape 14"/>
+          <p:cNvSpPr/>
+          <p:nvPr/>
+        </p:nvSpPr>
+        <p:spPr>
+          <a:xfrm>
+            <a:off x="2825496" y="1737360"/>
+            <a:ext cx="0" cy="402336"/>
+          </a:xfrm>
+          <a:prstGeom prst="line">
+            <a:avLst/>
+          </a:prstGeom>
+          <a:noFill/>
+          <a:ln w="20320">
+            <a:solidFill>
+              <a:srgbClr val="FF8A7A"/>
+            </a:solidFill>
+            <a:prstDash val="solid"/>
+          </a:ln>
+        </p:spPr>
+      </p:sp>
+      <p:sp>
+        <p:nvSpPr>
+          <p:cNvPr id="17" name="Shape 15"/>
+          <p:cNvSpPr/>
+          <p:nvPr/>
+        </p:nvSpPr>
+        <p:spPr>
+          <a:xfrm>
+            <a:off x="3713196" y="1909999"/>
+            <a:ext cx="437449" cy="133137"/>
+          </a:xfrm>
+          <a:prstGeom prst="roundRect">
+            <a:avLst>
+              <a:gd name="adj" fmla="val 206043"/>
+            </a:avLst>
+          </a:prstGeom>
+          <a:solidFill>
+            <a:srgbClr val="9FB0BE"/>
+          </a:solidFill>
+          <a:ln/>
+        </p:spPr>
+      </p:sp>
+      <p:sp>
+        <p:nvSpPr>
+          <p:cNvPr id="18" name="Shape 16"/>
+          <p:cNvSpPr/>
+          <p:nvPr/>
+        </p:nvSpPr>
+        <p:spPr>
+          <a:xfrm>
+            <a:off x="3808293" y="1814901"/>
+            <a:ext cx="237744" cy="104607"/>
+          </a:xfrm>
+          <a:prstGeom prst="trapezoid">
+            <a:avLst/>
+          </a:prstGeom>
+          <a:solidFill>
+            <a:srgbClr val="9FB0BE">
+              <a:alpha val="70000"/>
+            </a:srgbClr>
+          </a:solidFill>
+          <a:ln/>
+        </p:spPr>
+      </p:sp>
+      <p:sp>
+        <p:nvSpPr>
+          <p:cNvPr id="19" name="Shape 17"/>
+          <p:cNvSpPr/>
+          <p:nvPr/>
+        </p:nvSpPr>
+        <p:spPr>
+          <a:xfrm>
+            <a:off x="3770254" y="2014606"/>
+            <a:ext cx="95098" cy="95098"/>
+          </a:xfrm>
+          <a:prstGeom prst="ellipse">
+            <a:avLst/>
+          </a:prstGeom>
+          <a:solidFill>
+            <a:srgbClr val="9FB0BE"/>
+          </a:solidFill>
+          <a:ln/>
+        </p:spPr>
+      </p:sp>
+      <p:sp>
+        <p:nvSpPr>
+          <p:cNvPr id="20" name="Shape 18"/>
+          <p:cNvSpPr/>
+          <p:nvPr/>
+        </p:nvSpPr>
+        <p:spPr>
+          <a:xfrm>
+            <a:off x="3998488" y="2014606"/>
+            <a:ext cx="95098" cy="95098"/>
+          </a:xfrm>
+          <a:prstGeom prst="ellipse">
+            <a:avLst/>
+          </a:prstGeom>
+          <a:solidFill>
+            <a:srgbClr val="9FB0BE"/>
+          </a:solidFill>
+          <a:ln/>
+        </p:spPr>
+      </p:sp>
+      <p:sp>
+        <p:nvSpPr>
+          <p:cNvPr id="21" name="Shape 19"/>
+          <p:cNvSpPr/>
+          <p:nvPr/>
+        </p:nvSpPr>
+        <p:spPr>
+          <a:xfrm>
+            <a:off x="3794028" y="2038380"/>
+            <a:ext cx="47549" cy="47549"/>
+          </a:xfrm>
+          <a:prstGeom prst="ellipse">
+            <a:avLst/>
+          </a:prstGeom>
+          <a:solidFill>
+            <a:srgbClr val="FFFFFF"/>
+          </a:solidFill>
+          <a:ln/>
+        </p:spPr>
+      </p:sp>
+      <p:sp>
+        <p:nvSpPr>
+          <p:cNvPr id="22" name="Shape 20"/>
+          <p:cNvSpPr/>
+          <p:nvPr/>
+        </p:nvSpPr>
+        <p:spPr>
+          <a:xfrm>
+            <a:off x="4022263" y="2038380"/>
+            <a:ext cx="47549" cy="47549"/>
+          </a:xfrm>
+          <a:prstGeom prst="ellipse">
+            <a:avLst/>
+          </a:prstGeom>
+          <a:solidFill>
+            <a:srgbClr val="FFFFFF"/>
+          </a:solidFill>
+          <a:ln/>
+        </p:spPr>
+      </p:sp>
+      <p:sp>
+        <p:nvSpPr>
+          <p:cNvPr id="23" name="Shape 21"/>
+          <p:cNvSpPr/>
+          <p:nvPr/>
+        </p:nvSpPr>
+        <p:spPr>
+          <a:xfrm flipH="1">
+            <a:off x="3493008" y="2212848"/>
+            <a:ext cx="310896" cy="128016"/>
+          </a:xfrm>
+          <a:prstGeom prst="rightArrow">
+            <a:avLst/>
+          </a:prstGeom>
+          <a:solidFill>
+            <a:srgbClr val="FF8A7A"/>
+          </a:solidFill>
+          <a:ln/>
+        </p:spPr>
+      </p:sp>
+      <p:sp>
+        <p:nvSpPr>
+          <p:cNvPr id="24" name="Text 22"/>
           <p:cNvSpPr txBox="1"/>
           <p:nvPr/>
         </p:nvSpPr>
         <p:spPr>
           <a:xfrm>
-            <a:off x="685800" y="3346704"/>
-            <a:ext cx="3538728" cy="365760"/>
+            <a:off x="630936" y="2395728"/>
+            <a:ext cx="3648456" cy="310896"/>
           </a:xfrm>
           <a:prstGeom prst="rect">
             <a:avLst/>
@@ -22454,50 +23553,353 @@
           <a:bodyPr wrap="square" lIns="0" tIns="0" rIns="0" bIns="0" rtlCol="0" anchor="t"/>
           <a:lstStyle/>
           <a:p>
-            <a:pPr algn="ctr" indent="0" marL="0">
-              <a:lnSpc>
-                <a:spcPct val="110000"/>
-              </a:lnSpc>
-              <a:buNone/>
-            </a:pPr>
-            <a:r>
-              <a:rPr lang="en-US" sz="1000" dirty="0">
-                <a:solidFill>
-                  <a:srgbClr val="5F7183"/>
+            <a:pPr indent="0" marL="0">
+              <a:lnSpc>
+                <a:spcPct val="104000"/>
+              </a:lnSpc>
+              <a:buNone/>
+            </a:pPr>
+            <a:r>
+              <a:rPr lang="en-US" sz="1050" b="1" dirty="0">
+                <a:solidFill>
+                  <a:srgbClr val="7FB8FF"/>
                 </a:solidFill>
                 <a:latin typeface="Arial" pitchFamily="34" charset="0"/>
                 <a:ea typeface="Arial" pitchFamily="34" charset="-122"/>
                 <a:cs typeface="Arial" pitchFamily="34" charset="-120"/>
               </a:rPr>
-              <a:t>Chưa có ảnh thiết bị</a:t>
-            </a:r>
-            <a:endParaRPr lang="en-US" sz="1000" dirty="0"/>
-          </a:p>
-          <a:p>
-            <a:pPr algn="ctr" indent="0" marL="0">
-              <a:lnSpc>
-                <a:spcPct val="110000"/>
+              <a:t>Xe đi RA XA: sóng dội về bị kéo dài → tần số thấp hơn</a:t>
+            </a:r>
+            <a:endParaRPr lang="en-US" sz="1050" dirty="0"/>
+          </a:p>
+          <a:p>
+            <a:pPr indent="0" marL="0">
+              <a:lnSpc>
+                <a:spcPct val="104000"/>
               </a:lnSpc>
               <a:buNone/>
             </a:pPr>
             <a:r>
               <a:rPr lang="en-US" sz="950" dirty="0">
                 <a:solidFill>
-                  <a:srgbClr val="5F7183"/>
+                  <a:srgbClr val="7FB8FF"/>
                 </a:solidFill>
                 <a:latin typeface="微軟正黑體" pitchFamily="34" charset="0"/>
                 <a:ea typeface="微軟正黑體" pitchFamily="34" charset="-122"/>
                 <a:cs typeface="微軟正黑體" pitchFamily="34" charset="-120"/>
               </a:rPr>
-              <a:t>尚未取得實體照片</a:t>
-            </a:r>
-            <a:endParaRPr lang="en-US" sz="1000" dirty="0"/>
+              <a:t>車子遠離：回來的波被拉長 → 頻率變低</a:t>
+            </a:r>
+            <a:endParaRPr lang="en-US" sz="1050" dirty="0"/>
           </a:p>
         </p:txBody>
       </p:sp>
       <p:sp>
         <p:nvSpPr>
-          <p:cNvPr id="10" name="Shape 8"/>
+          <p:cNvPr id="25" name="Shape 23"/>
+          <p:cNvSpPr/>
+          <p:nvPr/>
+        </p:nvSpPr>
+        <p:spPr>
+          <a:xfrm>
+            <a:off x="685800" y="2880360"/>
+            <a:ext cx="274320" cy="237744"/>
+          </a:xfrm>
+          <a:prstGeom prst="roundRect">
+            <a:avLst>
+              <a:gd name="adj" fmla="val 19231"/>
+            </a:avLst>
+          </a:prstGeom>
+          <a:solidFill>
+            <a:srgbClr val="C8D3DE"/>
+          </a:solidFill>
+          <a:ln/>
+        </p:spPr>
+      </p:sp>
+      <p:sp>
+        <p:nvSpPr>
+          <p:cNvPr id="26" name="Shape 24"/>
+          <p:cNvSpPr/>
+          <p:nvPr/>
+        </p:nvSpPr>
+        <p:spPr>
+          <a:xfrm>
+            <a:off x="1069848" y="2798064"/>
+            <a:ext cx="0" cy="402336"/>
+          </a:xfrm>
+          <a:prstGeom prst="line">
+            <a:avLst/>
+          </a:prstGeom>
+          <a:noFill/>
+          <a:ln w="20320">
+            <a:solidFill>
+              <a:srgbClr val="7FB8FF"/>
+            </a:solidFill>
+            <a:prstDash val="solid"/>
+          </a:ln>
+        </p:spPr>
+      </p:sp>
+      <p:sp>
+        <p:nvSpPr>
+          <p:cNvPr id="27" name="Shape 25"/>
+          <p:cNvSpPr/>
+          <p:nvPr/>
+        </p:nvSpPr>
+        <p:spPr>
+          <a:xfrm>
+            <a:off x="1472184" y="2798064"/>
+            <a:ext cx="0" cy="402336"/>
+          </a:xfrm>
+          <a:prstGeom prst="line">
+            <a:avLst/>
+          </a:prstGeom>
+          <a:noFill/>
+          <a:ln w="20320">
+            <a:solidFill>
+              <a:srgbClr val="7FB8FF"/>
+            </a:solidFill>
+            <a:prstDash val="solid"/>
+          </a:ln>
+        </p:spPr>
+      </p:sp>
+      <p:sp>
+        <p:nvSpPr>
+          <p:cNvPr id="28" name="Shape 26"/>
+          <p:cNvSpPr/>
+          <p:nvPr/>
+        </p:nvSpPr>
+        <p:spPr>
+          <a:xfrm>
+            <a:off x="1874520" y="2798064"/>
+            <a:ext cx="0" cy="402336"/>
+          </a:xfrm>
+          <a:prstGeom prst="line">
+            <a:avLst/>
+          </a:prstGeom>
+          <a:noFill/>
+          <a:ln w="20320">
+            <a:solidFill>
+              <a:srgbClr val="7FB8FF"/>
+            </a:solidFill>
+            <a:prstDash val="solid"/>
+          </a:ln>
+        </p:spPr>
+      </p:sp>
+      <p:sp>
+        <p:nvSpPr>
+          <p:cNvPr id="29" name="Shape 27"/>
+          <p:cNvSpPr/>
+          <p:nvPr/>
+        </p:nvSpPr>
+        <p:spPr>
+          <a:xfrm>
+            <a:off x="2276856" y="2798064"/>
+            <a:ext cx="0" cy="402336"/>
+          </a:xfrm>
+          <a:prstGeom prst="line">
+            <a:avLst/>
+          </a:prstGeom>
+          <a:noFill/>
+          <a:ln w="20320">
+            <a:solidFill>
+              <a:srgbClr val="7FB8FF"/>
+            </a:solidFill>
+            <a:prstDash val="solid"/>
+          </a:ln>
+        </p:spPr>
+      </p:sp>
+      <p:sp>
+        <p:nvSpPr>
+          <p:cNvPr id="30" name="Shape 28"/>
+          <p:cNvSpPr/>
+          <p:nvPr/>
+        </p:nvSpPr>
+        <p:spPr>
+          <a:xfrm>
+            <a:off x="2679192" y="2798064"/>
+            <a:ext cx="0" cy="402336"/>
+          </a:xfrm>
+          <a:prstGeom prst="line">
+            <a:avLst/>
+          </a:prstGeom>
+          <a:noFill/>
+          <a:ln w="20320">
+            <a:solidFill>
+              <a:srgbClr val="7FB8FF"/>
+            </a:solidFill>
+            <a:prstDash val="solid"/>
+          </a:ln>
+        </p:spPr>
+      </p:sp>
+      <p:sp>
+        <p:nvSpPr>
+          <p:cNvPr id="31" name="Shape 29"/>
+          <p:cNvSpPr/>
+          <p:nvPr/>
+        </p:nvSpPr>
+        <p:spPr>
+          <a:xfrm>
+            <a:off x="3713196" y="2970703"/>
+            <a:ext cx="437449" cy="133137"/>
+          </a:xfrm>
+          <a:prstGeom prst="roundRect">
+            <a:avLst>
+              <a:gd name="adj" fmla="val 206043"/>
+            </a:avLst>
+          </a:prstGeom>
+          <a:solidFill>
+            <a:srgbClr val="9FB0BE"/>
+          </a:solidFill>
+          <a:ln/>
+        </p:spPr>
+      </p:sp>
+      <p:sp>
+        <p:nvSpPr>
+          <p:cNvPr id="32" name="Shape 30"/>
+          <p:cNvSpPr/>
+          <p:nvPr/>
+        </p:nvSpPr>
+        <p:spPr>
+          <a:xfrm>
+            <a:off x="3808293" y="2875605"/>
+            <a:ext cx="237744" cy="104607"/>
+          </a:xfrm>
+          <a:prstGeom prst="trapezoid">
+            <a:avLst/>
+          </a:prstGeom>
+          <a:solidFill>
+            <a:srgbClr val="9FB0BE">
+              <a:alpha val="70000"/>
+            </a:srgbClr>
+          </a:solidFill>
+          <a:ln/>
+        </p:spPr>
+      </p:sp>
+      <p:sp>
+        <p:nvSpPr>
+          <p:cNvPr id="33" name="Shape 31"/>
+          <p:cNvSpPr/>
+          <p:nvPr/>
+        </p:nvSpPr>
+        <p:spPr>
+          <a:xfrm>
+            <a:off x="3770254" y="3075310"/>
+            <a:ext cx="95098" cy="95098"/>
+          </a:xfrm>
+          <a:prstGeom prst="ellipse">
+            <a:avLst/>
+          </a:prstGeom>
+          <a:solidFill>
+            <a:srgbClr val="9FB0BE"/>
+          </a:solidFill>
+          <a:ln/>
+        </p:spPr>
+      </p:sp>
+      <p:sp>
+        <p:nvSpPr>
+          <p:cNvPr id="34" name="Shape 32"/>
+          <p:cNvSpPr/>
+          <p:nvPr/>
+        </p:nvSpPr>
+        <p:spPr>
+          <a:xfrm>
+            <a:off x="3998488" y="3075310"/>
+            <a:ext cx="95098" cy="95098"/>
+          </a:xfrm>
+          <a:prstGeom prst="ellipse">
+            <a:avLst/>
+          </a:prstGeom>
+          <a:solidFill>
+            <a:srgbClr val="9FB0BE"/>
+          </a:solidFill>
+          <a:ln/>
+        </p:spPr>
+      </p:sp>
+      <p:sp>
+        <p:nvSpPr>
+          <p:cNvPr id="35" name="Shape 33"/>
+          <p:cNvSpPr/>
+          <p:nvPr/>
+        </p:nvSpPr>
+        <p:spPr>
+          <a:xfrm>
+            <a:off x="3794028" y="3099084"/>
+            <a:ext cx="47549" cy="47549"/>
+          </a:xfrm>
+          <a:prstGeom prst="ellipse">
+            <a:avLst/>
+          </a:prstGeom>
+          <a:solidFill>
+            <a:srgbClr val="FFFFFF"/>
+          </a:solidFill>
+          <a:ln/>
+        </p:spPr>
+      </p:sp>
+      <p:sp>
+        <p:nvSpPr>
+          <p:cNvPr id="36" name="Shape 34"/>
+          <p:cNvSpPr/>
+          <p:nvPr/>
+        </p:nvSpPr>
+        <p:spPr>
+          <a:xfrm>
+            <a:off x="4022263" y="3099084"/>
+            <a:ext cx="47549" cy="47549"/>
+          </a:xfrm>
+          <a:prstGeom prst="ellipse">
+            <a:avLst/>
+          </a:prstGeom>
+          <a:solidFill>
+            <a:srgbClr val="FFFFFF"/>
+          </a:solidFill>
+          <a:ln/>
+        </p:spPr>
+      </p:sp>
+      <p:sp>
+        <p:nvSpPr>
+          <p:cNvPr id="37" name="Shape 35"/>
+          <p:cNvSpPr/>
+          <p:nvPr/>
+        </p:nvSpPr>
+        <p:spPr>
+          <a:xfrm>
+            <a:off x="3986784" y="3273552"/>
+            <a:ext cx="310896" cy="128016"/>
+          </a:xfrm>
+          <a:prstGeom prst="rightArrow">
+            <a:avLst/>
+          </a:prstGeom>
+          <a:solidFill>
+            <a:srgbClr val="7FB8FF"/>
+          </a:solidFill>
+          <a:ln/>
+        </p:spPr>
+      </p:sp>
+      <p:sp>
+        <p:nvSpPr>
+          <p:cNvPr id="38" name="Shape 36"/>
+          <p:cNvSpPr/>
+          <p:nvPr/>
+        </p:nvSpPr>
+        <p:spPr>
+          <a:xfrm>
+            <a:off x="539496" y="3310128"/>
+            <a:ext cx="3831336" cy="475488"/>
+          </a:xfrm>
+          <a:prstGeom prst="rect">
+            <a:avLst/>
+          </a:prstGeom>
+          <a:solidFill>
+            <a:srgbClr val="0B1F3A">
+              <a:alpha val="78000"/>
+            </a:srgbClr>
+          </a:solidFill>
+          <a:ln/>
+        </p:spPr>
+      </p:sp>
+      <p:sp>
+        <p:nvSpPr>
+          <p:cNvPr id="39" name="Shape 37"/>
           <p:cNvSpPr/>
           <p:nvPr/>
         </p:nvSpPr>
@@ -22524,7 +23926,7 @@
       </p:sp>
       <p:sp>
         <p:nvSpPr>
-          <p:cNvPr id="11" name="Shape 9"/>
+          <p:cNvPr id="40" name="Shape 38"/>
           <p:cNvSpPr/>
           <p:nvPr/>
         </p:nvSpPr>
@@ -22544,7 +23946,7 @@
       </p:sp>
       <p:sp>
         <p:nvSpPr>
-          <p:cNvPr id="12" name="Text 10"/>
+          <p:cNvPr id="41" name="Text 39"/>
           <p:cNvSpPr txBox="1"/>
           <p:nvPr/>
         </p:nvSpPr>
@@ -22583,7 +23985,7 @@
       </p:sp>
       <p:sp>
         <p:nvSpPr>
-          <p:cNvPr id="13" name="Text 11"/>
+          <p:cNvPr id="42" name="Text 40"/>
           <p:cNvSpPr txBox="1"/>
           <p:nvPr/>
         </p:nvSpPr>
@@ -22622,7 +24024,7 @@
       </p:sp>
       <p:sp>
         <p:nvSpPr>
-          <p:cNvPr id="14" name="Text 12"/>
+          <p:cNvPr id="43" name="Text 41"/>
           <p:cNvSpPr txBox="1"/>
           <p:nvPr/>
         </p:nvSpPr>
@@ -22661,7 +24063,7 @@
       </p:sp>
       <p:sp>
         <p:nvSpPr>
-          <p:cNvPr id="15" name="Text 13">
+          <p:cNvPr id="44" name="Text 42">
             <a:hlinkClick r:id="rId1" tooltip=""/>
           </p:cNvPr>
           <p:cNvSpPr txBox="1"/>
@@ -22709,7 +24111,7 @@
       </p:sp>
       <p:sp>
         <p:nvSpPr>
-          <p:cNvPr id="16" name="Shape 14"/>
+          <p:cNvPr id="45" name="Shape 43"/>
           <p:cNvSpPr/>
           <p:nvPr/>
         </p:nvSpPr>
@@ -22729,7 +24131,7 @@
       </p:sp>
       <p:sp>
         <p:nvSpPr>
-          <p:cNvPr id="17" name="Text 15"/>
+          <p:cNvPr id="46" name="Text 44"/>
           <p:cNvSpPr txBox="1"/>
           <p:nvPr/>
         </p:nvSpPr>
@@ -22791,7 +24193,7 @@
       </p:sp>
       <p:sp>
         <p:nvSpPr>
-          <p:cNvPr id="18" name="Shape 16"/>
+          <p:cNvPr id="47" name="Shape 45"/>
           <p:cNvSpPr/>
           <p:nvPr/>
         </p:nvSpPr>
@@ -22811,7 +24213,7 @@
       </p:sp>
       <p:sp>
         <p:nvSpPr>
-          <p:cNvPr id="19" name="Text 17"/>
+          <p:cNvPr id="48" name="Text 46"/>
           <p:cNvSpPr txBox="1"/>
           <p:nvPr/>
         </p:nvSpPr>
@@ -22873,7 +24275,7 @@
       </p:sp>
       <p:sp>
         <p:nvSpPr>
-          <p:cNvPr id="20" name="Shape 18"/>
+          <p:cNvPr id="49" name="Shape 47"/>
           <p:cNvSpPr/>
           <p:nvPr/>
         </p:nvSpPr>
@@ -22893,7 +24295,7 @@
       </p:sp>
       <p:sp>
         <p:nvSpPr>
-          <p:cNvPr id="21" name="Text 19"/>
+          <p:cNvPr id="50" name="Text 48"/>
           <p:cNvSpPr txBox="1"/>
           <p:nvPr/>
         </p:nvSpPr>
@@ -22955,7 +24357,7 @@
       </p:sp>
       <p:sp>
         <p:nvSpPr>
-          <p:cNvPr id="22" name="Shape 20"/>
+          <p:cNvPr id="51" name="Shape 49"/>
           <p:cNvSpPr/>
           <p:nvPr/>
         </p:nvSpPr>
@@ -22982,7 +24384,7 @@
       </p:sp>
       <p:sp>
         <p:nvSpPr>
-          <p:cNvPr id="23" name="Text 21"/>
+          <p:cNvPr id="52" name="Text 50"/>
           <p:cNvSpPr txBox="1"/>
           <p:nvPr/>
         </p:nvSpPr>
@@ -23044,7 +24446,7 @@
       </p:sp>
       <p:pic>
         <p:nvPicPr>
-          <p:cNvPr id="25" name="Image 0" descr="/Users/tsengchenghsun/Class/carClass/Claude outputs/第三週(9-24)/src/logo.png">    </p:cNvPr>
+          <p:cNvPr id="54" name="Image 0" descr="/Users/tsengchenghsun/Class/carClass/Claude outputs/第三週(9-24)/src/logo.png">    </p:cNvPr>
           <p:cNvPicPr>
             <a:picLocks noChangeAspect="1"/>
           </p:cNvPicPr>
@@ -23068,7 +24470,7 @@
       </p:pic>
       <p:sp>
         <p:nvSpPr>
-          <p:cNvPr id="26" name="Text 22"/>
+          <p:cNvPr id="55" name="Text 51"/>
           <p:cNvSpPr txBox="1"/>
           <p:nvPr/>
         </p:nvSpPr>
@@ -23107,7 +24509,7 @@
       </p:sp>
       <p:sp>
         <p:nvSpPr>
-          <p:cNvPr id="27" name="Text 23"/>
+          <p:cNvPr id="56" name="Text 52"/>
           <p:cNvSpPr txBox="1"/>
           <p:nvPr/>
         </p:nvSpPr>
@@ -23287,7 +24689,7 @@
             </a:avLst>
           </a:prstGeom>
           <a:solidFill>
-            <a:srgbClr val="F4F7FA"/>
+            <a:srgbClr val="0B1F3A"/>
           </a:solidFill>
           <a:ln w="12700">
             <a:solidFill>
@@ -23304,16 +24706,680 @@
           <p:nvPr/>
         </p:nvSpPr>
         <p:spPr>
-          <a:xfrm rot="-2280000">
-            <a:off x="1976989" y="2057185"/>
-            <a:ext cx="341986" cy="36210"/>
+          <a:xfrm>
+            <a:off x="539496" y="2326599"/>
+            <a:ext cx="3831336" cy="1459017"/>
           </a:xfrm>
           <a:prstGeom prst="rect">
             <a:avLst/>
           </a:prstGeom>
           <a:solidFill>
-            <a:srgbClr val="0B1F3A">
-              <a:alpha val="45000"/>
+            <a:srgbClr val="12263A"/>
+          </a:solidFill>
+          <a:ln/>
+        </p:spPr>
+      </p:sp>
+      <p:sp>
+        <p:nvSpPr>
+          <p:cNvPr id="6" name="Shape 4"/>
+          <p:cNvSpPr/>
+          <p:nvPr/>
+        </p:nvSpPr>
+        <p:spPr>
+          <a:xfrm>
+            <a:off x="557784" y="1298448"/>
+            <a:ext cx="3794760" cy="1179576"/>
+          </a:xfrm>
+          <a:prstGeom prst="roundRect">
+            <a:avLst>
+              <a:gd name="adj" fmla="val 5426"/>
+            </a:avLst>
+          </a:prstGeom>
+          <a:solidFill>
+            <a:srgbClr val="12263A"/>
+          </a:solidFill>
+          <a:ln/>
+        </p:spPr>
+      </p:sp>
+      <p:sp>
+        <p:nvSpPr>
+          <p:cNvPr id="7" name="Text 5"/>
+          <p:cNvSpPr txBox="1"/>
+          <p:nvPr/>
+        </p:nvSpPr>
+        <p:spPr>
+          <a:xfrm>
+            <a:off x="649224" y="1325880"/>
+            <a:ext cx="3611880" cy="292608"/>
+          </a:xfrm>
+          <a:prstGeom prst="rect">
+            <a:avLst/>
+          </a:prstGeom>
+          <a:noFill/>
+          <a:ln/>
+        </p:spPr>
+        <p:txBody>
+          <a:bodyPr wrap="square" lIns="0" tIns="0" rIns="0" bIns="0" rtlCol="0" anchor="t"/>
+          <a:lstStyle/>
+          <a:p>
+            <a:pPr indent="0" marL="0">
+              <a:lnSpc>
+                <a:spcPct val="104000"/>
+              </a:lnSpc>
+              <a:buNone/>
+            </a:pPr>
+            <a:r>
+              <a:rPr lang="en-US" sz="1050" b="1" dirty="0">
+                <a:solidFill>
+                  <a:srgbClr val="7ED957"/>
+                </a:solidFill>
+                <a:latin typeface="Arial" pitchFamily="34" charset="0"/>
+                <a:ea typeface="Arial" pitchFamily="34" charset="-122"/>
+                <a:cs typeface="Arial" pitchFamily="34" charset="-120"/>
+              </a:rPr>
+              <a:t>LiDAR trả về: một đám điểm</a:t>
+            </a:r>
+            <a:endParaRPr lang="en-US" sz="1050" dirty="0"/>
+          </a:p>
+          <a:p>
+            <a:pPr indent="0" marL="0">
+              <a:lnSpc>
+                <a:spcPct val="104000"/>
+              </a:lnSpc>
+              <a:buNone/>
+            </a:pPr>
+            <a:r>
+              <a:rPr lang="en-US" sz="950" dirty="0">
+                <a:solidFill>
+                  <a:srgbClr val="7ED957"/>
+                </a:solidFill>
+                <a:latin typeface="微軟正黑體" pitchFamily="34" charset="0"/>
+                <a:ea typeface="微軟正黑體" pitchFamily="34" charset="-122"/>
+                <a:cs typeface="微軟正黑體" pitchFamily="34" charset="-120"/>
+              </a:rPr>
+              <a:t>光達給的：一堆點</a:t>
+            </a:r>
+            <a:endParaRPr lang="en-US" sz="1050" dirty="0"/>
+          </a:p>
+        </p:txBody>
+      </p:sp>
+      <p:sp>
+        <p:nvSpPr>
+          <p:cNvPr id="8" name="Shape 6"/>
+          <p:cNvSpPr/>
+          <p:nvPr/>
+        </p:nvSpPr>
+        <p:spPr>
+          <a:xfrm>
+            <a:off x="1644091" y="1649029"/>
+            <a:ext cx="60350" cy="60350"/>
+          </a:xfrm>
+          <a:prstGeom prst="ellipse">
+            <a:avLst/>
+          </a:prstGeom>
+          <a:solidFill>
+            <a:srgbClr val="7ED957"/>
+          </a:solidFill>
+          <a:ln/>
+        </p:spPr>
+      </p:sp>
+      <p:sp>
+        <p:nvSpPr>
+          <p:cNvPr id="9" name="Shape 7"/>
+          <p:cNvSpPr/>
+          <p:nvPr/>
+        </p:nvSpPr>
+        <p:spPr>
+          <a:xfrm>
+            <a:off x="1577797" y="1688805"/>
+            <a:ext cx="60350" cy="60350"/>
+          </a:xfrm>
+          <a:prstGeom prst="ellipse">
+            <a:avLst/>
+          </a:prstGeom>
+          <a:solidFill>
+            <a:srgbClr val="7ED957"/>
+          </a:solidFill>
+          <a:ln/>
+        </p:spPr>
+      </p:sp>
+      <p:sp>
+        <p:nvSpPr>
+          <p:cNvPr id="10" name="Shape 8"/>
+          <p:cNvSpPr/>
+          <p:nvPr/>
+        </p:nvSpPr>
+        <p:spPr>
+          <a:xfrm>
+            <a:off x="1710385" y="1688805"/>
+            <a:ext cx="60350" cy="60350"/>
+          </a:xfrm>
+          <a:prstGeom prst="ellipse">
+            <a:avLst/>
+          </a:prstGeom>
+          <a:solidFill>
+            <a:srgbClr val="7ED957"/>
+          </a:solidFill>
+          <a:ln/>
+        </p:spPr>
+      </p:sp>
+      <p:sp>
+        <p:nvSpPr>
+          <p:cNvPr id="11" name="Shape 9"/>
+          <p:cNvSpPr/>
+          <p:nvPr/>
+        </p:nvSpPr>
+        <p:spPr>
+          <a:xfrm>
+            <a:off x="1551280" y="1755099"/>
+            <a:ext cx="60350" cy="60350"/>
+          </a:xfrm>
+          <a:prstGeom prst="ellipse">
+            <a:avLst/>
+          </a:prstGeom>
+          <a:solidFill>
+            <a:srgbClr val="7ED957"/>
+          </a:solidFill>
+          <a:ln/>
+        </p:spPr>
+      </p:sp>
+      <p:sp>
+        <p:nvSpPr>
+          <p:cNvPr id="12" name="Shape 10"/>
+          <p:cNvSpPr/>
+          <p:nvPr/>
+        </p:nvSpPr>
+        <p:spPr>
+          <a:xfrm>
+            <a:off x="1736903" y="1755099"/>
+            <a:ext cx="60350" cy="60350"/>
+          </a:xfrm>
+          <a:prstGeom prst="ellipse">
+            <a:avLst/>
+          </a:prstGeom>
+          <a:solidFill>
+            <a:srgbClr val="7ED957"/>
+          </a:solidFill>
+          <a:ln/>
+        </p:spPr>
+      </p:sp>
+      <p:sp>
+        <p:nvSpPr>
+          <p:cNvPr id="13" name="Shape 11"/>
+          <p:cNvSpPr/>
+          <p:nvPr/>
+        </p:nvSpPr>
+        <p:spPr>
+          <a:xfrm>
+            <a:off x="1644091" y="1755099"/>
+            <a:ext cx="60350" cy="60350"/>
+          </a:xfrm>
+          <a:prstGeom prst="ellipse">
+            <a:avLst/>
+          </a:prstGeom>
+          <a:solidFill>
+            <a:srgbClr val="7ED957"/>
+          </a:solidFill>
+          <a:ln/>
+        </p:spPr>
+      </p:sp>
+      <p:sp>
+        <p:nvSpPr>
+          <p:cNvPr id="14" name="Shape 12"/>
+          <p:cNvSpPr/>
+          <p:nvPr/>
+        </p:nvSpPr>
+        <p:spPr>
+          <a:xfrm>
+            <a:off x="1538021" y="1861170"/>
+            <a:ext cx="60350" cy="60350"/>
+          </a:xfrm>
+          <a:prstGeom prst="ellipse">
+            <a:avLst/>
+          </a:prstGeom>
+          <a:solidFill>
+            <a:srgbClr val="7ED957"/>
+          </a:solidFill>
+          <a:ln/>
+        </p:spPr>
+      </p:sp>
+      <p:sp>
+        <p:nvSpPr>
+          <p:cNvPr id="15" name="Shape 13"/>
+          <p:cNvSpPr/>
+          <p:nvPr/>
+        </p:nvSpPr>
+        <p:spPr>
+          <a:xfrm>
+            <a:off x="1644091" y="1861170"/>
+            <a:ext cx="60350" cy="60350"/>
+          </a:xfrm>
+          <a:prstGeom prst="ellipse">
+            <a:avLst/>
+          </a:prstGeom>
+          <a:solidFill>
+            <a:srgbClr val="7ED957"/>
+          </a:solidFill>
+          <a:ln/>
+        </p:spPr>
+      </p:sp>
+      <p:sp>
+        <p:nvSpPr>
+          <p:cNvPr id="16" name="Shape 14"/>
+          <p:cNvSpPr/>
+          <p:nvPr/>
+        </p:nvSpPr>
+        <p:spPr>
+          <a:xfrm>
+            <a:off x="1750162" y="1861170"/>
+            <a:ext cx="60350" cy="60350"/>
+          </a:xfrm>
+          <a:prstGeom prst="ellipse">
+            <a:avLst/>
+          </a:prstGeom>
+          <a:solidFill>
+            <a:srgbClr val="7ED957"/>
+          </a:solidFill>
+          <a:ln/>
+        </p:spPr>
+      </p:sp>
+      <p:sp>
+        <p:nvSpPr>
+          <p:cNvPr id="17" name="Shape 15"/>
+          <p:cNvSpPr/>
+          <p:nvPr/>
+        </p:nvSpPr>
+        <p:spPr>
+          <a:xfrm>
+            <a:off x="1524762" y="1967240"/>
+            <a:ext cx="60350" cy="60350"/>
+          </a:xfrm>
+          <a:prstGeom prst="ellipse">
+            <a:avLst/>
+          </a:prstGeom>
+          <a:solidFill>
+            <a:srgbClr val="7ED957"/>
+          </a:solidFill>
+          <a:ln/>
+        </p:spPr>
+      </p:sp>
+      <p:sp>
+        <p:nvSpPr>
+          <p:cNvPr id="18" name="Shape 16"/>
+          <p:cNvSpPr/>
+          <p:nvPr/>
+        </p:nvSpPr>
+        <p:spPr>
+          <a:xfrm>
+            <a:off x="1644091" y="1967240"/>
+            <a:ext cx="60350" cy="60350"/>
+          </a:xfrm>
+          <a:prstGeom prst="ellipse">
+            <a:avLst/>
+          </a:prstGeom>
+          <a:solidFill>
+            <a:srgbClr val="7ED957"/>
+          </a:solidFill>
+          <a:ln/>
+        </p:spPr>
+      </p:sp>
+      <p:sp>
+        <p:nvSpPr>
+          <p:cNvPr id="19" name="Shape 17"/>
+          <p:cNvSpPr/>
+          <p:nvPr/>
+        </p:nvSpPr>
+        <p:spPr>
+          <a:xfrm>
+            <a:off x="1763420" y="1967240"/>
+            <a:ext cx="60350" cy="60350"/>
+          </a:xfrm>
+          <a:prstGeom prst="ellipse">
+            <a:avLst/>
+          </a:prstGeom>
+          <a:solidFill>
+            <a:srgbClr val="7ED957"/>
+          </a:solidFill>
+          <a:ln/>
+        </p:spPr>
+      </p:sp>
+      <p:sp>
+        <p:nvSpPr>
+          <p:cNvPr id="20" name="Shape 18"/>
+          <p:cNvSpPr/>
+          <p:nvPr/>
+        </p:nvSpPr>
+        <p:spPr>
+          <a:xfrm>
+            <a:off x="1538021" y="2073311"/>
+            <a:ext cx="60350" cy="60350"/>
+          </a:xfrm>
+          <a:prstGeom prst="ellipse">
+            <a:avLst/>
+          </a:prstGeom>
+          <a:solidFill>
+            <a:srgbClr val="7ED957"/>
+          </a:solidFill>
+          <a:ln/>
+        </p:spPr>
+      </p:sp>
+      <p:sp>
+        <p:nvSpPr>
+          <p:cNvPr id="21" name="Shape 19"/>
+          <p:cNvSpPr/>
+          <p:nvPr/>
+        </p:nvSpPr>
+        <p:spPr>
+          <a:xfrm>
+            <a:off x="1644091" y="2073311"/>
+            <a:ext cx="60350" cy="60350"/>
+          </a:xfrm>
+          <a:prstGeom prst="ellipse">
+            <a:avLst/>
+          </a:prstGeom>
+          <a:solidFill>
+            <a:srgbClr val="7ED957"/>
+          </a:solidFill>
+          <a:ln/>
+        </p:spPr>
+      </p:sp>
+      <p:sp>
+        <p:nvSpPr>
+          <p:cNvPr id="22" name="Shape 20"/>
+          <p:cNvSpPr/>
+          <p:nvPr/>
+        </p:nvSpPr>
+        <p:spPr>
+          <a:xfrm>
+            <a:off x="1750162" y="2073311"/>
+            <a:ext cx="60350" cy="60350"/>
+          </a:xfrm>
+          <a:prstGeom prst="ellipse">
+            <a:avLst/>
+          </a:prstGeom>
+          <a:solidFill>
+            <a:srgbClr val="7ED957"/>
+          </a:solidFill>
+          <a:ln/>
+        </p:spPr>
+      </p:sp>
+      <p:sp>
+        <p:nvSpPr>
+          <p:cNvPr id="23" name="Shape 21"/>
+          <p:cNvSpPr/>
+          <p:nvPr/>
+        </p:nvSpPr>
+        <p:spPr>
+          <a:xfrm>
+            <a:off x="1564538" y="2179381"/>
+            <a:ext cx="60350" cy="60350"/>
+          </a:xfrm>
+          <a:prstGeom prst="ellipse">
+            <a:avLst/>
+          </a:prstGeom>
+          <a:solidFill>
+            <a:srgbClr val="7ED957"/>
+          </a:solidFill>
+          <a:ln/>
+        </p:spPr>
+      </p:sp>
+      <p:sp>
+        <p:nvSpPr>
+          <p:cNvPr id="24" name="Shape 22"/>
+          <p:cNvSpPr/>
+          <p:nvPr/>
+        </p:nvSpPr>
+        <p:spPr>
+          <a:xfrm>
+            <a:off x="1723644" y="2179381"/>
+            <a:ext cx="60350" cy="60350"/>
+          </a:xfrm>
+          <a:prstGeom prst="ellipse">
+            <a:avLst/>
+          </a:prstGeom>
+          <a:solidFill>
+            <a:srgbClr val="7ED957"/>
+          </a:solidFill>
+          <a:ln/>
+        </p:spPr>
+      </p:sp>
+      <p:sp>
+        <p:nvSpPr>
+          <p:cNvPr id="25" name="Shape 23"/>
+          <p:cNvSpPr/>
+          <p:nvPr/>
+        </p:nvSpPr>
+        <p:spPr>
+          <a:xfrm>
+            <a:off x="1577797" y="2285451"/>
+            <a:ext cx="60350" cy="60350"/>
+          </a:xfrm>
+          <a:prstGeom prst="ellipse">
+            <a:avLst/>
+          </a:prstGeom>
+          <a:solidFill>
+            <a:srgbClr val="7ED957"/>
+          </a:solidFill>
+          <a:ln/>
+        </p:spPr>
+      </p:sp>
+      <p:sp>
+        <p:nvSpPr>
+          <p:cNvPr id="26" name="Shape 24"/>
+          <p:cNvSpPr/>
+          <p:nvPr/>
+        </p:nvSpPr>
+        <p:spPr>
+          <a:xfrm>
+            <a:off x="1710385" y="2285451"/>
+            <a:ext cx="60350" cy="60350"/>
+          </a:xfrm>
+          <a:prstGeom prst="ellipse">
+            <a:avLst/>
+          </a:prstGeom>
+          <a:solidFill>
+            <a:srgbClr val="7ED957"/>
+          </a:solidFill>
+          <a:ln/>
+        </p:spPr>
+      </p:sp>
+      <p:sp>
+        <p:nvSpPr>
+          <p:cNvPr id="27" name="Shape 25"/>
+          <p:cNvSpPr/>
+          <p:nvPr/>
+        </p:nvSpPr>
+        <p:spPr>
+          <a:xfrm>
+            <a:off x="1577797" y="2391522"/>
+            <a:ext cx="60350" cy="60350"/>
+          </a:xfrm>
+          <a:prstGeom prst="ellipse">
+            <a:avLst/>
+          </a:prstGeom>
+          <a:solidFill>
+            <a:srgbClr val="7ED957"/>
+          </a:solidFill>
+          <a:ln/>
+        </p:spPr>
+      </p:sp>
+      <p:sp>
+        <p:nvSpPr>
+          <p:cNvPr id="28" name="Shape 26"/>
+          <p:cNvSpPr/>
+          <p:nvPr/>
+        </p:nvSpPr>
+        <p:spPr>
+          <a:xfrm>
+            <a:off x="1710385" y="2391522"/>
+            <a:ext cx="60350" cy="60350"/>
+          </a:xfrm>
+          <a:prstGeom prst="ellipse">
+            <a:avLst/>
+          </a:prstGeom>
+          <a:solidFill>
+            <a:srgbClr val="7ED957"/>
+          </a:solidFill>
+          <a:ln/>
+        </p:spPr>
+      </p:sp>
+      <p:sp>
+        <p:nvSpPr>
+          <p:cNvPr id="29" name="Text 27"/>
+          <p:cNvSpPr txBox="1"/>
+          <p:nvPr/>
+        </p:nvSpPr>
+        <p:spPr>
+          <a:xfrm>
+            <a:off x="2455164" y="1802648"/>
+            <a:ext cx="1796064" cy="548640"/>
+          </a:xfrm>
+          <a:prstGeom prst="rect">
+            <a:avLst/>
+          </a:prstGeom>
+          <a:noFill/>
+          <a:ln/>
+        </p:spPr>
+        <p:txBody>
+          <a:bodyPr wrap="square" lIns="0" tIns="0" rIns="0" bIns="0" rtlCol="0" anchor="ctr"/>
+          <a:lstStyle/>
+          <a:p>
+            <a:pPr indent="0" marL="0">
+              <a:buNone/>
+            </a:pPr>
+            <a:r>
+              <a:rPr lang="en-US" sz="1300" b="1" dirty="0">
+                <a:solidFill>
+                  <a:srgbClr val="FFFFFF"/>
+                </a:solidFill>
+                <a:latin typeface="Arial" pitchFamily="34" charset="0"/>
+                <a:ea typeface="Arial" pitchFamily="34" charset="-122"/>
+                <a:cs typeface="Arial" pitchFamily="34" charset="-120"/>
+              </a:rPr>
+              <a:t>hình dáng</a:t>
+            </a:r>
+            <a:endParaRPr lang="en-US" sz="1300" dirty="0"/>
+          </a:p>
+          <a:p>
+            <a:pPr indent="0" marL="0">
+              <a:buNone/>
+            </a:pPr>
+            <a:r>
+              <a:rPr lang="en-US" sz="1300" b="1" dirty="0">
+                <a:solidFill>
+                  <a:srgbClr val="FFFFFF"/>
+                </a:solidFill>
+                <a:latin typeface="Arial" pitchFamily="34" charset="0"/>
+                <a:ea typeface="Arial" pitchFamily="34" charset="-122"/>
+                <a:cs typeface="Arial" pitchFamily="34" charset="-120"/>
+              </a:rPr>
+              <a:t>看得出形狀</a:t>
+            </a:r>
+            <a:endParaRPr lang="en-US" sz="1300" dirty="0"/>
+          </a:p>
+        </p:txBody>
+      </p:sp>
+      <p:sp>
+        <p:nvSpPr>
+          <p:cNvPr id="30" name="Shape 28"/>
+          <p:cNvSpPr/>
+          <p:nvPr/>
+        </p:nvSpPr>
+        <p:spPr>
+          <a:xfrm>
+            <a:off x="557784" y="2532888"/>
+            <a:ext cx="3794760" cy="1179576"/>
+          </a:xfrm>
+          <a:prstGeom prst="roundRect">
+            <a:avLst>
+              <a:gd name="adj" fmla="val 5426"/>
+            </a:avLst>
+          </a:prstGeom>
+          <a:solidFill>
+            <a:srgbClr val="12263A"/>
+          </a:solidFill>
+          <a:ln/>
+        </p:spPr>
+      </p:sp>
+      <p:sp>
+        <p:nvSpPr>
+          <p:cNvPr id="31" name="Text 29"/>
+          <p:cNvSpPr txBox="1"/>
+          <p:nvPr/>
+        </p:nvSpPr>
+        <p:spPr>
+          <a:xfrm>
+            <a:off x="649224" y="2560320"/>
+            <a:ext cx="3611880" cy="292608"/>
+          </a:xfrm>
+          <a:prstGeom prst="rect">
+            <a:avLst/>
+          </a:prstGeom>
+          <a:noFill/>
+          <a:ln/>
+        </p:spPr>
+        <p:txBody>
+          <a:bodyPr wrap="square" lIns="0" tIns="0" rIns="0" bIns="0" rtlCol="0" anchor="t"/>
+          <a:lstStyle/>
+          <a:p>
+            <a:pPr indent="0" marL="0">
+              <a:lnSpc>
+                <a:spcPct val="104000"/>
+              </a:lnSpc>
+              <a:buNone/>
+            </a:pPr>
+            <a:r>
+              <a:rPr lang="en-US" sz="1050" b="1" dirty="0">
+                <a:solidFill>
+                  <a:srgbClr val="FFB020"/>
+                </a:solidFill>
+                <a:latin typeface="Arial" pitchFamily="34" charset="0"/>
+                <a:ea typeface="Arial" pitchFamily="34" charset="-122"/>
+                <a:cs typeface="Arial" pitchFamily="34" charset="-120"/>
+              </a:rPr>
+              <a:t>Radar trả về: một cục phản xạ + tốc độ</a:t>
+            </a:r>
+            <a:endParaRPr lang="en-US" sz="1050" dirty="0"/>
+          </a:p>
+          <a:p>
+            <a:pPr indent="0" marL="0">
+              <a:lnSpc>
+                <a:spcPct val="104000"/>
+              </a:lnSpc>
+              <a:buNone/>
+            </a:pPr>
+            <a:r>
+              <a:rPr lang="en-US" sz="950" dirty="0">
+                <a:solidFill>
+                  <a:srgbClr val="FFB020"/>
+                </a:solidFill>
+                <a:latin typeface="微軟正黑體" pitchFamily="34" charset="0"/>
+                <a:ea typeface="微軟正黑體" pitchFamily="34" charset="-122"/>
+                <a:cs typeface="微軟正黑體" pitchFamily="34" charset="-120"/>
+              </a:rPr>
+              <a:t>雷達給的：一團回波，加上速度</a:t>
+            </a:r>
+            <a:endParaRPr lang="en-US" sz="1050" dirty="0"/>
+          </a:p>
+        </p:txBody>
+      </p:sp>
+      <p:sp>
+        <p:nvSpPr>
+          <p:cNvPr id="32" name="Shape 30"/>
+          <p:cNvSpPr/>
+          <p:nvPr/>
+        </p:nvSpPr>
+        <p:spPr>
+          <a:xfrm>
+            <a:off x="1262786" y="2965765"/>
+            <a:ext cx="822960" cy="691286"/>
+          </a:xfrm>
+          <a:prstGeom prst="ellipse">
+            <a:avLst/>
+          </a:prstGeom>
+          <a:solidFill>
+            <a:srgbClr val="FFB020">
+              <a:alpha val="38000"/>
             </a:srgbClr>
           </a:solidFill>
           <a:ln/>
@@ -23321,190 +25387,20 @@
       </p:sp>
       <p:sp>
         <p:nvSpPr>
-          <p:cNvPr id="6" name="Shape 4"/>
+          <p:cNvPr id="33" name="Shape 31"/>
           <p:cNvSpPr/>
           <p:nvPr/>
         </p:nvSpPr>
         <p:spPr>
-          <a:xfrm rot="-1140000">
-            <a:off x="2043528" y="2179735"/>
-            <a:ext cx="341986" cy="36210"/>
-          </a:xfrm>
-          <a:prstGeom prst="rect">
+          <a:xfrm>
+            <a:off x="1390802" y="3073298"/>
+            <a:ext cx="566928" cy="476220"/>
+          </a:xfrm>
+          <a:prstGeom prst="ellipse">
             <a:avLst/>
           </a:prstGeom>
           <a:solidFill>
-            <a:srgbClr val="0B1F3A">
-              <a:alpha val="45000"/>
-            </a:srgbClr>
-          </a:solidFill>
-          <a:ln/>
-        </p:spPr>
-      </p:sp>
-      <p:sp>
-        <p:nvSpPr>
-          <p:cNvPr id="7" name="Shape 5"/>
-          <p:cNvSpPr/>
-          <p:nvPr/>
-        </p:nvSpPr>
-        <p:spPr>
-          <a:xfrm>
-            <a:off x="2066544" y="2317272"/>
-            <a:ext cx="341986" cy="36210"/>
-          </a:xfrm>
-          <a:prstGeom prst="rect">
-            <a:avLst/>
-          </a:prstGeom>
-          <a:solidFill>
-            <a:srgbClr val="0B1F3A">
-              <a:alpha val="45000"/>
-            </a:srgbClr>
-          </a:solidFill>
-          <a:ln/>
-        </p:spPr>
-      </p:sp>
-      <p:sp>
-        <p:nvSpPr>
-          <p:cNvPr id="8" name="Shape 6"/>
-          <p:cNvSpPr/>
-          <p:nvPr/>
-        </p:nvSpPr>
-        <p:spPr>
-          <a:xfrm rot="1140000">
-            <a:off x="2043528" y="2454810"/>
-            <a:ext cx="341986" cy="36210"/>
-          </a:xfrm>
-          <a:prstGeom prst="rect">
-            <a:avLst/>
-          </a:prstGeom>
-          <a:solidFill>
-            <a:srgbClr val="0B1F3A">
-              <a:alpha val="45000"/>
-            </a:srgbClr>
-          </a:solidFill>
-          <a:ln/>
-        </p:spPr>
-      </p:sp>
-      <p:sp>
-        <p:nvSpPr>
-          <p:cNvPr id="9" name="Shape 7"/>
-          <p:cNvSpPr/>
-          <p:nvPr/>
-        </p:nvSpPr>
-        <p:spPr>
-          <a:xfrm rot="2280000">
-            <a:off x="1976989" y="2577360"/>
-            <a:ext cx="341986" cy="36210"/>
-          </a:xfrm>
-          <a:prstGeom prst="rect">
-            <a:avLst/>
-          </a:prstGeom>
-          <a:solidFill>
-            <a:srgbClr val="0B1F3A">
-              <a:alpha val="45000"/>
-            </a:srgbClr>
-          </a:solidFill>
-          <a:ln/>
-        </p:spPr>
-      </p:sp>
-      <p:sp>
-        <p:nvSpPr>
-          <p:cNvPr id="10" name="Shape 8"/>
-          <p:cNvSpPr/>
-          <p:nvPr/>
-        </p:nvSpPr>
-        <p:spPr>
-          <a:xfrm>
-            <a:off x="1533449" y="2134210"/>
-            <a:ext cx="362102" cy="130759"/>
-          </a:xfrm>
-          <a:prstGeom prst="ellipse">
-            <a:avLst/>
-          </a:prstGeom>
-          <a:solidFill>
-            <a:srgbClr val="0B1F3A"/>
-          </a:solidFill>
-          <a:ln/>
-        </p:spPr>
-      </p:sp>
-      <p:sp>
-        <p:nvSpPr>
-          <p:cNvPr id="11" name="Shape 9"/>
-          <p:cNvSpPr/>
-          <p:nvPr/>
-        </p:nvSpPr>
-        <p:spPr>
-          <a:xfrm>
-            <a:off x="1533449" y="2194560"/>
-            <a:ext cx="362102" cy="341986"/>
-          </a:xfrm>
-          <a:prstGeom prst="rect">
-            <a:avLst/>
-          </a:prstGeom>
-          <a:solidFill>
-            <a:srgbClr val="0B1F3A"/>
-          </a:solidFill>
-          <a:ln/>
-        </p:spPr>
-      </p:sp>
-      <p:sp>
-        <p:nvSpPr>
-          <p:cNvPr id="12" name="Shape 10"/>
-          <p:cNvSpPr/>
-          <p:nvPr/>
-        </p:nvSpPr>
-        <p:spPr>
-          <a:xfrm>
-            <a:off x="1533449" y="2466137"/>
-            <a:ext cx="362102" cy="130759"/>
-          </a:xfrm>
-          <a:prstGeom prst="ellipse">
-            <a:avLst/>
-          </a:prstGeom>
-          <a:solidFill>
-            <a:srgbClr val="0B1F3A"/>
-          </a:solidFill>
-          <a:ln/>
-        </p:spPr>
-      </p:sp>
-      <p:sp>
-        <p:nvSpPr>
-          <p:cNvPr id="13" name="Shape 11"/>
-          <p:cNvSpPr/>
-          <p:nvPr/>
-        </p:nvSpPr>
-        <p:spPr>
-          <a:xfrm>
-            <a:off x="1533449" y="2295144"/>
-            <a:ext cx="362102" cy="70409"/>
-          </a:xfrm>
-          <a:prstGeom prst="rect">
-            <a:avLst/>
-          </a:prstGeom>
-          <a:solidFill>
-            <a:srgbClr val="FFFFFF">
-              <a:alpha val="65000"/>
-            </a:srgbClr>
-          </a:solidFill>
-          <a:ln/>
-        </p:spPr>
-      </p:sp>
-      <p:sp>
-        <p:nvSpPr>
-          <p:cNvPr id="14" name="Shape 12"/>
-          <p:cNvSpPr/>
-          <p:nvPr/>
-        </p:nvSpPr>
-        <p:spPr>
-          <a:xfrm>
-            <a:off x="1654150" y="2596896"/>
-            <a:ext cx="120701" cy="140818"/>
-          </a:xfrm>
-          <a:prstGeom prst="rect">
-            <a:avLst/>
-          </a:prstGeom>
-          <a:solidFill>
-            <a:srgbClr val="0B1F3A">
+            <a:srgbClr val="FFB020">
               <a:alpha val="60000"/>
             </a:srgbClr>
           </a:solidFill>
@@ -23513,14 +25409,36 @@
       </p:sp>
       <p:sp>
         <p:nvSpPr>
-          <p:cNvPr id="15" name="Text 13"/>
+          <p:cNvPr id="34" name="Shape 32"/>
+          <p:cNvSpPr/>
+          <p:nvPr/>
+        </p:nvSpPr>
+        <p:spPr>
+          <a:xfrm>
+            <a:off x="1509674" y="3173151"/>
+            <a:ext cx="329184" cy="276515"/>
+          </a:xfrm>
+          <a:prstGeom prst="ellipse">
+            <a:avLst/>
+          </a:prstGeom>
+          <a:solidFill>
+            <a:srgbClr val="FFB020">
+              <a:alpha val="82000"/>
+            </a:srgbClr>
+          </a:solidFill>
+          <a:ln/>
+        </p:spPr>
+      </p:sp>
+      <p:sp>
+        <p:nvSpPr>
+          <p:cNvPr id="35" name="Text 33"/>
           <p:cNvSpPr txBox="1"/>
           <p:nvPr/>
         </p:nvSpPr>
         <p:spPr>
           <a:xfrm>
-            <a:off x="2318004" y="2212848"/>
-            <a:ext cx="274320" cy="365760"/>
+            <a:off x="2455164" y="3037088"/>
+            <a:ext cx="1796064" cy="548640"/>
           </a:xfrm>
           <a:prstGeom prst="rect">
             <a:avLst/>
@@ -23532,179 +25450,49 @@
           <a:bodyPr wrap="square" lIns="0" tIns="0" rIns="0" bIns="0" rtlCol="0" anchor="ctr"/>
           <a:lstStyle/>
           <a:p>
-            <a:pPr algn="ctr" indent="0" marL="0">
-              <a:buNone/>
-            </a:pPr>
-            <a:r>
-              <a:rPr lang="en-US" sz="1700" b="1" dirty="0">
-                <a:solidFill>
-                  <a:srgbClr val="5F7183"/>
-                </a:solidFill>
-                <a:latin typeface="微軟正黑體" pitchFamily="34" charset="0"/>
-                <a:ea typeface="微軟正黑體" pitchFamily="34" charset="-122"/>
-                <a:cs typeface="微軟正黑體" pitchFamily="34" charset="-120"/>
-              </a:rPr>
-              <a:t>＋</a:t>
-            </a:r>
-            <a:endParaRPr lang="en-US" sz="1700" dirty="0"/>
-          </a:p>
-        </p:txBody>
-      </p:sp>
-      <p:sp>
-        <p:nvSpPr>
-          <p:cNvPr id="16" name="Shape 14"/>
-          <p:cNvSpPr/>
-          <p:nvPr/>
-        </p:nvSpPr>
-        <p:spPr>
-          <a:xfrm>
-            <a:off x="2692908" y="2315261"/>
-            <a:ext cx="181051" cy="181051"/>
-          </a:xfrm>
-          <a:prstGeom prst="ellipse">
-            <a:avLst/>
-          </a:prstGeom>
-          <a:solidFill>
-            <a:srgbClr val="0B1F3A"/>
-          </a:solidFill>
-          <a:ln/>
-        </p:spPr>
-      </p:sp>
-      <p:sp>
-        <p:nvSpPr>
-          <p:cNvPr id="17" name="Shape 15"/>
-          <p:cNvSpPr/>
-          <p:nvPr/>
-        </p:nvSpPr>
-        <p:spPr>
-          <a:xfrm>
-            <a:off x="2833726" y="2114093"/>
-            <a:ext cx="241402" cy="583387"/>
-          </a:xfrm>
-          <a:prstGeom prst="chevron">
-            <a:avLst/>
-          </a:prstGeom>
-          <a:ln w="31750">
-            <a:solidFill>
-              <a:srgbClr val="0B1F3A"/>
-            </a:solidFill>
-            <a:prstDash val="solid"/>
-          </a:ln>
-        </p:spPr>
-      </p:sp>
-      <p:sp>
-        <p:nvSpPr>
-          <p:cNvPr id="18" name="Shape 16"/>
-          <p:cNvSpPr/>
-          <p:nvPr/>
-        </p:nvSpPr>
-        <p:spPr>
-          <a:xfrm>
-            <a:off x="3034894" y="2033626"/>
-            <a:ext cx="261518" cy="744322"/>
-          </a:xfrm>
-          <a:prstGeom prst="chevron">
-            <a:avLst/>
-          </a:prstGeom>
-          <a:ln w="31750">
-            <a:solidFill>
-              <a:srgbClr val="0B1F3A">
-                <a:alpha val="75000"/>
-              </a:srgbClr>
-            </a:solidFill>
-            <a:prstDash val="solid"/>
-          </a:ln>
-        </p:spPr>
-      </p:sp>
-      <p:sp>
-        <p:nvSpPr>
-          <p:cNvPr id="19" name="Shape 17"/>
-          <p:cNvSpPr/>
-          <p:nvPr/>
-        </p:nvSpPr>
-        <p:spPr>
-          <a:xfrm>
-            <a:off x="3236062" y="1953158"/>
-            <a:ext cx="281635" cy="905256"/>
-          </a:xfrm>
-          <a:prstGeom prst="chevron">
-            <a:avLst/>
-          </a:prstGeom>
-          <a:ln w="31750">
-            <a:solidFill>
-              <a:srgbClr val="0B1F3A">
-                <a:alpha val="50000"/>
-              </a:srgbClr>
-            </a:solidFill>
-            <a:prstDash val="solid"/>
-          </a:ln>
-        </p:spPr>
-      </p:sp>
-      <p:sp>
-        <p:nvSpPr>
-          <p:cNvPr id="20" name="Text 18"/>
-          <p:cNvSpPr txBox="1"/>
-          <p:nvPr/>
-        </p:nvSpPr>
-        <p:spPr>
-          <a:xfrm>
-            <a:off x="685800" y="3346704"/>
-            <a:ext cx="3538728" cy="365760"/>
-          </a:xfrm>
-          <a:prstGeom prst="rect">
-            <a:avLst/>
-          </a:prstGeom>
-          <a:noFill/>
-          <a:ln/>
-        </p:spPr>
-        <p:txBody>
-          <a:bodyPr wrap="square" lIns="0" tIns="0" rIns="0" bIns="0" rtlCol="0" anchor="t"/>
-          <a:lstStyle/>
-          <a:p>
-            <a:pPr algn="ctr" indent="0" marL="0">
-              <a:lnSpc>
-                <a:spcPct val="110000"/>
-              </a:lnSpc>
-              <a:buNone/>
-            </a:pPr>
-            <a:r>
-              <a:rPr lang="en-US" sz="1000" dirty="0">
-                <a:solidFill>
-                  <a:srgbClr val="5F7183"/>
+            <a:pPr indent="0" marL="0">
+              <a:buNone/>
+            </a:pPr>
+            <a:r>
+              <a:rPr lang="en-US" sz="1300" b="1" dirty="0">
+                <a:solidFill>
+                  <a:srgbClr val="FFFFFF"/>
                 </a:solidFill>
                 <a:latin typeface="Arial" pitchFamily="34" charset="0"/>
                 <a:ea typeface="Arial" pitchFamily="34" charset="-122"/>
                 <a:cs typeface="Arial" pitchFamily="34" charset="-120"/>
               </a:rPr>
-              <a:t>Chưa có ảnh thiết bị</a:t>
-            </a:r>
-            <a:endParaRPr lang="en-US" sz="1000" dirty="0"/>
-          </a:p>
-          <a:p>
-            <a:pPr algn="ctr" indent="0" marL="0">
-              <a:lnSpc>
-                <a:spcPct val="110000"/>
-              </a:lnSpc>
-              <a:buNone/>
-            </a:pPr>
-            <a:r>
-              <a:rPr lang="en-US" sz="950" dirty="0">
-                <a:solidFill>
-                  <a:srgbClr val="5F7183"/>
-                </a:solidFill>
-                <a:latin typeface="微軟正黑體" pitchFamily="34" charset="0"/>
-                <a:ea typeface="微軟正黑體" pitchFamily="34" charset="-122"/>
-                <a:cs typeface="微軟正黑體" pitchFamily="34" charset="-120"/>
-              </a:rPr>
-              <a:t>尚未取得實體照片</a:t>
-            </a:r>
-            <a:endParaRPr lang="en-US" sz="1000" dirty="0"/>
+              <a:t>40,0 m　−5,2 m/s</a:t>
+            </a:r>
+            <a:endParaRPr lang="en-US" sz="1300" dirty="0"/>
           </a:p>
         </p:txBody>
       </p:sp>
       <p:sp>
         <p:nvSpPr>
-          <p:cNvPr id="21" name="Shape 19"/>
+          <p:cNvPr id="36" name="Shape 34"/>
+          <p:cNvSpPr/>
+          <p:nvPr/>
+        </p:nvSpPr>
+        <p:spPr>
+          <a:xfrm>
+            <a:off x="539496" y="3310128"/>
+            <a:ext cx="3831336" cy="475488"/>
+          </a:xfrm>
+          <a:prstGeom prst="rect">
+            <a:avLst/>
+          </a:prstGeom>
+          <a:solidFill>
+            <a:srgbClr val="0B1F3A">
+              <a:alpha val="78000"/>
+            </a:srgbClr>
+          </a:solidFill>
+          <a:ln/>
+        </p:spPr>
+      </p:sp>
+      <p:sp>
+        <p:nvSpPr>
+          <p:cNvPr id="37" name="Shape 35"/>
           <p:cNvSpPr/>
           <p:nvPr/>
         </p:nvSpPr>
@@ -23731,7 +25519,7 @@
       </p:sp>
       <p:sp>
         <p:nvSpPr>
-          <p:cNvPr id="22" name="Shape 20"/>
+          <p:cNvPr id="38" name="Shape 36"/>
           <p:cNvSpPr/>
           <p:nvPr/>
         </p:nvSpPr>
@@ -23751,7 +25539,7 @@
       </p:sp>
       <p:sp>
         <p:nvSpPr>
-          <p:cNvPr id="23" name="Text 21"/>
+          <p:cNvPr id="39" name="Text 37"/>
           <p:cNvSpPr txBox="1"/>
           <p:nvPr/>
         </p:nvSpPr>
@@ -23790,7 +25578,7 @@
       </p:sp>
       <p:sp>
         <p:nvSpPr>
-          <p:cNvPr id="24" name="Text 22"/>
+          <p:cNvPr id="40" name="Text 38"/>
           <p:cNvSpPr txBox="1"/>
           <p:nvPr/>
         </p:nvSpPr>
@@ -23829,7 +25617,7 @@
       </p:sp>
       <p:sp>
         <p:nvSpPr>
-          <p:cNvPr id="25" name="Text 23"/>
+          <p:cNvPr id="41" name="Text 39"/>
           <p:cNvSpPr txBox="1"/>
           <p:nvPr/>
         </p:nvSpPr>
@@ -23868,7 +25656,7 @@
       </p:sp>
       <p:sp>
         <p:nvSpPr>
-          <p:cNvPr id="26" name="Text 24">
+          <p:cNvPr id="42" name="Text 40">
             <a:hlinkClick r:id="rId1" tooltip=""/>
           </p:cNvPr>
           <p:cNvSpPr txBox="1"/>
@@ -23916,7 +25704,7 @@
       </p:sp>
       <p:sp>
         <p:nvSpPr>
-          <p:cNvPr id="27" name="Shape 25"/>
+          <p:cNvPr id="43" name="Shape 41"/>
           <p:cNvSpPr/>
           <p:nvPr/>
         </p:nvSpPr>
@@ -23936,7 +25724,7 @@
       </p:sp>
       <p:sp>
         <p:nvSpPr>
-          <p:cNvPr id="28" name="Text 26"/>
+          <p:cNvPr id="44" name="Text 42"/>
           <p:cNvSpPr txBox="1"/>
           <p:nvPr/>
         </p:nvSpPr>
@@ -23998,7 +25786,7 @@
       </p:sp>
       <p:sp>
         <p:nvSpPr>
-          <p:cNvPr id="29" name="Shape 27"/>
+          <p:cNvPr id="45" name="Shape 43"/>
           <p:cNvSpPr/>
           <p:nvPr/>
         </p:nvSpPr>
@@ -24018,7 +25806,7 @@
       </p:sp>
       <p:sp>
         <p:nvSpPr>
-          <p:cNvPr id="30" name="Text 28"/>
+          <p:cNvPr id="46" name="Text 44"/>
           <p:cNvSpPr txBox="1"/>
           <p:nvPr/>
         </p:nvSpPr>
@@ -24080,7 +25868,7 @@
       </p:sp>
       <p:sp>
         <p:nvSpPr>
-          <p:cNvPr id="31" name="Shape 29"/>
+          <p:cNvPr id="47" name="Shape 45"/>
           <p:cNvSpPr/>
           <p:nvPr/>
         </p:nvSpPr>
@@ -24100,7 +25888,7 @@
       </p:sp>
       <p:sp>
         <p:nvSpPr>
-          <p:cNvPr id="32" name="Text 30"/>
+          <p:cNvPr id="48" name="Text 46"/>
           <p:cNvSpPr txBox="1"/>
           <p:nvPr/>
         </p:nvSpPr>
@@ -24162,7 +25950,7 @@
       </p:sp>
       <p:sp>
         <p:nvSpPr>
-          <p:cNvPr id="33" name="Shape 31"/>
+          <p:cNvPr id="49" name="Shape 47"/>
           <p:cNvSpPr/>
           <p:nvPr/>
         </p:nvSpPr>
@@ -24189,7 +25977,7 @@
       </p:sp>
       <p:sp>
         <p:nvSpPr>
-          <p:cNvPr id="34" name="Text 32"/>
+          <p:cNvPr id="50" name="Text 48"/>
           <p:cNvSpPr txBox="1"/>
           <p:nvPr/>
         </p:nvSpPr>
@@ -24251,7 +26039,7 @@
       </p:sp>
       <p:pic>
         <p:nvPicPr>
-          <p:cNvPr id="36" name="Image 0" descr="/Users/tsengchenghsun/Class/carClass/Claude outputs/第三週(9-24)/src/logo.png">    </p:cNvPr>
+          <p:cNvPr id="52" name="Image 0" descr="/Users/tsengchenghsun/Class/carClass/Claude outputs/第三週(9-24)/src/logo.png">    </p:cNvPr>
           <p:cNvPicPr>
             <a:picLocks noChangeAspect="1"/>
           </p:cNvPicPr>
@@ -24275,7 +26063,7 @@
       </p:pic>
       <p:sp>
         <p:nvSpPr>
-          <p:cNvPr id="37" name="Text 33"/>
+          <p:cNvPr id="53" name="Text 49"/>
           <p:cNvSpPr txBox="1"/>
           <p:nvPr/>
         </p:nvSpPr>
@@ -24314,7 +26102,7 @@
       </p:sp>
       <p:sp>
         <p:nvSpPr>
-          <p:cNvPr id="38" name="Text 34"/>
+          <p:cNvPr id="54" name="Text 50"/>
           <p:cNvSpPr txBox="1"/>
           <p:nvPr/>
         </p:nvSpPr>

--- a/第三週(09-24)/第三週_第1節_簡報.pptx
+++ b/第三週(09-24)/第三週_第1節_簡報.pptx
@@ -11107,8 +11107,8 @@
         </p:nvSpPr>
         <p:spPr>
           <a:xfrm>
-            <a:off x="1125078" y="1403421"/>
-            <a:ext cx="237012" cy="237012"/>
+            <a:off x="1144829" y="1363919"/>
+            <a:ext cx="197510" cy="197510"/>
           </a:xfrm>
           <a:prstGeom prst="ellipse">
             <a:avLst/>
@@ -11127,12 +11127,12 @@
         </p:nvSpPr>
         <p:spPr>
           <a:xfrm>
-            <a:off x="1085576" y="1670060"/>
+            <a:off x="1085576" y="1581180"/>
             <a:ext cx="316017" cy="355519"/>
           </a:xfrm>
           <a:prstGeom prst="roundRect">
             <a:avLst>
-              <a:gd name="adj" fmla="val 86805"/>
+              <a:gd name="adj" fmla="val 81018"/>
             </a:avLst>
           </a:prstGeom>
           <a:solidFill>
@@ -11148,9 +11148,9 @@
           <p:nvPr/>
         </p:nvSpPr>
         <p:spPr>
-          <a:xfrm rot="480000">
-            <a:off x="1105327" y="2015703"/>
-            <a:ext cx="88880" cy="256764"/>
+          <a:xfrm rot="960000">
+            <a:off x="1031260" y="1610807"/>
+            <a:ext cx="79004" cy="256764"/>
           </a:xfrm>
           <a:prstGeom prst="rect">
             <a:avLst/>
@@ -11168,9 +11168,9 @@
           <p:nvPr/>
         </p:nvSpPr>
         <p:spPr>
-          <a:xfrm rot="-480000">
-            <a:off x="1292962" y="2015703"/>
-            <a:ext cx="88880" cy="256764"/>
+          <a:xfrm rot="-960000">
+            <a:off x="1376904" y="1610807"/>
+            <a:ext cx="79004" cy="256764"/>
           </a:xfrm>
           <a:prstGeom prst="rect">
             <a:avLst/>
@@ -11183,7 +11183,47 @@
       </p:sp>
       <p:sp>
         <p:nvSpPr>
-          <p:cNvPr id="8" name="Text 6"/>
+          <p:cNvPr id="8" name="Shape 6"/>
+          <p:cNvSpPr/>
+          <p:nvPr/>
+        </p:nvSpPr>
+        <p:spPr>
+          <a:xfrm rot="300000">
+            <a:off x="1139891" y="1887322"/>
+            <a:ext cx="88880" cy="355519"/>
+          </a:xfrm>
+          <a:prstGeom prst="rect">
+            <a:avLst/>
+          </a:prstGeom>
+          <a:solidFill>
+            <a:srgbClr val="FF7A59"/>
+          </a:solidFill>
+          <a:ln/>
+        </p:spPr>
+      </p:sp>
+      <p:sp>
+        <p:nvSpPr>
+          <p:cNvPr id="9" name="Shape 7"/>
+          <p:cNvSpPr/>
+          <p:nvPr/>
+        </p:nvSpPr>
+        <p:spPr>
+          <a:xfrm rot="-300000">
+            <a:off x="1258397" y="1887322"/>
+            <a:ext cx="88880" cy="355519"/>
+          </a:xfrm>
+          <a:prstGeom prst="rect">
+            <a:avLst/>
+          </a:prstGeom>
+          <a:solidFill>
+            <a:srgbClr val="FF7A59"/>
+          </a:solidFill>
+          <a:ln/>
+        </p:spPr>
+      </p:sp>
+      <p:sp>
+        <p:nvSpPr>
+          <p:cNvPr id="10" name="Text 8"/>
           <p:cNvSpPr txBox="1"/>
           <p:nvPr/>
         </p:nvSpPr>
@@ -11245,7 +11285,7 @@
       </p:sp>
       <p:sp>
         <p:nvSpPr>
-          <p:cNvPr id="9" name="Shape 7"/>
+          <p:cNvPr id="11" name="Shape 9"/>
           <p:cNvSpPr/>
           <p:nvPr/>
         </p:nvSpPr>
@@ -11267,7 +11307,7 @@
       </p:sp>
       <p:sp>
         <p:nvSpPr>
-          <p:cNvPr id="10" name="Text 8"/>
+          <p:cNvPr id="12" name="Text 10"/>
           <p:cNvSpPr txBox="1"/>
           <p:nvPr/>
         </p:nvSpPr>
@@ -11329,7 +11369,7 @@
       </p:sp>
       <p:sp>
         <p:nvSpPr>
-          <p:cNvPr id="11" name="Text 9"/>
+          <p:cNvPr id="13" name="Text 11"/>
           <p:cNvSpPr txBox="1"/>
           <p:nvPr/>
         </p:nvSpPr>
@@ -11391,7 +11431,7 @@
       </p:sp>
       <p:sp>
         <p:nvSpPr>
-          <p:cNvPr id="12" name="Shape 10"/>
+          <p:cNvPr id="14" name="Shape 12"/>
           <p:cNvSpPr/>
           <p:nvPr/>
         </p:nvSpPr>
@@ -11413,7 +11453,7 @@
       </p:sp>
       <p:sp>
         <p:nvSpPr>
-          <p:cNvPr id="13" name="Text 11"/>
+          <p:cNvPr id="15" name="Text 13"/>
           <p:cNvSpPr txBox="1"/>
           <p:nvPr/>
         </p:nvSpPr>
@@ -11475,7 +11515,7 @@
       </p:sp>
       <p:sp>
         <p:nvSpPr>
-          <p:cNvPr id="14" name="Text 12"/>
+          <p:cNvPr id="16" name="Text 14"/>
           <p:cNvSpPr txBox="1"/>
           <p:nvPr/>
         </p:nvSpPr>
@@ -11537,7 +11577,7 @@
       </p:sp>
       <p:sp>
         <p:nvSpPr>
-          <p:cNvPr id="15" name="Shape 13"/>
+          <p:cNvPr id="17" name="Shape 15"/>
           <p:cNvSpPr/>
           <p:nvPr/>
         </p:nvSpPr>
@@ -11559,7 +11599,7 @@
       </p:sp>
       <p:sp>
         <p:nvSpPr>
-          <p:cNvPr id="16" name="Text 14"/>
+          <p:cNvPr id="18" name="Text 16"/>
           <p:cNvSpPr txBox="1"/>
           <p:nvPr/>
         </p:nvSpPr>
@@ -11621,7 +11661,7 @@
       </p:sp>
       <p:sp>
         <p:nvSpPr>
-          <p:cNvPr id="17" name="Text 15"/>
+          <p:cNvPr id="19" name="Text 17"/>
           <p:cNvSpPr txBox="1"/>
           <p:nvPr/>
         </p:nvSpPr>
@@ -11683,7 +11723,7 @@
       </p:sp>
       <p:sp>
         <p:nvSpPr>
-          <p:cNvPr id="18" name="Shape 16"/>
+          <p:cNvPr id="20" name="Shape 18"/>
           <p:cNvSpPr/>
           <p:nvPr/>
         </p:nvSpPr>
@@ -11710,7 +11750,7 @@
       </p:sp>
       <p:sp>
         <p:nvSpPr>
-          <p:cNvPr id="19" name="Text 17"/>
+          <p:cNvPr id="21" name="Text 19"/>
           <p:cNvSpPr txBox="1"/>
           <p:nvPr/>
         </p:nvSpPr>
@@ -11772,7 +11812,7 @@
       </p:sp>
       <p:pic>
         <p:nvPicPr>
-          <p:cNvPr id="21" name="Image 0" descr="/Users/tsengchenghsun/Class/carClass/Claude outputs/第三週(9-24)/src/logo.png">    </p:cNvPr>
+          <p:cNvPr id="23" name="Image 0" descr="/Users/tsengchenghsun/Class/carClass/Claude outputs/第三週(9-24)/src/logo.png">    </p:cNvPr>
           <p:cNvPicPr>
             <a:picLocks noChangeAspect="1"/>
           </p:cNvPicPr>
@@ -11796,7 +11836,7 @@
       </p:pic>
       <p:sp>
         <p:nvSpPr>
-          <p:cNvPr id="22" name="Text 18"/>
+          <p:cNvPr id="24" name="Text 20"/>
           <p:cNvSpPr txBox="1"/>
           <p:nvPr/>
         </p:nvSpPr>
@@ -11835,7 +11875,7 @@
       </p:sp>
       <p:sp>
         <p:nvSpPr>
-          <p:cNvPr id="23" name="Text 19"/>
+          <p:cNvPr id="25" name="Text 21"/>
           <p:cNvSpPr txBox="1"/>
           <p:nvPr/>
         </p:nvSpPr>
@@ -13983,8 +14023,8 @@
         </p:nvSpPr>
         <p:spPr>
           <a:xfrm>
-            <a:off x="5509809" y="2192000"/>
-            <a:ext cx="136063" cy="136063"/>
+            <a:off x="5521147" y="2169323"/>
+            <a:ext cx="113386" cy="113386"/>
           </a:xfrm>
           <a:prstGeom prst="ellipse">
             <a:avLst/>
@@ -14003,12 +14043,12 @@
         </p:nvSpPr>
         <p:spPr>
           <a:xfrm>
-            <a:off x="5487132" y="2345070"/>
+            <a:off x="5487132" y="2294047"/>
             <a:ext cx="181417" cy="204094"/>
           </a:xfrm>
           <a:prstGeom prst="roundRect">
             <a:avLst>
-              <a:gd name="adj" fmla="val 151210"/>
+              <a:gd name="adj" fmla="val 141129"/>
             </a:avLst>
           </a:prstGeom>
           <a:solidFill>
@@ -14024,9 +14064,9 @@
           <p:nvPr/>
         </p:nvSpPr>
         <p:spPr>
-          <a:xfrm rot="480000">
-            <a:off x="5498470" y="2543495"/>
-            <a:ext cx="51024" cy="147401"/>
+          <a:xfrm rot="960000">
+            <a:off x="5455950" y="2311055"/>
+            <a:ext cx="45354" cy="147401"/>
           </a:xfrm>
           <a:prstGeom prst="rect">
             <a:avLst/>
@@ -14044,9 +14084,9 @@
           <p:nvPr/>
         </p:nvSpPr>
         <p:spPr>
-          <a:xfrm rot="-480000">
-            <a:off x="5606186" y="2543495"/>
-            <a:ext cx="51024" cy="147401"/>
+          <a:xfrm rot="-960000">
+            <a:off x="5654375" y="2311055"/>
+            <a:ext cx="45354" cy="147401"/>
           </a:xfrm>
           <a:prstGeom prst="rect">
             <a:avLst/>
@@ -14060,6 +14100,46 @@
       <p:sp>
         <p:nvSpPr>
           <p:cNvPr id="17" name="Shape 15"/>
+          <p:cNvSpPr/>
+          <p:nvPr/>
+        </p:nvSpPr>
+        <p:spPr>
+          <a:xfrm rot="300000">
+            <a:off x="5518313" y="2469794"/>
+            <a:ext cx="51024" cy="204094"/>
+          </a:xfrm>
+          <a:prstGeom prst="rect">
+            <a:avLst/>
+          </a:prstGeom>
+          <a:solidFill>
+            <a:srgbClr val="9AA6B0"/>
+          </a:solidFill>
+          <a:ln/>
+        </p:spPr>
+      </p:sp>
+      <p:sp>
+        <p:nvSpPr>
+          <p:cNvPr id="18" name="Shape 16"/>
+          <p:cNvSpPr/>
+          <p:nvPr/>
+        </p:nvSpPr>
+        <p:spPr>
+          <a:xfrm rot="-300000">
+            <a:off x="5586344" y="2469794"/>
+            <a:ext cx="51024" cy="204094"/>
+          </a:xfrm>
+          <a:prstGeom prst="rect">
+            <a:avLst/>
+          </a:prstGeom>
+          <a:solidFill>
+            <a:srgbClr val="9AA6B0"/>
+          </a:solidFill>
+          <a:ln/>
+        </p:spPr>
+      </p:sp>
+      <p:sp>
+        <p:nvSpPr>
+          <p:cNvPr id="19" name="Shape 17"/>
           <p:cNvSpPr/>
           <p:nvPr/>
         </p:nvSpPr>
@@ -14081,7 +14161,7 @@
       </p:sp>
       <p:sp>
         <p:nvSpPr>
-          <p:cNvPr id="18" name="Shape 16"/>
+          <p:cNvPr id="20" name="Shape 18"/>
           <p:cNvSpPr/>
           <p:nvPr/>
         </p:nvSpPr>
@@ -14101,7 +14181,7 @@
       </p:sp>
       <p:sp>
         <p:nvSpPr>
-          <p:cNvPr id="19" name="Text 17"/>
+          <p:cNvPr id="21" name="Text 19"/>
           <p:cNvSpPr txBox="1"/>
           <p:nvPr/>
         </p:nvSpPr>
@@ -14140,7 +14220,7 @@
       </p:sp>
       <p:sp>
         <p:nvSpPr>
-          <p:cNvPr id="20" name="Text 18"/>
+          <p:cNvPr id="22" name="Text 20"/>
           <p:cNvSpPr txBox="1"/>
           <p:nvPr/>
         </p:nvSpPr>
@@ -14202,7 +14282,7 @@
       </p:sp>
       <p:sp>
         <p:nvSpPr>
-          <p:cNvPr id="21" name="Text 19"/>
+          <p:cNvPr id="23" name="Text 21"/>
           <p:cNvSpPr txBox="1"/>
           <p:nvPr/>
         </p:nvSpPr>
@@ -14264,7 +14344,7 @@
       </p:sp>
       <p:sp>
         <p:nvSpPr>
-          <p:cNvPr id="22" name="Shape 20"/>
+          <p:cNvPr id="24" name="Shape 22"/>
           <p:cNvSpPr/>
           <p:nvPr/>
         </p:nvSpPr>
@@ -14291,7 +14371,7 @@
       </p:sp>
       <p:sp>
         <p:nvSpPr>
-          <p:cNvPr id="23" name="Text 21"/>
+          <p:cNvPr id="25" name="Text 23"/>
           <p:cNvSpPr txBox="1"/>
           <p:nvPr/>
         </p:nvSpPr>
@@ -14353,7 +14433,7 @@
       </p:sp>
       <p:pic>
         <p:nvPicPr>
-          <p:cNvPr id="25" name="Image 0" descr="/Users/tsengchenghsun/Class/carClass/Claude outputs/第三週(9-24)/src/logo.png">    </p:cNvPr>
+          <p:cNvPr id="27" name="Image 0" descr="/Users/tsengchenghsun/Class/carClass/Claude outputs/第三週(9-24)/src/logo.png">    </p:cNvPr>
           <p:cNvPicPr>
             <a:picLocks noChangeAspect="1"/>
           </p:cNvPicPr>
@@ -14377,7 +14457,7 @@
       </p:pic>
       <p:sp>
         <p:nvSpPr>
-          <p:cNvPr id="26" name="Text 22"/>
+          <p:cNvPr id="28" name="Text 24"/>
           <p:cNvSpPr txBox="1"/>
           <p:nvPr/>
         </p:nvSpPr>
@@ -14416,7 +14496,7 @@
       </p:sp>
       <p:sp>
         <p:nvSpPr>
-          <p:cNvPr id="27" name="Text 23"/>
+          <p:cNvPr id="29" name="Text 25"/>
           <p:cNvSpPr txBox="1"/>
           <p:nvPr/>
         </p:nvSpPr>
@@ -18935,8 +19015,8 @@
         </p:nvSpPr>
         <p:spPr>
           <a:xfrm>
-            <a:off x="1263127" y="2575982"/>
-            <a:ext cx="164123" cy="164123"/>
+            <a:off x="1276804" y="2548628"/>
+            <a:ext cx="136769" cy="136769"/>
           </a:xfrm>
           <a:prstGeom prst="ellipse">
             <a:avLst/>
@@ -18955,12 +19035,12 @@
         </p:nvSpPr>
         <p:spPr>
           <a:xfrm>
-            <a:off x="1235773" y="2760620"/>
+            <a:off x="1235773" y="2699074"/>
             <a:ext cx="218831" cy="246185"/>
           </a:xfrm>
           <a:prstGeom prst="roundRect">
             <a:avLst>
-              <a:gd name="adj" fmla="val 125357"/>
+              <a:gd name="adj" fmla="val 117000"/>
             </a:avLst>
           </a:prstGeom>
           <a:solidFill>
@@ -18976,9 +19056,9 @@
           <p:nvPr/>
         </p:nvSpPr>
         <p:spPr>
-          <a:xfrm rot="480000">
-            <a:off x="1249450" y="2999967"/>
-            <a:ext cx="61546" cy="177800"/>
+          <a:xfrm rot="960000">
+            <a:off x="1198161" y="2719590"/>
+            <a:ext cx="54708" cy="177800"/>
           </a:xfrm>
           <a:prstGeom prst="rect">
             <a:avLst/>
@@ -18996,9 +19076,9 @@
           <p:nvPr/>
         </p:nvSpPr>
         <p:spPr>
-          <a:xfrm rot="-480000">
-            <a:off x="1379381" y="2999967"/>
-            <a:ext cx="61546" cy="177800"/>
+          <a:xfrm rot="-960000">
+            <a:off x="1437508" y="2719590"/>
+            <a:ext cx="54708" cy="177800"/>
           </a:xfrm>
           <a:prstGeom prst="rect">
             <a:avLst/>
@@ -19012,6 +19092,46 @@
       <p:sp>
         <p:nvSpPr>
           <p:cNvPr id="12" name="Shape 10"/>
+          <p:cNvSpPr/>
+          <p:nvPr/>
+        </p:nvSpPr>
+        <p:spPr>
+          <a:xfrm rot="300000">
+            <a:off x="1273385" y="2911067"/>
+            <a:ext cx="61546" cy="246185"/>
+          </a:xfrm>
+          <a:prstGeom prst="rect">
+            <a:avLst/>
+          </a:prstGeom>
+          <a:solidFill>
+            <a:srgbClr val="D8E4EC"/>
+          </a:solidFill>
+          <a:ln/>
+        </p:spPr>
+      </p:sp>
+      <p:sp>
+        <p:nvSpPr>
+          <p:cNvPr id="13" name="Shape 11"/>
+          <p:cNvSpPr/>
+          <p:nvPr/>
+        </p:nvSpPr>
+        <p:spPr>
+          <a:xfrm rot="-300000">
+            <a:off x="1355446" y="2911067"/>
+            <a:ext cx="61546" cy="246185"/>
+          </a:xfrm>
+          <a:prstGeom prst="rect">
+            <a:avLst/>
+          </a:prstGeom>
+          <a:solidFill>
+            <a:srgbClr val="D8E4EC"/>
+          </a:solidFill>
+          <a:ln/>
+        </p:spPr>
+      </p:sp>
+      <p:sp>
+        <p:nvSpPr>
+          <p:cNvPr id="14" name="Shape 12"/>
           <p:cNvSpPr/>
           <p:nvPr/>
         </p:nvSpPr>
@@ -19033,7 +19153,7 @@
       </p:sp>
       <p:sp>
         <p:nvSpPr>
-          <p:cNvPr id="13" name="Shape 11"/>
+          <p:cNvPr id="15" name="Shape 13"/>
           <p:cNvSpPr/>
           <p:nvPr/>
         </p:nvSpPr>
@@ -19053,7 +19173,7 @@
       </p:sp>
       <p:sp>
         <p:nvSpPr>
-          <p:cNvPr id="14" name="Text 12"/>
+          <p:cNvPr id="16" name="Text 14"/>
           <p:cNvSpPr txBox="1"/>
           <p:nvPr/>
         </p:nvSpPr>
@@ -19092,7 +19212,7 @@
       </p:sp>
       <p:sp>
         <p:nvSpPr>
-          <p:cNvPr id="15" name="Shape 13"/>
+          <p:cNvPr id="17" name="Shape 15"/>
           <p:cNvSpPr/>
           <p:nvPr/>
         </p:nvSpPr>
@@ -19114,7 +19234,7 @@
       </p:sp>
       <p:sp>
         <p:nvSpPr>
-          <p:cNvPr id="16" name="Shape 14"/>
+          <p:cNvPr id="18" name="Shape 16"/>
           <p:cNvSpPr/>
           <p:nvPr/>
         </p:nvSpPr>
@@ -19136,7 +19256,7 @@
       </p:sp>
       <p:sp>
         <p:nvSpPr>
-          <p:cNvPr id="17" name="Shape 15"/>
+          <p:cNvPr id="19" name="Shape 17"/>
           <p:cNvSpPr/>
           <p:nvPr/>
         </p:nvSpPr>
@@ -19156,7 +19276,7 @@
       </p:sp>
       <p:sp>
         <p:nvSpPr>
-          <p:cNvPr id="18" name="Shape 16"/>
+          <p:cNvPr id="20" name="Shape 18"/>
           <p:cNvSpPr/>
           <p:nvPr/>
         </p:nvSpPr>
@@ -19176,7 +19296,7 @@
       </p:sp>
       <p:sp>
         <p:nvSpPr>
-          <p:cNvPr id="19" name="Shape 17"/>
+          <p:cNvPr id="21" name="Shape 19"/>
           <p:cNvSpPr/>
           <p:nvPr/>
         </p:nvSpPr>
@@ -19196,7 +19316,7 @@
       </p:sp>
       <p:sp>
         <p:nvSpPr>
-          <p:cNvPr id="20" name="Shape 18"/>
+          <p:cNvPr id="22" name="Shape 20"/>
           <p:cNvSpPr/>
           <p:nvPr/>
         </p:nvSpPr>
@@ -19216,7 +19336,7 @@
       </p:sp>
       <p:sp>
         <p:nvSpPr>
-          <p:cNvPr id="21" name="Shape 19"/>
+          <p:cNvPr id="23" name="Shape 21"/>
           <p:cNvSpPr/>
           <p:nvPr/>
         </p:nvSpPr>
@@ -19238,7 +19358,7 @@
       </p:sp>
       <p:sp>
         <p:nvSpPr>
-          <p:cNvPr id="22" name="Shape 20"/>
+          <p:cNvPr id="24" name="Shape 22"/>
           <p:cNvSpPr/>
           <p:nvPr/>
         </p:nvSpPr>
@@ -19258,7 +19378,7 @@
       </p:sp>
       <p:sp>
         <p:nvSpPr>
-          <p:cNvPr id="23" name="Text 21"/>
+          <p:cNvPr id="25" name="Text 23"/>
           <p:cNvSpPr txBox="1"/>
           <p:nvPr/>
         </p:nvSpPr>
@@ -19297,7 +19417,7 @@
       </p:sp>
       <p:sp>
         <p:nvSpPr>
-          <p:cNvPr id="24" name="Shape 22"/>
+          <p:cNvPr id="26" name="Shape 24"/>
           <p:cNvSpPr/>
           <p:nvPr/>
         </p:nvSpPr>
@@ -19319,7 +19439,7 @@
       </p:sp>
       <p:sp>
         <p:nvSpPr>
-          <p:cNvPr id="25" name="Shape 23"/>
+          <p:cNvPr id="27" name="Shape 25"/>
           <p:cNvSpPr/>
           <p:nvPr/>
         </p:nvSpPr>
@@ -19339,7 +19459,7 @@
       </p:sp>
       <p:sp>
         <p:nvSpPr>
-          <p:cNvPr id="26" name="Shape 24"/>
+          <p:cNvPr id="28" name="Shape 26"/>
           <p:cNvSpPr/>
           <p:nvPr/>
         </p:nvSpPr>
@@ -19359,7 +19479,7 @@
       </p:sp>
       <p:sp>
         <p:nvSpPr>
-          <p:cNvPr id="27" name="Shape 25"/>
+          <p:cNvPr id="29" name="Shape 27"/>
           <p:cNvSpPr/>
           <p:nvPr/>
         </p:nvSpPr>
@@ -19379,7 +19499,7 @@
       </p:sp>
       <p:sp>
         <p:nvSpPr>
-          <p:cNvPr id="28" name="Shape 26"/>
+          <p:cNvPr id="30" name="Shape 28"/>
           <p:cNvSpPr/>
           <p:nvPr/>
         </p:nvSpPr>
@@ -19401,7 +19521,7 @@
       </p:sp>
       <p:sp>
         <p:nvSpPr>
-          <p:cNvPr id="29" name="Shape 27"/>
+          <p:cNvPr id="31" name="Shape 29"/>
           <p:cNvSpPr/>
           <p:nvPr/>
         </p:nvSpPr>
@@ -19421,7 +19541,7 @@
       </p:sp>
       <p:sp>
         <p:nvSpPr>
-          <p:cNvPr id="30" name="Text 28"/>
+          <p:cNvPr id="32" name="Text 30"/>
           <p:cNvSpPr txBox="1"/>
           <p:nvPr/>
         </p:nvSpPr>
@@ -19460,7 +19580,7 @@
       </p:sp>
       <p:sp>
         <p:nvSpPr>
-          <p:cNvPr id="31" name="Shape 29"/>
+          <p:cNvPr id="33" name="Shape 31"/>
           <p:cNvSpPr/>
           <p:nvPr/>
         </p:nvSpPr>
@@ -19482,7 +19602,7 @@
       </p:sp>
       <p:sp>
         <p:nvSpPr>
-          <p:cNvPr id="32" name="Text 30"/>
+          <p:cNvPr id="34" name="Text 32"/>
           <p:cNvSpPr txBox="1"/>
           <p:nvPr/>
         </p:nvSpPr>
@@ -19544,7 +19664,7 @@
       </p:sp>
       <p:sp>
         <p:nvSpPr>
-          <p:cNvPr id="33" name="Shape 31"/>
+          <p:cNvPr id="35" name="Shape 33"/>
           <p:cNvSpPr/>
           <p:nvPr/>
         </p:nvSpPr>
@@ -19571,7 +19691,7 @@
       </p:sp>
       <p:sp>
         <p:nvSpPr>
-          <p:cNvPr id="34" name="Shape 32"/>
+          <p:cNvPr id="36" name="Shape 34"/>
           <p:cNvSpPr/>
           <p:nvPr/>
         </p:nvSpPr>
@@ -19591,7 +19711,7 @@
       </p:sp>
       <p:sp>
         <p:nvSpPr>
-          <p:cNvPr id="35" name="Text 33"/>
+          <p:cNvPr id="37" name="Text 35"/>
           <p:cNvSpPr txBox="1"/>
           <p:nvPr/>
         </p:nvSpPr>
@@ -19630,7 +19750,7 @@
       </p:sp>
       <p:sp>
         <p:nvSpPr>
-          <p:cNvPr id="36" name="Text 34"/>
+          <p:cNvPr id="38" name="Text 36"/>
           <p:cNvSpPr txBox="1"/>
           <p:nvPr/>
         </p:nvSpPr>
@@ -19669,7 +19789,7 @@
       </p:sp>
       <p:sp>
         <p:nvSpPr>
-          <p:cNvPr id="37" name="Text 35"/>
+          <p:cNvPr id="39" name="Text 37"/>
           <p:cNvSpPr txBox="1"/>
           <p:nvPr/>
         </p:nvSpPr>
@@ -19708,7 +19828,7 @@
       </p:sp>
       <p:sp>
         <p:nvSpPr>
-          <p:cNvPr id="38" name="Text 36">
+          <p:cNvPr id="40" name="Text 38">
             <a:hlinkClick r:id="rId1" tooltip=""/>
           </p:cNvPr>
           <p:cNvSpPr txBox="1"/>
@@ -19756,7 +19876,7 @@
       </p:sp>
       <p:sp>
         <p:nvSpPr>
-          <p:cNvPr id="39" name="Shape 37"/>
+          <p:cNvPr id="41" name="Shape 39"/>
           <p:cNvSpPr/>
           <p:nvPr/>
         </p:nvSpPr>
@@ -19776,7 +19896,7 @@
       </p:sp>
       <p:sp>
         <p:nvSpPr>
-          <p:cNvPr id="40" name="Text 38"/>
+          <p:cNvPr id="42" name="Text 40"/>
           <p:cNvSpPr txBox="1"/>
           <p:nvPr/>
         </p:nvSpPr>
@@ -19838,7 +19958,7 @@
       </p:sp>
       <p:sp>
         <p:nvSpPr>
-          <p:cNvPr id="41" name="Shape 39"/>
+          <p:cNvPr id="43" name="Shape 41"/>
           <p:cNvSpPr/>
           <p:nvPr/>
         </p:nvSpPr>
@@ -19858,7 +19978,7 @@
       </p:sp>
       <p:sp>
         <p:nvSpPr>
-          <p:cNvPr id="42" name="Text 40"/>
+          <p:cNvPr id="44" name="Text 42"/>
           <p:cNvSpPr txBox="1"/>
           <p:nvPr/>
         </p:nvSpPr>
@@ -19920,7 +20040,7 @@
       </p:sp>
       <p:sp>
         <p:nvSpPr>
-          <p:cNvPr id="43" name="Shape 41"/>
+          <p:cNvPr id="45" name="Shape 43"/>
           <p:cNvSpPr/>
           <p:nvPr/>
         </p:nvSpPr>
@@ -19940,7 +20060,7 @@
       </p:sp>
       <p:sp>
         <p:nvSpPr>
-          <p:cNvPr id="44" name="Text 42"/>
+          <p:cNvPr id="46" name="Text 44"/>
           <p:cNvSpPr txBox="1"/>
           <p:nvPr/>
         </p:nvSpPr>
@@ -20002,7 +20122,7 @@
       </p:sp>
       <p:sp>
         <p:nvSpPr>
-          <p:cNvPr id="45" name="Shape 43"/>
+          <p:cNvPr id="47" name="Shape 45"/>
           <p:cNvSpPr/>
           <p:nvPr/>
         </p:nvSpPr>
@@ -20029,7 +20149,7 @@
       </p:sp>
       <p:sp>
         <p:nvSpPr>
-          <p:cNvPr id="46" name="Text 44"/>
+          <p:cNvPr id="48" name="Text 46"/>
           <p:cNvSpPr txBox="1"/>
           <p:nvPr/>
         </p:nvSpPr>
@@ -20091,7 +20211,7 @@
       </p:sp>
       <p:pic>
         <p:nvPicPr>
-          <p:cNvPr id="48" name="Image 0" descr="/Users/tsengchenghsun/Class/carClass/Claude outputs/第三週(9-24)/src/logo.png">    </p:cNvPr>
+          <p:cNvPr id="50" name="Image 0" descr="/Users/tsengchenghsun/Class/carClass/Claude outputs/第三週(9-24)/src/logo.png">    </p:cNvPr>
           <p:cNvPicPr>
             <a:picLocks noChangeAspect="1"/>
           </p:cNvPicPr>
@@ -20115,7 +20235,7 @@
       </p:pic>
       <p:sp>
         <p:nvSpPr>
-          <p:cNvPr id="49" name="Text 45"/>
+          <p:cNvPr id="51" name="Text 47"/>
           <p:cNvSpPr txBox="1"/>
           <p:nvPr/>
         </p:nvSpPr>
@@ -20154,7 +20274,7 @@
       </p:sp>
       <p:sp>
         <p:nvSpPr>
-          <p:cNvPr id="50" name="Text 46"/>
+          <p:cNvPr id="52" name="Text 48"/>
           <p:cNvSpPr txBox="1"/>
           <p:nvPr/>
         </p:nvSpPr>

--- a/第三週(09-24)/第三週_第1節_簡報.pptx
+++ b/第三週(09-24)/第三週_第1節_簡報.pptx
@@ -4823,11 +4823,11 @@
                 <a:spcPct val="115000"/>
               </a:lnSpc>
               <a:spcAft>
-                <a:spcPts val="600"/>
+                <a:spcPts val="500"/>
               </a:spcAft>
             </a:pPr>
             <a:r>
-              <a:rPr sz="1200" lang="zh-TW" dirty="0">
+              <a:rPr sz="1000" lang="zh-TW" dirty="0">
                 <a:solidFill>
                   <a:srgbClr val="000000"/>
                 </a:solidFill>
@@ -4845,19 +4845,41 @@
                 <a:spcPct val="115000"/>
               </a:lnSpc>
               <a:spcAft>
-                <a:spcPts val="600"/>
+                <a:spcPts val="500"/>
               </a:spcAft>
             </a:pPr>
             <a:r>
-              <a:rPr sz="1200" lang="zh-TW" dirty="0">
-                <a:solidFill>
-                  <a:srgbClr val="000000"/>
-                </a:solidFill>
-                <a:latin typeface="Arial Unicode MS"/>
-                <a:ea typeface="Arial Unicode MS"/>
-                <a:cs typeface="Arial Unicode MS"/>
-              </a:rPr>
-              <a:t>（建議播 2–3 分鐘即可，不必播完。需要網路；沒網路時跳過這一頁，直接接下一種感測器。）
+              <a:rPr sz="1000" lang="zh-TW" dirty="0">
+                <a:solidFill>
+                  <a:srgbClr val="000000"/>
+                </a:solidFill>
+                <a:latin typeface="Arial Unicode MS"/>
+                <a:ea typeface="Arial Unicode MS"/>
+                <a:cs typeface="Arial Unicode MS"/>
+              </a:rPr>
+              <a:t>（</a:t>
+            </a:r>
+            <a:r>
+              <a:rPr sz="1000" b="1" lang="zh-TW" dirty="0">
+                <a:solidFill>
+                  <a:srgbClr val="000000"/>
+                </a:solidFill>
+                <a:latin typeface="Arial Unicode MS"/>
+                <a:ea typeface="Arial Unicode MS"/>
+                <a:cs typeface="Arial Unicode MS"/>
+              </a:rPr>
+              <a:t>這支影片只有三十一秒</a:t>
+            </a:r>
+            <a:r>
+              <a:rPr sz="1000" lang="zh-TW" dirty="0">
+                <a:solidFill>
+                  <a:srgbClr val="000000"/>
+                </a:solidFill>
+                <a:latin typeface="Arial Unicode MS"/>
+                <a:ea typeface="Arial Unicode MS"/>
+                <a:cs typeface="Arial Unicode MS"/>
+              </a:rPr>
+              <a:t>，沒有旁白也沒有字幕。建議連播兩三次，每一次只請學生看一件事。需要網路；沒網路時跳過這一頁，直接接下一種感測器。）
 </a:t>
             </a:r>
           </a:p>
@@ -4867,19 +4889,19 @@
                 <a:spcPct val="115000"/>
               </a:lnSpc>
               <a:spcAft>
-                <a:spcPts val="600"/>
+                <a:spcPts val="500"/>
               </a:spcAft>
             </a:pPr>
             <a:r>
-              <a:rPr sz="1200" lang="zh-TW" dirty="0">
-                <a:solidFill>
-                  <a:srgbClr val="000000"/>
-                </a:solidFill>
-                <a:latin typeface="Arial Unicode MS"/>
-                <a:ea typeface="Arial Unicode MS"/>
-                <a:cs typeface="Arial Unicode MS"/>
-              </a:rPr>
-              <a:t>看的時候請帶著三個問題。
+              <a:rPr sz="1000" lang="zh-TW" dirty="0">
+                <a:solidFill>
+                  <a:srgbClr val="000000"/>
+                </a:solidFill>
+                <a:latin typeface="Arial Unicode MS"/>
+                <a:ea typeface="Arial Unicode MS"/>
+                <a:cs typeface="Arial Unicode MS"/>
+              </a:rPr>
+              <a:t>發布者的說明寫著：畫面是特斯拉的神經網路在每一顆相機上跑出來的結果——把畫面分類、框出物體、再估出距離。
 </a:t>
             </a:r>
           </a:p>
@@ -4889,19 +4911,19 @@
                 <a:spcPct val="115000"/>
               </a:lnSpc>
               <a:spcAft>
-                <a:spcPts val="600"/>
+                <a:spcPts val="500"/>
               </a:spcAft>
             </a:pPr>
             <a:r>
-              <a:rPr sz="1200" lang="zh-TW" dirty="0">
-                <a:solidFill>
-                  <a:srgbClr val="000000"/>
-                </a:solidFill>
-                <a:latin typeface="Arial Unicode MS"/>
-                <a:ea typeface="Arial Unicode MS"/>
-                <a:cs typeface="Arial Unicode MS"/>
-              </a:rPr>
-              <a:t>第一，畫面上那些框——車子、行人、車道線——全部是相機貼的標籤。剛剛那一頁講過，只有相機做得到這件事。
+              <a:rPr sz="1000" lang="zh-TW" dirty="0">
+                <a:solidFill>
+                  <a:srgbClr val="000000"/>
+                </a:solidFill>
+                <a:latin typeface="Arial Unicode MS"/>
+                <a:ea typeface="Arial Unicode MS"/>
+                <a:cs typeface="Arial Unicode MS"/>
+              </a:rPr>
+              <a:t>三次分別看什麼。
 </a:t>
             </a:r>
           </a:p>
@@ -4911,19 +4933,30 @@
                 <a:spcPct val="115000"/>
               </a:lnSpc>
               <a:spcAft>
-                <a:spcPts val="600"/>
+                <a:spcPts val="500"/>
               </a:spcAft>
             </a:pPr>
             <a:r>
-              <a:rPr sz="1200" lang="zh-TW" dirty="0">
-                <a:solidFill>
-                  <a:srgbClr val="000000"/>
-                </a:solidFill>
-                <a:latin typeface="Arial Unicode MS"/>
-                <a:ea typeface="Arial Unicode MS"/>
-                <a:cs typeface="Arial Unicode MS"/>
-              </a:rPr>
-              <a:t>第二，注意逆光和進隧道的那幾秒。畫面會突然過曝或全黑，框就跟著亂跳。這就是「被動接收」的代價，第三節我們會用數字量它。
+              <a:rPr sz="1000" b="1" lang="zh-TW" dirty="0">
+                <a:solidFill>
+                  <a:srgbClr val="000000"/>
+                </a:solidFill>
+                <a:latin typeface="Arial Unicode MS"/>
+                <a:ea typeface="Arial Unicode MS"/>
+                <a:cs typeface="Arial Unicode MS"/>
+              </a:rPr>
+              <a:t>第一次，看框和標籤。</a:t>
+            </a:r>
+            <a:r>
+              <a:rPr sz="1000" lang="zh-TW" dirty="0">
+                <a:solidFill>
+                  <a:srgbClr val="000000"/>
+                </a:solidFill>
+                <a:latin typeface="Arial Unicode MS"/>
+                <a:ea typeface="Arial Unicode MS"/>
+                <a:cs typeface="Arial Unicode MS"/>
+              </a:rPr>
+              <a:t>車子、行人、車道線，全部是相機貼上去的。剛剛那一頁講過，只有相機做得到這件事。
 </a:t>
             </a:r>
           </a:p>
@@ -4933,19 +4966,30 @@
                 <a:spcPct val="115000"/>
               </a:lnSpc>
               <a:spcAft>
-                <a:spcPts val="600"/>
+                <a:spcPts val="500"/>
               </a:spcAft>
             </a:pPr>
             <a:r>
-              <a:rPr sz="1200" lang="zh-TW" dirty="0">
-                <a:solidFill>
-                  <a:srgbClr val="000000"/>
-                </a:solidFill>
-                <a:latin typeface="Arial Unicode MS"/>
-                <a:ea typeface="Arial Unicode MS"/>
-                <a:cs typeface="Arial Unicode MS"/>
-              </a:rPr>
-              <a:t>第三，看遠處的物體。框會跳來跳去、忽大忽小，那不是程式壞掉，那就是估距誤差。第二節我們會算出來：六十公尺的時候誤差有將近四公尺。
+              <a:rPr sz="1000" b="1" lang="zh-TW" dirty="0">
+                <a:solidFill>
+                  <a:srgbClr val="000000"/>
+                </a:solidFill>
+                <a:latin typeface="Arial Unicode MS"/>
+                <a:ea typeface="Arial Unicode MS"/>
+                <a:cs typeface="Arial Unicode MS"/>
+              </a:rPr>
+              <a:t>第二次，看顏色。</a:t>
+            </a:r>
+            <a:r>
+              <a:rPr sz="1000" lang="zh-TW" dirty="0">
+                <a:solidFill>
+                  <a:srgbClr val="000000"/>
+                </a:solidFill>
+                <a:latin typeface="Arial Unicode MS"/>
+                <a:ea typeface="Arial Unicode MS"/>
+                <a:cs typeface="Arial Unicode MS"/>
+              </a:rPr>
+              <a:t>畫面被塗成不同顏色，那是把每一個像素分類：哪些是路面、哪些是車、哪些是人。
 </a:t>
             </a:r>
           </a:p>
@@ -4955,11 +4999,110 @@
                 <a:spcPct val="115000"/>
               </a:lnSpc>
               <a:spcAft>
-                <a:spcPts val="600"/>
+                <a:spcPts val="500"/>
               </a:spcAft>
             </a:pPr>
             <a:r>
-              <a:rPr sz="1200" lang="zh-TW" dirty="0">
+              <a:rPr sz="1000" b="1" lang="zh-TW" dirty="0">
+                <a:solidFill>
+                  <a:srgbClr val="000000"/>
+                </a:solidFill>
+                <a:latin typeface="Arial Unicode MS"/>
+                <a:ea typeface="Arial Unicode MS"/>
+                <a:cs typeface="Arial Unicode MS"/>
+              </a:rPr>
+              <a:t>第三次，看遠處。</a:t>
+            </a:r>
+            <a:r>
+              <a:rPr sz="1000" lang="zh-TW" dirty="0">
+                <a:solidFill>
+                  <a:srgbClr val="000000"/>
+                </a:solidFill>
+                <a:latin typeface="Arial Unicode MS"/>
+                <a:ea typeface="Arial Unicode MS"/>
+                <a:cs typeface="Arial Unicode MS"/>
+              </a:rPr>
+              <a:t>問全班一個觀察題：遠處那些框，穩不穩？
+</a:t>
+            </a:r>
+          </a:p>
+          <a:p>
+            <a:pPr algn="l">
+              <a:lnSpc>
+                <a:spcPct val="115000"/>
+              </a:lnSpc>
+              <a:spcAft>
+                <a:spcPts val="500"/>
+              </a:spcAft>
+            </a:pPr>
+            <a:r>
+              <a:rPr sz="1000" lang="zh-TW" dirty="0">
+                <a:solidFill>
+                  <a:srgbClr val="000000"/>
+                </a:solidFill>
+                <a:latin typeface="Arial Unicode MS"/>
+                <a:ea typeface="Arial Unicode MS"/>
+                <a:cs typeface="Arial Unicode MS"/>
+              </a:rPr>
+              <a:t>（讓學生自己講。如果他們看到框忽大忽小、跳來跳去，那就是估距誤差——第二節會算出來：六十公尺的時候誤差有將近四公尺。如果這麼短的片子裡看不出來，就直接說第二節會算，不必硬掰。）
+</a:t>
+            </a:r>
+          </a:p>
+          <a:p>
+            <a:pPr algn="l">
+              <a:lnSpc>
+                <a:spcPct val="115000"/>
+              </a:lnSpc>
+              <a:spcAft>
+                <a:spcPts val="500"/>
+              </a:spcAft>
+            </a:pPr>
+            <a:r>
+              <a:rPr sz="1000" lang="zh-TW" dirty="0">
+                <a:solidFill>
+                  <a:srgbClr val="000000"/>
+                </a:solidFill>
+                <a:latin typeface="Arial Unicode MS"/>
+                <a:ea typeface="Arial Unicode MS"/>
+                <a:cs typeface="Arial Unicode MS"/>
+              </a:rPr>
+              <a:t>（</a:t>
+            </a:r>
+            <a:r>
+              <a:rPr sz="1000" b="1" lang="zh-TW" dirty="0">
+                <a:solidFill>
+                  <a:srgbClr val="000000"/>
+                </a:solidFill>
+                <a:latin typeface="Arial Unicode MS"/>
+                <a:ea typeface="Arial Unicode MS"/>
+                <a:cs typeface="Arial Unicode MS"/>
+              </a:rPr>
+              <a:t>逆光和隧道不在這支影片裡。</a:t>
+            </a:r>
+            <a:r>
+              <a:rPr sz="1000" lang="zh-TW" dirty="0">
+                <a:solidFill>
+                  <a:srgbClr val="000000"/>
+                </a:solidFill>
+                <a:latin typeface="Arial Unicode MS"/>
+                <a:ea typeface="Arial Unicode MS"/>
+                <a:cs typeface="Arial Unicode MS"/>
+              </a:rPr>
+              <a:t>相機怕強光、怕明暗突然變化這件事，留到第三節用數字講；第四週的回家作業也會請各位拍一張自己覺得相機會看不清楚的路況。老師想額外補一段實拍的話，Scott Kubo 的「Tesla Autopilot Driving Directly Into the Sun」有六分鐘的逆光行駛，但那不是課程必要的內容。）
+</a:t>
+            </a:r>
+          </a:p>
+          <a:p>
+            <a:pPr algn="l">
+              <a:lnSpc>
+                <a:spcPct val="115000"/>
+              </a:lnSpc>
+              <a:spcAft>
+                <a:spcPts val="500"/>
+              </a:spcAft>
+            </a:pPr>
+            <a:r>
+              <a:rPr sz="1000" lang="zh-TW" dirty="0">
                 <a:solidFill>
                   <a:srgbClr val="000000"/>
                 </a:solidFill>
@@ -19820,7 +19963,7 @@
                 <a:ea typeface="Arial" pitchFamily="34" charset="-122"/>
                 <a:cs typeface="Arial" pitchFamily="34" charset="-120"/>
               </a:rPr>
-              <a:t>Carscoops　·　</a:t>
+              <a:t>Carscoops　·　0:31（很短，連播兩三次）</a:t>
             </a:r>
             <a:endParaRPr lang="en-US" sz="900" dirty="0"/>
           </a:p>
@@ -20012,7 +20155,7 @@
                 <a:ea typeface="Arial" pitchFamily="34" charset="-122"/>
                 <a:cs typeface="Arial" pitchFamily="34" charset="-120"/>
               </a:rPr>
-              <a:t>Chú ý lúc ngược sáng và lúc vào hầm</a:t>
+              <a:t>Chỉ 31 giây — xem 2–3 lần, mỗi lần chỉ nhìn một thứ</a:t>
             </a:r>
             <a:endParaRPr lang="en-US" sz="950" dirty="0"/>
           </a:p>
@@ -20032,7 +20175,7 @@
                 <a:ea typeface="微軟正黑體" pitchFamily="34" charset="-122"/>
                 <a:cs typeface="微軟正黑體" pitchFamily="34" charset="-120"/>
               </a:rPr>
-              <a:t>注意逆光和進隧道的那幾秒</a:t>
+              <a:t>只有 31 秒——連看兩三次，每次只看一件事</a:t>
             </a:r>
             <a:endParaRPr lang="en-US" sz="950" dirty="0"/>
           </a:p>
@@ -20067,7 +20210,7 @@
         <p:spPr>
           <a:xfrm>
             <a:off x="5047488" y="3110691"/>
-            <a:ext cx="3429000" cy="456079"/>
+            <a:ext cx="3429000" cy="313748"/>
           </a:xfrm>
           <a:prstGeom prst="rect">
             <a:avLst/>
@@ -20094,7 +20237,7 @@
                 <a:ea typeface="Arial" pitchFamily="34" charset="-122"/>
                 <a:cs typeface="Arial" pitchFamily="34" charset="-120"/>
               </a:rPr>
-              <a:t>Vật ở xa: khung nhảy qua nhảy lại — đó là sai số ước lượng</a:t>
+              <a:t>Quan sát: vật ở xa thì khung có đứng yên không?</a:t>
             </a:r>
             <a:endParaRPr lang="en-US" sz="950" dirty="0"/>
           </a:p>
@@ -20114,7 +20257,7 @@
                 <a:ea typeface="微軟正黑體" pitchFamily="34" charset="-122"/>
                 <a:cs typeface="微軟正黑體" pitchFamily="34" charset="-120"/>
               </a:rPr>
-              <a:t>遠處的物體：框會跳來跳去——那就是估距誤差</a:t>
+              <a:t>觀察題：遠處的東西，框穩不穩？</a:t>
             </a:r>
             <a:endParaRPr lang="en-US" sz="950" dirty="0"/>
           </a:p>

--- a/第三週(09-24)/第三週_第1節_簡報.pptx
+++ b/第三週(09-24)/第三週_第1節_簡報.pptx
@@ -6023,7 +6023,293 @@
                 <a:ea typeface="Arial Unicode MS"/>
                 <a:cs typeface="Arial Unicode MS"/>
               </a:rPr>
-              <a:t>所以雷達一次量測就同時得到距離和接近速度，別的感測器都要量兩次再相減才推得出來。這是它不可取代的地方。
+              <a:t>所以雷達在</a:t>
+            </a:r>
+            <a:r>
+              <a:rPr sz="1000" b="1" lang="zh-TW" dirty="0">
+                <a:solidFill>
+                  <a:srgbClr val="000000"/>
+                </a:solidFill>
+                <a:latin typeface="Arial Unicode MS"/>
+                <a:ea typeface="Arial Unicode MS"/>
+                <a:cs typeface="Arial Unicode MS"/>
+              </a:rPr>
+              <a:t>同一次掃描</a:t>
+            </a:r>
+            <a:r>
+              <a:rPr sz="1000" lang="zh-TW" dirty="0">
+                <a:solidFill>
+                  <a:srgbClr val="000000"/>
+                </a:solidFill>
+                <a:latin typeface="Arial Unicode MS"/>
+                <a:ea typeface="Arial Unicode MS"/>
+                <a:cs typeface="Arial Unicode MS"/>
+              </a:rPr>
+              <a:t>裡就同時得到距離和接近速度，別的感測器都要量兩次再相減才推得出來。這是它不可取代的地方。
+</a:t>
+            </a:r>
+          </a:p>
+          <a:p>
+            <a:pPr algn="l">
+              <a:lnSpc>
+                <a:spcPct val="115000"/>
+              </a:lnSpc>
+              <a:spcAft>
+                <a:spcPts val="500"/>
+              </a:spcAft>
+            </a:pPr>
+            <a:r>
+              <a:rPr sz="1000" lang="zh-TW" dirty="0">
+                <a:solidFill>
+                  <a:srgbClr val="000000"/>
+                </a:solidFill>
+                <a:latin typeface="Arial Unicode MS"/>
+                <a:ea typeface="Arial Unicode MS"/>
+                <a:cs typeface="Arial Unicode MS"/>
+              </a:rPr>
+              <a:t>（如果有同學追問「它到底是怎麼比出來的」，下面這段講給他聽，其他人聽不懂也沒關係。）
+</a:t>
+            </a:r>
+          </a:p>
+          <a:p>
+            <a:pPr algn="l">
+              <a:lnSpc>
+                <a:spcPct val="115000"/>
+              </a:lnSpc>
+              <a:spcAft>
+                <a:spcPts val="500"/>
+              </a:spcAft>
+            </a:pPr>
+            <a:r>
+              <a:rPr sz="1000" lang="zh-TW" dirty="0">
+                <a:solidFill>
+                  <a:srgbClr val="000000"/>
+                </a:solidFill>
+                <a:latin typeface="Arial Unicode MS"/>
+                <a:ea typeface="Arial Unicode MS"/>
+                <a:cs typeface="Arial Unicode MS"/>
+              </a:rPr>
+              <a:t>車用雷達叫 </a:t>
+            </a:r>
+            <a:r>
+              <a:rPr sz="1000" b="1" lang="zh-TW" dirty="0">
+                <a:solidFill>
+                  <a:srgbClr val="000000"/>
+                </a:solidFill>
+                <a:latin typeface="Arial Unicode MS"/>
+                <a:ea typeface="Arial Unicode MS"/>
+                <a:cs typeface="Arial Unicode MS"/>
+              </a:rPr>
+              <a:t>FMCW</a:t>
+            </a:r>
+            <a:r>
+              <a:rPr sz="1000" lang="zh-TW" dirty="0">
+                <a:solidFill>
+                  <a:srgbClr val="000000"/>
+                </a:solidFill>
+                <a:latin typeface="Arial Unicode MS"/>
+                <a:ea typeface="Arial Unicode MS"/>
+                <a:cs typeface="Arial Unicode MS"/>
+              </a:rPr>
+              <a:t>，調頻連續波。它不是打一個脈衝等回音，而是在一次量測裡——大約三十毫秒——連續發出</a:t>
+            </a:r>
+            <a:r>
+              <a:rPr sz="1000" b="1" lang="zh-TW" dirty="0">
+                <a:solidFill>
+                  <a:srgbClr val="000000"/>
+                </a:solidFill>
+                <a:latin typeface="Arial Unicode MS"/>
+                <a:ea typeface="Arial Unicode MS"/>
+                <a:cs typeface="Arial Unicode MS"/>
+              </a:rPr>
+              <a:t>上百個</a:t>
+            </a:r>
+            <a:r>
+              <a:rPr sz="1000" lang="zh-TW" dirty="0">
+                <a:solidFill>
+                  <a:srgbClr val="000000"/>
+                </a:solidFill>
+                <a:latin typeface="Arial Unicode MS"/>
+                <a:ea typeface="Arial Unicode MS"/>
+                <a:cs typeface="Arial Unicode MS"/>
+              </a:rPr>
+              <a:t> chirp，每一個 chirp 的頻率都從低線性掃到高。
+</a:t>
+            </a:r>
+          </a:p>
+          <a:p>
+            <a:pPr algn="l">
+              <a:lnSpc>
+                <a:spcPct val="115000"/>
+              </a:lnSpc>
+              <a:spcAft>
+                <a:spcPts val="500"/>
+              </a:spcAft>
+            </a:pPr>
+            <a:r>
+              <a:rPr sz="1000" b="1" lang="zh-TW" dirty="0">
+                <a:solidFill>
+                  <a:srgbClr val="000000"/>
+                </a:solidFill>
+                <a:latin typeface="Arial Unicode MS"/>
+                <a:ea typeface="Arial Unicode MS"/>
+                <a:cs typeface="Arial Unicode MS"/>
+              </a:rPr>
+              <a:t>距離</a:t>
+            </a:r>
+            <a:r>
+              <a:rPr sz="1000" lang="zh-TW" dirty="0">
+                <a:solidFill>
+                  <a:srgbClr val="000000"/>
+                </a:solidFill>
+                <a:latin typeface="Arial Unicode MS"/>
+                <a:ea typeface="Arial Unicode MS"/>
+                <a:cs typeface="Arial Unicode MS"/>
+              </a:rPr>
+              <a:t>是這樣來的：發射中的波和收到的回波同時存在，兩者的</a:t>
+            </a:r>
+            <a:r>
+              <a:rPr sz="1000" b="1" lang="zh-TW" dirty="0">
+                <a:solidFill>
+                  <a:srgbClr val="000000"/>
+                </a:solidFill>
+                <a:latin typeface="Arial Unicode MS"/>
+                <a:ea typeface="Arial Unicode MS"/>
+                <a:cs typeface="Arial Unicode MS"/>
+              </a:rPr>
+              <a:t>頻率差</a:t>
+            </a:r>
+            <a:r>
+              <a:rPr sz="1000" lang="zh-TW" dirty="0">
+                <a:solidFill>
+                  <a:srgbClr val="000000"/>
+                </a:solidFill>
+                <a:latin typeface="Arial Unicode MS"/>
+                <a:ea typeface="Arial Unicode MS"/>
+                <a:cs typeface="Arial Unicode MS"/>
+              </a:rPr>
+              <a:t>正比於來回跑的時間。所以一個 chirp 就夠。
+</a:t>
+            </a:r>
+          </a:p>
+          <a:p>
+            <a:pPr algn="l">
+              <a:lnSpc>
+                <a:spcPct val="115000"/>
+              </a:lnSpc>
+              <a:spcAft>
+                <a:spcPts val="500"/>
+              </a:spcAft>
+            </a:pPr>
+            <a:r>
+              <a:rPr sz="1000" b="1" lang="zh-TW" dirty="0">
+                <a:solidFill>
+                  <a:srgbClr val="000000"/>
+                </a:solidFill>
+                <a:latin typeface="Arial Unicode MS"/>
+                <a:ea typeface="Arial Unicode MS"/>
+                <a:cs typeface="Arial Unicode MS"/>
+              </a:rPr>
+              <a:t>速度</a:t>
+            </a:r>
+            <a:r>
+              <a:rPr sz="1000" lang="zh-TW" dirty="0">
+                <a:solidFill>
+                  <a:srgbClr val="000000"/>
+                </a:solidFill>
+                <a:latin typeface="Arial Unicode MS"/>
+                <a:ea typeface="Arial Unicode MS"/>
+                <a:cs typeface="Arial Unicode MS"/>
+              </a:rPr>
+              <a:t>是這樣來的：相鄰兩個 chirp 之間，目標只移動了零點幾公釐，位置根本看不出差別，但回波的</a:t>
+            </a:r>
+            <a:r>
+              <a:rPr sz="1000" b="1" lang="zh-TW" dirty="0">
+                <a:solidFill>
+                  <a:srgbClr val="000000"/>
+                </a:solidFill>
+                <a:latin typeface="Arial Unicode MS"/>
+                <a:ea typeface="Arial Unicode MS"/>
+                <a:cs typeface="Arial Unicode MS"/>
+              </a:rPr>
+              <a:t>相位</a:t>
+            </a:r>
+            <a:r>
+              <a:rPr sz="1000" lang="zh-TW" dirty="0">
+                <a:solidFill>
+                  <a:srgbClr val="000000"/>
+                </a:solidFill>
+                <a:latin typeface="Arial Unicode MS"/>
+                <a:ea typeface="Arial Unicode MS"/>
+                <a:cs typeface="Arial Unicode MS"/>
+              </a:rPr>
+              <a:t>變了。把整組 chirp 一起處理，就得到速度。
+</a:t>
+            </a:r>
+          </a:p>
+          <a:p>
+            <a:pPr algn="l">
+              <a:lnSpc>
+                <a:spcPct val="115000"/>
+              </a:lnSpc>
+              <a:spcAft>
+                <a:spcPts val="500"/>
+              </a:spcAft>
+            </a:pPr>
+            <a:r>
+              <a:rPr sz="1000" lang="zh-TW" dirty="0">
+                <a:solidFill>
+                  <a:srgbClr val="000000"/>
+                </a:solidFill>
+                <a:latin typeface="Arial Unicode MS"/>
+                <a:ea typeface="Arial Unicode MS"/>
+                <a:cs typeface="Arial Unicode MS"/>
+              </a:rPr>
+              <a:t>所以它</a:t>
+            </a:r>
+            <a:r>
+              <a:rPr sz="1000" b="1" lang="zh-TW" dirty="0">
+                <a:solidFill>
+                  <a:srgbClr val="000000"/>
+                </a:solidFill>
+                <a:latin typeface="Arial Unicode MS"/>
+                <a:ea typeface="Arial Unicode MS"/>
+                <a:cs typeface="Arial Unicode MS"/>
+              </a:rPr>
+              <a:t>確實有做比較</a:t>
+            </a:r>
+            <a:r>
+              <a:rPr sz="1000" lang="zh-TW" dirty="0">
+                <a:solidFill>
+                  <a:srgbClr val="000000"/>
+                </a:solidFill>
+                <a:latin typeface="Arial Unicode MS"/>
+                <a:ea typeface="Arial Unicode MS"/>
+                <a:cs typeface="Arial Unicode MS"/>
+              </a:rPr>
+              <a:t>——但比的是</a:t>
+            </a:r>
+            <a:r>
+              <a:rPr sz="1000" b="1" lang="zh-TW" dirty="0">
+                <a:solidFill>
+                  <a:srgbClr val="000000"/>
+                </a:solidFill>
+                <a:latin typeface="Arial Unicode MS"/>
+                <a:ea typeface="Arial Unicode MS"/>
+                <a:cs typeface="Arial Unicode MS"/>
+              </a:rPr>
+              <a:t>同一次量測裡面相鄰的 chirp</a:t>
+            </a:r>
+            <a:r>
+              <a:rPr sz="1000" lang="zh-TW" dirty="0">
+                <a:solidFill>
+                  <a:srgbClr val="000000"/>
+                </a:solidFill>
+                <a:latin typeface="Arial Unicode MS"/>
+                <a:ea typeface="Arial Unicode MS"/>
+                <a:cs typeface="Arial Unicode MS"/>
+              </a:rPr>
+              <a:t>，不是跟上一幀的位置相減。這兩件事差在哪裡？位置相減要先認出「這一幀的這個點，就是上一幀的那個點」，認錯了速度就整個錯；而且位置本身有誤差，除以很短的時間之後，雜訊會被放大。相位不用管這些。
 </a:t>
             </a:r>
           </a:p>
@@ -7971,7 +8257,7 @@
         <p:spPr>
           <a:xfrm>
             <a:off x="3209544" y="1400190"/>
-            <a:ext cx="5431536" cy="566800"/>
+            <a:ext cx="5431536" cy="635187"/>
           </a:xfrm>
           <a:prstGeom prst="rect">
             <a:avLst/>
@@ -8032,7 +8318,7 @@
         </p:nvSpPr>
         <p:spPr>
           <a:xfrm>
-            <a:off x="2295144" y="2030998"/>
+            <a:off x="2295144" y="2099385"/>
             <a:ext cx="786384" cy="283464"/>
           </a:xfrm>
           <a:prstGeom prst="roundRect">
@@ -8054,7 +8340,7 @@
         </p:nvSpPr>
         <p:spPr>
           <a:xfrm>
-            <a:off x="2295144" y="2053858"/>
+            <a:off x="2295144" y="2122245"/>
             <a:ext cx="786384" cy="256032"/>
           </a:xfrm>
           <a:prstGeom prst="rect">
@@ -8116,8 +8402,8 @@
         </p:nvSpPr>
         <p:spPr>
           <a:xfrm>
-            <a:off x="3209544" y="2030998"/>
-            <a:ext cx="5431536" cy="438912"/>
+            <a:off x="3209544" y="2099385"/>
+            <a:ext cx="5431536" cy="445131"/>
           </a:xfrm>
           <a:prstGeom prst="rect">
             <a:avLst/>
@@ -8178,7 +8464,7 @@
         </p:nvSpPr>
         <p:spPr>
           <a:xfrm>
-            <a:off x="2295144" y="2533918"/>
+            <a:off x="2295144" y="2608523"/>
             <a:ext cx="786384" cy="283464"/>
           </a:xfrm>
           <a:prstGeom prst="roundRect">
@@ -8200,7 +8486,7 @@
         </p:nvSpPr>
         <p:spPr>
           <a:xfrm>
-            <a:off x="2295144" y="2556778"/>
+            <a:off x="2295144" y="2631383"/>
             <a:ext cx="786384" cy="256032"/>
           </a:xfrm>
           <a:prstGeom prst="rect">
@@ -8262,8 +8548,8 @@
         </p:nvSpPr>
         <p:spPr>
           <a:xfrm>
-            <a:off x="3209544" y="2533918"/>
-            <a:ext cx="5431536" cy="566800"/>
+            <a:off x="3209544" y="2608523"/>
+            <a:ext cx="5431536" cy="635187"/>
           </a:xfrm>
           <a:prstGeom prst="rect">
             <a:avLst/>
@@ -8580,7 +8866,7 @@
         <p:spPr>
           <a:xfrm>
             <a:off x="502920" y="676656"/>
-            <a:ext cx="8138160" cy="713232"/>
+            <a:ext cx="8138160" cy="560684"/>
           </a:xfrm>
           <a:prstGeom prst="rect">
             <a:avLst/>
@@ -8641,12 +8927,12 @@
         </p:nvSpPr>
         <p:spPr>
           <a:xfrm>
-            <a:off x="502920" y="1243584"/>
-            <a:ext cx="3904488" cy="2578608"/>
+            <a:off x="502920" y="1255628"/>
+            <a:ext cx="3904488" cy="2566564"/>
           </a:xfrm>
           <a:prstGeom prst="roundRect">
             <a:avLst>
-              <a:gd name="adj" fmla="val 3546"/>
+              <a:gd name="adj" fmla="val 3563"/>
             </a:avLst>
           </a:prstGeom>
           <a:solidFill>
@@ -8676,8 +8962,8 @@
         </p:blipFill>
         <p:spPr>
           <a:xfrm>
-            <a:off x="727812" y="1289304"/>
-            <a:ext cx="3454705" cy="2304288"/>
+            <a:off x="736840" y="1301348"/>
+            <a:ext cx="3436647" cy="2292244"/>
           </a:xfrm>
           <a:prstGeom prst="rect">
             <a:avLst/>
@@ -8731,12 +9017,12 @@
         </p:nvSpPr>
         <p:spPr>
           <a:xfrm>
-            <a:off x="4736592" y="1243584"/>
-            <a:ext cx="3904488" cy="2578608"/>
+            <a:off x="4736592" y="1255628"/>
+            <a:ext cx="3904488" cy="2566564"/>
           </a:xfrm>
           <a:prstGeom prst="roundRect">
             <a:avLst>
-              <a:gd name="adj" fmla="val 3546"/>
+              <a:gd name="adj" fmla="val 3563"/>
             </a:avLst>
           </a:prstGeom>
           <a:solidFill>
@@ -8758,7 +9044,7 @@
         </p:nvSpPr>
         <p:spPr>
           <a:xfrm>
-            <a:off x="4919472" y="1408176"/>
+            <a:off x="4919472" y="1420220"/>
             <a:ext cx="347472" cy="347472"/>
           </a:xfrm>
           <a:prstGeom prst="ellipse">
@@ -8778,7 +9064,7 @@
         </p:nvSpPr>
         <p:spPr>
           <a:xfrm>
-            <a:off x="4919472" y="1453896"/>
+            <a:off x="4919472" y="1465940"/>
             <a:ext cx="347472" cy="256032"/>
           </a:xfrm>
           <a:prstGeom prst="rect">
@@ -8817,7 +9103,7 @@
         </p:nvSpPr>
         <p:spPr>
           <a:xfrm>
-            <a:off x="5340096" y="1389888"/>
+            <a:off x="5340096" y="1401932"/>
             <a:ext cx="3118104" cy="420624"/>
           </a:xfrm>
           <a:prstGeom prst="rect">
@@ -8856,7 +9142,7 @@
         </p:nvSpPr>
         <p:spPr>
           <a:xfrm>
-            <a:off x="4919472" y="1847088"/>
+            <a:off x="4919472" y="1859132"/>
             <a:ext cx="3538728" cy="201168"/>
           </a:xfrm>
           <a:prstGeom prst="rect">
@@ -8897,7 +9183,7 @@
         </p:nvSpPr>
         <p:spPr>
           <a:xfrm>
-            <a:off x="4919472" y="2029968"/>
+            <a:off x="4919472" y="2042012"/>
             <a:ext cx="3538728" cy="201168"/>
           </a:xfrm>
           <a:prstGeom prst="rect">
@@ -8943,7 +9229,7 @@
         </p:nvSpPr>
         <p:spPr>
           <a:xfrm>
-            <a:off x="4919472" y="2304288"/>
+            <a:off x="4919472" y="2316332"/>
             <a:ext cx="36576" cy="237744"/>
           </a:xfrm>
           <a:prstGeom prst="rect">
@@ -8963,7 +9249,7 @@
         </p:nvSpPr>
         <p:spPr>
           <a:xfrm>
-            <a:off x="5047488" y="2267712"/>
+            <a:off x="5047488" y="2279756"/>
             <a:ext cx="3429000" cy="313748"/>
           </a:xfrm>
           <a:prstGeom prst="rect">
@@ -9025,7 +9311,7 @@
         </p:nvSpPr>
         <p:spPr>
           <a:xfrm>
-            <a:off x="4919472" y="2654612"/>
+            <a:off x="4919472" y="2666656"/>
             <a:ext cx="36576" cy="237744"/>
           </a:xfrm>
           <a:prstGeom prst="rect">
@@ -9045,7 +9331,7 @@
         </p:nvSpPr>
         <p:spPr>
           <a:xfrm>
-            <a:off x="5047488" y="2618036"/>
+            <a:off x="5047488" y="2630080"/>
             <a:ext cx="3429000" cy="456079"/>
           </a:xfrm>
           <a:prstGeom prst="rect">
@@ -9107,7 +9393,7 @@
         </p:nvSpPr>
         <p:spPr>
           <a:xfrm>
-            <a:off x="4919472" y="3147267"/>
+            <a:off x="4919472" y="3159311"/>
             <a:ext cx="36576" cy="237744"/>
           </a:xfrm>
           <a:prstGeom prst="rect">
@@ -9127,7 +9413,7 @@
         </p:nvSpPr>
         <p:spPr>
           <a:xfrm>
-            <a:off x="5047488" y="3110691"/>
+            <a:off x="5047488" y="3122735"/>
             <a:ext cx="3429000" cy="313748"/>
           </a:xfrm>
           <a:prstGeom prst="rect">
@@ -9750,7 +10036,7 @@
         <p:spPr>
           <a:xfrm>
             <a:off x="3209544" y="1665299"/>
-            <a:ext cx="5431536" cy="726780"/>
+            <a:ext cx="5431536" cy="635187"/>
           </a:xfrm>
           <a:prstGeom prst="rect">
             <a:avLst/>
@@ -9777,7 +10063,7 @@
                 <a:ea typeface="Arial" pitchFamily="34" charset="-122"/>
                 <a:cs typeface="Arial" pitchFamily="34" charset="-120"/>
               </a:rPr>
-              <a:t>Mỗi vệ tinh phát ra thời điểm gửi. So sánh độ trễ của ít nhất bốn vệ tinh là tính được vị trí — giống như đo khoảng cách tới bốn điểm đã biết.</a:t>
+              <a:t>Mỗi vệ tinh phát ra thời điểm gửi. So độ trễ của ít nhất bốn vệ tinh là tính được vị trí.</a:t>
             </a:r>
             <a:endParaRPr lang="en-US" sz="1100" dirty="0"/>
           </a:p>
@@ -9797,7 +10083,7 @@
                 <a:ea typeface="微軟正黑體" pitchFamily="34" charset="-122"/>
                 <a:cs typeface="微軟正黑體" pitchFamily="34" charset="-120"/>
               </a:rPr>
-              <a:t>每顆衛星發出「我幾點幾分發的」。比對至少四顆的時間差就算得出位置——就像量到四個已知點的距離。</a:t>
+              <a:t>每顆衛星發出「我幾點幾分發的」。比對至少四顆的時間差就算得出位置。</a:t>
             </a:r>
             <a:endParaRPr lang="en-US" sz="1100" dirty="0"/>
           </a:p>
@@ -9811,7 +10097,7 @@
         </p:nvSpPr>
         <p:spPr>
           <a:xfrm>
-            <a:off x="2295144" y="2456087"/>
+            <a:off x="2295144" y="2364494"/>
             <a:ext cx="786384" cy="283464"/>
           </a:xfrm>
           <a:prstGeom prst="roundRect">
@@ -9833,7 +10119,7 @@
         </p:nvSpPr>
         <p:spPr>
           <a:xfrm>
-            <a:off x="2295144" y="2478947"/>
+            <a:off x="2295144" y="2387354"/>
             <a:ext cx="786384" cy="256032"/>
           </a:xfrm>
           <a:prstGeom prst="rect">
@@ -9895,8 +10181,8 @@
         </p:nvSpPr>
         <p:spPr>
           <a:xfrm>
-            <a:off x="3209544" y="2456087"/>
-            <a:ext cx="5431536" cy="566800"/>
+            <a:off x="3209544" y="2364494"/>
+            <a:ext cx="5431536" cy="635187"/>
           </a:xfrm>
           <a:prstGeom prst="rect">
             <a:avLst/>
@@ -9957,7 +10243,7 @@
         </p:nvSpPr>
         <p:spPr>
           <a:xfrm>
-            <a:off x="2295144" y="3086895"/>
+            <a:off x="2295144" y="3063689"/>
             <a:ext cx="786384" cy="283464"/>
           </a:xfrm>
           <a:prstGeom prst="roundRect">
@@ -9979,7 +10265,7 @@
         </p:nvSpPr>
         <p:spPr>
           <a:xfrm>
-            <a:off x="2295144" y="3109755"/>
+            <a:off x="2295144" y="3086549"/>
             <a:ext cx="786384" cy="256032"/>
           </a:xfrm>
           <a:prstGeom prst="rect">
@@ -10041,8 +10327,8 @@
         </p:nvSpPr>
         <p:spPr>
           <a:xfrm>
-            <a:off x="3209544" y="3086895"/>
-            <a:ext cx="5431536" cy="566800"/>
+            <a:off x="3209544" y="3063689"/>
+            <a:ext cx="5431536" cy="635187"/>
           </a:xfrm>
           <a:prstGeom prst="rect">
             <a:avLst/>
@@ -10359,7 +10645,7 @@
         <p:spPr>
           <a:xfrm>
             <a:off x="502920" y="676656"/>
-            <a:ext cx="8138160" cy="713232"/>
+            <a:ext cx="8138160" cy="560684"/>
           </a:xfrm>
           <a:prstGeom prst="rect">
             <a:avLst/>
@@ -10386,7 +10672,7 @@
                 <a:ea typeface="Arial" pitchFamily="34" charset="-122"/>
                 <a:cs typeface="Arial" pitchFamily="34" charset="-120"/>
               </a:rPr>
-              <a:t>Vì sao cần bốn vệ tinh: mỗi vệ tinh cho một mặt cầu, bốn mặt cầu cắt nhau tại một điểm</a:t>
+              <a:t>Vì sao cần bốn vệ tinh: bốn mặt cầu cắt nhau tại một điểm</a:t>
             </a:r>
             <a:endParaRPr lang="en-US" sz="1700" dirty="0"/>
           </a:p>
@@ -10406,7 +10692,7 @@
                 <a:ea typeface="微軟正黑體" pitchFamily="34" charset="-122"/>
                 <a:cs typeface="微軟正黑體" pitchFamily="34" charset="-120"/>
               </a:rPr>
-              <a:t>為什麼要四顆衛星：每一顆給一個球面，四個球面交在一個點</a:t>
+              <a:t>為什麼要四顆衛星：四個球面交在一個點</a:t>
             </a:r>
             <a:endParaRPr lang="en-US" sz="1700" dirty="0"/>
           </a:p>
@@ -10420,12 +10706,12 @@
         </p:nvSpPr>
         <p:spPr>
           <a:xfrm>
-            <a:off x="502920" y="1434675"/>
-            <a:ext cx="3904488" cy="2387517"/>
+            <a:off x="502920" y="1255628"/>
+            <a:ext cx="3904488" cy="2566564"/>
           </a:xfrm>
           <a:prstGeom prst="roundRect">
             <a:avLst>
-              <a:gd name="adj" fmla="val 3830"/>
+              <a:gd name="adj" fmla="val 3563"/>
             </a:avLst>
           </a:prstGeom>
           <a:solidFill>
@@ -10455,7 +10741,7 @@
         </p:blipFill>
         <p:spPr>
           <a:xfrm>
-            <a:off x="548640" y="1635208"/>
+            <a:off x="548640" y="1545684"/>
             <a:ext cx="3813048" cy="1803572"/>
           </a:xfrm>
           <a:prstGeom prst="rect">
@@ -10510,12 +10796,12 @@
         </p:nvSpPr>
         <p:spPr>
           <a:xfrm>
-            <a:off x="4736592" y="1434675"/>
-            <a:ext cx="3904488" cy="2387517"/>
+            <a:off x="4736592" y="1255628"/>
+            <a:ext cx="3904488" cy="2566564"/>
           </a:xfrm>
           <a:prstGeom prst="roundRect">
             <a:avLst>
-              <a:gd name="adj" fmla="val 3830"/>
+              <a:gd name="adj" fmla="val 3563"/>
             </a:avLst>
           </a:prstGeom>
           <a:solidFill>
@@ -10537,7 +10823,7 @@
         </p:nvSpPr>
         <p:spPr>
           <a:xfrm>
-            <a:off x="4919472" y="1599267"/>
+            <a:off x="4919472" y="1420220"/>
             <a:ext cx="347472" cy="347472"/>
           </a:xfrm>
           <a:prstGeom prst="ellipse">
@@ -10557,7 +10843,7 @@
         </p:nvSpPr>
         <p:spPr>
           <a:xfrm>
-            <a:off x="4919472" y="1644987"/>
+            <a:off x="4919472" y="1465940"/>
             <a:ext cx="347472" cy="256032"/>
           </a:xfrm>
           <a:prstGeom prst="rect">
@@ -10596,7 +10882,7 @@
         </p:nvSpPr>
         <p:spPr>
           <a:xfrm>
-            <a:off x="5340096" y="1580979"/>
+            <a:off x="5340096" y="1401932"/>
             <a:ext cx="3118104" cy="420624"/>
           </a:xfrm>
           <a:prstGeom prst="rect">
@@ -10635,7 +10921,7 @@
         </p:nvSpPr>
         <p:spPr>
           <a:xfrm>
-            <a:off x="4919472" y="2038179"/>
+            <a:off x="4919472" y="1859132"/>
             <a:ext cx="3538728" cy="201168"/>
           </a:xfrm>
           <a:prstGeom prst="rect">
@@ -10676,7 +10962,7 @@
         </p:nvSpPr>
         <p:spPr>
           <a:xfrm>
-            <a:off x="4919472" y="2221059"/>
+            <a:off x="4919472" y="2042012"/>
             <a:ext cx="3538728" cy="201168"/>
           </a:xfrm>
           <a:prstGeom prst="rect">
@@ -10722,7 +11008,7 @@
         </p:nvSpPr>
         <p:spPr>
           <a:xfrm>
-            <a:off x="4919472" y="2495379"/>
+            <a:off x="4919472" y="2316332"/>
             <a:ext cx="36576" cy="237744"/>
           </a:xfrm>
           <a:prstGeom prst="rect">
@@ -10742,7 +11028,7 @@
         </p:nvSpPr>
         <p:spPr>
           <a:xfrm>
-            <a:off x="5047488" y="2458803"/>
+            <a:off x="5047488" y="2279756"/>
             <a:ext cx="3429000" cy="313748"/>
           </a:xfrm>
           <a:prstGeom prst="rect">
@@ -10804,7 +11090,7 @@
         </p:nvSpPr>
         <p:spPr>
           <a:xfrm>
-            <a:off x="4919472" y="2845702"/>
+            <a:off x="4919472" y="2666656"/>
             <a:ext cx="36576" cy="237744"/>
           </a:xfrm>
           <a:prstGeom prst="rect">
@@ -10824,7 +11110,7 @@
         </p:nvSpPr>
         <p:spPr>
           <a:xfrm>
-            <a:off x="5047488" y="2809126"/>
+            <a:off x="5047488" y="2630080"/>
             <a:ext cx="3429000" cy="456079"/>
           </a:xfrm>
           <a:prstGeom prst="rect">
@@ -10886,7 +11172,7 @@
         </p:nvSpPr>
         <p:spPr>
           <a:xfrm>
-            <a:off x="4919472" y="3338358"/>
+            <a:off x="4919472" y="3159311"/>
             <a:ext cx="36576" cy="237744"/>
           </a:xfrm>
           <a:prstGeom prst="rect">
@@ -10906,7 +11192,7 @@
         </p:nvSpPr>
         <p:spPr>
           <a:xfrm>
-            <a:off x="5047488" y="3301782"/>
+            <a:off x="5047488" y="3122735"/>
             <a:ext cx="3429000" cy="456079"/>
           </a:xfrm>
           <a:prstGeom prst="rect">
@@ -11519,7 +11805,7 @@
         <p:spPr>
           <a:xfrm>
             <a:off x="3209544" y="1400190"/>
-            <a:ext cx="5431536" cy="726780"/>
+            <a:ext cx="5431536" cy="807965"/>
           </a:xfrm>
           <a:prstGeom prst="rect">
             <a:avLst/>
@@ -11580,7 +11866,7 @@
         </p:nvSpPr>
         <p:spPr>
           <a:xfrm>
-            <a:off x="2295144" y="2190978"/>
+            <a:off x="2295144" y="2272163"/>
             <a:ext cx="786384" cy="283464"/>
           </a:xfrm>
           <a:prstGeom prst="roundRect">
@@ -11602,7 +11888,7 @@
         </p:nvSpPr>
         <p:spPr>
           <a:xfrm>
-            <a:off x="2295144" y="2213838"/>
+            <a:off x="2295144" y="2295023"/>
             <a:ext cx="786384" cy="256032"/>
           </a:xfrm>
           <a:prstGeom prst="rect">
@@ -11664,8 +11950,8 @@
         </p:nvSpPr>
         <p:spPr>
           <a:xfrm>
-            <a:off x="3209544" y="2190978"/>
-            <a:ext cx="5431536" cy="566800"/>
+            <a:off x="3209544" y="2272163"/>
+            <a:ext cx="5431536" cy="635187"/>
           </a:xfrm>
           <a:prstGeom prst="rect">
             <a:avLst/>
@@ -11726,7 +12012,7 @@
         </p:nvSpPr>
         <p:spPr>
           <a:xfrm>
-            <a:off x="2295144" y="2821786"/>
+            <a:off x="2295144" y="2971358"/>
             <a:ext cx="786384" cy="283464"/>
           </a:xfrm>
           <a:prstGeom prst="roundRect">
@@ -11748,7 +12034,7 @@
         </p:nvSpPr>
         <p:spPr>
           <a:xfrm>
-            <a:off x="2295144" y="2844646"/>
+            <a:off x="2295144" y="2994218"/>
             <a:ext cx="786384" cy="256032"/>
           </a:xfrm>
           <a:prstGeom prst="rect">
@@ -11810,8 +12096,8 @@
         </p:nvSpPr>
         <p:spPr>
           <a:xfrm>
-            <a:off x="3209544" y="2821786"/>
-            <a:ext cx="5431536" cy="566800"/>
+            <a:off x="3209544" y="2971358"/>
+            <a:ext cx="5431536" cy="635187"/>
           </a:xfrm>
           <a:prstGeom prst="rect">
             <a:avLst/>
@@ -12128,7 +12414,7 @@
         <p:spPr>
           <a:xfrm>
             <a:off x="502920" y="676656"/>
-            <a:ext cx="8138160" cy="713232"/>
+            <a:ext cx="8138160" cy="560684"/>
           </a:xfrm>
           <a:prstGeom prst="rect">
             <a:avLst/>
@@ -12189,12 +12475,12 @@
         </p:nvSpPr>
         <p:spPr>
           <a:xfrm>
-            <a:off x="502920" y="1243584"/>
-            <a:ext cx="3904488" cy="2578608"/>
+            <a:off x="502920" y="1255628"/>
+            <a:ext cx="3904488" cy="2566564"/>
           </a:xfrm>
           <a:prstGeom prst="roundRect">
             <a:avLst>
-              <a:gd name="adj" fmla="val 3546"/>
+              <a:gd name="adj" fmla="val 3563"/>
             </a:avLst>
           </a:prstGeom>
           <a:solidFill>
@@ -12224,8 +12510,8 @@
         </p:blipFill>
         <p:spPr>
           <a:xfrm>
-            <a:off x="977347" y="1289304"/>
-            <a:ext cx="2955633" cy="2304288"/>
+            <a:off x="985072" y="1301348"/>
+            <a:ext cx="2940185" cy="2292244"/>
           </a:xfrm>
           <a:prstGeom prst="rect">
             <a:avLst/>
@@ -12279,12 +12565,12 @@
         </p:nvSpPr>
         <p:spPr>
           <a:xfrm>
-            <a:off x="4736592" y="1243584"/>
-            <a:ext cx="3904488" cy="2578608"/>
+            <a:off x="4736592" y="1255628"/>
+            <a:ext cx="3904488" cy="2566564"/>
           </a:xfrm>
           <a:prstGeom prst="roundRect">
             <a:avLst>
-              <a:gd name="adj" fmla="val 3546"/>
+              <a:gd name="adj" fmla="val 3563"/>
             </a:avLst>
           </a:prstGeom>
           <a:solidFill>
@@ -12306,7 +12592,7 @@
         </p:nvSpPr>
         <p:spPr>
           <a:xfrm>
-            <a:off x="4919472" y="1408176"/>
+            <a:off x="4919472" y="1420220"/>
             <a:ext cx="347472" cy="347472"/>
           </a:xfrm>
           <a:prstGeom prst="ellipse">
@@ -12326,7 +12612,7 @@
         </p:nvSpPr>
         <p:spPr>
           <a:xfrm>
-            <a:off x="4919472" y="1453896"/>
+            <a:off x="4919472" y="1465940"/>
             <a:ext cx="347472" cy="256032"/>
           </a:xfrm>
           <a:prstGeom prst="rect">
@@ -12365,7 +12651,7 @@
         </p:nvSpPr>
         <p:spPr>
           <a:xfrm>
-            <a:off x="5340096" y="1389888"/>
+            <a:off x="5340096" y="1401932"/>
             <a:ext cx="3118104" cy="420624"/>
           </a:xfrm>
           <a:prstGeom prst="rect">
@@ -12404,7 +12690,7 @@
         </p:nvSpPr>
         <p:spPr>
           <a:xfrm>
-            <a:off x="4919472" y="1847088"/>
+            <a:off x="4919472" y="1859132"/>
             <a:ext cx="3538728" cy="201168"/>
           </a:xfrm>
           <a:prstGeom prst="rect">
@@ -12445,7 +12731,7 @@
         </p:nvSpPr>
         <p:spPr>
           <a:xfrm>
-            <a:off x="4919472" y="2029968"/>
+            <a:off x="4919472" y="2042012"/>
             <a:ext cx="3538728" cy="201168"/>
           </a:xfrm>
           <a:prstGeom prst="rect">
@@ -12491,7 +12777,7 @@
         </p:nvSpPr>
         <p:spPr>
           <a:xfrm>
-            <a:off x="4919472" y="2304288"/>
+            <a:off x="4919472" y="2316332"/>
             <a:ext cx="36576" cy="237744"/>
           </a:xfrm>
           <a:prstGeom prst="rect">
@@ -12511,7 +12797,7 @@
         </p:nvSpPr>
         <p:spPr>
           <a:xfrm>
-            <a:off x="5047488" y="2267712"/>
+            <a:off x="5047488" y="2279756"/>
             <a:ext cx="3429000" cy="456079"/>
           </a:xfrm>
           <a:prstGeom prst="rect">
@@ -12573,7 +12859,7 @@
         </p:nvSpPr>
         <p:spPr>
           <a:xfrm>
-            <a:off x="4919472" y="2796943"/>
+            <a:off x="4919472" y="2808987"/>
             <a:ext cx="36576" cy="237744"/>
           </a:xfrm>
           <a:prstGeom prst="rect">
@@ -12593,7 +12879,7 @@
         </p:nvSpPr>
         <p:spPr>
           <a:xfrm>
-            <a:off x="5047488" y="2760367"/>
+            <a:off x="5047488" y="2772411"/>
             <a:ext cx="3429000" cy="456079"/>
           </a:xfrm>
           <a:prstGeom prst="rect">
@@ -12655,7 +12941,7 @@
         </p:nvSpPr>
         <p:spPr>
           <a:xfrm>
-            <a:off x="4919472" y="3289598"/>
+            <a:off x="4919472" y="3301642"/>
             <a:ext cx="36576" cy="237744"/>
           </a:xfrm>
           <a:prstGeom prst="rect">
@@ -12675,7 +12961,7 @@
         </p:nvSpPr>
         <p:spPr>
           <a:xfrm>
-            <a:off x="5047488" y="3253022"/>
+            <a:off x="5047488" y="3265066"/>
             <a:ext cx="3429000" cy="313748"/>
           </a:xfrm>
           <a:prstGeom prst="rect">
@@ -18391,7 +18677,7 @@
         <p:spPr>
           <a:xfrm>
             <a:off x="3209544" y="1665299"/>
-            <a:ext cx="5431536" cy="566800"/>
+            <a:ext cx="5431536" cy="635187"/>
           </a:xfrm>
           <a:prstGeom prst="rect">
             <a:avLst/>
@@ -18452,7 +18738,7 @@
         </p:nvSpPr>
         <p:spPr>
           <a:xfrm>
-            <a:off x="2295144" y="2296107"/>
+            <a:off x="2295144" y="2364494"/>
             <a:ext cx="786384" cy="283464"/>
           </a:xfrm>
           <a:prstGeom prst="roundRect">
@@ -18474,7 +18760,7 @@
         </p:nvSpPr>
         <p:spPr>
           <a:xfrm>
-            <a:off x="2295144" y="2318967"/>
+            <a:off x="2295144" y="2387354"/>
             <a:ext cx="786384" cy="256032"/>
           </a:xfrm>
           <a:prstGeom prst="rect">
@@ -18536,8 +18822,8 @@
         </p:nvSpPr>
         <p:spPr>
           <a:xfrm>
-            <a:off x="3209544" y="2296107"/>
-            <a:ext cx="5431536" cy="566800"/>
+            <a:off x="3209544" y="2364494"/>
+            <a:ext cx="5431536" cy="635187"/>
           </a:xfrm>
           <a:prstGeom prst="rect">
             <a:avLst/>
@@ -18598,7 +18884,7 @@
         </p:nvSpPr>
         <p:spPr>
           <a:xfrm>
-            <a:off x="2295144" y="2926915"/>
+            <a:off x="2295144" y="3063689"/>
             <a:ext cx="786384" cy="283464"/>
           </a:xfrm>
           <a:prstGeom prst="roundRect">
@@ -18620,7 +18906,7 @@
         </p:nvSpPr>
         <p:spPr>
           <a:xfrm>
-            <a:off x="2295144" y="2949775"/>
+            <a:off x="2295144" y="3086549"/>
             <a:ext cx="786384" cy="256032"/>
           </a:xfrm>
           <a:prstGeom prst="rect">
@@ -18682,8 +18968,8 @@
         </p:nvSpPr>
         <p:spPr>
           <a:xfrm>
-            <a:off x="3209544" y="2926915"/>
-            <a:ext cx="5431536" cy="566800"/>
+            <a:off x="3209544" y="3063689"/>
+            <a:ext cx="5431536" cy="635187"/>
           </a:xfrm>
           <a:prstGeom prst="rect">
             <a:avLst/>
@@ -19000,7 +19286,7 @@
         <p:spPr>
           <a:xfrm>
             <a:off x="502920" y="676656"/>
-            <a:ext cx="8138160" cy="713232"/>
+            <a:ext cx="8138160" cy="560684"/>
           </a:xfrm>
           <a:prstGeom prst="rect">
             <a:avLst/>
@@ -19061,12 +19347,12 @@
         </p:nvSpPr>
         <p:spPr>
           <a:xfrm>
-            <a:off x="502920" y="1243584"/>
-            <a:ext cx="3904488" cy="2578608"/>
+            <a:off x="502920" y="1255628"/>
+            <a:ext cx="3904488" cy="2566564"/>
           </a:xfrm>
           <a:prstGeom prst="roundRect">
             <a:avLst>
-              <a:gd name="adj" fmla="val 3546"/>
+              <a:gd name="adj" fmla="val 3563"/>
             </a:avLst>
           </a:prstGeom>
           <a:solidFill>
@@ -19088,8 +19374,8 @@
         </p:nvSpPr>
         <p:spPr>
           <a:xfrm>
-            <a:off x="539496" y="2326599"/>
-            <a:ext cx="3831336" cy="1459017"/>
+            <a:off x="539496" y="2333585"/>
+            <a:ext cx="3831336" cy="1452031"/>
           </a:xfrm>
           <a:prstGeom prst="rect">
             <a:avLst/>
@@ -19108,8 +19394,8 @@
         </p:nvSpPr>
         <p:spPr>
           <a:xfrm flipH="1">
-            <a:off x="815279" y="2326599"/>
-            <a:ext cx="1548445" cy="1440729"/>
+            <a:off x="815279" y="2333585"/>
+            <a:ext cx="1548445" cy="1433743"/>
           </a:xfrm>
           <a:prstGeom prst="line">
             <a:avLst/>
@@ -19133,8 +19419,8 @@
         </p:nvSpPr>
         <p:spPr>
           <a:xfrm>
-            <a:off x="2546604" y="2326599"/>
-            <a:ext cx="1548445" cy="1440729"/>
+            <a:off x="2546604" y="2333585"/>
+            <a:ext cx="1548445" cy="1433743"/>
           </a:xfrm>
           <a:prstGeom prst="line">
             <a:avLst/>
@@ -19158,8 +19444,8 @@
         </p:nvSpPr>
         <p:spPr>
           <a:xfrm>
-            <a:off x="1276804" y="2548628"/>
-            <a:ext cx="136769" cy="136769"/>
+            <a:off x="1276837" y="2554576"/>
+            <a:ext cx="136131" cy="136131"/>
           </a:xfrm>
           <a:prstGeom prst="ellipse">
             <a:avLst/>
@@ -19178,12 +19464,12 @@
         </p:nvSpPr>
         <p:spPr>
           <a:xfrm>
-            <a:off x="1235773" y="2699074"/>
-            <a:ext cx="218831" cy="246185"/>
+            <a:off x="1235997" y="2704320"/>
+            <a:ext cx="217809" cy="245035"/>
           </a:xfrm>
           <a:prstGeom prst="roundRect">
             <a:avLst>
-              <a:gd name="adj" fmla="val 117000"/>
+              <a:gd name="adj" fmla="val 117549"/>
             </a:avLst>
           </a:prstGeom>
           <a:solidFill>
@@ -19200,8 +19486,8 @@
         </p:nvSpPr>
         <p:spPr>
           <a:xfrm rot="960000">
-            <a:off x="1198161" y="2719590"/>
-            <a:ext cx="54708" cy="177800"/>
+            <a:off x="1198561" y="2724740"/>
+            <a:ext cx="54452" cy="176970"/>
           </a:xfrm>
           <a:prstGeom prst="rect">
             <a:avLst/>
@@ -19220,8 +19506,8 @@
         </p:nvSpPr>
         <p:spPr>
           <a:xfrm rot="-960000">
-            <a:off x="1437508" y="2719590"/>
-            <a:ext cx="54708" cy="177800"/>
+            <a:off x="1436790" y="2724740"/>
+            <a:ext cx="54452" cy="176970"/>
           </a:xfrm>
           <a:prstGeom prst="rect">
             <a:avLst/>
@@ -19240,8 +19526,8 @@
         </p:nvSpPr>
         <p:spPr>
           <a:xfrm rot="300000">
-            <a:off x="1273385" y="2911067"/>
-            <a:ext cx="61546" cy="246185"/>
+            <a:off x="1273433" y="2915322"/>
+            <a:ext cx="61259" cy="245035"/>
           </a:xfrm>
           <a:prstGeom prst="rect">
             <a:avLst/>
@@ -19260,8 +19546,8 @@
         </p:nvSpPr>
         <p:spPr>
           <a:xfrm rot="-300000">
-            <a:off x="1355446" y="2911067"/>
-            <a:ext cx="61546" cy="246185"/>
+            <a:off x="1355112" y="2915322"/>
+            <a:ext cx="61259" cy="245035"/>
           </a:xfrm>
           <a:prstGeom prst="rect">
             <a:avLst/>
@@ -19280,8 +19566,8 @@
         </p:nvSpPr>
         <p:spPr>
           <a:xfrm>
-            <a:off x="893369" y="2429744"/>
-            <a:ext cx="780898" cy="876727"/>
+            <a:off x="893369" y="2436248"/>
+            <a:ext cx="780898" cy="872632"/>
           </a:xfrm>
           <a:prstGeom prst="rect">
             <a:avLst/>
@@ -19302,7 +19588,7 @@
         </p:nvSpPr>
         <p:spPr>
           <a:xfrm>
-            <a:off x="893369" y="2256008"/>
+            <a:off x="893369" y="2262512"/>
             <a:ext cx="786384" cy="173736"/>
           </a:xfrm>
           <a:prstGeom prst="rect">
@@ -19322,7 +19608,7 @@
         </p:nvSpPr>
         <p:spPr>
           <a:xfrm>
-            <a:off x="920801" y="2260580"/>
+            <a:off x="920801" y="2267084"/>
             <a:ext cx="786384" cy="164592"/>
           </a:xfrm>
           <a:prstGeom prst="rect">
@@ -19361,12 +19647,12 @@
         </p:nvSpPr>
         <p:spPr>
           <a:xfrm>
-            <a:off x="3129786" y="2891211"/>
-            <a:ext cx="555123" cy="168950"/>
+            <a:off x="3130829" y="2895560"/>
+            <a:ext cx="552530" cy="168161"/>
           </a:xfrm>
           <a:prstGeom prst="roundRect">
             <a:avLst>
-              <a:gd name="adj" fmla="val 162368"/>
+              <a:gd name="adj" fmla="val 163129"/>
             </a:avLst>
           </a:prstGeom>
           <a:solidFill>
@@ -19383,8 +19669,8 @@
         </p:nvSpPr>
         <p:spPr>
           <a:xfrm>
-            <a:off x="3250464" y="2770533"/>
-            <a:ext cx="301697" cy="132747"/>
+            <a:off x="3250944" y="2775445"/>
+            <a:ext cx="300288" cy="132127"/>
           </a:xfrm>
           <a:prstGeom prst="trapezoid">
             <a:avLst/>
@@ -19405,8 +19691,8 @@
         </p:nvSpPr>
         <p:spPr>
           <a:xfrm>
-            <a:off x="3202193" y="3023958"/>
-            <a:ext cx="120679" cy="120679"/>
+            <a:off x="3202898" y="3027687"/>
+            <a:ext cx="120115" cy="120115"/>
           </a:xfrm>
           <a:prstGeom prst="ellipse">
             <a:avLst/>
@@ -19425,8 +19711,8 @@
         </p:nvSpPr>
         <p:spPr>
           <a:xfrm>
-            <a:off x="3491822" y="3023958"/>
-            <a:ext cx="120679" cy="120679"/>
+            <a:off x="3491175" y="3027687"/>
+            <a:ext cx="120115" cy="120115"/>
           </a:xfrm>
           <a:prstGeom prst="ellipse">
             <a:avLst/>
@@ -19445,8 +19731,8 @@
         </p:nvSpPr>
         <p:spPr>
           <a:xfrm>
-            <a:off x="3232363" y="3054128"/>
-            <a:ext cx="60339" cy="60339"/>
+            <a:off x="3232927" y="3057715"/>
+            <a:ext cx="60058" cy="60058"/>
           </a:xfrm>
           <a:prstGeom prst="ellipse">
             <a:avLst/>
@@ -19465,8 +19751,8 @@
         </p:nvSpPr>
         <p:spPr>
           <a:xfrm>
-            <a:off x="3521992" y="3054128"/>
-            <a:ext cx="60339" cy="60339"/>
+            <a:off x="3521204" y="3057715"/>
+            <a:ext cx="60058" cy="60058"/>
           </a:xfrm>
           <a:prstGeom prst="ellipse">
             <a:avLst/>
@@ -19485,8 +19771,8 @@
         </p:nvSpPr>
         <p:spPr>
           <a:xfrm>
-            <a:off x="2767523" y="2532888"/>
-            <a:ext cx="1171346" cy="773582"/>
+            <a:off x="2767523" y="2538910"/>
+            <a:ext cx="1171346" cy="769969"/>
           </a:xfrm>
           <a:prstGeom prst="rect">
             <a:avLst/>
@@ -19507,7 +19793,7 @@
         </p:nvSpPr>
         <p:spPr>
           <a:xfrm>
-            <a:off x="2767523" y="2359152"/>
+            <a:off x="2767523" y="2365174"/>
             <a:ext cx="1171346" cy="173736"/>
           </a:xfrm>
           <a:prstGeom prst="rect">
@@ -19527,7 +19813,7 @@
         </p:nvSpPr>
         <p:spPr>
           <a:xfrm>
-            <a:off x="2794955" y="2363724"/>
+            <a:off x="2794955" y="2369746"/>
             <a:ext cx="1171346" cy="164592"/>
           </a:xfrm>
           <a:prstGeom prst="rect">
@@ -19566,8 +19852,8 @@
         </p:nvSpPr>
         <p:spPr>
           <a:xfrm>
-            <a:off x="2145929" y="1537545"/>
-            <a:ext cx="345157" cy="443521"/>
+            <a:off x="2145929" y="1548216"/>
+            <a:ext cx="345157" cy="441449"/>
           </a:xfrm>
           <a:prstGeom prst="roundRect">
             <a:avLst>
@@ -19588,7 +19874,7 @@
         </p:nvSpPr>
         <p:spPr>
           <a:xfrm>
-            <a:off x="2221863" y="1577462"/>
+            <a:off x="2221863" y="1587947"/>
             <a:ext cx="193288" cy="193288"/>
           </a:xfrm>
           <a:prstGeom prst="ellipse">
@@ -19608,7 +19894,7 @@
         </p:nvSpPr>
         <p:spPr>
           <a:xfrm>
-            <a:off x="2221863" y="1710518"/>
+            <a:off x="2221863" y="1720382"/>
             <a:ext cx="193288" cy="193288"/>
           </a:xfrm>
           <a:prstGeom prst="ellipse">
@@ -19628,7 +19914,7 @@
         </p:nvSpPr>
         <p:spPr>
           <a:xfrm>
-            <a:off x="2221863" y="1843575"/>
+            <a:off x="2221863" y="1852816"/>
             <a:ext cx="193288" cy="193288"/>
           </a:xfrm>
           <a:prstGeom prst="ellipse">
@@ -19648,8 +19934,8 @@
         </p:nvSpPr>
         <p:spPr>
           <a:xfrm>
-            <a:off x="1986625" y="1501445"/>
-            <a:ext cx="663763" cy="515722"/>
+            <a:off x="1986625" y="1512285"/>
+            <a:ext cx="663763" cy="513313"/>
           </a:xfrm>
           <a:prstGeom prst="rect">
             <a:avLst/>
@@ -19670,7 +19956,7 @@
         </p:nvSpPr>
         <p:spPr>
           <a:xfrm>
-            <a:off x="1986625" y="1327709"/>
+            <a:off x="1986625" y="1338549"/>
             <a:ext cx="786384" cy="173736"/>
           </a:xfrm>
           <a:prstGeom prst="rect">
@@ -19690,7 +19976,7 @@
         </p:nvSpPr>
         <p:spPr>
           <a:xfrm>
-            <a:off x="2014057" y="1332281"/>
+            <a:off x="2014057" y="1343121"/>
             <a:ext cx="786384" cy="164592"/>
           </a:xfrm>
           <a:prstGeom prst="rect">
@@ -19813,12 +20099,12 @@
         </p:nvSpPr>
         <p:spPr>
           <a:xfrm>
-            <a:off x="4736592" y="1243584"/>
-            <a:ext cx="3904488" cy="2578608"/>
+            <a:off x="4736592" y="1255628"/>
+            <a:ext cx="3904488" cy="2566564"/>
           </a:xfrm>
           <a:prstGeom prst="roundRect">
             <a:avLst>
-              <a:gd name="adj" fmla="val 3546"/>
+              <a:gd name="adj" fmla="val 3563"/>
             </a:avLst>
           </a:prstGeom>
           <a:solidFill>
@@ -19840,7 +20126,7 @@
         </p:nvSpPr>
         <p:spPr>
           <a:xfrm>
-            <a:off x="4919472" y="1408176"/>
+            <a:off x="4919472" y="1420220"/>
             <a:ext cx="347472" cy="347472"/>
           </a:xfrm>
           <a:prstGeom prst="ellipse">
@@ -19860,7 +20146,7 @@
         </p:nvSpPr>
         <p:spPr>
           <a:xfrm>
-            <a:off x="4919472" y="1453896"/>
+            <a:off x="4919472" y="1465940"/>
             <a:ext cx="347472" cy="256032"/>
           </a:xfrm>
           <a:prstGeom prst="rect">
@@ -19899,7 +20185,7 @@
         </p:nvSpPr>
         <p:spPr>
           <a:xfrm>
-            <a:off x="5340096" y="1389888"/>
+            <a:off x="5340096" y="1401932"/>
             <a:ext cx="3118104" cy="420624"/>
           </a:xfrm>
           <a:prstGeom prst="rect">
@@ -19938,7 +20224,7 @@
         </p:nvSpPr>
         <p:spPr>
           <a:xfrm>
-            <a:off x="4919472" y="1847088"/>
+            <a:off x="4919472" y="1859132"/>
             <a:ext cx="3538728" cy="201168"/>
           </a:xfrm>
           <a:prstGeom prst="rect">
@@ -19979,7 +20265,7 @@
         </p:nvSpPr>
         <p:spPr>
           <a:xfrm>
-            <a:off x="4919472" y="2029968"/>
+            <a:off x="4919472" y="2042012"/>
             <a:ext cx="3538728" cy="201168"/>
           </a:xfrm>
           <a:prstGeom prst="rect">
@@ -20025,7 +20311,7 @@
         </p:nvSpPr>
         <p:spPr>
           <a:xfrm>
-            <a:off x="4919472" y="2304288"/>
+            <a:off x="4919472" y="2316332"/>
             <a:ext cx="36576" cy="237744"/>
           </a:xfrm>
           <a:prstGeom prst="rect">
@@ -20045,7 +20331,7 @@
         </p:nvSpPr>
         <p:spPr>
           <a:xfrm>
-            <a:off x="5047488" y="2267712"/>
+            <a:off x="5047488" y="2279756"/>
             <a:ext cx="3429000" cy="456079"/>
           </a:xfrm>
           <a:prstGeom prst="rect">
@@ -20107,7 +20393,7 @@
         </p:nvSpPr>
         <p:spPr>
           <a:xfrm>
-            <a:off x="4919472" y="2796943"/>
+            <a:off x="4919472" y="2808987"/>
             <a:ext cx="36576" cy="237744"/>
           </a:xfrm>
           <a:prstGeom prst="rect">
@@ -20127,7 +20413,7 @@
         </p:nvSpPr>
         <p:spPr>
           <a:xfrm>
-            <a:off x="5047488" y="2760367"/>
+            <a:off x="5047488" y="2772411"/>
             <a:ext cx="3429000" cy="313748"/>
           </a:xfrm>
           <a:prstGeom prst="rect">
@@ -20189,7 +20475,7 @@
         </p:nvSpPr>
         <p:spPr>
           <a:xfrm>
-            <a:off x="4919472" y="3147267"/>
+            <a:off x="4919472" y="3159311"/>
             <a:ext cx="36576" cy="237744"/>
           </a:xfrm>
           <a:prstGeom prst="rect">
@@ -20209,7 +20495,7 @@
         </p:nvSpPr>
         <p:spPr>
           <a:xfrm>
-            <a:off x="5047488" y="3110691"/>
+            <a:off x="5047488" y="3122735"/>
             <a:ext cx="3429000" cy="313748"/>
           </a:xfrm>
           <a:prstGeom prst="rect">
@@ -20914,7 +21200,7 @@
         <p:spPr>
           <a:xfrm>
             <a:off x="3209544" y="1400190"/>
-            <a:ext cx="5431536" cy="566800"/>
+            <a:ext cx="5431536" cy="635187"/>
           </a:xfrm>
           <a:prstGeom prst="rect">
             <a:avLst/>
@@ -20975,7 +21261,7 @@
         </p:nvSpPr>
         <p:spPr>
           <a:xfrm>
-            <a:off x="2295144" y="2030998"/>
+            <a:off x="2295144" y="2099385"/>
             <a:ext cx="786384" cy="283464"/>
           </a:xfrm>
           <a:prstGeom prst="roundRect">
@@ -20997,7 +21283,7 @@
         </p:nvSpPr>
         <p:spPr>
           <a:xfrm>
-            <a:off x="2295144" y="2053858"/>
+            <a:off x="2295144" y="2122245"/>
             <a:ext cx="786384" cy="256032"/>
           </a:xfrm>
           <a:prstGeom prst="rect">
@@ -21059,8 +21345,8 @@
         </p:nvSpPr>
         <p:spPr>
           <a:xfrm>
-            <a:off x="3209544" y="2030998"/>
-            <a:ext cx="5431536" cy="566800"/>
+            <a:off x="3209544" y="2099385"/>
+            <a:ext cx="5431536" cy="635187"/>
           </a:xfrm>
           <a:prstGeom prst="rect">
             <a:avLst/>
@@ -21121,7 +21407,7 @@
         </p:nvSpPr>
         <p:spPr>
           <a:xfrm>
-            <a:off x="2295144" y="2661806"/>
+            <a:off x="2295144" y="2798579"/>
             <a:ext cx="786384" cy="283464"/>
           </a:xfrm>
           <a:prstGeom prst="roundRect">
@@ -21143,7 +21429,7 @@
         </p:nvSpPr>
         <p:spPr>
           <a:xfrm>
-            <a:off x="2295144" y="2684666"/>
+            <a:off x="2295144" y="2821439"/>
             <a:ext cx="786384" cy="256032"/>
           </a:xfrm>
           <a:prstGeom prst="rect">
@@ -21205,8 +21491,8 @@
         </p:nvSpPr>
         <p:spPr>
           <a:xfrm>
-            <a:off x="3209544" y="2661806"/>
-            <a:ext cx="5431536" cy="566800"/>
+            <a:off x="3209544" y="2798579"/>
+            <a:ext cx="5431536" cy="635187"/>
           </a:xfrm>
           <a:prstGeom prst="rect">
             <a:avLst/>
@@ -21523,7 +21809,7 @@
         <p:spPr>
           <a:xfrm>
             <a:off x="502920" y="676656"/>
-            <a:ext cx="8138160" cy="713232"/>
+            <a:ext cx="8138160" cy="560684"/>
           </a:xfrm>
           <a:prstGeom prst="rect">
             <a:avLst/>
@@ -21584,12 +21870,12 @@
         </p:nvSpPr>
         <p:spPr>
           <a:xfrm>
-            <a:off x="502920" y="1243584"/>
-            <a:ext cx="3904488" cy="2578608"/>
+            <a:off x="502920" y="1255628"/>
+            <a:ext cx="3904488" cy="2566564"/>
           </a:xfrm>
           <a:prstGeom prst="roundRect">
             <a:avLst>
-              <a:gd name="adj" fmla="val 3546"/>
+              <a:gd name="adj" fmla="val 3563"/>
             </a:avLst>
           </a:prstGeom>
           <a:solidFill>
@@ -21619,8 +21905,8 @@
         </p:blipFill>
         <p:spPr>
           <a:xfrm>
-            <a:off x="863805" y="1289304"/>
-            <a:ext cx="3182718" cy="2304288"/>
+            <a:off x="872123" y="1301348"/>
+            <a:ext cx="3166083" cy="2292244"/>
           </a:xfrm>
           <a:prstGeom prst="rect">
             <a:avLst/>
@@ -21674,12 +21960,12 @@
         </p:nvSpPr>
         <p:spPr>
           <a:xfrm>
-            <a:off x="4736592" y="1243584"/>
-            <a:ext cx="3904488" cy="2578608"/>
+            <a:off x="4736592" y="1255628"/>
+            <a:ext cx="3904488" cy="2566564"/>
           </a:xfrm>
           <a:prstGeom prst="roundRect">
             <a:avLst>
-              <a:gd name="adj" fmla="val 3546"/>
+              <a:gd name="adj" fmla="val 3563"/>
             </a:avLst>
           </a:prstGeom>
           <a:solidFill>
@@ -21701,7 +21987,7 @@
         </p:nvSpPr>
         <p:spPr>
           <a:xfrm>
-            <a:off x="4919472" y="1408176"/>
+            <a:off x="4919472" y="1420220"/>
             <a:ext cx="347472" cy="347472"/>
           </a:xfrm>
           <a:prstGeom prst="ellipse">
@@ -21721,7 +22007,7 @@
         </p:nvSpPr>
         <p:spPr>
           <a:xfrm>
-            <a:off x="4919472" y="1453896"/>
+            <a:off x="4919472" y="1465940"/>
             <a:ext cx="347472" cy="256032"/>
           </a:xfrm>
           <a:prstGeom prst="rect">
@@ -21760,7 +22046,7 @@
         </p:nvSpPr>
         <p:spPr>
           <a:xfrm>
-            <a:off x="5340096" y="1389888"/>
+            <a:off x="5340096" y="1401932"/>
             <a:ext cx="3118104" cy="420624"/>
           </a:xfrm>
           <a:prstGeom prst="rect">
@@ -21799,7 +22085,7 @@
         </p:nvSpPr>
         <p:spPr>
           <a:xfrm>
-            <a:off x="4919472" y="1847088"/>
+            <a:off x="4919472" y="1859132"/>
             <a:ext cx="3538728" cy="201168"/>
           </a:xfrm>
           <a:prstGeom prst="rect">
@@ -21840,7 +22126,7 @@
         </p:nvSpPr>
         <p:spPr>
           <a:xfrm>
-            <a:off x="4919472" y="2029968"/>
+            <a:off x="4919472" y="2042012"/>
             <a:ext cx="3538728" cy="201168"/>
           </a:xfrm>
           <a:prstGeom prst="rect">
@@ -21886,7 +22172,7 @@
         </p:nvSpPr>
         <p:spPr>
           <a:xfrm>
-            <a:off x="4919472" y="2304288"/>
+            <a:off x="4919472" y="2316332"/>
             <a:ext cx="36576" cy="237744"/>
           </a:xfrm>
           <a:prstGeom prst="rect">
@@ -21906,7 +22192,7 @@
         </p:nvSpPr>
         <p:spPr>
           <a:xfrm>
-            <a:off x="5047488" y="2267712"/>
+            <a:off x="5047488" y="2279756"/>
             <a:ext cx="3429000" cy="456079"/>
           </a:xfrm>
           <a:prstGeom prst="rect">
@@ -21968,7 +22254,7 @@
         </p:nvSpPr>
         <p:spPr>
           <a:xfrm>
-            <a:off x="4919472" y="2796943"/>
+            <a:off x="4919472" y="2808987"/>
             <a:ext cx="36576" cy="237744"/>
           </a:xfrm>
           <a:prstGeom prst="rect">
@@ -21988,7 +22274,7 @@
         </p:nvSpPr>
         <p:spPr>
           <a:xfrm>
-            <a:off x="5047488" y="2760367"/>
+            <a:off x="5047488" y="2772411"/>
             <a:ext cx="3429000" cy="456079"/>
           </a:xfrm>
           <a:prstGeom prst="rect">
@@ -22050,7 +22336,7 @@
         </p:nvSpPr>
         <p:spPr>
           <a:xfrm>
-            <a:off x="4919472" y="3289598"/>
+            <a:off x="4919472" y="3301642"/>
             <a:ext cx="36576" cy="237744"/>
           </a:xfrm>
           <a:prstGeom prst="rect">
@@ -22070,7 +22356,7 @@
         </p:nvSpPr>
         <p:spPr>
           <a:xfrm>
-            <a:off x="5047488" y="3253022"/>
+            <a:off x="5047488" y="3265066"/>
             <a:ext cx="3429000" cy="313748"/>
           </a:xfrm>
           <a:prstGeom prst="rect">
@@ -22651,7 +22937,7 @@
         <p:spPr>
           <a:xfrm>
             <a:off x="3209544" y="1665299"/>
-            <a:ext cx="5431536" cy="566800"/>
+            <a:ext cx="5431536" cy="635187"/>
           </a:xfrm>
           <a:prstGeom prst="rect">
             <a:avLst/>
@@ -22678,7 +22964,7 @@
                 <a:ea typeface="Arial" pitchFamily="34" charset="-122"/>
                 <a:cs typeface="Arial" pitchFamily="34" charset="-120"/>
               </a:rPr>
-              <a:t>Xe hơi dùng sóng milimét 77 GHz. Thời gian cho khoảng cách; tần số lệch đi (Doppler) cho tốc độ lại gần — một lần đo có cả hai.</a:t>
+              <a:t>Sóng milimét 77 GHz. Chênh lệch tần số cho khoảng cách, Doppler cho tốc độ lại gần — cùng một lần quét có cả hai.</a:t>
             </a:r>
             <a:endParaRPr lang="en-US" sz="1100" dirty="0"/>
           </a:p>
@@ -22698,7 +22984,7 @@
                 <a:ea typeface="微軟正黑體" pitchFamily="34" charset="-122"/>
                 <a:cs typeface="微軟正黑體" pitchFamily="34" charset="-120"/>
               </a:rPr>
-              <a:t>車用是 77 GHz 毫米波。時間給距離；頻率偏移（都卜勒）給接近速度——一次量測兩樣都有。</a:t>
+              <a:t>77 GHz 毫米波。頻率差給距離，都卜勒給接近速度——同一次掃描裡兩樣都有。</a:t>
             </a:r>
             <a:endParaRPr lang="en-US" sz="1100" dirty="0"/>
           </a:p>
@@ -22712,7 +22998,7 @@
         </p:nvSpPr>
         <p:spPr>
           <a:xfrm>
-            <a:off x="2295144" y="2296107"/>
+            <a:off x="2295144" y="2364494"/>
             <a:ext cx="786384" cy="283464"/>
           </a:xfrm>
           <a:prstGeom prst="roundRect">
@@ -22734,7 +23020,7 @@
         </p:nvSpPr>
         <p:spPr>
           <a:xfrm>
-            <a:off x="2295144" y="2318967"/>
+            <a:off x="2295144" y="2387354"/>
             <a:ext cx="786384" cy="256032"/>
           </a:xfrm>
           <a:prstGeom prst="rect">
@@ -22796,8 +23082,8 @@
         </p:nvSpPr>
         <p:spPr>
           <a:xfrm>
-            <a:off x="3209544" y="2296107"/>
-            <a:ext cx="5431536" cy="566800"/>
+            <a:off x="3209544" y="2364494"/>
+            <a:ext cx="5431536" cy="635187"/>
           </a:xfrm>
           <a:prstGeom prst="rect">
             <a:avLst/>
@@ -22858,7 +23144,7 @@
         </p:nvSpPr>
         <p:spPr>
           <a:xfrm>
-            <a:off x="2295144" y="2926915"/>
+            <a:off x="2295144" y="3063689"/>
             <a:ext cx="786384" cy="283464"/>
           </a:xfrm>
           <a:prstGeom prst="roundRect">
@@ -22880,7 +23166,7 @@
         </p:nvSpPr>
         <p:spPr>
           <a:xfrm>
-            <a:off x="2295144" y="2949775"/>
+            <a:off x="2295144" y="3086549"/>
             <a:ext cx="786384" cy="256032"/>
           </a:xfrm>
           <a:prstGeom prst="rect">
@@ -22942,8 +23228,8 @@
         </p:nvSpPr>
         <p:spPr>
           <a:xfrm>
-            <a:off x="3209544" y="2926915"/>
-            <a:ext cx="5431536" cy="566800"/>
+            <a:off x="3209544" y="3063689"/>
+            <a:ext cx="5431536" cy="635187"/>
           </a:xfrm>
           <a:prstGeom prst="rect">
             <a:avLst/>
@@ -23260,7 +23546,7 @@
         <p:spPr>
           <a:xfrm>
             <a:off x="502920" y="676656"/>
-            <a:ext cx="8138160" cy="713232"/>
+            <a:ext cx="8138160" cy="560684"/>
           </a:xfrm>
           <a:prstGeom prst="rect">
             <a:avLst/>
@@ -23287,7 +23573,7 @@
                 <a:ea typeface="Arial" pitchFamily="34" charset="-122"/>
                 <a:cs typeface="Arial" pitchFamily="34" charset="-120"/>
               </a:rPr>
-              <a:t>Vì sao radar đo được tốc độ chỉ bằng một lần đo</a:t>
+              <a:t>Vì sao radar biết tốc độ mà không cần so vị trí hai lần</a:t>
             </a:r>
             <a:endParaRPr lang="en-US" sz="1700" dirty="0"/>
           </a:p>
@@ -23307,7 +23593,7 @@
                 <a:ea typeface="微軟正黑體" pitchFamily="34" charset="-122"/>
                 <a:cs typeface="微軟正黑體" pitchFamily="34" charset="-120"/>
               </a:rPr>
-              <a:t>為什麼雷達一次量測就有速度</a:t>
+              <a:t>為什麼雷達不用比位置就知道速度</a:t>
             </a:r>
             <a:endParaRPr lang="en-US" sz="1700" dirty="0"/>
           </a:p>
@@ -23321,12 +23607,12 @@
         </p:nvSpPr>
         <p:spPr>
           <a:xfrm>
-            <a:off x="502920" y="1243584"/>
-            <a:ext cx="3904488" cy="2578608"/>
+            <a:off x="502920" y="1255628"/>
+            <a:ext cx="3904488" cy="2566564"/>
           </a:xfrm>
           <a:prstGeom prst="roundRect">
             <a:avLst>
-              <a:gd name="adj" fmla="val 3546"/>
+              <a:gd name="adj" fmla="val 3563"/>
             </a:avLst>
           </a:prstGeom>
           <a:solidFill>
@@ -23348,8 +23634,8 @@
         </p:nvSpPr>
         <p:spPr>
           <a:xfrm>
-            <a:off x="539496" y="2326599"/>
-            <a:ext cx="3831336" cy="1459017"/>
+            <a:off x="539496" y="2333585"/>
+            <a:ext cx="3831336" cy="1452031"/>
           </a:xfrm>
           <a:prstGeom prst="rect">
             <a:avLst/>
@@ -23368,7 +23654,7 @@
         </p:nvSpPr>
         <p:spPr>
           <a:xfrm>
-            <a:off x="630936" y="1335024"/>
+            <a:off x="630936" y="1347068"/>
             <a:ext cx="3648456" cy="310896"/>
           </a:xfrm>
           <a:prstGeom prst="rect">
@@ -23430,7 +23716,7 @@
         </p:nvSpPr>
         <p:spPr>
           <a:xfrm>
-            <a:off x="685800" y="1819656"/>
+            <a:off x="685800" y="1831700"/>
             <a:ext cx="274320" cy="237744"/>
           </a:xfrm>
           <a:prstGeom prst="roundRect">
@@ -23452,7 +23738,7 @@
         </p:nvSpPr>
         <p:spPr>
           <a:xfrm>
-            <a:off x="1069848" y="1737360"/>
+            <a:off x="1069848" y="1749404"/>
             <a:ext cx="0" cy="402336"/>
           </a:xfrm>
           <a:prstGeom prst="line">
@@ -23475,7 +23761,7 @@
         </p:nvSpPr>
         <p:spPr>
           <a:xfrm>
-            <a:off x="1289304" y="1737360"/>
+            <a:off x="1289304" y="1749404"/>
             <a:ext cx="0" cy="402336"/>
           </a:xfrm>
           <a:prstGeom prst="line">
@@ -23498,7 +23784,7 @@
         </p:nvSpPr>
         <p:spPr>
           <a:xfrm>
-            <a:off x="1508760" y="1737360"/>
+            <a:off x="1508760" y="1749404"/>
             <a:ext cx="0" cy="402336"/>
           </a:xfrm>
           <a:prstGeom prst="line">
@@ -23521,7 +23807,7 @@
         </p:nvSpPr>
         <p:spPr>
           <a:xfrm>
-            <a:off x="1728216" y="1737360"/>
+            <a:off x="1728216" y="1749404"/>
             <a:ext cx="0" cy="402336"/>
           </a:xfrm>
           <a:prstGeom prst="line">
@@ -23544,7 +23830,7 @@
         </p:nvSpPr>
         <p:spPr>
           <a:xfrm>
-            <a:off x="1947672" y="1737360"/>
+            <a:off x="1947672" y="1749404"/>
             <a:ext cx="0" cy="402336"/>
           </a:xfrm>
           <a:prstGeom prst="line">
@@ -23567,7 +23853,7 @@
         </p:nvSpPr>
         <p:spPr>
           <a:xfrm>
-            <a:off x="2167128" y="1737360"/>
+            <a:off x="2167128" y="1749404"/>
             <a:ext cx="0" cy="402336"/>
           </a:xfrm>
           <a:prstGeom prst="line">
@@ -23590,7 +23876,7 @@
         </p:nvSpPr>
         <p:spPr>
           <a:xfrm>
-            <a:off x="2386584" y="1737360"/>
+            <a:off x="2386584" y="1749404"/>
             <a:ext cx="0" cy="402336"/>
           </a:xfrm>
           <a:prstGeom prst="line">
@@ -23613,7 +23899,7 @@
         </p:nvSpPr>
         <p:spPr>
           <a:xfrm>
-            <a:off x="2606040" y="1737360"/>
+            <a:off x="2606040" y="1749404"/>
             <a:ext cx="0" cy="402336"/>
           </a:xfrm>
           <a:prstGeom prst="line">
@@ -23636,7 +23922,7 @@
         </p:nvSpPr>
         <p:spPr>
           <a:xfrm>
-            <a:off x="2825496" y="1737360"/>
+            <a:off x="2825496" y="1749404"/>
             <a:ext cx="0" cy="402336"/>
           </a:xfrm>
           <a:prstGeom prst="line">
@@ -23659,7 +23945,7 @@
         </p:nvSpPr>
         <p:spPr>
           <a:xfrm>
-            <a:off x="3713196" y="1909999"/>
+            <a:off x="3713196" y="1922043"/>
             <a:ext cx="437449" cy="133137"/>
           </a:xfrm>
           <a:prstGeom prst="roundRect">
@@ -23681,7 +23967,7 @@
         </p:nvSpPr>
         <p:spPr>
           <a:xfrm>
-            <a:off x="3808293" y="1814901"/>
+            <a:off x="3808293" y="1826945"/>
             <a:ext cx="237744" cy="104607"/>
           </a:xfrm>
           <a:prstGeom prst="trapezoid">
@@ -23703,7 +23989,7 @@
         </p:nvSpPr>
         <p:spPr>
           <a:xfrm>
-            <a:off x="3770254" y="2014606"/>
+            <a:off x="3770254" y="2026650"/>
             <a:ext cx="95098" cy="95098"/>
           </a:xfrm>
           <a:prstGeom prst="ellipse">
@@ -23723,7 +24009,7 @@
         </p:nvSpPr>
         <p:spPr>
           <a:xfrm>
-            <a:off x="3998488" y="2014606"/>
+            <a:off x="3998488" y="2026650"/>
             <a:ext cx="95098" cy="95098"/>
           </a:xfrm>
           <a:prstGeom prst="ellipse">
@@ -23743,7 +24029,7 @@
         </p:nvSpPr>
         <p:spPr>
           <a:xfrm>
-            <a:off x="3794028" y="2038380"/>
+            <a:off x="3794028" y="2050425"/>
             <a:ext cx="47549" cy="47549"/>
           </a:xfrm>
           <a:prstGeom prst="ellipse">
@@ -23763,7 +24049,7 @@
         </p:nvSpPr>
         <p:spPr>
           <a:xfrm>
-            <a:off x="4022263" y="2038380"/>
+            <a:off x="4022263" y="2050425"/>
             <a:ext cx="47549" cy="47549"/>
           </a:xfrm>
           <a:prstGeom prst="ellipse">
@@ -23783,7 +24069,7 @@
         </p:nvSpPr>
         <p:spPr>
           <a:xfrm flipH="1">
-            <a:off x="3493008" y="2212848"/>
+            <a:off x="3493008" y="2224892"/>
             <a:ext cx="310896" cy="128016"/>
           </a:xfrm>
           <a:prstGeom prst="rightArrow">
@@ -23803,7 +24089,7 @@
         </p:nvSpPr>
         <p:spPr>
           <a:xfrm>
-            <a:off x="630936" y="2395728"/>
+            <a:off x="630936" y="2401750"/>
             <a:ext cx="3648456" cy="310896"/>
           </a:xfrm>
           <a:prstGeom prst="rect">
@@ -23865,7 +24151,7 @@
         </p:nvSpPr>
         <p:spPr>
           <a:xfrm>
-            <a:off x="685800" y="2880360"/>
+            <a:off x="685800" y="2886382"/>
             <a:ext cx="274320" cy="237744"/>
           </a:xfrm>
           <a:prstGeom prst="roundRect">
@@ -23887,7 +24173,7 @@
         </p:nvSpPr>
         <p:spPr>
           <a:xfrm>
-            <a:off x="1069848" y="2798064"/>
+            <a:off x="1069848" y="2804086"/>
             <a:ext cx="0" cy="402336"/>
           </a:xfrm>
           <a:prstGeom prst="line">
@@ -23910,7 +24196,7 @@
         </p:nvSpPr>
         <p:spPr>
           <a:xfrm>
-            <a:off x="1472184" y="2798064"/>
+            <a:off x="1472184" y="2804086"/>
             <a:ext cx="0" cy="402336"/>
           </a:xfrm>
           <a:prstGeom prst="line">
@@ -23933,7 +24219,7 @@
         </p:nvSpPr>
         <p:spPr>
           <a:xfrm>
-            <a:off x="1874520" y="2798064"/>
+            <a:off x="1874520" y="2804086"/>
             <a:ext cx="0" cy="402336"/>
           </a:xfrm>
           <a:prstGeom prst="line">
@@ -23956,7 +24242,7 @@
         </p:nvSpPr>
         <p:spPr>
           <a:xfrm>
-            <a:off x="2276856" y="2798064"/>
+            <a:off x="2276856" y="2804086"/>
             <a:ext cx="0" cy="402336"/>
           </a:xfrm>
           <a:prstGeom prst="line">
@@ -23979,7 +24265,7 @@
         </p:nvSpPr>
         <p:spPr>
           <a:xfrm>
-            <a:off x="2679192" y="2798064"/>
+            <a:off x="2679192" y="2804086"/>
             <a:ext cx="0" cy="402336"/>
           </a:xfrm>
           <a:prstGeom prst="line">
@@ -24002,7 +24288,7 @@
         </p:nvSpPr>
         <p:spPr>
           <a:xfrm>
-            <a:off x="3713196" y="2970703"/>
+            <a:off x="3713196" y="2976725"/>
             <a:ext cx="437449" cy="133137"/>
           </a:xfrm>
           <a:prstGeom prst="roundRect">
@@ -24024,7 +24310,7 @@
         </p:nvSpPr>
         <p:spPr>
           <a:xfrm>
-            <a:off x="3808293" y="2875605"/>
+            <a:off x="3808293" y="2881627"/>
             <a:ext cx="237744" cy="104607"/>
           </a:xfrm>
           <a:prstGeom prst="trapezoid">
@@ -24046,7 +24332,7 @@
         </p:nvSpPr>
         <p:spPr>
           <a:xfrm>
-            <a:off x="3770254" y="3075310"/>
+            <a:off x="3770254" y="3081332"/>
             <a:ext cx="95098" cy="95098"/>
           </a:xfrm>
           <a:prstGeom prst="ellipse">
@@ -24066,7 +24352,7 @@
         </p:nvSpPr>
         <p:spPr>
           <a:xfrm>
-            <a:off x="3998488" y="3075310"/>
+            <a:off x="3998488" y="3081332"/>
             <a:ext cx="95098" cy="95098"/>
           </a:xfrm>
           <a:prstGeom prst="ellipse">
@@ -24086,7 +24372,7 @@
         </p:nvSpPr>
         <p:spPr>
           <a:xfrm>
-            <a:off x="3794028" y="3099084"/>
+            <a:off x="3794028" y="3105107"/>
             <a:ext cx="47549" cy="47549"/>
           </a:xfrm>
           <a:prstGeom prst="ellipse">
@@ -24106,7 +24392,7 @@
         </p:nvSpPr>
         <p:spPr>
           <a:xfrm>
-            <a:off x="4022263" y="3099084"/>
+            <a:off x="4022263" y="3105107"/>
             <a:ext cx="47549" cy="47549"/>
           </a:xfrm>
           <a:prstGeom prst="ellipse">
@@ -24126,7 +24412,7 @@
         </p:nvSpPr>
         <p:spPr>
           <a:xfrm>
-            <a:off x="3986784" y="3273552"/>
+            <a:off x="3986784" y="3279574"/>
             <a:ext cx="310896" cy="128016"/>
           </a:xfrm>
           <a:prstGeom prst="rightArrow">
@@ -24168,12 +24454,12 @@
         </p:nvSpPr>
         <p:spPr>
           <a:xfrm>
-            <a:off x="4736592" y="1243584"/>
-            <a:ext cx="3904488" cy="2578608"/>
+            <a:off x="4736592" y="1255628"/>
+            <a:ext cx="3904488" cy="2566564"/>
           </a:xfrm>
           <a:prstGeom prst="roundRect">
             <a:avLst>
-              <a:gd name="adj" fmla="val 3546"/>
+              <a:gd name="adj" fmla="val 3563"/>
             </a:avLst>
           </a:prstGeom>
           <a:solidFill>
@@ -24195,7 +24481,7 @@
         </p:nvSpPr>
         <p:spPr>
           <a:xfrm>
-            <a:off x="4919472" y="1408176"/>
+            <a:off x="4919472" y="1420220"/>
             <a:ext cx="347472" cy="347472"/>
           </a:xfrm>
           <a:prstGeom prst="ellipse">
@@ -24215,7 +24501,7 @@
         </p:nvSpPr>
         <p:spPr>
           <a:xfrm>
-            <a:off x="4919472" y="1453896"/>
+            <a:off x="4919472" y="1465940"/>
             <a:ext cx="347472" cy="256032"/>
           </a:xfrm>
           <a:prstGeom prst="rect">
@@ -24254,7 +24540,7 @@
         </p:nvSpPr>
         <p:spPr>
           <a:xfrm>
-            <a:off x="5340096" y="1389888"/>
+            <a:off x="5340096" y="1401932"/>
             <a:ext cx="3118104" cy="420624"/>
           </a:xfrm>
           <a:prstGeom prst="rect">
@@ -24293,7 +24579,7 @@
         </p:nvSpPr>
         <p:spPr>
           <a:xfrm>
-            <a:off x="4919472" y="1847088"/>
+            <a:off x="4919472" y="1859132"/>
             <a:ext cx="3538728" cy="201168"/>
           </a:xfrm>
           <a:prstGeom prst="rect">
@@ -24334,7 +24620,7 @@
         </p:nvSpPr>
         <p:spPr>
           <a:xfrm>
-            <a:off x="4919472" y="2029968"/>
+            <a:off x="4919472" y="2042012"/>
             <a:ext cx="3538728" cy="201168"/>
           </a:xfrm>
           <a:prstGeom prst="rect">
@@ -24380,7 +24666,7 @@
         </p:nvSpPr>
         <p:spPr>
           <a:xfrm>
-            <a:off x="4919472" y="2304288"/>
+            <a:off x="4919472" y="2316332"/>
             <a:ext cx="36576" cy="237744"/>
           </a:xfrm>
           <a:prstGeom prst="rect">
@@ -24400,7 +24686,7 @@
         </p:nvSpPr>
         <p:spPr>
           <a:xfrm>
-            <a:off x="5047488" y="2267712"/>
+            <a:off x="5047488" y="2279756"/>
             <a:ext cx="3429000" cy="313748"/>
           </a:xfrm>
           <a:prstGeom prst="rect">
@@ -24462,7 +24748,7 @@
         </p:nvSpPr>
         <p:spPr>
           <a:xfrm>
-            <a:off x="4919472" y="2654612"/>
+            <a:off x="4919472" y="2666656"/>
             <a:ext cx="36576" cy="237744"/>
           </a:xfrm>
           <a:prstGeom prst="rect">
@@ -24482,7 +24768,7 @@
         </p:nvSpPr>
         <p:spPr>
           <a:xfrm>
-            <a:off x="5047488" y="2618036"/>
+            <a:off x="5047488" y="2630080"/>
             <a:ext cx="3429000" cy="456079"/>
           </a:xfrm>
           <a:prstGeom prst="rect">
@@ -24544,7 +24830,7 @@
         </p:nvSpPr>
         <p:spPr>
           <a:xfrm>
-            <a:off x="4919472" y="3147267"/>
+            <a:off x="4919472" y="3159311"/>
             <a:ext cx="36576" cy="237744"/>
           </a:xfrm>
           <a:prstGeom prst="rect">
@@ -24564,7 +24850,7 @@
         </p:nvSpPr>
         <p:spPr>
           <a:xfrm>
-            <a:off x="5047488" y="3110691"/>
+            <a:off x="5047488" y="3122735"/>
             <a:ext cx="3429000" cy="313748"/>
           </a:xfrm>
           <a:prstGeom prst="rect">
@@ -24882,7 +25168,7 @@
         <p:spPr>
           <a:xfrm>
             <a:off x="502920" y="676656"/>
-            <a:ext cx="8138160" cy="713232"/>
+            <a:ext cx="8138160" cy="560684"/>
           </a:xfrm>
           <a:prstGeom prst="rect">
             <a:avLst/>
@@ -24943,12 +25229,12 @@
         </p:nvSpPr>
         <p:spPr>
           <a:xfrm>
-            <a:off x="502920" y="1243584"/>
-            <a:ext cx="3904488" cy="2578608"/>
+            <a:off x="502920" y="1255628"/>
+            <a:ext cx="3904488" cy="2566564"/>
           </a:xfrm>
           <a:prstGeom prst="roundRect">
             <a:avLst>
-              <a:gd name="adj" fmla="val 3546"/>
+              <a:gd name="adj" fmla="val 3563"/>
             </a:avLst>
           </a:prstGeom>
           <a:solidFill>
@@ -24970,8 +25256,8 @@
         </p:nvSpPr>
         <p:spPr>
           <a:xfrm>
-            <a:off x="539496" y="2326599"/>
-            <a:ext cx="3831336" cy="1459017"/>
+            <a:off x="539496" y="2333585"/>
+            <a:ext cx="3831336" cy="1452031"/>
           </a:xfrm>
           <a:prstGeom prst="rect">
             <a:avLst/>
@@ -24990,12 +25276,12 @@
         </p:nvSpPr>
         <p:spPr>
           <a:xfrm>
-            <a:off x="557784" y="1298448"/>
-            <a:ext cx="3794760" cy="1179576"/>
+            <a:off x="557784" y="1310492"/>
+            <a:ext cx="3794760" cy="1173554"/>
           </a:xfrm>
           <a:prstGeom prst="roundRect">
             <a:avLst>
-              <a:gd name="adj" fmla="val 5426"/>
+              <a:gd name="adj" fmla="val 5454"/>
             </a:avLst>
           </a:prstGeom>
           <a:solidFill>
@@ -25012,7 +25298,7 @@
         </p:nvSpPr>
         <p:spPr>
           <a:xfrm>
-            <a:off x="649224" y="1325880"/>
+            <a:off x="649224" y="1337924"/>
             <a:ext cx="3611880" cy="292608"/>
           </a:xfrm>
           <a:prstGeom prst="rect">
@@ -25074,7 +25360,7 @@
         </p:nvSpPr>
         <p:spPr>
           <a:xfrm>
-            <a:off x="1644091" y="1649029"/>
+            <a:off x="1644091" y="1657099"/>
             <a:ext cx="60350" cy="60350"/>
           </a:xfrm>
           <a:prstGeom prst="ellipse">
@@ -25094,7 +25380,7 @@
         </p:nvSpPr>
         <p:spPr>
           <a:xfrm>
-            <a:off x="1577797" y="1688805"/>
+            <a:off x="1577797" y="1696875"/>
             <a:ext cx="60350" cy="60350"/>
           </a:xfrm>
           <a:prstGeom prst="ellipse">
@@ -25114,7 +25400,7 @@
         </p:nvSpPr>
         <p:spPr>
           <a:xfrm>
-            <a:off x="1710385" y="1688805"/>
+            <a:off x="1710385" y="1696875"/>
             <a:ext cx="60350" cy="60350"/>
           </a:xfrm>
           <a:prstGeom prst="ellipse">
@@ -25134,7 +25420,7 @@
         </p:nvSpPr>
         <p:spPr>
           <a:xfrm>
-            <a:off x="1551280" y="1755099"/>
+            <a:off x="1551280" y="1763169"/>
             <a:ext cx="60350" cy="60350"/>
           </a:xfrm>
           <a:prstGeom prst="ellipse">
@@ -25154,7 +25440,7 @@
         </p:nvSpPr>
         <p:spPr>
           <a:xfrm>
-            <a:off x="1736903" y="1755099"/>
+            <a:off x="1736903" y="1763169"/>
             <a:ext cx="60350" cy="60350"/>
           </a:xfrm>
           <a:prstGeom prst="ellipse">
@@ -25174,7 +25460,7 @@
         </p:nvSpPr>
         <p:spPr>
           <a:xfrm>
-            <a:off x="1644091" y="1755099"/>
+            <a:off x="1644091" y="1763169"/>
             <a:ext cx="60350" cy="60350"/>
           </a:xfrm>
           <a:prstGeom prst="ellipse">
@@ -25194,7 +25480,7 @@
         </p:nvSpPr>
         <p:spPr>
           <a:xfrm>
-            <a:off x="1538021" y="1861170"/>
+            <a:off x="1538021" y="1869239"/>
             <a:ext cx="60350" cy="60350"/>
           </a:xfrm>
           <a:prstGeom prst="ellipse">
@@ -25214,7 +25500,7 @@
         </p:nvSpPr>
         <p:spPr>
           <a:xfrm>
-            <a:off x="1644091" y="1861170"/>
+            <a:off x="1644091" y="1869239"/>
             <a:ext cx="60350" cy="60350"/>
           </a:xfrm>
           <a:prstGeom prst="ellipse">
@@ -25234,7 +25520,7 @@
         </p:nvSpPr>
         <p:spPr>
           <a:xfrm>
-            <a:off x="1750162" y="1861170"/>
+            <a:off x="1750162" y="1869239"/>
             <a:ext cx="60350" cy="60350"/>
           </a:xfrm>
           <a:prstGeom prst="ellipse">
@@ -25254,7 +25540,7 @@
         </p:nvSpPr>
         <p:spPr>
           <a:xfrm>
-            <a:off x="1524762" y="1967240"/>
+            <a:off x="1524762" y="1975310"/>
             <a:ext cx="60350" cy="60350"/>
           </a:xfrm>
           <a:prstGeom prst="ellipse">
@@ -25274,7 +25560,7 @@
         </p:nvSpPr>
         <p:spPr>
           <a:xfrm>
-            <a:off x="1644091" y="1967240"/>
+            <a:off x="1644091" y="1975310"/>
             <a:ext cx="60350" cy="60350"/>
           </a:xfrm>
           <a:prstGeom prst="ellipse">
@@ -25294,7 +25580,7 @@
         </p:nvSpPr>
         <p:spPr>
           <a:xfrm>
-            <a:off x="1763420" y="1967240"/>
+            <a:off x="1763420" y="1975310"/>
             <a:ext cx="60350" cy="60350"/>
           </a:xfrm>
           <a:prstGeom prst="ellipse">
@@ -25314,7 +25600,7 @@
         </p:nvSpPr>
         <p:spPr>
           <a:xfrm>
-            <a:off x="1538021" y="2073311"/>
+            <a:off x="1538021" y="2081380"/>
             <a:ext cx="60350" cy="60350"/>
           </a:xfrm>
           <a:prstGeom prst="ellipse">
@@ -25334,7 +25620,7 @@
         </p:nvSpPr>
         <p:spPr>
           <a:xfrm>
-            <a:off x="1644091" y="2073311"/>
+            <a:off x="1644091" y="2081380"/>
             <a:ext cx="60350" cy="60350"/>
           </a:xfrm>
           <a:prstGeom prst="ellipse">
@@ -25354,7 +25640,7 @@
         </p:nvSpPr>
         <p:spPr>
           <a:xfrm>
-            <a:off x="1750162" y="2073311"/>
+            <a:off x="1750162" y="2081380"/>
             <a:ext cx="60350" cy="60350"/>
           </a:xfrm>
           <a:prstGeom prst="ellipse">
@@ -25374,7 +25660,7 @@
         </p:nvSpPr>
         <p:spPr>
           <a:xfrm>
-            <a:off x="1564538" y="2179381"/>
+            <a:off x="1564538" y="2187451"/>
             <a:ext cx="60350" cy="60350"/>
           </a:xfrm>
           <a:prstGeom prst="ellipse">
@@ -25394,7 +25680,7 @@
         </p:nvSpPr>
         <p:spPr>
           <a:xfrm>
-            <a:off x="1723644" y="2179381"/>
+            <a:off x="1723644" y="2187451"/>
             <a:ext cx="60350" cy="60350"/>
           </a:xfrm>
           <a:prstGeom prst="ellipse">
@@ -25414,7 +25700,7 @@
         </p:nvSpPr>
         <p:spPr>
           <a:xfrm>
-            <a:off x="1577797" y="2285451"/>
+            <a:off x="1577797" y="2293521"/>
             <a:ext cx="60350" cy="60350"/>
           </a:xfrm>
           <a:prstGeom prst="ellipse">
@@ -25434,7 +25720,7 @@
         </p:nvSpPr>
         <p:spPr>
           <a:xfrm>
-            <a:off x="1710385" y="2285451"/>
+            <a:off x="1710385" y="2293521"/>
             <a:ext cx="60350" cy="60350"/>
           </a:xfrm>
           <a:prstGeom prst="ellipse">
@@ -25454,7 +25740,7 @@
         </p:nvSpPr>
         <p:spPr>
           <a:xfrm>
-            <a:off x="1577797" y="2391522"/>
+            <a:off x="1577797" y="2399591"/>
             <a:ext cx="60350" cy="60350"/>
           </a:xfrm>
           <a:prstGeom prst="ellipse">
@@ -25474,7 +25760,7 @@
         </p:nvSpPr>
         <p:spPr>
           <a:xfrm>
-            <a:off x="1710385" y="2391522"/>
+            <a:off x="1710385" y="2399591"/>
             <a:ext cx="60350" cy="60350"/>
           </a:xfrm>
           <a:prstGeom prst="ellipse">
@@ -25494,7 +25780,7 @@
         </p:nvSpPr>
         <p:spPr>
           <a:xfrm>
-            <a:off x="2455164" y="1802648"/>
+            <a:off x="2455164" y="1810718"/>
             <a:ext cx="1796064" cy="548640"/>
           </a:xfrm>
           <a:prstGeom prst="rect">
@@ -25550,12 +25836,12 @@
         </p:nvSpPr>
         <p:spPr>
           <a:xfrm>
-            <a:off x="557784" y="2532888"/>
-            <a:ext cx="3794760" cy="1179576"/>
+            <a:off x="557784" y="2538910"/>
+            <a:ext cx="3794760" cy="1173554"/>
           </a:xfrm>
           <a:prstGeom prst="roundRect">
             <a:avLst>
-              <a:gd name="adj" fmla="val 5426"/>
+              <a:gd name="adj" fmla="val 5454"/>
             </a:avLst>
           </a:prstGeom>
           <a:solidFill>
@@ -25572,7 +25858,7 @@
         </p:nvSpPr>
         <p:spPr>
           <a:xfrm>
-            <a:off x="649224" y="2560320"/>
+            <a:off x="649224" y="2566342"/>
             <a:ext cx="3611880" cy="292608"/>
           </a:xfrm>
           <a:prstGeom prst="rect">
@@ -25634,7 +25920,7 @@
         </p:nvSpPr>
         <p:spPr>
           <a:xfrm>
-            <a:off x="1262786" y="2965765"/>
+            <a:off x="1262786" y="2967812"/>
             <a:ext cx="822960" cy="691286"/>
           </a:xfrm>
           <a:prstGeom prst="ellipse">
@@ -25656,7 +25942,7 @@
         </p:nvSpPr>
         <p:spPr>
           <a:xfrm>
-            <a:off x="1390802" y="3073298"/>
+            <a:off x="1390802" y="3075346"/>
             <a:ext cx="566928" cy="476220"/>
           </a:xfrm>
           <a:prstGeom prst="ellipse">
@@ -25678,7 +25964,7 @@
         </p:nvSpPr>
         <p:spPr>
           <a:xfrm>
-            <a:off x="1509674" y="3173151"/>
+            <a:off x="1509674" y="3175198"/>
             <a:ext cx="329184" cy="276515"/>
           </a:xfrm>
           <a:prstGeom prst="ellipse">
@@ -25700,7 +25986,7 @@
         </p:nvSpPr>
         <p:spPr>
           <a:xfrm>
-            <a:off x="2455164" y="3037088"/>
+            <a:off x="2455164" y="3039136"/>
             <a:ext cx="1796064" cy="548640"/>
           </a:xfrm>
           <a:prstGeom prst="rect">
@@ -25761,12 +26047,12 @@
         </p:nvSpPr>
         <p:spPr>
           <a:xfrm>
-            <a:off x="4736592" y="1243584"/>
-            <a:ext cx="3904488" cy="2578608"/>
+            <a:off x="4736592" y="1255628"/>
+            <a:ext cx="3904488" cy="2566564"/>
           </a:xfrm>
           <a:prstGeom prst="roundRect">
             <a:avLst>
-              <a:gd name="adj" fmla="val 3546"/>
+              <a:gd name="adj" fmla="val 3563"/>
             </a:avLst>
           </a:prstGeom>
           <a:solidFill>
@@ -25788,7 +26074,7 @@
         </p:nvSpPr>
         <p:spPr>
           <a:xfrm>
-            <a:off x="4919472" y="1408176"/>
+            <a:off x="4919472" y="1420220"/>
             <a:ext cx="347472" cy="347472"/>
           </a:xfrm>
           <a:prstGeom prst="ellipse">
@@ -25808,7 +26094,7 @@
         </p:nvSpPr>
         <p:spPr>
           <a:xfrm>
-            <a:off x="4919472" y="1453896"/>
+            <a:off x="4919472" y="1465940"/>
             <a:ext cx="347472" cy="256032"/>
           </a:xfrm>
           <a:prstGeom prst="rect">
@@ -25847,7 +26133,7 @@
         </p:nvSpPr>
         <p:spPr>
           <a:xfrm>
-            <a:off x="5340096" y="1389888"/>
+            <a:off x="5340096" y="1401932"/>
             <a:ext cx="3118104" cy="420624"/>
           </a:xfrm>
           <a:prstGeom prst="rect">
@@ -25886,7 +26172,7 @@
         </p:nvSpPr>
         <p:spPr>
           <a:xfrm>
-            <a:off x="4919472" y="1847088"/>
+            <a:off x="4919472" y="1859132"/>
             <a:ext cx="3538728" cy="201168"/>
           </a:xfrm>
           <a:prstGeom prst="rect">
@@ -25927,7 +26213,7 @@
         </p:nvSpPr>
         <p:spPr>
           <a:xfrm>
-            <a:off x="4919472" y="2029968"/>
+            <a:off x="4919472" y="2042012"/>
             <a:ext cx="3538728" cy="201168"/>
           </a:xfrm>
           <a:prstGeom prst="rect">
@@ -25973,7 +26259,7 @@
         </p:nvSpPr>
         <p:spPr>
           <a:xfrm>
-            <a:off x="4919472" y="2304288"/>
+            <a:off x="4919472" y="2316332"/>
             <a:ext cx="36576" cy="237744"/>
           </a:xfrm>
           <a:prstGeom prst="rect">
@@ -25993,7 +26279,7 @@
         </p:nvSpPr>
         <p:spPr>
           <a:xfrm>
-            <a:off x="5047488" y="2267712"/>
+            <a:off x="5047488" y="2279756"/>
             <a:ext cx="3429000" cy="313748"/>
           </a:xfrm>
           <a:prstGeom prst="rect">
@@ -26055,7 +26341,7 @@
         </p:nvSpPr>
         <p:spPr>
           <a:xfrm>
-            <a:off x="4919472" y="2654612"/>
+            <a:off x="4919472" y="2666656"/>
             <a:ext cx="36576" cy="237744"/>
           </a:xfrm>
           <a:prstGeom prst="rect">
@@ -26075,7 +26361,7 @@
         </p:nvSpPr>
         <p:spPr>
           <a:xfrm>
-            <a:off x="5047488" y="2618036"/>
+            <a:off x="5047488" y="2630080"/>
             <a:ext cx="3429000" cy="456079"/>
           </a:xfrm>
           <a:prstGeom prst="rect">
@@ -26137,7 +26423,7 @@
         </p:nvSpPr>
         <p:spPr>
           <a:xfrm>
-            <a:off x="4919472" y="3147267"/>
+            <a:off x="4919472" y="3159311"/>
             <a:ext cx="36576" cy="237744"/>
           </a:xfrm>
           <a:prstGeom prst="rect">
@@ -26157,7 +26443,7 @@
         </p:nvSpPr>
         <p:spPr>
           <a:xfrm>
-            <a:off x="5047488" y="3110691"/>
+            <a:off x="5047488" y="3122735"/>
             <a:ext cx="3429000" cy="456079"/>
           </a:xfrm>
           <a:prstGeom prst="rect">

--- a/第三週(09-24)/第三週_第1節_簡報.pptx
+++ b/第三週(09-24)/第三週_第1節_簡報.pptx
@@ -8042,16 +8042,18 @@
         </p:nvSpPr>
         <p:spPr>
           <a:xfrm>
-            <a:off x="809061" y="1679936"/>
-            <a:ext cx="158008" cy="335768"/>
+            <a:off x="750174" y="1531803"/>
+            <a:ext cx="986820" cy="578267"/>
           </a:xfrm>
           <a:prstGeom prst="roundRect">
             <a:avLst>
-              <a:gd name="adj" fmla="val 173611"/>
+              <a:gd name="adj" fmla="val 9488"/>
             </a:avLst>
           </a:prstGeom>
           <a:solidFill>
-            <a:srgbClr val="C08BFF"/>
+            <a:srgbClr val="7A3FB5">
+              <a:alpha val="18000"/>
+            </a:srgbClr>
           </a:solidFill>
           <a:ln/>
         </p:spPr>
@@ -8064,47 +8066,189 @@
         </p:nvSpPr>
         <p:spPr>
           <a:xfrm>
-            <a:off x="1006572" y="1620683"/>
-            <a:ext cx="217261" cy="454274"/>
-          </a:xfrm>
-          <a:prstGeom prst="chevron">
-            <a:avLst/>
-          </a:prstGeom>
-          <a:ln w="31750">
+            <a:off x="776143" y="1293693"/>
+            <a:ext cx="934883" cy="204094"/>
+          </a:xfrm>
+          <a:prstGeom prst="roundRect">
+            <a:avLst>
+              <a:gd name="adj" fmla="val 41667"/>
+            </a:avLst>
+          </a:prstGeom>
+          <a:solidFill>
+            <a:srgbClr val="8FA3B5"/>
+          </a:solidFill>
+          <a:ln/>
+        </p:spPr>
+      </p:sp>
+      <p:sp>
+        <p:nvSpPr>
+          <p:cNvPr id="6" name="Shape 4"/>
+          <p:cNvSpPr/>
+          <p:nvPr/>
+        </p:nvSpPr>
+        <p:spPr>
+          <a:xfrm>
+            <a:off x="875864" y="1364577"/>
+            <a:ext cx="62326" cy="62326"/>
+          </a:xfrm>
+          <a:prstGeom prst="ellipse">
+            <a:avLst/>
+          </a:prstGeom>
+          <a:solidFill>
+            <a:srgbClr val="F4F7FA"/>
+          </a:solidFill>
+          <a:ln/>
+        </p:spPr>
+      </p:sp>
+      <p:sp>
+        <p:nvSpPr>
+          <p:cNvPr id="7" name="Shape 5"/>
+          <p:cNvSpPr/>
+          <p:nvPr/>
+        </p:nvSpPr>
+        <p:spPr>
+          <a:xfrm>
+            <a:off x="1100235" y="1364577"/>
+            <a:ext cx="62326" cy="62326"/>
+          </a:xfrm>
+          <a:prstGeom prst="ellipse">
+            <a:avLst/>
+          </a:prstGeom>
+          <a:solidFill>
+            <a:srgbClr val="F4F7FA"/>
+          </a:solidFill>
+          <a:ln/>
+        </p:spPr>
+      </p:sp>
+      <p:sp>
+        <p:nvSpPr>
+          <p:cNvPr id="8" name="Shape 6"/>
+          <p:cNvSpPr/>
+          <p:nvPr/>
+        </p:nvSpPr>
+        <p:spPr>
+          <a:xfrm>
+            <a:off x="1324607" y="1364577"/>
+            <a:ext cx="62326" cy="62326"/>
+          </a:xfrm>
+          <a:prstGeom prst="ellipse">
+            <a:avLst/>
+          </a:prstGeom>
+          <a:solidFill>
+            <a:srgbClr val="F4F7FA"/>
+          </a:solidFill>
+          <a:ln/>
+        </p:spPr>
+      </p:sp>
+      <p:sp>
+        <p:nvSpPr>
+          <p:cNvPr id="9" name="Shape 7"/>
+          <p:cNvSpPr/>
+          <p:nvPr/>
+        </p:nvSpPr>
+        <p:spPr>
+          <a:xfrm>
+            <a:off x="1548979" y="1364577"/>
+            <a:ext cx="62326" cy="62326"/>
+          </a:xfrm>
+          <a:prstGeom prst="ellipse">
+            <a:avLst/>
+          </a:prstGeom>
+          <a:solidFill>
+            <a:srgbClr val="F4F7FA"/>
+          </a:solidFill>
+          <a:ln/>
+        </p:spPr>
+      </p:sp>
+      <p:sp>
+        <p:nvSpPr>
+          <p:cNvPr id="10" name="Shape 8"/>
+          <p:cNvSpPr/>
+          <p:nvPr/>
+        </p:nvSpPr>
+        <p:spPr>
+          <a:xfrm>
+            <a:off x="1355770" y="1939991"/>
+            <a:ext cx="64922" cy="272125"/>
+          </a:xfrm>
+          <a:prstGeom prst="roundRect">
+            <a:avLst>
+              <a:gd name="adj" fmla="val 30000"/>
+            </a:avLst>
+          </a:prstGeom>
+          <a:solidFill>
+            <a:srgbClr val="3A4650"/>
+          </a:solidFill>
+          <a:ln/>
+        </p:spPr>
+      </p:sp>
+      <p:sp>
+        <p:nvSpPr>
+          <p:cNvPr id="11" name="Shape 9"/>
+          <p:cNvSpPr/>
+          <p:nvPr/>
+        </p:nvSpPr>
+        <p:spPr>
+          <a:xfrm>
+            <a:off x="659282" y="1531803"/>
+            <a:ext cx="0" cy="578267"/>
+          </a:xfrm>
+          <a:prstGeom prst="line">
+            <a:avLst/>
+          </a:prstGeom>
+          <a:noFill/>
+          <a:ln w="12700">
             <a:solidFill>
-              <a:srgbClr val="C08BFF"/>
+              <a:srgbClr val="6B7A88"/>
             </a:solidFill>
             <a:prstDash val="solid"/>
+            <a:headEnd type="triangle"/>
+            <a:tailEnd type="triangle"/>
           </a:ln>
         </p:spPr>
       </p:sp>
       <p:sp>
         <p:nvSpPr>
-          <p:cNvPr id="6" name="Shape 4"/>
-          <p:cNvSpPr/>
-          <p:nvPr/>
-        </p:nvSpPr>
-        <p:spPr>
-          <a:xfrm>
-            <a:off x="1204082" y="1541678"/>
-            <a:ext cx="237012" cy="612282"/>
-          </a:xfrm>
-          <a:prstGeom prst="chevron">
-            <a:avLst/>
-          </a:prstGeom>
-          <a:ln w="31750">
-            <a:solidFill>
-              <a:srgbClr val="C08BFF">
-                <a:alpha val="65000"/>
-              </a:srgbClr>
-            </a:solidFill>
-            <a:prstDash val="solid"/>
-          </a:ln>
-        </p:spPr>
-      </p:sp>
-      <p:sp>
-        <p:nvSpPr>
-          <p:cNvPr id="7" name="Text 5"/>
+          <p:cNvPr id="12" name="Text 10"/>
+          <p:cNvSpPr txBox="1"/>
+          <p:nvPr/>
+        </p:nvSpPr>
+        <p:spPr>
+          <a:xfrm>
+            <a:off x="594360" y="2212116"/>
+            <a:ext cx="1298448" cy="204094"/>
+          </a:xfrm>
+          <a:prstGeom prst="rect">
+            <a:avLst/>
+          </a:prstGeom>
+          <a:noFill/>
+          <a:ln/>
+        </p:spPr>
+        <p:txBody>
+          <a:bodyPr wrap="square" lIns="0" tIns="0" rIns="0" bIns="0" rtlCol="0" anchor="ctr"/>
+          <a:lstStyle/>
+          <a:p>
+            <a:pPr algn="ctr" indent="0" marL="0">
+              <a:buNone/>
+            </a:pPr>
+            <a:r>
+              <a:rPr lang="en-US" sz="800" b="1" dirty="0">
+                <a:solidFill>
+                  <a:srgbClr val="6B7A88"/>
+                </a:solidFill>
+                <a:latin typeface="Arial" pitchFamily="34" charset="0"/>
+                <a:ea typeface="Arial" pitchFamily="34" charset="-122"/>
+                <a:cs typeface="Arial" pitchFamily="34" charset="-120"/>
+              </a:rPr>
+              <a:t>vài mét  幾公尺</a:t>
+            </a:r>
+            <a:endParaRPr lang="en-US" sz="800" dirty="0"/>
+          </a:p>
+        </p:txBody>
+      </p:sp>
+      <p:sp>
+        <p:nvSpPr>
+          <p:cNvPr id="13" name="Text 11"/>
           <p:cNvSpPr txBox="1"/>
           <p:nvPr/>
         </p:nvSpPr>
@@ -8166,7 +8310,7 @@
       </p:sp>
       <p:sp>
         <p:nvSpPr>
-          <p:cNvPr id="8" name="Shape 6"/>
+          <p:cNvPr id="14" name="Shape 12"/>
           <p:cNvSpPr/>
           <p:nvPr/>
         </p:nvSpPr>
@@ -8188,7 +8332,7 @@
       </p:sp>
       <p:sp>
         <p:nvSpPr>
-          <p:cNvPr id="9" name="Text 7"/>
+          <p:cNvPr id="15" name="Text 13"/>
           <p:cNvSpPr txBox="1"/>
           <p:nvPr/>
         </p:nvSpPr>
@@ -8250,14 +8394,14 @@
       </p:sp>
       <p:sp>
         <p:nvSpPr>
-          <p:cNvPr id="10" name="Text 8"/>
+          <p:cNvPr id="16" name="Text 14"/>
           <p:cNvSpPr txBox="1"/>
           <p:nvPr/>
         </p:nvSpPr>
         <p:spPr>
           <a:xfrm>
             <a:off x="3209544" y="1400190"/>
-            <a:ext cx="5431536" cy="635187"/>
+            <a:ext cx="5431536" cy="807965"/>
           </a:xfrm>
           <a:prstGeom prst="rect">
             <a:avLst/>
@@ -8312,13 +8456,13 @@
       </p:sp>
       <p:sp>
         <p:nvSpPr>
-          <p:cNvPr id="11" name="Shape 9"/>
+          <p:cNvPr id="17" name="Shape 15"/>
           <p:cNvSpPr/>
           <p:nvPr/>
         </p:nvSpPr>
         <p:spPr>
           <a:xfrm>
-            <a:off x="2295144" y="2099385"/>
+            <a:off x="2295144" y="2272163"/>
             <a:ext cx="786384" cy="283464"/>
           </a:xfrm>
           <a:prstGeom prst="roundRect">
@@ -8334,13 +8478,13 @@
       </p:sp>
       <p:sp>
         <p:nvSpPr>
-          <p:cNvPr id="12" name="Text 10"/>
+          <p:cNvPr id="18" name="Text 16"/>
           <p:cNvSpPr txBox="1"/>
           <p:nvPr/>
         </p:nvSpPr>
         <p:spPr>
           <a:xfrm>
-            <a:off x="2295144" y="2122245"/>
+            <a:off x="2295144" y="2295023"/>
             <a:ext cx="786384" cy="256032"/>
           </a:xfrm>
           <a:prstGeom prst="rect">
@@ -8396,13 +8540,13 @@
       </p:sp>
       <p:sp>
         <p:nvSpPr>
-          <p:cNvPr id="13" name="Text 11"/>
+          <p:cNvPr id="19" name="Text 17"/>
           <p:cNvSpPr txBox="1"/>
           <p:nvPr/>
         </p:nvSpPr>
         <p:spPr>
           <a:xfrm>
-            <a:off x="3209544" y="2099385"/>
+            <a:off x="3209544" y="2272163"/>
             <a:ext cx="5431536" cy="445131"/>
           </a:xfrm>
           <a:prstGeom prst="rect">
@@ -8458,13 +8602,13 @@
       </p:sp>
       <p:sp>
         <p:nvSpPr>
-          <p:cNvPr id="14" name="Shape 12"/>
+          <p:cNvPr id="20" name="Shape 18"/>
           <p:cNvSpPr/>
           <p:nvPr/>
         </p:nvSpPr>
         <p:spPr>
           <a:xfrm>
-            <a:off x="2295144" y="2608523"/>
+            <a:off x="2295144" y="2781302"/>
             <a:ext cx="786384" cy="283464"/>
           </a:xfrm>
           <a:prstGeom prst="roundRect">
@@ -8480,13 +8624,13 @@
       </p:sp>
       <p:sp>
         <p:nvSpPr>
-          <p:cNvPr id="15" name="Text 13"/>
+          <p:cNvPr id="21" name="Text 19"/>
           <p:cNvSpPr txBox="1"/>
           <p:nvPr/>
         </p:nvSpPr>
         <p:spPr>
           <a:xfrm>
-            <a:off x="2295144" y="2631383"/>
+            <a:off x="2295144" y="2804162"/>
             <a:ext cx="786384" cy="256032"/>
           </a:xfrm>
           <a:prstGeom prst="rect">
@@ -8542,13 +8686,13 @@
       </p:sp>
       <p:sp>
         <p:nvSpPr>
-          <p:cNvPr id="16" name="Text 14"/>
+          <p:cNvPr id="22" name="Text 20"/>
           <p:cNvSpPr txBox="1"/>
           <p:nvPr/>
         </p:nvSpPr>
         <p:spPr>
           <a:xfrm>
-            <a:off x="3209544" y="2608523"/>
+            <a:off x="3209544" y="2781302"/>
             <a:ext cx="5431536" cy="635187"/>
           </a:xfrm>
           <a:prstGeom prst="rect">
@@ -8604,7 +8748,7 @@
       </p:sp>
       <p:sp>
         <p:nvSpPr>
-          <p:cNvPr id="17" name="Shape 15"/>
+          <p:cNvPr id="23" name="Shape 21"/>
           <p:cNvSpPr/>
           <p:nvPr/>
         </p:nvSpPr>
@@ -8631,7 +8775,7 @@
       </p:sp>
       <p:sp>
         <p:nvSpPr>
-          <p:cNvPr id="18" name="Text 16"/>
+          <p:cNvPr id="24" name="Text 22"/>
           <p:cNvSpPr txBox="1"/>
           <p:nvPr/>
         </p:nvSpPr>
@@ -8693,7 +8837,7 @@
       </p:sp>
       <p:pic>
         <p:nvPicPr>
-          <p:cNvPr id="20" name="Image 0" descr="/Users/tsengchenghsun/Class/carClass/Claude outputs/第三週(9-24)/src/logo.png">    </p:cNvPr>
+          <p:cNvPr id="26" name="Image 0" descr="/Users/tsengchenghsun/Class/carClass/Claude outputs/第三週(9-24)/src/logo.png">    </p:cNvPr>
           <p:cNvPicPr>
             <a:picLocks noChangeAspect="1"/>
           </p:cNvPicPr>
@@ -8717,7 +8861,7 @@
       </p:pic>
       <p:sp>
         <p:nvSpPr>
-          <p:cNvPr id="21" name="Text 17"/>
+          <p:cNvPr id="27" name="Text 23"/>
           <p:cNvSpPr txBox="1"/>
           <p:nvPr/>
         </p:nvSpPr>
@@ -8756,7 +8900,7 @@
       </p:sp>
       <p:sp>
         <p:nvSpPr>
-          <p:cNvPr id="22" name="Text 18"/>
+          <p:cNvPr id="28" name="Text 24"/>
           <p:cNvSpPr txBox="1"/>
           <p:nvPr/>
         </p:nvSpPr>

--- a/第三週(09-24)/第三週_第1節_簡報.pptx
+++ b/第三週(09-24)/第三週_第1節_簡報.pptx
@@ -1754,19 +1754,41 @@
                 <a:spcPct val="115000"/>
               </a:lnSpc>
               <a:spcAft>
-                <a:spcPts val="600"/>
+                <a:spcPts val="500"/>
               </a:spcAft>
             </a:pPr>
             <a:r>
-              <a:rPr sz="1200" lang="zh-TW" dirty="0">
-                <a:solidFill>
-                  <a:srgbClr val="000000"/>
-                </a:solidFill>
-                <a:latin typeface="Arial Unicode MS"/>
-                <a:ea typeface="Arial Unicode MS"/>
-                <a:cs typeface="Arial Unicode MS"/>
-              </a:rPr>
-              <a:t>左邊這張是 GNSS 天線，測量等級的那種，比手機裡面那顆準很多。照片來自 Wikimedia Commons，CC BY-SA 4.0。
+              <a:rPr sz="1000" lang="zh-TW" dirty="0">
+                <a:solidFill>
+                  <a:srgbClr val="000000"/>
+                </a:solidFill>
+                <a:latin typeface="Arial Unicode MS"/>
+                <a:ea typeface="Arial Unicode MS"/>
+                <a:cs typeface="Arial Unicode MS"/>
+              </a:rPr>
+              <a:t>左邊這張是</a:t>
+            </a:r>
+            <a:r>
+              <a:rPr sz="1000" b="1" lang="zh-TW" dirty="0">
+                <a:solidFill>
+                  <a:srgbClr val="000000"/>
+                </a:solidFill>
+                <a:latin typeface="Arial Unicode MS"/>
+                <a:ea typeface="Arial Unicode MS"/>
+                <a:cs typeface="Arial Unicode MS"/>
+              </a:rPr>
+              <a:t>車用的 GPS 天線</a:t>
+            </a:r>
+            <a:r>
+              <a:rPr sz="1000" lang="zh-TW" dirty="0">
+                <a:solidFill>
+                  <a:srgbClr val="000000"/>
+                </a:solidFill>
+                <a:latin typeface="Arial Unicode MS"/>
+                <a:ea typeface="Arial Unicode MS"/>
+                <a:cs typeface="Arial Unicode MS"/>
+              </a:rPr>
+              <a:t>，黏在擋風玻璃下面或貼在車頂上。計程車、貨車、還有裝了行車紀錄器的車，幾乎都有一顆。下課可以到停車場看看，很多車的擋風玻璃下就黏著這樣一塊黑色的東西，拉一條線接到主機。
 </a:t>
             </a:r>
           </a:p>
@@ -1776,11 +1798,55 @@
                 <a:spcPct val="115000"/>
               </a:lnSpc>
               <a:spcAft>
-                <a:spcPts val="600"/>
+                <a:spcPts val="500"/>
               </a:spcAft>
             </a:pPr>
             <a:r>
-              <a:rPr sz="1200" lang="zh-TW" dirty="0">
+              <a:rPr sz="1000" lang="zh-TW" dirty="0">
+                <a:solidFill>
+                  <a:srgbClr val="000000"/>
+                </a:solidFill>
+                <a:latin typeface="Arial Unicode MS"/>
+                <a:ea typeface="Arial Unicode MS"/>
+                <a:cs typeface="Arial Unicode MS"/>
+              </a:rPr>
+              <a:t>（照片由授課教師提供。）
+</a:t>
+            </a:r>
+          </a:p>
+          <a:p>
+            <a:pPr algn="l">
+              <a:lnSpc>
+                <a:spcPct val="115000"/>
+              </a:lnSpc>
+              <a:spcAft>
+                <a:spcPts val="500"/>
+              </a:spcAft>
+            </a:pPr>
+            <a:r>
+              <a:rPr sz="1000" lang="zh-TW" dirty="0">
+                <a:solidFill>
+                  <a:srgbClr val="000000"/>
+                </a:solidFill>
+                <a:latin typeface="Arial Unicode MS"/>
+                <a:ea typeface="Arial Unicode MS"/>
+                <a:cs typeface="Arial Unicode MS"/>
+              </a:rPr>
+              <a:t>順帶一提，這顆跟各位手機裡那顆是同一個等級。真正做測量用的那種天線長得完全不一樣——一顆圓盤架在腳架上，可以做到公分等級，但也貴上百倍。自駕車用的是介於兩者之間的車規等級。
+</a:t>
+            </a:r>
+          </a:p>
+          <a:p>
+            <a:pPr algn="l">
+              <a:lnSpc>
+                <a:spcPct val="115000"/>
+              </a:lnSpc>
+              <a:spcAft>
+                <a:spcPts val="500"/>
+              </a:spcAft>
+            </a:pPr>
+            <a:r>
+              <a:rPr sz="1000" lang="zh-TW" dirty="0">
                 <a:solidFill>
                   <a:srgbClr val="000000"/>
                 </a:solidFill>
@@ -1798,11 +1864,11 @@
                 <a:spcPct val="115000"/>
               </a:lnSpc>
               <a:spcAft>
-                <a:spcPts val="600"/>
+                <a:spcPts val="500"/>
               </a:spcAft>
             </a:pPr>
             <a:r>
-              <a:rPr sz="1200" lang="zh-TW" dirty="0">
+              <a:rPr sz="1000" lang="zh-TW" dirty="0">
                 <a:solidFill>
                   <a:srgbClr val="000000"/>
                 </a:solidFill>
@@ -1820,11 +1886,11 @@
                 <a:spcPct val="115000"/>
               </a:lnSpc>
               <a:spcAft>
-                <a:spcPts val="600"/>
+                <a:spcPts val="500"/>
               </a:spcAft>
             </a:pPr>
             <a:r>
-              <a:rPr sz="1200" lang="zh-TW" dirty="0">
+              <a:rPr sz="1000" lang="zh-TW" dirty="0">
                 <a:solidFill>
                   <a:srgbClr val="000000"/>
                 </a:solidFill>
@@ -1842,11 +1908,11 @@
                 <a:spcPct val="115000"/>
               </a:lnSpc>
               <a:spcAft>
-                <a:spcPts val="600"/>
+                <a:spcPts val="500"/>
               </a:spcAft>
             </a:pPr>
             <a:r>
-              <a:rPr sz="1200" lang="zh-TW" dirty="0">
+              <a:rPr sz="1000" lang="zh-TW" dirty="0">
                 <a:solidFill>
                   <a:srgbClr val="000000"/>
                 </a:solidFill>
@@ -1864,11 +1930,11 @@
                 <a:spcPct val="115000"/>
               </a:lnSpc>
               <a:spcAft>
-                <a:spcPts val="600"/>
+                <a:spcPts val="500"/>
               </a:spcAft>
             </a:pPr>
             <a:r>
-              <a:rPr sz="1200" lang="zh-TW" dirty="0">
+              <a:rPr sz="1000" lang="zh-TW" dirty="0">
                 <a:solidFill>
                   <a:srgbClr val="000000"/>
                 </a:solidFill>
@@ -1886,11 +1952,11 @@
                 <a:spcPct val="115000"/>
               </a:lnSpc>
               <a:spcAft>
-                <a:spcPts val="600"/>
+                <a:spcPts val="500"/>
               </a:spcAft>
             </a:pPr>
             <a:r>
-              <a:rPr sz="1200" lang="zh-TW" dirty="0">
+              <a:rPr sz="1000" lang="zh-TW" dirty="0">
                 <a:solidFill>
                   <a:srgbClr val="000000"/>
                 </a:solidFill>
@@ -1908,11 +1974,11 @@
                 <a:spcPct val="115000"/>
               </a:lnSpc>
               <a:spcAft>
-                <a:spcPts val="600"/>
+                <a:spcPts val="500"/>
               </a:spcAft>
             </a:pPr>
             <a:r>
-              <a:rPr sz="1200" lang="zh-TW" dirty="0">
+              <a:rPr sz="1000" lang="zh-TW" dirty="0">
                 <a:solidFill>
                   <a:srgbClr val="000000"/>
                 </a:solidFill>
@@ -1930,11 +1996,11 @@
                 <a:spcPct val="115000"/>
               </a:lnSpc>
               <a:spcAft>
-                <a:spcPts val="600"/>
+                <a:spcPts val="500"/>
               </a:spcAft>
             </a:pPr>
             <a:r>
-              <a:rPr sz="1200" lang="zh-TW" dirty="0">
+              <a:rPr sz="1000" lang="zh-TW" dirty="0">
                 <a:solidFill>
                   <a:srgbClr val="000000"/>
                 </a:solidFill>
@@ -10871,7 +10937,7 @@
       </p:sp>
       <p:pic>
         <p:nvPicPr>
-          <p:cNvPr id="5" name="Image 0" descr="/Users/tsengchenghsun/Class/carClass/Claude outputs/第三週(9-24)/src/img/w3_gns.jpg">    </p:cNvPr>
+          <p:cNvPr id="5" name="Image 0" descr="/Users/tsengchenghsun/Class/carClass/Claude outputs/第三週(9-24)/src/img/w3_gns_car.jpg">    </p:cNvPr>
           <p:cNvPicPr>
             <a:picLocks noChangeAspect="1"/>
           </p:cNvPicPr>
@@ -10885,8 +10951,8 @@
         </p:blipFill>
         <p:spPr>
           <a:xfrm>
-            <a:off x="548640" y="1545684"/>
-            <a:ext cx="3813048" cy="1803572"/>
+            <a:off x="735981" y="1301348"/>
+            <a:ext cx="3438366" cy="2292244"/>
           </a:xfrm>
           <a:prstGeom prst="rect">
             <a:avLst/>
@@ -10926,7 +10992,7 @@
                 <a:ea typeface="Arial" pitchFamily="34" charset="-122"/>
                 <a:cs typeface="Arial" pitchFamily="34" charset="-120"/>
               </a:rPr>
-              <a:t>Karlbrix · CC BY-SA 4.0 · Wikimedia Commons</a:t>
+              <a:t>Ảnh do giảng viên cung cấp · 授課教師提供</a:t>
             </a:r>
             <a:endParaRPr lang="en-US" sz="750" dirty="0"/>
           </a:p>
@@ -11364,7 +11430,7 @@
                 <a:ea typeface="Arial" pitchFamily="34" charset="-122"/>
                 <a:cs typeface="Arial" pitchFamily="34" charset="-120"/>
               </a:rPr>
-              <a:t>Ăng-ten bên trái là loại trắc địa, chính xác hơn loại trong điện thoại</a:t>
+              <a:t>Bên trái: ăng-ten GPS dán dưới kính lái — taxi, xe tải đều có một cái</a:t>
             </a:r>
             <a:endParaRPr lang="en-US" sz="950" dirty="0"/>
           </a:p>
@@ -11384,7 +11450,7 @@
                 <a:ea typeface="微軟正黑體" pitchFamily="34" charset="-122"/>
                 <a:cs typeface="微軟正黑體" pitchFamily="34" charset="-120"/>
               </a:rPr>
-              <a:t>左邊那個天線是測量等級的，比手機裡那顆準得多</a:t>
+              <a:t>左邊那顆：黏在擋風玻璃下的 GPS 天線，計程車和貨車上都有一個</a:t>
             </a:r>
             <a:endParaRPr lang="en-US" sz="950" dirty="0"/>
           </a:p>

--- a/第三週(09-24)/第三週_第1節_簡報.pptx
+++ b/第三週(09-24)/第三週_第1節_簡報.pptx
@@ -1084,7 +1084,7 @@
                 <a:ea typeface="Arial Unicode MS"/>
                 <a:cs typeface="Arial Unicode MS"/>
               </a:rPr>
-              <a:t>左邊這張是停車感測器的特寫，就是保險桿上那個小圓點，照片來自 Wikimedia Commons，CC BY 2.0。
+              <a:t>左邊這張是停車感測器的特寫，就是保險桿上那個小圓點。照片來自 Wikimedia Commons，CC BY 2.0 授權。
 </a:t>
             </a:r>
           </a:p>
@@ -1128,7 +1128,7 @@
                 <a:ea typeface="Arial Unicode MS"/>
                 <a:cs typeface="Arial Unicode MS"/>
               </a:rPr>
-              <a:t>影片重點：
+              <a:t>影片我們看三件事。
 </a:t>
             </a:r>
           </a:p>
@@ -1150,7 +1150,7 @@
                 <a:ea typeface="Arial Unicode MS"/>
                 <a:cs typeface="Arial Unicode MS"/>
               </a:rPr>
-              <a:t>第一，數數看一台車裝幾顆。為什麼要好幾顆？因為一顆的視野只有一個錐形，要涵蓋整個車尾就得排一排。
+              <a:t>第一，數數看一台車裝幾顆。為什麼要好幾顆？因為一顆的視野只有一個錐形，要涵蓋整個車尾，就得排一排。
 </a:t>
             </a:r>
           </a:p>
@@ -1172,7 +1172,7 @@
                 <a:ea typeface="Arial Unicode MS"/>
                 <a:cs typeface="Arial Unicode MS"/>
               </a:rPr>
-              <a:t>第二，嗶嗶聲。愈近嗶得愈快，那是車子把距離翻譯成你聽得懂的東西。其實螢幕上也會畫距離，但聲音不用你低頭看。
+              <a:t>第二，注意那個嗶嗶聲。愈近嗶得愈快，那是車子把距離翻譯成你聽得懂的東西。其實螢幕上也會畫出距離，但是聲音不用你低頭去看。
 </a:t>
             </a:r>
           </a:p>
@@ -1194,7 +1194,7 @@
                 <a:ea typeface="Arial Unicode MS"/>
                 <a:cs typeface="Arial Unicode MS"/>
               </a:rPr>
-              <a:t>第三，一個思考題：為什麼超音波只在停車的時候用，開車的時候不用？
+              <a:t>第三，我給大家一個思考題：為什麼超音波只在停車的時候用，開車的時候不用？
 </a:t>
             </a:r>
           </a:p>
@@ -1216,7 +1216,7 @@
                 <a:ea typeface="Arial Unicode MS"/>
                 <a:cs typeface="Arial Unicode MS"/>
               </a:rPr>
-              <a:t>（預期答案：只有幾公尺，時速五十的煞停距離要二十公尺，它根本來不及。第二節會算這個。）
+              <a:t>因為它只有幾公尺。時速五十的時候，煞停距離要二十公尺，它根本來不及。這個數字第二節我們會算出來。
 </a:t>
             </a:r>
           </a:p>
@@ -1238,7 +1238,7 @@
                 <a:ea typeface="Arial Unicode MS"/>
                 <a:cs typeface="Arial Unicode MS"/>
               </a:rPr>
-              <a:t>（建議播 2–3 分鐘。需要網路。）</a:t>
+              <a:t>我們播兩三分鐘就好。</a:t>
             </a:r>
           </a:p>
         </p:txBody>
@@ -1436,7 +1436,7 @@
                 <a:ea typeface="Arial Unicode MS"/>
                 <a:cs typeface="Arial Unicode MS"/>
               </a:rPr>
-              <a:t>我在哪裡</a:t>
+              <a:t>我在哪裡。</a:t>
             </a:r>
             <a:r>
               <a:rPr sz="1050" lang="zh-TW" dirty="0">
@@ -1447,7 +1447,7 @@
                 <a:ea typeface="Arial Unicode MS"/>
                 <a:cs typeface="Arial Unicode MS"/>
               </a:rPr>
-              <a:t>。
+              <a:t>
 </a:t>
             </a:r>
           </a:p>
@@ -1469,7 +1469,7 @@
                 <a:ea typeface="Arial Unicode MS"/>
                 <a:cs typeface="Arial Unicode MS"/>
               </a:rPr>
-              <a:t>原理是比對時間。天上每顆衛星不斷廣播「我是幾號衛星，現在幾點幾分幾秒，我在這個位置」。訊號傳到你的接收器要時間，你比對「它說幾點發的」和「我幾點收到」，就知道離那顆衛星多遠。同時收到四顆以上，就能解出自己在三維空間的位置。
+              <a:t>原理是比對時間。天上每一顆衛星不斷廣播「我是幾號衛星，現在幾點幾分幾秒，我在這個位置」。訊號傳到你的接收器要時間，你比對「它說幾點發的」跟「我幾點收到」，就知道離那一顆衛星多遠。同時收到四顆以上，就能解出自己在三維空間裡的位置。
 </a:t>
             </a:r>
           </a:p>
@@ -1491,7 +1491,7 @@
                 <a:ea typeface="Arial Unicode MS"/>
                 <a:cs typeface="Arial Unicode MS"/>
               </a:rPr>
-              <a:t>為什麼要四顆不是三顆？因為還有一個未知數是你自己接收器的時鐘誤差。三顆解位置，第四顆解時間。
+              <a:t>為什麼要四顆，不是三顆？因為還有一個未知數，是你自己接收器的時鐘誤差。三顆解位置，第四顆解時間。
 </a:t>
             </a:r>
           </a:p>
@@ -1513,7 +1513,7 @@
                 <a:ea typeface="Arial Unicode MS"/>
                 <a:cs typeface="Arial Unicode MS"/>
               </a:rPr>
-              <a:t>特性：它給的是</a:t>
+              <a:t>特性是這樣：它給的是</a:t>
             </a:r>
             <a:r>
               <a:rPr sz="1050" b="1" lang="zh-TW" dirty="0">
@@ -1579,7 +1579,29 @@
                 <a:ea typeface="Arial Unicode MS"/>
                 <a:cs typeface="Arial Unicode MS"/>
               </a:rPr>
-              <a:t>（預期答案：分不出自己在哪一個車道。）
+              <a:t>代表它</a:t>
+            </a:r>
+            <a:r>
+              <a:rPr sz="1050" b="1" lang="zh-TW" dirty="0">
+                <a:solidFill>
+                  <a:srgbClr val="000000"/>
+                </a:solidFill>
+                <a:latin typeface="Arial Unicode MS"/>
+                <a:ea typeface="Arial Unicode MS"/>
+                <a:cs typeface="Arial Unicode MS"/>
+              </a:rPr>
+              <a:t>分不出你在哪一個車道</a:t>
+            </a:r>
+            <a:r>
+              <a:rPr sz="1050" lang="zh-TW" dirty="0">
+                <a:solidFill>
+                  <a:srgbClr val="000000"/>
+                </a:solidFill>
+                <a:latin typeface="Arial Unicode MS"/>
+                <a:ea typeface="Arial Unicode MS"/>
+                <a:cs typeface="Arial Unicode MS"/>
+              </a:rPr>
+              <a:t>。所以 GNSS 可以告訴你「你在中正路上」，但是沒辦法告訴你「你在中間那個車道」。要知道在哪一個車道，還是得靠相機去看標線。
 </a:t>
             </a:r>
           </a:p>
@@ -1601,29 +1623,7 @@
                 <a:ea typeface="Arial Unicode MS"/>
                 <a:cs typeface="Arial Unicode MS"/>
               </a:rPr>
-              <a:t>對。所以 GNSS 可以告訴你「你在中正路上」，但沒辦法告訴你「你在中間那個車道」。要知道車道，還是得靠相機看標線。
-</a:t>
-            </a:r>
-          </a:p>
-          <a:p>
-            <a:pPr algn="l">
-              <a:lnSpc>
-                <a:spcPct val="115000"/>
-              </a:lnSpc>
-              <a:spcAft>
-                <a:spcPts val="525"/>
-              </a:spcAft>
-            </a:pPr>
-            <a:r>
-              <a:rPr sz="1050" lang="zh-TW" dirty="0">
-                <a:solidFill>
-                  <a:srgbClr val="000000"/>
-                </a:solidFill>
-                <a:latin typeface="Arial Unicode MS"/>
-                <a:ea typeface="Arial Unicode MS"/>
-                <a:cs typeface="Arial Unicode MS"/>
-              </a:rPr>
-              <a:t>而且隧道裡、高樓之間會收不到訊號，這時候要靠慣性感測器暫時頂著。
+              <a:t>而且在隧道裡面、在高樓中間會收不到訊號，這時候要靠慣性感測器暫時頂著。
 </a:t>
             </a:r>
           </a:p>
@@ -1754,11 +1754,11 @@
                 <a:spcPct val="115000"/>
               </a:lnSpc>
               <a:spcAft>
-                <a:spcPts val="500"/>
+                <a:spcPts val="525"/>
               </a:spcAft>
             </a:pPr>
             <a:r>
-              <a:rPr sz="1000" lang="zh-TW" dirty="0">
+              <a:rPr sz="1050" lang="zh-TW" dirty="0">
                 <a:solidFill>
                   <a:srgbClr val="000000"/>
                 </a:solidFill>
@@ -1769,7 +1769,7 @@
               <a:t>左邊這張是</a:t>
             </a:r>
             <a:r>
-              <a:rPr sz="1000" b="1" lang="zh-TW" dirty="0">
+              <a:rPr sz="1050" b="1" lang="zh-TW" dirty="0">
                 <a:solidFill>
                   <a:srgbClr val="000000"/>
                 </a:solidFill>
@@ -1780,15 +1780,15 @@
               <a:t>車用的 GPS 天線</a:t>
             </a:r>
             <a:r>
-              <a:rPr sz="1000" lang="zh-TW" dirty="0">
-                <a:solidFill>
-                  <a:srgbClr val="000000"/>
-                </a:solidFill>
-                <a:latin typeface="Arial Unicode MS"/>
-                <a:ea typeface="Arial Unicode MS"/>
-                <a:cs typeface="Arial Unicode MS"/>
-              </a:rPr>
-              <a:t>，黏在擋風玻璃下面或貼在車頂上。計程車、貨車、還有裝了行車紀錄器的車，幾乎都有一顆。下課可以到停車場看看，很多車的擋風玻璃下就黏著這樣一塊黑色的東西，拉一條線接到主機。
+              <a:rPr sz="1050" lang="zh-TW" dirty="0">
+                <a:solidFill>
+                  <a:srgbClr val="000000"/>
+                </a:solidFill>
+                <a:latin typeface="Arial Unicode MS"/>
+                <a:ea typeface="Arial Unicode MS"/>
+                <a:cs typeface="Arial Unicode MS"/>
+              </a:rPr>
+              <a:t>，黏在擋風玻璃下面，或者貼在車頂上。計程車、貨車、還有裝了行車紀錄器的車，幾乎都有一顆。下課可以到停車場看看，很多車的擋風玻璃下面就黏著這樣一塊黑色的東西，拉一條線接到主機。
 </a:t>
             </a:r>
           </a:p>
@@ -1798,19 +1798,19 @@
                 <a:spcPct val="115000"/>
               </a:lnSpc>
               <a:spcAft>
-                <a:spcPts val="500"/>
+                <a:spcPts val="525"/>
               </a:spcAft>
             </a:pPr>
             <a:r>
-              <a:rPr sz="1000" lang="zh-TW" dirty="0">
-                <a:solidFill>
-                  <a:srgbClr val="000000"/>
-                </a:solidFill>
-                <a:latin typeface="Arial Unicode MS"/>
-                <a:ea typeface="Arial Unicode MS"/>
-                <a:cs typeface="Arial Unicode MS"/>
-              </a:rPr>
-              <a:t>（照片由授課教師提供。）
+              <a:rPr sz="1050" lang="zh-TW" dirty="0">
+                <a:solidFill>
+                  <a:srgbClr val="000000"/>
+                </a:solidFill>
+                <a:latin typeface="Arial Unicode MS"/>
+                <a:ea typeface="Arial Unicode MS"/>
+                <a:cs typeface="Arial Unicode MS"/>
+              </a:rPr>
+              <a:t>順帶一提，這一顆跟各位手機裡面那一顆是同一個等級。真正做測量用的那種天線長得完全不一樣，是一個圓盤架在腳架上，可以做到公分等級，但是也貴上百倍。自駕車用的是介於兩者中間的車規等級。
 </a:t>
             </a:r>
           </a:p>
@@ -1820,19 +1820,19 @@
                 <a:spcPct val="115000"/>
               </a:lnSpc>
               <a:spcAft>
-                <a:spcPts val="500"/>
+                <a:spcPts val="525"/>
               </a:spcAft>
             </a:pPr>
             <a:r>
-              <a:rPr sz="1000" lang="zh-TW" dirty="0">
-                <a:solidFill>
-                  <a:srgbClr val="000000"/>
-                </a:solidFill>
-                <a:latin typeface="Arial Unicode MS"/>
-                <a:ea typeface="Arial Unicode MS"/>
-                <a:cs typeface="Arial Unicode MS"/>
-              </a:rPr>
-              <a:t>順帶一提，這顆跟各位手機裡那顆是同一個等級。真正做測量用的那種天線長得完全不一樣——一顆圓盤架在腳架上，可以做到公分等級，但也貴上百倍。自駕車用的是介於兩者之間的車規等級。
+              <a:rPr sz="1050" lang="zh-TW" dirty="0">
+                <a:solidFill>
+                  <a:srgbClr val="000000"/>
+                </a:solidFill>
+                <a:latin typeface="Arial Unicode MS"/>
+                <a:ea typeface="Arial Unicode MS"/>
+                <a:cs typeface="Arial Unicode MS"/>
+              </a:rPr>
+              <a:t>影片是 Perimeter Institute 拍的，那是加拿大一間理論物理研究院。他們用實體教具示範三邊測量，講得非常清楚，不熟數學的同學也看得懂。
 </a:t>
             </a:r>
           </a:p>
@@ -1842,19 +1842,19 @@
                 <a:spcPct val="115000"/>
               </a:lnSpc>
               <a:spcAft>
-                <a:spcPts val="500"/>
+                <a:spcPts val="525"/>
               </a:spcAft>
             </a:pPr>
             <a:r>
-              <a:rPr sz="1000" lang="zh-TW" dirty="0">
-                <a:solidFill>
-                  <a:srgbClr val="000000"/>
-                </a:solidFill>
-                <a:latin typeface="Arial Unicode MS"/>
-                <a:ea typeface="Arial Unicode MS"/>
-                <a:cs typeface="Arial Unicode MS"/>
-              </a:rPr>
-              <a:t>影片是 Perimeter Institute 拍的——那是加拿大一間理論物理研究院，他們用實體教具示範三邊測量，講得非常清楚，適合給不熟數學的同學看。
+              <a:rPr sz="1050" lang="zh-TW" dirty="0">
+                <a:solidFill>
+                  <a:srgbClr val="000000"/>
+                </a:solidFill>
+                <a:latin typeface="Arial Unicode MS"/>
+                <a:ea typeface="Arial Unicode MS"/>
+                <a:cs typeface="Arial Unicode MS"/>
+              </a:rPr>
+              <a:t>重點是這樣。
 </a:t>
             </a:r>
           </a:p>
@@ -1864,19 +1864,19 @@
                 <a:spcPct val="115000"/>
               </a:lnSpc>
               <a:spcAft>
-                <a:spcPts val="500"/>
+                <a:spcPts val="525"/>
               </a:spcAft>
             </a:pPr>
             <a:r>
-              <a:rPr sz="1000" lang="zh-TW" dirty="0">
-                <a:solidFill>
-                  <a:srgbClr val="000000"/>
-                </a:solidFill>
-                <a:latin typeface="Arial Unicode MS"/>
-                <a:ea typeface="Arial Unicode MS"/>
-                <a:cs typeface="Arial Unicode MS"/>
-              </a:rPr>
-              <a:t>重點：
+              <a:rPr sz="1050" lang="zh-TW" dirty="0">
+                <a:solidFill>
+                  <a:srgbClr val="000000"/>
+                </a:solidFill>
+                <a:latin typeface="Arial Unicode MS"/>
+                <a:ea typeface="Arial Unicode MS"/>
+                <a:cs typeface="Arial Unicode MS"/>
+              </a:rPr>
+              <a:t>一顆衛星，你只知道自己離它多遠，也就是在某一個球面上，可能在地球上的任何地方。
 </a:t>
             </a:r>
           </a:p>
@@ -1886,19 +1886,19 @@
                 <a:spcPct val="115000"/>
               </a:lnSpc>
               <a:spcAft>
-                <a:spcPts val="500"/>
+                <a:spcPts val="525"/>
               </a:spcAft>
             </a:pPr>
             <a:r>
-              <a:rPr sz="1000" lang="zh-TW" dirty="0">
-                <a:solidFill>
-                  <a:srgbClr val="000000"/>
-                </a:solidFill>
-                <a:latin typeface="Arial Unicode MS"/>
-                <a:ea typeface="Arial Unicode MS"/>
-                <a:cs typeface="Arial Unicode MS"/>
-              </a:rPr>
-              <a:t>一顆衛星，你只知道自己離它多遠，也就是在某個球面上，可能在地球任何地方。
+              <a:rPr sz="1050" lang="zh-TW" dirty="0">
+                <a:solidFill>
+                  <a:srgbClr val="000000"/>
+                </a:solidFill>
+                <a:latin typeface="Arial Unicode MS"/>
+                <a:ea typeface="Arial Unicode MS"/>
+                <a:cs typeface="Arial Unicode MS"/>
+              </a:rPr>
+              <a:t>兩顆，兩個球面相交，變成一個圓。
 </a:t>
             </a:r>
           </a:p>
@@ -1908,19 +1908,19 @@
                 <a:spcPct val="115000"/>
               </a:lnSpc>
               <a:spcAft>
-                <a:spcPts val="500"/>
+                <a:spcPts val="525"/>
               </a:spcAft>
             </a:pPr>
             <a:r>
-              <a:rPr sz="1000" lang="zh-TW" dirty="0">
-                <a:solidFill>
-                  <a:srgbClr val="000000"/>
-                </a:solidFill>
-                <a:latin typeface="Arial Unicode MS"/>
-                <a:ea typeface="Arial Unicode MS"/>
-                <a:cs typeface="Arial Unicode MS"/>
-              </a:rPr>
-              <a:t>兩顆，兩個球面相交成一個圓。
+              <a:rPr sz="1050" lang="zh-TW" dirty="0">
+                <a:solidFill>
+                  <a:srgbClr val="000000"/>
+                </a:solidFill>
+                <a:latin typeface="Arial Unicode MS"/>
+                <a:ea typeface="Arial Unicode MS"/>
+                <a:cs typeface="Arial Unicode MS"/>
+              </a:rPr>
+              <a:t>三顆，縮到兩個點，其中一個通常在外太空，可以排除掉。
 </a:t>
             </a:r>
           </a:p>
@@ -1930,19 +1930,19 @@
                 <a:spcPct val="115000"/>
               </a:lnSpc>
               <a:spcAft>
-                <a:spcPts val="500"/>
+                <a:spcPts val="525"/>
               </a:spcAft>
             </a:pPr>
             <a:r>
-              <a:rPr sz="1000" lang="zh-TW" dirty="0">
-                <a:solidFill>
-                  <a:srgbClr val="000000"/>
-                </a:solidFill>
-                <a:latin typeface="Arial Unicode MS"/>
-                <a:ea typeface="Arial Unicode MS"/>
-                <a:cs typeface="Arial Unicode MS"/>
-              </a:rPr>
-              <a:t>三顆，縮到兩個點，其中一個通常在外太空，可以排除。
+              <a:rPr sz="1050" lang="zh-TW" dirty="0">
+                <a:solidFill>
+                  <a:srgbClr val="000000"/>
+                </a:solidFill>
+                <a:latin typeface="Arial Unicode MS"/>
+                <a:ea typeface="Arial Unicode MS"/>
+                <a:cs typeface="Arial Unicode MS"/>
+              </a:rPr>
+              <a:t>四顆，解出唯一的那個點，而且第四顆還順便修正你接收器的時鐘誤差，剛剛那一頁講過這件事。
 </a:t>
             </a:r>
           </a:p>
@@ -1952,19 +1952,19 @@
                 <a:spcPct val="115000"/>
               </a:lnSpc>
               <a:spcAft>
-                <a:spcPts val="500"/>
+                <a:spcPts val="525"/>
               </a:spcAft>
             </a:pPr>
             <a:r>
-              <a:rPr sz="1000" lang="zh-TW" dirty="0">
-                <a:solidFill>
-                  <a:srgbClr val="000000"/>
-                </a:solidFill>
-                <a:latin typeface="Arial Unicode MS"/>
-                <a:ea typeface="Arial Unicode MS"/>
-                <a:cs typeface="Arial Unicode MS"/>
-              </a:rPr>
-              <a:t>四顆，解出唯一的點，而且第四顆還順便修正你接收器的時鐘誤差——剛剛那一頁講過這件事。
+              <a:rPr sz="1050" lang="zh-TW" dirty="0">
+                <a:solidFill>
+                  <a:srgbClr val="000000"/>
+                </a:solidFill>
+                <a:latin typeface="Arial Unicode MS"/>
+                <a:ea typeface="Arial Unicode MS"/>
+                <a:cs typeface="Arial Unicode MS"/>
+              </a:rPr>
+              <a:t>看完請大家記住一句話：它從頭到尾都在算自己在哪裡，完全沒有看前面有什麼。
 </a:t>
             </a:r>
           </a:p>
@@ -1974,41 +1974,19 @@
                 <a:spcPct val="115000"/>
               </a:lnSpc>
               <a:spcAft>
-                <a:spcPts val="500"/>
+                <a:spcPts val="525"/>
               </a:spcAft>
             </a:pPr>
             <a:r>
-              <a:rPr sz="1000" lang="zh-TW" dirty="0">
-                <a:solidFill>
-                  <a:srgbClr val="000000"/>
-                </a:solidFill>
-                <a:latin typeface="Arial Unicode MS"/>
-                <a:ea typeface="Arial Unicode MS"/>
-                <a:cs typeface="Arial Unicode MS"/>
-              </a:rPr>
-              <a:t>看完請記住一句話：它從頭到尾都在算自己在哪裡，完全沒有看前面有什麼。
-</a:t>
-            </a:r>
-          </a:p>
-          <a:p>
-            <a:pPr algn="l">
-              <a:lnSpc>
-                <a:spcPct val="115000"/>
-              </a:lnSpc>
-              <a:spcAft>
-                <a:spcPts val="500"/>
-              </a:spcAft>
-            </a:pPr>
-            <a:r>
-              <a:rPr sz="1000" lang="zh-TW" dirty="0">
-                <a:solidFill>
-                  <a:srgbClr val="000000"/>
-                </a:solidFill>
-                <a:latin typeface="Arial Unicode MS"/>
-                <a:ea typeface="Arial Unicode MS"/>
-                <a:cs typeface="Arial Unicode MS"/>
-              </a:rPr>
-              <a:t>（建議播 2–3 分鐘。需要網路。）</a:t>
+              <a:rPr sz="1050" lang="zh-TW" dirty="0">
+                <a:solidFill>
+                  <a:srgbClr val="000000"/>
+                </a:solidFill>
+                <a:latin typeface="Arial Unicode MS"/>
+                <a:ea typeface="Arial Unicode MS"/>
+                <a:cs typeface="Arial Unicode MS"/>
+              </a:rPr>
+              <a:t>我們播兩三分鐘就好。</a:t>
             </a:r>
           </a:p>
         </p:txBody>
@@ -2480,11 +2458,11 @@
                 <a:spcPct val="115000"/>
               </a:lnSpc>
               <a:spcAft>
-                <a:spcPts val="575"/>
+                <a:spcPts val="600"/>
               </a:spcAft>
             </a:pPr>
             <a:r>
-              <a:rPr sz="1150" lang="zh-TW" dirty="0">
+              <a:rPr sz="1200" lang="zh-TW" dirty="0">
                 <a:solidFill>
                   <a:srgbClr val="000000"/>
                 </a:solidFill>
@@ -2502,19 +2480,19 @@
                 <a:spcPct val="115000"/>
               </a:lnSpc>
               <a:spcAft>
-                <a:spcPts val="575"/>
+                <a:spcPts val="600"/>
               </a:spcAft>
             </a:pPr>
             <a:r>
-              <a:rPr sz="1150" lang="zh-TW" dirty="0">
-                <a:solidFill>
-                  <a:srgbClr val="000000"/>
-                </a:solidFill>
-                <a:latin typeface="Arial Unicode MS"/>
-                <a:ea typeface="Arial Unicode MS"/>
-                <a:cs typeface="Arial Unicode MS"/>
-              </a:rPr>
-              <a:t>請大家注意一個細節：衣服厚的地方顏色比較暗。為什麼？
+              <a:rPr sz="1200" lang="zh-TW" dirty="0">
+                <a:solidFill>
+                  <a:srgbClr val="000000"/>
+                </a:solidFill>
+                <a:latin typeface="Arial Unicode MS"/>
+                <a:ea typeface="Arial Unicode MS"/>
+                <a:cs typeface="Arial Unicode MS"/>
+              </a:rPr>
+              <a:t>請大家注意一個細節：衣服比較厚的地方，顏色比較暗。為什麼？
 </a:t>
             </a:r>
           </a:p>
@@ -2524,19 +2502,41 @@
                 <a:spcPct val="115000"/>
               </a:lnSpc>
               <a:spcAft>
-                <a:spcPts val="575"/>
+                <a:spcPts val="600"/>
               </a:spcAft>
             </a:pPr>
             <a:r>
-              <a:rPr sz="1150" lang="zh-TW" dirty="0">
-                <a:solidFill>
-                  <a:srgbClr val="000000"/>
-                </a:solidFill>
-                <a:latin typeface="Arial Unicode MS"/>
-                <a:ea typeface="Arial Unicode MS"/>
-                <a:cs typeface="Arial Unicode MS"/>
-              </a:rPr>
-              <a:t>（預期答案：衣服會隔熱，所以表面溫度比較低。）
+              <a:rPr sz="1200" lang="zh-TW" dirty="0">
+                <a:solidFill>
+                  <a:srgbClr val="000000"/>
+                </a:solidFill>
+                <a:latin typeface="Arial Unicode MS"/>
+                <a:ea typeface="Arial Unicode MS"/>
+                <a:cs typeface="Arial Unicode MS"/>
+              </a:rPr>
+              <a:t>因為衣服會隔熱，所以表面的溫度比較低。這也告訴我們熱像的一個限制——</a:t>
+            </a:r>
+            <a:r>
+              <a:rPr sz="1200" b="1" lang="zh-TW" dirty="0">
+                <a:solidFill>
+                  <a:srgbClr val="000000"/>
+                </a:solidFill>
+                <a:latin typeface="Arial Unicode MS"/>
+                <a:ea typeface="Arial Unicode MS"/>
+                <a:cs typeface="Arial Unicode MS"/>
+              </a:rPr>
+              <a:t>它看到的是表面溫度，不是身體裡面的溫度。</a:t>
+            </a:r>
+            <a:r>
+              <a:rPr sz="1200" lang="zh-TW" dirty="0">
+                <a:solidFill>
+                  <a:srgbClr val="000000"/>
+                </a:solidFill>
+                <a:latin typeface="Arial Unicode MS"/>
+                <a:ea typeface="Arial Unicode MS"/>
+                <a:cs typeface="Arial Unicode MS"/>
+              </a:rPr>
+              <a:t>冬天穿很厚的人，在熱像裡面會比夏天穿短袖的人暗一些。
 </a:t>
             </a:r>
           </a:p>
@@ -2546,19 +2546,19 @@
                 <a:spcPct val="115000"/>
               </a:lnSpc>
               <a:spcAft>
-                <a:spcPts val="575"/>
+                <a:spcPts val="600"/>
               </a:spcAft>
             </a:pPr>
             <a:r>
-              <a:rPr sz="1150" lang="zh-TW" dirty="0">
-                <a:solidFill>
-                  <a:srgbClr val="000000"/>
-                </a:solidFill>
-                <a:latin typeface="Arial Unicode MS"/>
-                <a:ea typeface="Arial Unicode MS"/>
-                <a:cs typeface="Arial Unicode MS"/>
-              </a:rPr>
-              <a:t>對。這也告訴我們熱像的一個限制——它看到的是表面溫度，不是身體裡面的溫度。冬天穿很厚的人，在熱像裡會比夏天穿短袖的人暗一些。
+              <a:rPr sz="1200" lang="zh-TW" dirty="0">
+                <a:solidFill>
+                  <a:srgbClr val="000000"/>
+                </a:solidFill>
+                <a:latin typeface="Arial Unicode MS"/>
+                <a:ea typeface="Arial Unicode MS"/>
+                <a:cs typeface="Arial Unicode MS"/>
+              </a:rPr>
+              <a:t>影片是實際裝在車上的熱像夜視。我們看三件事。
 </a:t>
             </a:r>
           </a:p>
@@ -2568,19 +2568,19 @@
                 <a:spcPct val="115000"/>
               </a:lnSpc>
               <a:spcAft>
-                <a:spcPts val="575"/>
+                <a:spcPts val="600"/>
               </a:spcAft>
             </a:pPr>
             <a:r>
-              <a:rPr sz="1150" lang="zh-TW" dirty="0">
-                <a:solidFill>
-                  <a:srgbClr val="000000"/>
-                </a:solidFill>
-                <a:latin typeface="Arial Unicode MS"/>
-                <a:ea typeface="Arial Unicode MS"/>
-                <a:cs typeface="Arial Unicode MS"/>
-              </a:rPr>
-              <a:t>影片是實際裝在車上的熱像夜視。重點：
+              <a:rPr sz="1200" lang="zh-TW" dirty="0">
+                <a:solidFill>
+                  <a:srgbClr val="000000"/>
+                </a:solidFill>
+                <a:latin typeface="Arial Unicode MS"/>
+                <a:ea typeface="Arial Unicode MS"/>
+                <a:cs typeface="Arial Unicode MS"/>
+              </a:rPr>
+              <a:t>第一，人和動物非常亮。鹿站在路邊很遠就看得到，一般的車燈根本照不到那麼遠。
 </a:t>
             </a:r>
           </a:p>
@@ -2590,19 +2590,19 @@
                 <a:spcPct val="115000"/>
               </a:lnSpc>
               <a:spcAft>
-                <a:spcPts val="575"/>
+                <a:spcPts val="600"/>
               </a:spcAft>
             </a:pPr>
             <a:r>
-              <a:rPr sz="1150" lang="zh-TW" dirty="0">
-                <a:solidFill>
-                  <a:srgbClr val="000000"/>
-                </a:solidFill>
-                <a:latin typeface="Arial Unicode MS"/>
-                <a:ea typeface="Arial Unicode MS"/>
-                <a:cs typeface="Arial Unicode MS"/>
-              </a:rPr>
-              <a:t>第一，人和動物非常亮，鹿在路邊很遠就看得到，一般車燈根本照不到那麼遠。
+              <a:rPr sz="1200" lang="zh-TW" dirty="0">
+                <a:solidFill>
+                  <a:srgbClr val="000000"/>
+                </a:solidFill>
+                <a:latin typeface="Arial Unicode MS"/>
+                <a:ea typeface="Arial Unicode MS"/>
+                <a:cs typeface="Arial Unicode MS"/>
+              </a:rPr>
+              <a:t>第二，可是交通標誌、紅綠燈、路面標線，完全看不到。因為它們跟背景沒有溫差。
 </a:t>
             </a:r>
           </a:p>
@@ -2612,19 +2612,19 @@
                 <a:spcPct val="115000"/>
               </a:lnSpc>
               <a:spcAft>
-                <a:spcPts val="575"/>
+                <a:spcPts val="600"/>
               </a:spcAft>
             </a:pPr>
             <a:r>
-              <a:rPr sz="1150" lang="zh-TW" dirty="0">
-                <a:solidFill>
-                  <a:srgbClr val="000000"/>
-                </a:solidFill>
-                <a:latin typeface="Arial Unicode MS"/>
-                <a:ea typeface="Arial Unicode MS"/>
-                <a:cs typeface="Arial Unicode MS"/>
-              </a:rPr>
-              <a:t>第二，但是交通標誌、紅綠燈、路面標線——完全看不到。因為它們跟背景沒有溫差。
+              <a:rPr sz="1200" lang="zh-TW" dirty="0">
+                <a:solidFill>
+                  <a:srgbClr val="000000"/>
+                </a:solidFill>
+                <a:latin typeface="Arial Unicode MS"/>
+                <a:ea typeface="Arial Unicode MS"/>
+                <a:cs typeface="Arial Unicode MS"/>
+              </a:rPr>
+              <a:t>第三，如果影片裡有並排比較，請跟一般相機的夜間畫面對照一下，差別非常明顯。
 </a:t>
             </a:r>
           </a:p>
@@ -2634,19 +2634,19 @@
                 <a:spcPct val="115000"/>
               </a:lnSpc>
               <a:spcAft>
-                <a:spcPts val="575"/>
+                <a:spcPts val="600"/>
               </a:spcAft>
             </a:pPr>
             <a:r>
-              <a:rPr sz="1150" lang="zh-TW" dirty="0">
-                <a:solidFill>
-                  <a:srgbClr val="000000"/>
-                </a:solidFill>
-                <a:latin typeface="Arial Unicode MS"/>
-                <a:ea typeface="Arial Unicode MS"/>
-                <a:cs typeface="Arial Unicode MS"/>
-              </a:rPr>
-              <a:t>第三，如果影片有並排比較，請跟一般相機的夜間畫面對照一下，差別非常明顯。
+              <a:rPr sz="1200" lang="zh-TW" dirty="0">
+                <a:solidFill>
+                  <a:srgbClr val="000000"/>
+                </a:solidFill>
+                <a:latin typeface="Arial Unicode MS"/>
+                <a:ea typeface="Arial Unicode MS"/>
+                <a:cs typeface="Arial Unicode MS"/>
+              </a:rPr>
+              <a:t>這就是為什麼有些高階車款會多裝一顆熱像做夜視輔助，但是它永遠是補強，不能取代相機。
 </a:t>
             </a:r>
           </a:p>
@@ -2656,19 +2656,19 @@
                 <a:spcPct val="115000"/>
               </a:lnSpc>
               <a:spcAft>
-                <a:spcPts val="575"/>
+                <a:spcPts val="600"/>
               </a:spcAft>
             </a:pPr>
             <a:r>
-              <a:rPr sz="1150" lang="zh-TW" dirty="0">
-                <a:solidFill>
-                  <a:srgbClr val="000000"/>
-                </a:solidFill>
-                <a:latin typeface="Arial Unicode MS"/>
-                <a:ea typeface="Arial Unicode MS"/>
-                <a:cs typeface="Arial Unicode MS"/>
-              </a:rPr>
-              <a:t>這就是為什麼某些高階車款會多裝一顆熱像做夜視輔助，但它永遠是補強，不能取代相機。
+              <a:rPr sz="1200" lang="zh-TW" dirty="0">
+                <a:solidFill>
+                  <a:srgbClr val="000000"/>
+                </a:solidFill>
+                <a:latin typeface="Arial Unicode MS"/>
+                <a:ea typeface="Arial Unicode MS"/>
+                <a:cs typeface="Arial Unicode MS"/>
+              </a:rPr>
+              <a:t>我們播兩三分鐘就好。
 </a:t>
             </a:r>
           </a:p>
@@ -2678,41 +2678,19 @@
                 <a:spcPct val="115000"/>
               </a:lnSpc>
               <a:spcAft>
-                <a:spcPts val="575"/>
+                <a:spcPts val="600"/>
               </a:spcAft>
             </a:pPr>
             <a:r>
-              <a:rPr sz="1150" lang="zh-TW" dirty="0">
-                <a:solidFill>
-                  <a:srgbClr val="000000"/>
-                </a:solidFill>
-                <a:latin typeface="Arial Unicode MS"/>
-                <a:ea typeface="Arial Unicode MS"/>
-                <a:cs typeface="Arial Unicode MS"/>
-              </a:rPr>
-              <a:t>六種講完了。現在我們打開網頁，把剛剛講的全部量一遍。
-</a:t>
-            </a:r>
-          </a:p>
-          <a:p>
-            <a:pPr algn="l">
-              <a:lnSpc>
-                <a:spcPct val="115000"/>
-              </a:lnSpc>
-              <a:spcAft>
-                <a:spcPts val="575"/>
-              </a:spcAft>
-            </a:pPr>
-            <a:r>
-              <a:rPr sz="1150" lang="zh-TW" dirty="0">
-                <a:solidFill>
-                  <a:srgbClr val="000000"/>
-                </a:solidFill>
-                <a:latin typeface="Arial Unicode MS"/>
-                <a:ea typeface="Arial Unicode MS"/>
-                <a:cs typeface="Arial Unicode MS"/>
-              </a:rPr>
-              <a:t>（建議播 2–3 分鐘。需要網路。）</a:t>
+              <a:rPr sz="1200" lang="zh-TW" dirty="0">
+                <a:solidFill>
+                  <a:srgbClr val="000000"/>
+                </a:solidFill>
+                <a:latin typeface="Arial Unicode MS"/>
+                <a:ea typeface="Arial Unicode MS"/>
+                <a:cs typeface="Arial Unicode MS"/>
+              </a:rPr>
+              <a:t>六種講完了。現在我們打開網頁，把剛剛講的東西全部量一遍。</a:t>
             </a:r>
           </a:p>
         </p:txBody>
@@ -2855,7 +2833,7 @@
                 <a:ea typeface="Arial Unicode MS"/>
                 <a:cs typeface="Arial Unicode MS"/>
               </a:rPr>
-              <a:t>中間是俯視圖，最下面綠色那台是我們的車，今天它完全不會動。上面是路上的東西。操作只有一個動作：用滑鼠把東西拖走。右邊六張卡立刻跟著變。沒有開始鍵，不會撞車。這禮拜是實驗室，下禮拜才上路。
+              <a:t>中間是俯視圖，最下面綠色那一台是我們的車，今天它完全不會動。上面是路上的東西。操作只有一個動作：用滑鼠把東西拖走，右邊六張卡就會立刻跟著變。沒有開始鍵，也不會撞車。這禮拜是實驗室，下禮拜才上路。
 </a:t>
             </a:r>
           </a:p>
@@ -2877,7 +2855,7 @@
                 <a:ea typeface="Arial Unicode MS"/>
                 <a:cs typeface="Arial Unicode MS"/>
               </a:rPr>
-              <a:t>地上的圈圈每一圈十公尺，左邊有標。
+              <a:t>地上的圈圈每一圈是十公尺，左邊有標。
 </a:t>
             </a:r>
           </a:p>
@@ -2899,7 +2877,7 @@
                 <a:ea typeface="Arial Unicode MS"/>
                 <a:cs typeface="Arial Unicode MS"/>
               </a:rPr>
-              <a:t>請把行人拖到三十公尺，第三圈。
+              <a:t>請把行人拖到三十公尺，第三圈的位置。
 </a:t>
             </a:r>
           </a:p>
@@ -2921,7 +2899,7 @@
                 <a:ea typeface="Arial Unicode MS"/>
                 <a:cs typeface="Arial Unicode MS"/>
               </a:rPr>
-              <a:t>（預期讀值：相機 30.0 ± 0.33 m、類別「行人」；光達 30.0 m、28 點、「未分類障礙物」；雷達 30.0 m、+0.0 m/s、「未分類障礙物」；超音波「太遠了，超音波只到 4.5 m」；GNSS ±2.5 m 加座標；熱像 30.0 m、20 px、「人體熱訊號」。）
+              <a:t>好，現在我們對照剛剛講的原理，我問三個問題。
 </a:t>
             </a:r>
           </a:p>
@@ -2943,7 +2921,29 @@
                 <a:ea typeface="Arial Unicode MS"/>
                 <a:cs typeface="Arial Unicode MS"/>
               </a:rPr>
-              <a:t>好，現在對照剛剛講的原理，我問三個問題。
+              <a:t>第一，六張卡裡面，有幾張知道那是一個</a:t>
+            </a:r>
+            <a:r>
+              <a:rPr sz="1000" b="1" lang="zh-TW" dirty="0">
+                <a:solidFill>
+                  <a:srgbClr val="000000"/>
+                </a:solidFill>
+                <a:latin typeface="Arial Unicode MS"/>
+                <a:ea typeface="Arial Unicode MS"/>
+                <a:cs typeface="Arial Unicode MS"/>
+              </a:rPr>
+              <a:t>人</a:t>
+            </a:r>
+            <a:r>
+              <a:rPr sz="1000" lang="zh-TW" dirty="0">
+                <a:solidFill>
+                  <a:srgbClr val="000000"/>
+                </a:solidFill>
+                <a:latin typeface="Arial Unicode MS"/>
+                <a:ea typeface="Arial Unicode MS"/>
+                <a:cs typeface="Arial Unicode MS"/>
+              </a:rPr>
+              <a:t>？
 </a:t>
             </a:r>
           </a:p>
@@ -2965,29 +2965,7 @@
                 <a:ea typeface="Arial Unicode MS"/>
                 <a:cs typeface="Arial Unicode MS"/>
               </a:rPr>
-              <a:t>有幾張知道那是一個</a:t>
-            </a:r>
-            <a:r>
-              <a:rPr sz="1000" b="1" lang="zh-TW" dirty="0">
-                <a:solidFill>
-                  <a:srgbClr val="000000"/>
-                </a:solidFill>
-                <a:latin typeface="Arial Unicode MS"/>
-                <a:ea typeface="Arial Unicode MS"/>
-                <a:cs typeface="Arial Unicode MS"/>
-              </a:rPr>
-              <a:t>人</a:t>
-            </a:r>
-            <a:r>
-              <a:rPr sz="1000" lang="zh-TW" dirty="0">
-                <a:solidFill>
-                  <a:srgbClr val="000000"/>
-                </a:solidFill>
-                <a:latin typeface="Arial Unicode MS"/>
-                <a:ea typeface="Arial Unicode MS"/>
-                <a:cs typeface="Arial Unicode MS"/>
-              </a:rPr>
-              <a:t>？
+              <a:t>兩張。相機和熱像。相機那張寫「行人」，熱像那張寫「人體熱訊號」。其他四張只寫「未分類障礙物」，或者根本沒有讀值。
 </a:t>
             </a:r>
           </a:p>
@@ -3009,7 +2987,29 @@
                 <a:ea typeface="Arial Unicode MS"/>
                 <a:cs typeface="Arial Unicode MS"/>
               </a:rPr>
-              <a:t>（預期答案：兩張。相機和熱像。這對應相機「物體分類」和熱像「人體熱訊號」。）
+              <a:t>第二，有幾張量得到</a:t>
+            </a:r>
+            <a:r>
+              <a:rPr sz="1000" b="1" lang="zh-TW" dirty="0">
+                <a:solidFill>
+                  <a:srgbClr val="000000"/>
+                </a:solidFill>
+                <a:latin typeface="Arial Unicode MS"/>
+                <a:ea typeface="Arial Unicode MS"/>
+                <a:cs typeface="Arial Unicode MS"/>
+              </a:rPr>
+              <a:t>距離</a:t>
+            </a:r>
+            <a:r>
+              <a:rPr sz="1000" lang="zh-TW" dirty="0">
+                <a:solidFill>
+                  <a:srgbClr val="000000"/>
+                </a:solidFill>
+                <a:latin typeface="Arial Unicode MS"/>
+                <a:ea typeface="Arial Unicode MS"/>
+                <a:cs typeface="Arial Unicode MS"/>
+              </a:rPr>
+              <a:t>？
 </a:t>
             </a:r>
           </a:p>
@@ -3031,29 +3031,7 @@
                 <a:ea typeface="Arial Unicode MS"/>
                 <a:cs typeface="Arial Unicode MS"/>
               </a:rPr>
-              <a:t>有幾張量得到</a:t>
-            </a:r>
-            <a:r>
-              <a:rPr sz="1000" b="1" lang="zh-TW" dirty="0">
-                <a:solidFill>
-                  <a:srgbClr val="000000"/>
-                </a:solidFill>
-                <a:latin typeface="Arial Unicode MS"/>
-                <a:ea typeface="Arial Unicode MS"/>
-                <a:cs typeface="Arial Unicode MS"/>
-              </a:rPr>
-              <a:t>距離</a:t>
-            </a:r>
-            <a:r>
-              <a:rPr sz="1000" lang="zh-TW" dirty="0">
-                <a:solidFill>
-                  <a:srgbClr val="000000"/>
-                </a:solidFill>
-                <a:latin typeface="Arial Unicode MS"/>
-                <a:ea typeface="Arial Unicode MS"/>
-                <a:cs typeface="Arial Unicode MS"/>
-              </a:rPr>
-              <a:t>？
+              <a:t>四張。相機、光達、雷達、熱像。
 </a:t>
             </a:r>
           </a:p>
@@ -3075,7 +3053,7 @@
                 <a:ea typeface="Arial Unicode MS"/>
                 <a:cs typeface="Arial Unicode MS"/>
               </a:rPr>
-              <a:t>（預期答案：四張。相機、光達、雷達、熱像。）
+              <a:t>第三，超音波為什麼沒有讀值？
 </a:t>
             </a:r>
           </a:p>
@@ -3097,7 +3075,7 @@
                 <a:ea typeface="Arial Unicode MS"/>
                 <a:cs typeface="Arial Unicode MS"/>
               </a:rPr>
-              <a:t>超音波為什麼沒有讀值？
+              <a:t>因為它只有幾公尺，剛剛那一頁講過。三十公尺對它來說太遠了，所以它那張卡直接寫「太遠了」。
 </a:t>
             </a:r>
           </a:p>
@@ -3119,29 +3097,7 @@
                 <a:ea typeface="Arial Unicode MS"/>
                 <a:cs typeface="Arial Unicode MS"/>
               </a:rPr>
-              <a:t>（預期答案：它只有五公尺，剛剛那一頁講過。）
-</a:t>
-            </a:r>
-          </a:p>
-          <a:p>
-            <a:pPr algn="l">
-              <a:lnSpc>
-                <a:spcPct val="115000"/>
-              </a:lnSpc>
-              <a:spcAft>
-                <a:spcPts val="500"/>
-              </a:spcAft>
-            </a:pPr>
-            <a:r>
-              <a:rPr sz="1000" lang="zh-TW" dirty="0">
-                <a:solidFill>
-                  <a:srgbClr val="000000"/>
-                </a:solidFill>
-                <a:latin typeface="Arial Unicode MS"/>
-                <a:ea typeface="Arial Unicode MS"/>
-                <a:cs typeface="Arial Unicode MS"/>
-              </a:rPr>
-              <a:t>所以剛剛六頁講的原理，在畫面上一個一個都對得起來。下一頁我們把最重要的那句話講透。</a:t>
+              <a:t>所以剛剛六頁講的原理，在畫面上一個一個都對得起來。下一頁我們把最重要的那一句話講透。</a:t>
             </a:r>
           </a:p>
         </p:txBody>
@@ -4307,7 +4263,7 @@
                 <a:ea typeface="Arial Unicode MS"/>
                 <a:cs typeface="Arial Unicode MS"/>
               </a:rPr>
-              <a:t>（開場先花兩分鐘讓全班把工具打開，不要等到要操作時才手忙腳亂。）
+              <a:t>螢幕上這個網址，今天三節課都會用到，現在請大家把它打開。
 </a:t>
             </a:r>
           </a:p>
@@ -4329,7 +4285,7 @@
                 <a:ea typeface="Arial Unicode MS"/>
                 <a:cs typeface="Arial Unicode MS"/>
               </a:rPr>
-              <a:t>螢幕上這個網址，等一下三節課都會用到。有兩個方式打開：
+              <a:t>有兩個方法。第一個，用手機的相機對準右邊這個 QR，大部分的手機對準就會跳出連結，不用另外裝掃描的程式。第二個，直接打網址，不過它有點長，我建議用掃的比較快。
 </a:t>
             </a:r>
           </a:p>
@@ -4351,7 +4307,29 @@
                 <a:ea typeface="Arial Unicode MS"/>
                 <a:cs typeface="Arial Unicode MS"/>
               </a:rPr>
-              <a:t>第一，用手機相機掃右邊的 QR。大部分手機的相機 app 對準就會跳出連結，不用裝掃描程式。
+              <a:t>打開之後，大家會看到一張俯視圖，中間是我們的車，前面有幾個東西。</a:t>
+            </a:r>
+            <a:r>
+              <a:rPr sz="1200" b="1" lang="zh-TW" dirty="0">
+                <a:solidFill>
+                  <a:srgbClr val="000000"/>
+                </a:solidFill>
+                <a:latin typeface="Arial Unicode MS"/>
+                <a:ea typeface="Arial Unicode MS"/>
+                <a:cs typeface="Arial Unicode MS"/>
+              </a:rPr>
+              <a:t>請現在就用手指或滑鼠拖拖看那個行人</a:t>
+            </a:r>
+            <a:r>
+              <a:rPr sz="1200" lang="zh-TW" dirty="0">
+                <a:solidFill>
+                  <a:srgbClr val="000000"/>
+                </a:solidFill>
+                <a:latin typeface="Arial Unicode MS"/>
+                <a:ea typeface="Arial Unicode MS"/>
+                <a:cs typeface="Arial Unicode MS"/>
+              </a:rPr>
+              <a:t>，看看數字會不會跟著變。用電腦的同學，數字在右邊；用手機的同學，數字在下面。
 </a:t>
             </a:r>
           </a:p>
@@ -4373,7 +4351,7 @@
                 <a:ea typeface="Arial Unicode MS"/>
                 <a:cs typeface="Arial Unicode MS"/>
               </a:rPr>
-              <a:t>第二，直接打網址。比較長，所以建議用掃的。
+              <a:t>用手機的同學還要注意一件事。畫面下方有兩個分頁，一個是「調整參數」，一個是「六張讀數卡」。預設是停在讀數卡這一頁，等一下要改規格的時候再切過去。
 </a:t>
             </a:r>
           </a:p>
@@ -4395,7 +4373,7 @@
                 <a:ea typeface="Arial Unicode MS"/>
                 <a:cs typeface="Arial Unicode MS"/>
               </a:rPr>
-              <a:t>（如果教室網路不穩，可以請已經打開的同學用手機開熱點，或兩三個人看同一台。這個頁面只有一個檔案，第一次打開之後即使斷線也還能繼續操作——它不需要連回伺服器。）
+              <a:t>如果有人的網路連不上，先跟旁邊的同學一起看同一台。這個頁面只有一個檔案，第一次打開之後，就算網路斷掉也還可以繼續操作。
 </a:t>
             </a:r>
           </a:p>
@@ -4417,73 +4395,7 @@
                 <a:ea typeface="Arial Unicode MS"/>
                 <a:cs typeface="Arial Unicode MS"/>
               </a:rPr>
-              <a:t>打開之後大家會看到一張俯視圖，中間是本車，前面有幾個物體。</a:t>
-            </a:r>
-            <a:r>
-              <a:rPr sz="1200" b="1" lang="zh-TW" dirty="0">
-                <a:solidFill>
-                  <a:srgbClr val="000000"/>
-                </a:solidFill>
-                <a:latin typeface="Arial Unicode MS"/>
-                <a:ea typeface="Arial Unicode MS"/>
-                <a:cs typeface="Arial Unicode MS"/>
-              </a:rPr>
-              <a:t>請現在就用手指拖拖看那個行人</a:t>
-            </a:r>
-            <a:r>
-              <a:rPr sz="1200" lang="zh-TW" dirty="0">
-                <a:solidFill>
-                  <a:srgbClr val="000000"/>
-                </a:solidFill>
-                <a:latin typeface="Arial Unicode MS"/>
-                <a:ea typeface="Arial Unicode MS"/>
-                <a:cs typeface="Arial Unicode MS"/>
-              </a:rPr>
-              <a:t>，看右邊（手機是下面）的數字會不會跟著變。
-</a:t>
-            </a:r>
-          </a:p>
-          <a:p>
-            <a:pPr algn="l">
-              <a:lnSpc>
-                <a:spcPct val="115000"/>
-              </a:lnSpc>
-              <a:spcAft>
-                <a:spcPts val="600"/>
-              </a:spcAft>
-            </a:pPr>
-            <a:r>
-              <a:rPr sz="1200" lang="zh-TW" dirty="0">
-                <a:solidFill>
-                  <a:srgbClr val="000000"/>
-                </a:solidFill>
-                <a:latin typeface="Arial Unicode MS"/>
-                <a:ea typeface="Arial Unicode MS"/>
-                <a:cs typeface="Arial Unicode MS"/>
-              </a:rPr>
-              <a:t>手機的同學注意：畫面下方有兩個分頁，「調整參數」和「六張讀數卡」。預設在讀數卡，要改規格的時候再切過去。
-</a:t>
-            </a:r>
-          </a:p>
-          <a:p>
-            <a:pPr algn="l">
-              <a:lnSpc>
-                <a:spcPct val="115000"/>
-              </a:lnSpc>
-              <a:spcAft>
-                <a:spcPts val="600"/>
-              </a:spcAft>
-            </a:pPr>
-            <a:r>
-              <a:rPr sz="1200" lang="zh-TW" dirty="0">
-                <a:solidFill>
-                  <a:srgbClr val="000000"/>
-                </a:solidFill>
-                <a:latin typeface="Arial Unicode MS"/>
-                <a:ea typeface="Arial Unicode MS"/>
-                <a:cs typeface="Arial Unicode MS"/>
-              </a:rPr>
-              <a:t>（確認全班都打開了再往下。這一頁的兩分鐘花得很值得，後面每一輪上台操作都會順很多。）</a:t>
+              <a:t>我們花兩分鐘，等全部的人都打開了再往下。</a:t>
             </a:r>
           </a:p>
         </p:txBody>
@@ -4626,7 +4538,7 @@
                 <a:ea typeface="Arial Unicode MS"/>
                 <a:cs typeface="Arial Unicode MS"/>
               </a:rPr>
-              <a:t>原理最單純，跟你的手機一樣——鏡頭把光聚焦到感光晶片上，晶片上每一個小格子記錄那個方向的顏色和亮度。
+              <a:t>原理最單純，跟你的手機一樣。鏡頭把光聚焦到感光晶片上，晶片上每一個小格子，記錄那個方向的顏色和亮度。
 </a:t>
             </a:r>
           </a:p>
@@ -4648,7 +4560,7 @@
                 <a:ea typeface="Arial Unicode MS"/>
                 <a:cs typeface="Arial Unicode MS"/>
               </a:rPr>
-              <a:t>請注意「被動」這兩個字，這是理解它所有優缺點的關鍵。相機自己不發出任何東西，它只能接收現場已經存在的光。太陽的光、路燈的光、對向車頭燈的光。沒有光，它就什麼都收不到。
+              <a:t>請注意「被動」這兩個字，這是理解它所有優點和缺點的關鍵。相機自己不發出任何東西，它只能接收現場已經有的光——太陽的光、路燈的光、對向車頭燈的光。沒有光，它就什麼都收不到。
 </a:t>
             </a:r>
           </a:p>
@@ -4670,7 +4582,7 @@
                 <a:ea typeface="Arial Unicode MS"/>
                 <a:cs typeface="Arial Unicode MS"/>
               </a:rPr>
-              <a:t>特性方面：解析度最高，六種裡面它給的資訊量最大；有顏色，這是獨門的；而且最便宜，一顆幾百塊到幾千塊。
+              <a:t>特性有三個。解析度最高，六種裡面它給的資訊量最大。有顏色，這是它的獨門。而且最便宜，一顆幾百塊到幾千塊。
 </a:t>
             </a:r>
           </a:p>
@@ -4692,7 +4604,7 @@
                 <a:ea typeface="Arial Unicode MS"/>
                 <a:cs typeface="Arial Unicode MS"/>
               </a:rPr>
-              <a:t>代價是距離。一張照片本身沒有距離這個資訊，它得靠幾何推算，第二節我們會仔細算這件事。
+              <a:t>代價是距離。一張照片本身沒有距離這個資訊，它得靠幾何去推算，第二節我們會仔細算這件事。
 </a:t>
             </a:r>
           </a:p>
@@ -4714,7 +4626,7 @@
                 <a:ea typeface="Arial Unicode MS"/>
                 <a:cs typeface="Arial Unicode MS"/>
               </a:rPr>
-              <a:t>用途最重要：紅綠燈、速限標誌、車道標線、判斷那是人還是車。大家想一想這些東西有什麼共通點——
+              <a:t>用途最重要：紅綠燈、速限標誌、車道標線，還有判斷那是人還是車。大家想一想，這些東西有什麼共通點？
 </a:t>
             </a:r>
           </a:p>
@@ -4736,7 +4648,29 @@
                 <a:ea typeface="Arial Unicode MS"/>
                 <a:cs typeface="Arial Unicode MS"/>
               </a:rPr>
-              <a:t>（預期答案：都是給人看的、都是顏色或文字。）
+              <a:t>可能會有人說，它們都是顏色，或者都是文字。再想深一點——</a:t>
+            </a:r>
+            <a:r>
+              <a:rPr sz="1150" b="1" lang="zh-TW" dirty="0">
+                <a:solidFill>
+                  <a:srgbClr val="000000"/>
+                </a:solidFill>
+                <a:latin typeface="Arial Unicode MS"/>
+                <a:ea typeface="Arial Unicode MS"/>
+                <a:cs typeface="Arial Unicode MS"/>
+              </a:rPr>
+              <a:t>它們全部是人類設計給人類眼睛看的</a:t>
+            </a:r>
+            <a:r>
+              <a:rPr sz="1150" lang="zh-TW" dirty="0">
+                <a:solidFill>
+                  <a:srgbClr val="000000"/>
+                </a:solidFill>
+                <a:latin typeface="Arial Unicode MS"/>
+                <a:ea typeface="Arial Unicode MS"/>
+                <a:cs typeface="Arial Unicode MS"/>
+              </a:rPr>
+              <a:t>。所以只有一種跟人眼原理相同的感測器讀得懂，那就是相機。
 </a:t>
             </a:r>
           </a:p>
@@ -4758,29 +4692,7 @@
                 <a:ea typeface="Arial Unicode MS"/>
                 <a:cs typeface="Arial Unicode MS"/>
               </a:rPr>
-              <a:t>對，</a:t>
-            </a:r>
-            <a:r>
-              <a:rPr sz="1150" b="1" lang="zh-TW" dirty="0">
-                <a:solidFill>
-                  <a:srgbClr val="000000"/>
-                </a:solidFill>
-                <a:latin typeface="Arial Unicode MS"/>
-                <a:ea typeface="Arial Unicode MS"/>
-                <a:cs typeface="Arial Unicode MS"/>
-              </a:rPr>
-              <a:t>它們全部是人類設計給人類眼睛看的</a:t>
-            </a:r>
-            <a:r>
-              <a:rPr sz="1150" lang="zh-TW" dirty="0">
-                <a:solidFill>
-                  <a:srgbClr val="000000"/>
-                </a:solidFill>
-                <a:latin typeface="Arial Unicode MS"/>
-                <a:ea typeface="Arial Unicode MS"/>
-                <a:cs typeface="Arial Unicode MS"/>
-              </a:rPr>
-              <a:t>。所以只有一個跟人眼原理相同的感測器讀得懂。這就是為什麼 Waymo 第六代車上裝了十三顆相機，沒有任何一家敢不裝。</a:t>
+              <a:t>這就是為什麼 Waymo 第六代車上裝了十三顆相機。到目前為止，沒有任何一家自駕公司敢不裝相機。</a:t>
             </a:r>
           </a:p>
         </p:txBody>
@@ -4889,19 +4801,19 @@
                 <a:spcPct val="115000"/>
               </a:lnSpc>
               <a:spcAft>
-                <a:spcPts val="500"/>
+                <a:spcPts val="525"/>
               </a:spcAft>
             </a:pPr>
             <a:r>
-              <a:rPr sz="1000" lang="zh-TW" dirty="0">
-                <a:solidFill>
-                  <a:srgbClr val="000000"/>
-                </a:solidFill>
-                <a:latin typeface="Arial Unicode MS"/>
-                <a:ea typeface="Arial Unicode MS"/>
-                <a:cs typeface="Arial Unicode MS"/>
-              </a:rPr>
-              <a:t>影片時間。這一支是特斯拉的 Autopilot 畫面，右邊是車上相機看到的東西加上它自己畫的框。
+              <a:rPr sz="1050" lang="zh-TW" dirty="0">
+                <a:solidFill>
+                  <a:srgbClr val="000000"/>
+                </a:solidFill>
+                <a:latin typeface="Arial Unicode MS"/>
+                <a:ea typeface="Arial Unicode MS"/>
+                <a:cs typeface="Arial Unicode MS"/>
+              </a:rPr>
+              <a:t>影片時間。這一支是特斯拉的 Autopilot 畫面，右邊是車上相機看到的東西，加上它自己畫出來的框。
 </a:t>
             </a:r>
           </a:p>
@@ -4911,41 +4823,19 @@
                 <a:spcPct val="115000"/>
               </a:lnSpc>
               <a:spcAft>
-                <a:spcPts val="500"/>
+                <a:spcPts val="525"/>
               </a:spcAft>
             </a:pPr>
             <a:r>
-              <a:rPr sz="1000" lang="zh-TW" dirty="0">
-                <a:solidFill>
-                  <a:srgbClr val="000000"/>
-                </a:solidFill>
-                <a:latin typeface="Arial Unicode MS"/>
-                <a:ea typeface="Arial Unicode MS"/>
-                <a:cs typeface="Arial Unicode MS"/>
-              </a:rPr>
-              <a:t>（</a:t>
-            </a:r>
-            <a:r>
-              <a:rPr sz="1000" b="1" lang="zh-TW" dirty="0">
-                <a:solidFill>
-                  <a:srgbClr val="000000"/>
-                </a:solidFill>
-                <a:latin typeface="Arial Unicode MS"/>
-                <a:ea typeface="Arial Unicode MS"/>
-                <a:cs typeface="Arial Unicode MS"/>
-              </a:rPr>
-              <a:t>這支影片只有三十一秒</a:t>
-            </a:r>
-            <a:r>
-              <a:rPr sz="1000" lang="zh-TW" dirty="0">
-                <a:solidFill>
-                  <a:srgbClr val="000000"/>
-                </a:solidFill>
-                <a:latin typeface="Arial Unicode MS"/>
-                <a:ea typeface="Arial Unicode MS"/>
-                <a:cs typeface="Arial Unicode MS"/>
-              </a:rPr>
-              <a:t>，沒有旁白也沒有字幕。建議連播兩三次，每一次只請學生看一件事。需要網路；沒網路時跳過這一頁，直接接下一種感測器。）
+              <a:rPr sz="1050" lang="zh-TW" dirty="0">
+                <a:solidFill>
+                  <a:srgbClr val="000000"/>
+                </a:solidFill>
+                <a:latin typeface="Arial Unicode MS"/>
+                <a:ea typeface="Arial Unicode MS"/>
+                <a:cs typeface="Arial Unicode MS"/>
+              </a:rPr>
+              <a:t>這支影片只有三十一秒，沒有旁白也沒有字幕，所以我們連續播兩三次，每一次只看一件事。
 </a:t>
             </a:r>
           </a:p>
@@ -4955,19 +4845,19 @@
                 <a:spcPct val="115000"/>
               </a:lnSpc>
               <a:spcAft>
-                <a:spcPts val="500"/>
+                <a:spcPts val="525"/>
               </a:spcAft>
             </a:pPr>
             <a:r>
-              <a:rPr sz="1000" lang="zh-TW" dirty="0">
-                <a:solidFill>
-                  <a:srgbClr val="000000"/>
-                </a:solidFill>
-                <a:latin typeface="Arial Unicode MS"/>
-                <a:ea typeface="Arial Unicode MS"/>
-                <a:cs typeface="Arial Unicode MS"/>
-              </a:rPr>
-              <a:t>發布者的說明寫著：畫面是特斯拉的神經網路在每一顆相機上跑出來的結果——把畫面分類、框出物體、再估出距離。
+              <a:rPr sz="1050" lang="zh-TW" dirty="0">
+                <a:solidFill>
+                  <a:srgbClr val="000000"/>
+                </a:solidFill>
+                <a:latin typeface="Arial Unicode MS"/>
+                <a:ea typeface="Arial Unicode MS"/>
+                <a:cs typeface="Arial Unicode MS"/>
+              </a:rPr>
+              <a:t>發布者的說明寫著：畫面是特斯拉的神經網路在每一顆相機上跑出來的結果，把畫面分類、框出物體、再估出距離。
 </a:t>
             </a:r>
           </a:p>
@@ -4977,33 +4867,11 @@
                 <a:spcPct val="115000"/>
               </a:lnSpc>
               <a:spcAft>
-                <a:spcPts val="500"/>
+                <a:spcPts val="525"/>
               </a:spcAft>
             </a:pPr>
             <a:r>
-              <a:rPr sz="1000" lang="zh-TW" dirty="0">
-                <a:solidFill>
-                  <a:srgbClr val="000000"/>
-                </a:solidFill>
-                <a:latin typeface="Arial Unicode MS"/>
-                <a:ea typeface="Arial Unicode MS"/>
-                <a:cs typeface="Arial Unicode MS"/>
-              </a:rPr>
-              <a:t>三次分別看什麼。
-</a:t>
-            </a:r>
-          </a:p>
-          <a:p>
-            <a:pPr algn="l">
-              <a:lnSpc>
-                <a:spcPct val="115000"/>
-              </a:lnSpc>
-              <a:spcAft>
-                <a:spcPts val="500"/>
-              </a:spcAft>
-            </a:pPr>
-            <a:r>
-              <a:rPr sz="1000" b="1" lang="zh-TW" dirty="0">
+              <a:rPr sz="1050" b="1" lang="zh-TW" dirty="0">
                 <a:solidFill>
                   <a:srgbClr val="000000"/>
                 </a:solidFill>
@@ -5014,7 +4882,7 @@
               <a:t>第一次，看框和標籤。</a:t>
             </a:r>
             <a:r>
-              <a:rPr sz="1000" lang="zh-TW" dirty="0">
+              <a:rPr sz="1050" lang="zh-TW" dirty="0">
                 <a:solidFill>
                   <a:srgbClr val="000000"/>
                 </a:solidFill>
@@ -5032,11 +4900,11 @@
                 <a:spcPct val="115000"/>
               </a:lnSpc>
               <a:spcAft>
-                <a:spcPts val="500"/>
+                <a:spcPts val="525"/>
               </a:spcAft>
             </a:pPr>
             <a:r>
-              <a:rPr sz="1000" b="1" lang="zh-TW" dirty="0">
+              <a:rPr sz="1050" b="1" lang="zh-TW" dirty="0">
                 <a:solidFill>
                   <a:srgbClr val="000000"/>
                 </a:solidFill>
@@ -5047,15 +4915,15 @@
               <a:t>第二次，看顏色。</a:t>
             </a:r>
             <a:r>
-              <a:rPr sz="1000" lang="zh-TW" dirty="0">
-                <a:solidFill>
-                  <a:srgbClr val="000000"/>
-                </a:solidFill>
-                <a:latin typeface="Arial Unicode MS"/>
-                <a:ea typeface="Arial Unicode MS"/>
-                <a:cs typeface="Arial Unicode MS"/>
-              </a:rPr>
-              <a:t>畫面被塗成不同顏色，那是把每一個像素分類：哪些是路面、哪些是車、哪些是人。
+              <a:rPr sz="1050" lang="zh-TW" dirty="0">
+                <a:solidFill>
+                  <a:srgbClr val="000000"/>
+                </a:solidFill>
+                <a:latin typeface="Arial Unicode MS"/>
+                <a:ea typeface="Arial Unicode MS"/>
+                <a:cs typeface="Arial Unicode MS"/>
+              </a:rPr>
+              <a:t>畫面被塗成不同的顏色，那是把每一個像素分類：哪些是路面、哪些是車、哪些是人。
 </a:t>
             </a:r>
           </a:p>
@@ -5065,11 +4933,11 @@
                 <a:spcPct val="115000"/>
               </a:lnSpc>
               <a:spcAft>
-                <a:spcPts val="500"/>
+                <a:spcPts val="525"/>
               </a:spcAft>
             </a:pPr>
             <a:r>
-              <a:rPr sz="1000" b="1" lang="zh-TW" dirty="0">
+              <a:rPr sz="1050" b="1" lang="zh-TW" dirty="0">
                 <a:solidFill>
                   <a:srgbClr val="000000"/>
                 </a:solidFill>
@@ -5080,15 +4948,15 @@
               <a:t>第三次，看遠處。</a:t>
             </a:r>
             <a:r>
-              <a:rPr sz="1000" lang="zh-TW" dirty="0">
-                <a:solidFill>
-                  <a:srgbClr val="000000"/>
-                </a:solidFill>
-                <a:latin typeface="Arial Unicode MS"/>
-                <a:ea typeface="Arial Unicode MS"/>
-                <a:cs typeface="Arial Unicode MS"/>
-              </a:rPr>
-              <a:t>問全班一個觀察題：遠處那些框，穩不穩？
+              <a:rPr sz="1050" lang="zh-TW" dirty="0">
+                <a:solidFill>
+                  <a:srgbClr val="000000"/>
+                </a:solidFill>
+                <a:latin typeface="Arial Unicode MS"/>
+                <a:ea typeface="Arial Unicode MS"/>
+                <a:cs typeface="Arial Unicode MS"/>
+              </a:rPr>
+              <a:t>我問大家一個問題：遠處那些框，穩不穩？
 </a:t>
             </a:r>
           </a:p>
@@ -5098,19 +4966,19 @@
                 <a:spcPct val="115000"/>
               </a:lnSpc>
               <a:spcAft>
-                <a:spcPts val="500"/>
+                <a:spcPts val="525"/>
               </a:spcAft>
             </a:pPr>
             <a:r>
-              <a:rPr sz="1000" lang="zh-TW" dirty="0">
-                <a:solidFill>
-                  <a:srgbClr val="000000"/>
-                </a:solidFill>
-                <a:latin typeface="Arial Unicode MS"/>
-                <a:ea typeface="Arial Unicode MS"/>
-                <a:cs typeface="Arial Unicode MS"/>
-              </a:rPr>
-              <a:t>（讓學生自己講。如果他們看到框忽大忽小、跳來跳去，那就是估距誤差——第二節會算出來：六十公尺的時候誤差有將近四公尺。如果這麼短的片子裡看不出來，就直接說第二節會算，不必硬掰。）
+              <a:rPr sz="1050" lang="zh-TW" dirty="0">
+                <a:solidFill>
+                  <a:srgbClr val="000000"/>
+                </a:solidFill>
+                <a:latin typeface="Arial Unicode MS"/>
+                <a:ea typeface="Arial Unicode MS"/>
+                <a:cs typeface="Arial Unicode MS"/>
+              </a:rPr>
+              <a:t>如果你看到框忽大忽小、跳來跳去，那不是程式壞掉，那就是估距誤差。第二節我們會算出來，六十公尺的時候，誤差有將近四公尺。如果在這麼短的片子裡看不太出來也沒關係，第二節我會用數字算給大家看。
 </a:t>
             </a:r>
           </a:p>
@@ -5120,41 +4988,41 @@
                 <a:spcPct val="115000"/>
               </a:lnSpc>
               <a:spcAft>
-                <a:spcPts val="500"/>
+                <a:spcPts val="525"/>
               </a:spcAft>
             </a:pPr>
             <a:r>
-              <a:rPr sz="1000" lang="zh-TW" dirty="0">
-                <a:solidFill>
-                  <a:srgbClr val="000000"/>
-                </a:solidFill>
-                <a:latin typeface="Arial Unicode MS"/>
-                <a:ea typeface="Arial Unicode MS"/>
-                <a:cs typeface="Arial Unicode MS"/>
-              </a:rPr>
-              <a:t>（</a:t>
-            </a:r>
-            <a:r>
-              <a:rPr sz="1000" b="1" lang="zh-TW" dirty="0">
-                <a:solidFill>
-                  <a:srgbClr val="000000"/>
-                </a:solidFill>
-                <a:latin typeface="Arial Unicode MS"/>
-                <a:ea typeface="Arial Unicode MS"/>
-                <a:cs typeface="Arial Unicode MS"/>
-              </a:rPr>
-              <a:t>逆光和隧道不在這支影片裡。</a:t>
-            </a:r>
-            <a:r>
-              <a:rPr sz="1000" lang="zh-TW" dirty="0">
-                <a:solidFill>
-                  <a:srgbClr val="000000"/>
-                </a:solidFill>
-                <a:latin typeface="Arial Unicode MS"/>
-                <a:ea typeface="Arial Unicode MS"/>
-                <a:cs typeface="Arial Unicode MS"/>
-              </a:rPr>
-              <a:t>相機怕強光、怕明暗突然變化這件事，留到第三節用數字講；第四週的回家作業也會請各位拍一張自己覺得相機會看不清楚的路況。老師想額外補一段實拍的話，Scott Kubo 的「Tesla Autopilot Driving Directly Into the Sun」有六分鐘的逆光行駛，但那不是課程必要的內容。）
+              <a:rPr sz="1050" lang="zh-TW" dirty="0">
+                <a:solidFill>
+                  <a:srgbClr val="000000"/>
+                </a:solidFill>
+                <a:latin typeface="Arial Unicode MS"/>
+                <a:ea typeface="Arial Unicode MS"/>
+                <a:cs typeface="Arial Unicode MS"/>
+              </a:rPr>
+              <a:t>還有一件事我先講清楚：</a:t>
+            </a:r>
+            <a:r>
+              <a:rPr sz="1050" b="1" lang="zh-TW" dirty="0">
+                <a:solidFill>
+                  <a:srgbClr val="000000"/>
+                </a:solidFill>
+                <a:latin typeface="Arial Unicode MS"/>
+                <a:ea typeface="Arial Unicode MS"/>
+                <a:cs typeface="Arial Unicode MS"/>
+              </a:rPr>
+              <a:t>逆光和進隧道不在這支影片裡面。</a:t>
+            </a:r>
+            <a:r>
+              <a:rPr sz="1050" lang="zh-TW" dirty="0">
+                <a:solidFill>
+                  <a:srgbClr val="000000"/>
+                </a:solidFill>
+                <a:latin typeface="Arial Unicode MS"/>
+                <a:ea typeface="Arial Unicode MS"/>
+                <a:cs typeface="Arial Unicode MS"/>
+              </a:rPr>
+              <a:t>相機怕強光、怕明暗突然變化，這件事我們留到第三節，用數字來講。
 </a:t>
             </a:r>
           </a:p>
@@ -5164,19 +5032,19 @@
                 <a:spcPct val="115000"/>
               </a:lnSpc>
               <a:spcAft>
-                <a:spcPts val="500"/>
+                <a:spcPts val="525"/>
               </a:spcAft>
             </a:pPr>
             <a:r>
-              <a:rPr sz="1000" lang="zh-TW" dirty="0">
-                <a:solidFill>
-                  <a:srgbClr val="000000"/>
-                </a:solidFill>
-                <a:latin typeface="Arial Unicode MS"/>
-                <a:ea typeface="Arial Unicode MS"/>
-                <a:cs typeface="Arial Unicode MS"/>
-              </a:rPr>
-              <a:t>看完不用討論，我們繼續下一種。</a:t>
+              <a:rPr sz="1050" lang="zh-TW" dirty="0">
+                <a:solidFill>
+                  <a:srgbClr val="000000"/>
+                </a:solidFill>
+                <a:latin typeface="Arial Unicode MS"/>
+                <a:ea typeface="Arial Unicode MS"/>
+                <a:cs typeface="Arial Unicode MS"/>
+              </a:rPr>
+              <a:t>看完不用討論，我們繼續看下一種。</a:t>
             </a:r>
           </a:p>
         </p:txBody>
@@ -5604,11 +5472,11 @@
                 <a:spcPct val="115000"/>
               </a:lnSpc>
               <a:spcAft>
-                <a:spcPts val="500"/>
+                <a:spcPts val="575"/>
               </a:spcAft>
             </a:pPr>
             <a:r>
-              <a:rPr sz="1000" lang="zh-TW" dirty="0">
+              <a:rPr sz="1150" lang="zh-TW" dirty="0">
                 <a:solidFill>
                   <a:srgbClr val="000000"/>
                 </a:solidFill>
@@ -5626,19 +5494,19 @@
                 <a:spcPct val="115000"/>
               </a:lnSpc>
               <a:spcAft>
-                <a:spcPts val="500"/>
+                <a:spcPts val="575"/>
               </a:spcAft>
             </a:pPr>
             <a:r>
-              <a:rPr sz="1000" lang="zh-TW" dirty="0">
-                <a:solidFill>
-                  <a:srgbClr val="000000"/>
-                </a:solidFill>
-                <a:latin typeface="Arial Unicode MS"/>
-                <a:ea typeface="Arial Unicode MS"/>
-                <a:cs typeface="Arial Unicode MS"/>
-              </a:rPr>
-              <a:t>（連結已設定從 0:56 開始，請播到 2:10 就停。前 56 秒是泛談，2:10 之後講的是用雷射掃路面調整懸吊，跟今天無關。旁白是英文但語速很慢；請開齒輪 → 字幕 → 自動翻譯 → 越南文。需要網路。）
+              <a:rPr sz="1150" lang="zh-TW" dirty="0">
+                <a:solidFill>
+                  <a:srgbClr val="000000"/>
+                </a:solidFill>
+                <a:latin typeface="Arial Unicode MS"/>
+                <a:ea typeface="Arial Unicode MS"/>
+                <a:cs typeface="Arial Unicode MS"/>
+              </a:rPr>
+              <a:t>影片我們從五十六秒開始播，播到兩分十秒就停。前面那五十六秒是泛泛而談，兩分十秒之後講的是用雷射掃路面調整懸吊，跟今天沒有關係。旁白是英文，不過語速很慢。請大家點播放器右下角的齒輪，選字幕，自動翻譯，越南文。
 </a:t>
             </a:r>
           </a:p>
@@ -5648,19 +5516,41 @@
                 <a:spcPct val="115000"/>
               </a:lnSpc>
               <a:spcAft>
-                <a:spcPts val="500"/>
+                <a:spcPts val="575"/>
               </a:spcAft>
             </a:pPr>
             <a:r>
-              <a:rPr sz="1000" lang="zh-TW" dirty="0">
-                <a:solidFill>
-                  <a:srgbClr val="000000"/>
-                </a:solidFill>
-                <a:latin typeface="Arial Unicode MS"/>
-                <a:ea typeface="Arial Unicode MS"/>
-                <a:cs typeface="Arial Unicode MS"/>
-              </a:rPr>
-              <a:t>（時間碼：0:56 車頂旋轉的裝置叫光達、看 360°｜1:05 每秒幾千道脈衝、碰到東西反射｜1:28 反射點拼成 3D 點雲、由車上電腦處理｜1:52 用它監看與前車的距離，決定煞車或加速。）
+              <a:rPr sz="1150" lang="zh-TW" dirty="0">
+                <a:solidFill>
+                  <a:srgbClr val="000000"/>
+                </a:solidFill>
+                <a:latin typeface="Arial Unicode MS"/>
+                <a:ea typeface="Arial Unicode MS"/>
+                <a:cs typeface="Arial Unicode MS"/>
+              </a:rPr>
+              <a:t>播之前給大家一個任務：這支影片有</a:t>
+            </a:r>
+            <a:r>
+              <a:rPr sz="1150" b="1" lang="zh-TW" dirty="0">
+                <a:solidFill>
+                  <a:srgbClr val="000000"/>
+                </a:solidFill>
+                <a:latin typeface="Arial Unicode MS"/>
+                <a:ea typeface="Arial Unicode MS"/>
+                <a:cs typeface="Arial Unicode MS"/>
+              </a:rPr>
+              <a:t>一句話講得不精確</a:t>
+            </a:r>
+            <a:r>
+              <a:rPr sz="1150" lang="zh-TW" dirty="0">
+                <a:solidFill>
+                  <a:srgbClr val="000000"/>
+                </a:solidFill>
+                <a:latin typeface="Arial Unicode MS"/>
+                <a:ea typeface="Arial Unicode MS"/>
+                <a:cs typeface="Arial Unicode MS"/>
+              </a:rPr>
+              <a:t>，請把它抓出來。
 </a:t>
             </a:r>
           </a:p>
@@ -5670,41 +5560,41 @@
                 <a:spcPct val="115000"/>
               </a:lnSpc>
               <a:spcAft>
-                <a:spcPts val="500"/>
+                <a:spcPts val="575"/>
               </a:spcAft>
             </a:pPr>
             <a:r>
-              <a:rPr sz="1000" lang="zh-TW" dirty="0">
-                <a:solidFill>
-                  <a:srgbClr val="000000"/>
-                </a:solidFill>
-                <a:latin typeface="Arial Unicode MS"/>
-                <a:ea typeface="Arial Unicode MS"/>
-                <a:cs typeface="Arial Unicode MS"/>
-              </a:rPr>
-              <a:t>播之前給大家一個任務：這支影片有</a:t>
-            </a:r>
-            <a:r>
-              <a:rPr sz="1000" b="1" lang="zh-TW" dirty="0">
-                <a:solidFill>
-                  <a:srgbClr val="000000"/>
-                </a:solidFill>
-                <a:latin typeface="Arial Unicode MS"/>
-                <a:ea typeface="Arial Unicode MS"/>
-                <a:cs typeface="Arial Unicode MS"/>
-              </a:rPr>
-              <a:t>一句話講得不精確</a:t>
-            </a:r>
-            <a:r>
-              <a:rPr sz="1000" lang="zh-TW" dirty="0">
-                <a:solidFill>
-                  <a:srgbClr val="000000"/>
-                </a:solidFill>
-                <a:latin typeface="Arial Unicode MS"/>
-                <a:ea typeface="Arial Unicode MS"/>
-                <a:cs typeface="Arial Unicode MS"/>
-              </a:rPr>
-              <a:t>，請抓出來。
+              <a:rPr sz="1150" lang="zh-TW" dirty="0">
+                <a:solidFill>
+                  <a:srgbClr val="000000"/>
+                </a:solidFill>
+                <a:latin typeface="Arial Unicode MS"/>
+                <a:ea typeface="Arial Unicode MS"/>
+                <a:cs typeface="Arial Unicode MS"/>
+              </a:rPr>
+              <a:t>答案是這一句：它說立體畫面是靠「量測光速」算出來的。光速是一個已知的常數，不用量；真正要量的是</a:t>
+            </a:r>
+            <a:r>
+              <a:rPr sz="1150" b="1" lang="zh-TW" dirty="0">
+                <a:solidFill>
+                  <a:srgbClr val="000000"/>
+                </a:solidFill>
+                <a:latin typeface="Arial Unicode MS"/>
+                <a:ea typeface="Arial Unicode MS"/>
+                <a:cs typeface="Arial Unicode MS"/>
+              </a:rPr>
+              <a:t>時間</a:t>
+            </a:r>
+            <a:r>
+              <a:rPr sz="1150" lang="zh-TW" dirty="0">
+                <a:solidFill>
+                  <a:srgbClr val="000000"/>
+                </a:solidFill>
+                <a:latin typeface="Arial Unicode MS"/>
+                <a:ea typeface="Arial Unicode MS"/>
+                <a:cs typeface="Arial Unicode MS"/>
+              </a:rPr>
+              <a:t>。距離等於光速乘以時間再除以二，剛剛那一頁才講過。抓得到的同學很厲害。
 </a:t>
             </a:r>
           </a:p>
@@ -5714,41 +5604,19 @@
                 <a:spcPct val="115000"/>
               </a:lnSpc>
               <a:spcAft>
-                <a:spcPts val="500"/>
+                <a:spcPts val="575"/>
               </a:spcAft>
             </a:pPr>
             <a:r>
-              <a:rPr sz="1000" lang="zh-TW" dirty="0">
-                <a:solidFill>
-                  <a:srgbClr val="000000"/>
-                </a:solidFill>
-                <a:latin typeface="Arial Unicode MS"/>
-                <a:ea typeface="Arial Unicode MS"/>
-                <a:cs typeface="Arial Unicode MS"/>
-              </a:rPr>
-              <a:t>（預期答案：它說 3D 畫面是靠「量測光速」算出來的。光速是已知的常數，不用量；真正量的是</a:t>
-            </a:r>
-            <a:r>
-              <a:rPr sz="1000" b="1" lang="zh-TW" dirty="0">
-                <a:solidFill>
-                  <a:srgbClr val="000000"/>
-                </a:solidFill>
-                <a:latin typeface="Arial Unicode MS"/>
-                <a:ea typeface="Arial Unicode MS"/>
-                <a:cs typeface="Arial Unicode MS"/>
-              </a:rPr>
-              <a:t>時間</a:t>
-            </a:r>
-            <a:r>
-              <a:rPr sz="1000" lang="zh-TW" dirty="0">
-                <a:solidFill>
-                  <a:srgbClr val="000000"/>
-                </a:solidFill>
-                <a:latin typeface="Arial Unicode MS"/>
-                <a:ea typeface="Arial Unicode MS"/>
-                <a:cs typeface="Arial Unicode MS"/>
-              </a:rPr>
-              <a:t>。距離 ＝ 光速 × 時間 ÷ 2，剛剛那一頁才講過。）
+              <a:rPr sz="1150" lang="zh-TW" dirty="0">
+                <a:solidFill>
+                  <a:srgbClr val="000000"/>
+                </a:solidFill>
+                <a:latin typeface="Arial Unicode MS"/>
+                <a:ea typeface="Arial Unicode MS"/>
+                <a:cs typeface="Arial Unicode MS"/>
+              </a:rPr>
+              <a:t>這也提醒大家一件事，科普影片不一定每一句都對。
 </a:t>
             </a:r>
           </a:p>
@@ -5758,44 +5626,22 @@
                 <a:spcPct val="115000"/>
               </a:lnSpc>
               <a:spcAft>
-                <a:spcPts val="500"/>
+                <a:spcPts val="575"/>
               </a:spcAft>
             </a:pPr>
             <a:r>
-              <a:rPr sz="1000" lang="zh-TW" dirty="0">
-                <a:solidFill>
-                  <a:srgbClr val="000000"/>
-                </a:solidFill>
-                <a:latin typeface="Arial Unicode MS"/>
-                <a:ea typeface="Arial Unicode MS"/>
-                <a:cs typeface="Arial Unicode MS"/>
-              </a:rPr>
-              <a:t>抓到的同學很厲害。這也提醒大家，科普影片不一定每句都對。
-</a:t>
-            </a:r>
-          </a:p>
-          <a:p>
-            <a:pPr algn="l">
-              <a:lnSpc>
-                <a:spcPct val="115000"/>
-              </a:lnSpc>
-              <a:spcAft>
-                <a:spcPts val="500"/>
-              </a:spcAft>
-            </a:pPr>
-            <a:r>
-              <a:rPr sz="1000" lang="zh-TW" dirty="0">
-                <a:solidFill>
-                  <a:srgbClr val="000000"/>
-                </a:solidFill>
-                <a:latin typeface="Arial Unicode MS"/>
-                <a:ea typeface="Arial Unicode MS"/>
-                <a:cs typeface="Arial Unicode MS"/>
-              </a:rPr>
-              <a:t>再補一個我很喜歡的比喻，出自 Forbes 訪問 Waymo 工程師的另一支影片：在一個全黑的房間裡，</a:t>
-            </a:r>
-            <a:r>
-              <a:rPr sz="1000" b="1" lang="zh-TW" dirty="0">
+              <a:rPr sz="1150" lang="zh-TW" dirty="0">
+                <a:solidFill>
+                  <a:srgbClr val="000000"/>
+                </a:solidFill>
+                <a:latin typeface="Arial Unicode MS"/>
+                <a:ea typeface="Arial Unicode MS"/>
+                <a:cs typeface="Arial Unicode MS"/>
+              </a:rPr>
+              <a:t>我再補一個我很喜歡的比喻，是 Waymo 的工程師講的。在一個全黑的房間裡，</a:t>
+            </a:r>
+            <a:r>
+              <a:rPr sz="1150" b="1" lang="zh-TW" dirty="0">
                 <a:solidFill>
                   <a:srgbClr val="000000"/>
                 </a:solidFill>
@@ -5806,7 +5652,7 @@
               <a:t>相機像你的眼睛，沒有光就看不到；光達像你伸出去摸的手</a:t>
             </a:r>
             <a:r>
-              <a:rPr sz="1000" lang="zh-TW" dirty="0">
+              <a:rPr sz="1150" lang="zh-TW" dirty="0">
                 <a:solidFill>
                   <a:srgbClr val="000000"/>
                 </a:solidFill>
@@ -5824,41 +5670,19 @@
                 <a:spcPct val="115000"/>
               </a:lnSpc>
               <a:spcAft>
-                <a:spcPts val="500"/>
+                <a:spcPts val="575"/>
               </a:spcAft>
             </a:pPr>
             <a:r>
-              <a:rPr sz="1000" lang="zh-TW" dirty="0">
-                <a:solidFill>
-                  <a:srgbClr val="000000"/>
-                </a:solidFill>
-                <a:latin typeface="Arial Unicode MS"/>
-                <a:ea typeface="Arial Unicode MS"/>
-                <a:cs typeface="Arial Unicode MS"/>
-              </a:rPr>
-              <a:t>（延伸教材，適合想多了解的同學：Forbes《What Is Lidar and How Does It Help Self-Driving Cars Make Decisions?》youtube.com/watch?v=j2dt4lo0kx8，3 分 34 秒，語速較快。它還提到一種同調式光達也能直接量接近速度——所以等一下我說「只有雷達直接量得到速度」，嚴格講是指目前主流的飛時測距光達。）
-</a:t>
-            </a:r>
-          </a:p>
-          <a:p>
-            <a:pPr algn="l">
-              <a:lnSpc>
-                <a:spcPct val="115000"/>
-              </a:lnSpc>
-              <a:spcAft>
-                <a:spcPts val="500"/>
-              </a:spcAft>
-            </a:pPr>
-            <a:r>
-              <a:rPr sz="1000" lang="zh-TW" dirty="0">
-                <a:solidFill>
-                  <a:srgbClr val="000000"/>
-                </a:solidFill>
-                <a:latin typeface="Arial Unicode MS"/>
-                <a:ea typeface="Arial Unicode MS"/>
-                <a:cs typeface="Arial Unicode MS"/>
-              </a:rPr>
-              <a:t>看遠處的點會變稀，這個現象第二節會算出確切的數字——六十四線的光達，四十公尺外的行人身上只剩十五個點。</a:t>
+              <a:rPr sz="1150" lang="zh-TW" dirty="0">
+                <a:solidFill>
+                  <a:srgbClr val="000000"/>
+                </a:solidFill>
+                <a:latin typeface="Arial Unicode MS"/>
+                <a:ea typeface="Arial Unicode MS"/>
+                <a:cs typeface="Arial Unicode MS"/>
+              </a:rPr>
+              <a:t>最後提醒一件事，看遠處的點會變稀。這個現象第二節會算出確切的數字：六十四線的光達，四十公尺外的行人身上只剩十五個點。</a:t>
             </a:r>
           </a:p>
         </p:txBody>
@@ -6001,7 +5825,7 @@
                 <a:ea typeface="Arial Unicode MS"/>
                 <a:cs typeface="Arial Unicode MS"/>
               </a:rPr>
-              <a:t>原理跟光達有點像，都是發射訊號再等它回來，但雷達用的是無線電波，車用的是 77 GHz 的毫米波。
+              <a:t>原理跟光達有點像，都是發射訊號再等它回來，但是雷達用的是無線電波，車用的是 77 GHz 的毫米波。
 </a:t>
             </a:r>
           </a:p>
@@ -6045,7 +5869,7 @@
                 <a:ea typeface="Arial Unicode MS"/>
                 <a:cs typeface="Arial Unicode MS"/>
               </a:rPr>
-              <a:t>。如果前面那個東西正在靠近，反射回來的波會被壓縮、頻率變高；正在遠離就被拉長、頻率變低。這叫都卜勒效應。
+              <a:t>。如果前面那個東西正在靠近，反射回來的波會被壓縮，頻率變高；正在遠離就被拉長，頻率變低。這叫都卜勒效應。
 </a:t>
             </a:r>
           </a:p>
@@ -6111,7 +5935,7 @@
                 <a:ea typeface="Arial Unicode MS"/>
                 <a:cs typeface="Arial Unicode MS"/>
               </a:rPr>
-              <a:t>裡就同時得到距離和接近速度，別的感測器都要量兩次再相減才推得出來。這是它不可取代的地方。
+              <a:t>裡面，就同時拿到距離和接近速度。別的感測器都要量兩次再相減才推得出來。這是它不可取代的地方。
 </a:t>
             </a:r>
           </a:p>
@@ -6133,7 +5957,7 @@
                 <a:ea typeface="Arial Unicode MS"/>
                 <a:cs typeface="Arial Unicode MS"/>
               </a:rPr>
-              <a:t>（如果有同學追問「它到底是怎麼比出來的」，下面這段講給他聽，其他人聽不懂也沒關係。）
+              <a:t>接下來這一段比較細，我講給想知道的同學聽，聽不懂也沒有關係。
 </a:t>
             </a:r>
           </a:p>
@@ -6155,51 +5979,7 @@
                 <a:ea typeface="Arial Unicode MS"/>
                 <a:cs typeface="Arial Unicode MS"/>
               </a:rPr>
-              <a:t>車用雷達叫 </a:t>
-            </a:r>
-            <a:r>
-              <a:rPr sz="1000" b="1" lang="zh-TW" dirty="0">
-                <a:solidFill>
-                  <a:srgbClr val="000000"/>
-                </a:solidFill>
-                <a:latin typeface="Arial Unicode MS"/>
-                <a:ea typeface="Arial Unicode MS"/>
-                <a:cs typeface="Arial Unicode MS"/>
-              </a:rPr>
-              <a:t>FMCW</a:t>
-            </a:r>
-            <a:r>
-              <a:rPr sz="1000" lang="zh-TW" dirty="0">
-                <a:solidFill>
-                  <a:srgbClr val="000000"/>
-                </a:solidFill>
-                <a:latin typeface="Arial Unicode MS"/>
-                <a:ea typeface="Arial Unicode MS"/>
-                <a:cs typeface="Arial Unicode MS"/>
-              </a:rPr>
-              <a:t>，調頻連續波。它不是打一個脈衝等回音，而是在一次量測裡——大約三十毫秒——連續發出</a:t>
-            </a:r>
-            <a:r>
-              <a:rPr sz="1000" b="1" lang="zh-TW" dirty="0">
-                <a:solidFill>
-                  <a:srgbClr val="000000"/>
-                </a:solidFill>
-                <a:latin typeface="Arial Unicode MS"/>
-                <a:ea typeface="Arial Unicode MS"/>
-                <a:cs typeface="Arial Unicode MS"/>
-              </a:rPr>
-              <a:t>上百個</a:t>
-            </a:r>
-            <a:r>
-              <a:rPr sz="1000" lang="zh-TW" dirty="0">
-                <a:solidFill>
-                  <a:srgbClr val="000000"/>
-                </a:solidFill>
-                <a:latin typeface="Arial Unicode MS"/>
-                <a:ea typeface="Arial Unicode MS"/>
-                <a:cs typeface="Arial Unicode MS"/>
-              </a:rPr>
-              <a:t> chirp，每一個 chirp 的頻率都從低線性掃到高。
+              <a:t>車用雷達叫做 FMCW，調頻連續波。它不是打一個脈衝等回音，而是在一次量測裡面，大約三十毫秒，連續發出上百個 chirp，每一個 chirp 的頻率都從低線性掃到高。
 </a:t>
             </a:r>
           </a:p>
@@ -6213,17 +5993,6 @@
               </a:spcAft>
             </a:pPr>
             <a:r>
-              <a:rPr sz="1000" b="1" lang="zh-TW" dirty="0">
-                <a:solidFill>
-                  <a:srgbClr val="000000"/>
-                </a:solidFill>
-                <a:latin typeface="Arial Unicode MS"/>
-                <a:ea typeface="Arial Unicode MS"/>
-                <a:cs typeface="Arial Unicode MS"/>
-              </a:rPr>
-              <a:t>距離</a:t>
-            </a:r>
-            <a:r>
               <a:rPr sz="1000" lang="zh-TW" dirty="0">
                 <a:solidFill>
                   <a:srgbClr val="000000"/>
@@ -6232,7 +6001,7 @@
                 <a:ea typeface="Arial Unicode MS"/>
                 <a:cs typeface="Arial Unicode MS"/>
               </a:rPr>
-              <a:t>是這樣來的：發射中的波和收到的回波同時存在，兩者的</a:t>
+              <a:t>距離是這樣來的：發射中的波和收到的回波同時存在，兩者的</a:t>
             </a:r>
             <a:r>
               <a:rPr sz="1000" b="1" lang="zh-TW" dirty="0">
@@ -6268,17 +6037,6 @@
               </a:spcAft>
             </a:pPr>
             <a:r>
-              <a:rPr sz="1000" b="1" lang="zh-TW" dirty="0">
-                <a:solidFill>
-                  <a:srgbClr val="000000"/>
-                </a:solidFill>
-                <a:latin typeface="Arial Unicode MS"/>
-                <a:ea typeface="Arial Unicode MS"/>
-                <a:cs typeface="Arial Unicode MS"/>
-              </a:rPr>
-              <a:t>速度</a:t>
-            </a:r>
-            <a:r>
               <a:rPr sz="1000" lang="zh-TW" dirty="0">
                 <a:solidFill>
                   <a:srgbClr val="000000"/>
@@ -6287,7 +6045,7 @@
                 <a:ea typeface="Arial Unicode MS"/>
                 <a:cs typeface="Arial Unicode MS"/>
               </a:rPr>
-              <a:t>是這樣來的：相鄰兩個 chirp 之間，目標只移動了零點幾公釐，位置根本看不出差別，但回波的</a:t>
+              <a:t>速度是這樣來的：相鄰兩個 chirp 之間，目標只移動了零點幾公釐，位置根本看不出差別，可是回波的</a:t>
             </a:r>
             <a:r>
               <a:rPr sz="1000" b="1" lang="zh-TW" dirty="0">
@@ -6331,7 +6089,7 @@
                 <a:ea typeface="Arial Unicode MS"/>
                 <a:cs typeface="Arial Unicode MS"/>
               </a:rPr>
-              <a:t>所以它</a:t>
+              <a:t>所以它確實有做比較，但是比的是</a:t>
             </a:r>
             <a:r>
               <a:rPr sz="1000" b="1" lang="zh-TW" dirty="0">
@@ -6342,7 +6100,7 @@
                 <a:ea typeface="Arial Unicode MS"/>
                 <a:cs typeface="Arial Unicode MS"/>
               </a:rPr>
-              <a:t>確實有做比較</a:t>
+              <a:t>同一次量測裡面相鄰的 chirp</a:t>
             </a:r>
             <a:r>
               <a:rPr sz="1000" lang="zh-TW" dirty="0">
@@ -6353,29 +6111,7 @@
                 <a:ea typeface="Arial Unicode MS"/>
                 <a:cs typeface="Arial Unicode MS"/>
               </a:rPr>
-              <a:t>——但比的是</a:t>
-            </a:r>
-            <a:r>
-              <a:rPr sz="1000" b="1" lang="zh-TW" dirty="0">
-                <a:solidFill>
-                  <a:srgbClr val="000000"/>
-                </a:solidFill>
-                <a:latin typeface="Arial Unicode MS"/>
-                <a:ea typeface="Arial Unicode MS"/>
-                <a:cs typeface="Arial Unicode MS"/>
-              </a:rPr>
-              <a:t>同一次量測裡面相鄰的 chirp</a:t>
-            </a:r>
-            <a:r>
-              <a:rPr sz="1000" lang="zh-TW" dirty="0">
-                <a:solidFill>
-                  <a:srgbClr val="000000"/>
-                </a:solidFill>
-                <a:latin typeface="Arial Unicode MS"/>
-                <a:ea typeface="Arial Unicode MS"/>
-                <a:cs typeface="Arial Unicode MS"/>
-              </a:rPr>
-              <a:t>，不是跟上一幀的位置相減。這兩件事差在哪裡？位置相減要先認出「這一幀的這個點，就是上一幀的那個點」，認錯了速度就整個錯；而且位置本身有誤差，除以很短的時間之後，雜訊會被放大。相位不用管這些。
+              <a:t>，不是跟上一次的位置相減。這兩件事差在哪裡？位置相減要先認出「這一次的這個點，就是上一次的那個點」，認錯了速度就整個錯掉；而且位置本身有誤差，除以很短的時間之後，雜訊會被放大。用相位就不必管這些。
 </a:t>
             </a:r>
           </a:p>
@@ -6389,17 +6125,6 @@
               </a:spcAft>
             </a:pPr>
             <a:r>
-              <a:rPr sz="1000" b="1" lang="zh-TW" dirty="0">
-                <a:solidFill>
-                  <a:srgbClr val="000000"/>
-                </a:solidFill>
-                <a:latin typeface="Arial Unicode MS"/>
-                <a:ea typeface="Arial Unicode MS"/>
-                <a:cs typeface="Arial Unicode MS"/>
-              </a:rPr>
-              <a:t>等一下操作工具的時候，同學一定會發現一件事：拉「目標的移動」那條滑桿，六張卡只有雷達那一格在動，其他五格完全不理你。有人會以為程式壞了。</a:t>
-            </a:r>
-            <a:r>
               <a:rPr sz="1000" lang="zh-TW" dirty="0">
                 <a:solidFill>
                   <a:srgbClr val="000000"/>
@@ -6408,7 +6133,7 @@
                 <a:ea typeface="Arial Unicode MS"/>
                 <a:cs typeface="Arial Unicode MS"/>
               </a:rPr>
-              <a:t>
+              <a:t>等一下操作工具的時候，大家一定會發現一件事：拉「目標的移動」那條滑桿，六張卡只有雷達那一格在動，其他五格完全不理你。可能會有人以為程式壞掉了。
 </a:t>
             </a:r>
           </a:p>
@@ -6430,7 +6155,7 @@
                 <a:ea typeface="Arial Unicode MS"/>
                 <a:cs typeface="Arial Unicode MS"/>
               </a:rPr>
-              <a:t>沒有壞。原因就是我們剛講的：另外五種量的是「這一瞬間的位置」——人站在三十公尺，距離就是三十公尺，跟他下一秒要往左走還是往右走完全沒關係。相機的估距誤差、光達的點數、熱像的像素，全部只跟「他現在在哪裡」有關。
+              <a:t>沒有壞。原因就是我們剛剛講的。另外五種量的是「這一瞬間的位置」——人站在三十公尺，距離就是三十公尺，跟他下一秒要往左走還是往右走完全沒有關係。
 </a:t>
             </a:r>
           </a:p>
@@ -6496,7 +6221,7 @@
                 <a:ea typeface="Arial Unicode MS"/>
                 <a:cs typeface="Arial Unicode MS"/>
               </a:rPr>
-              <a:t>——連續拍兩張，看位置差多少，再除以時間。算出來的東西一定比量出來的慢、也比較容易被雜訊影響。
+              <a:t>——連續拍兩張，看位置差多少，再除以時間。算出來的東西一定比量出來的慢，也比較容易被雜訊影響。
 </a:t>
             </a:r>
           </a:p>
@@ -6518,7 +6243,7 @@
                 <a:ea typeface="Arial Unicode MS"/>
                 <a:cs typeface="Arial Unicode MS"/>
               </a:rPr>
-              <a:t>（補充給比較快的同學：現在也有 FMCW 光達可以直接量速度，但還很貴，路上的車幾乎都還沒裝。）
+              <a:t>另外補充一件事：現在也有一種光達可以直接量速度，不過還很貴，路上的車幾乎都還沒有裝。
 </a:t>
             </a:r>
           </a:p>
@@ -6540,7 +6265,7 @@
                 <a:ea typeface="Arial Unicode MS"/>
                 <a:cs typeface="Arial Unicode MS"/>
               </a:rPr>
-              <a:t>特性最突出的是</a:t>
+              <a:t>雷達最突出的特性是</a:t>
             </a:r>
             <a:r>
               <a:rPr sz="1000" b="1" lang="zh-TW" dirty="0">
@@ -6562,7 +6287,7 @@
                 <a:ea typeface="Arial Unicode MS"/>
                 <a:cs typeface="Arial Unicode MS"/>
               </a:rPr>
-              <a:t>。為什麼？看最下面那一行：77 GHz 的波長大約四公釐，霧滴的直徑只有幾十微米，波長比障礙物大很多的時候，波會直接繞過去。就像海浪碰到一根細竹竿不會被擋住。
+              <a:t>。為什麼？看最下面那一行，77 GHz 的波長大約四公釐，霧滴的直徑只有幾十微米。波長比障礙物大很多的時候，波會直接繞過去，就像海浪碰到一根細竹竿不會被擋住。
 </a:t>
             </a:r>
           </a:p>
@@ -6584,7 +6309,7 @@
                 <a:ea typeface="Arial Unicode MS"/>
                 <a:cs typeface="Arial Unicode MS"/>
               </a:rPr>
-              <a:t>缺點是角解析度差。它知道「三十公尺外有東西」，但那個東西在左邊一點還是右邊一點，它分得很模糊。兩台並排的機車，雷達可能只看到一個目標。
+              <a:t>它的缺點是角解析度差。它知道三十公尺外有東西，可是那個東西在左邊一點還是右邊一點，它分得很模糊。兩台並排的機車，雷達可能只看到一個目標。
 </a:t>
             </a:r>
           </a:p>
@@ -6606,7 +6331,7 @@
                 <a:ea typeface="Arial Unicode MS"/>
                 <a:cs typeface="Arial Unicode MS"/>
               </a:rPr>
-              <a:t>還有一件事等一下操作時會看到：工具裡雷達的預設是</a:t>
+              <a:t>還有一件事等一下操作的時候會看到：工具裡面雷達的預設是</a:t>
             </a:r>
             <a:r>
               <a:rPr sz="1000" b="1" lang="zh-TW" dirty="0">
@@ -6628,7 +6353,7 @@
                 <a:ea typeface="Arial Unicode MS"/>
                 <a:cs typeface="Arial Unicode MS"/>
               </a:rPr>
-              <a:t>，兩百五十公尺，但視野只有二十度——非常窄。真車因此要另外再裝中短距雷達補兩側，那種是六十到一百公尺配九十到一百五十度。看得遠和看得廣，一顆做不到兩件事。
+              <a:t>，兩百五十公尺，可是視野只有二十度，非常窄。真車因此要另外再裝中短距雷達補兩側，那一種是六十到一百公尺，配九十到一百五十度。看得遠和看得廣，一顆做不到兩件事。
 </a:t>
             </a:r>
           </a:p>
@@ -6650,7 +6375,7 @@
                 <a:ea typeface="Arial Unicode MS"/>
                 <a:cs typeface="Arial Unicode MS"/>
               </a:rPr>
-              <a:t>用途：你們家裡的車如果有定速跟車或自動煞車，那就是雷達。它是量產車上最早普及的自駕感測器，因為便宜又耐用。</a:t>
+              <a:t>用途方面，你們家裡的車如果有定速跟車或者自動煞車，那就是雷達。它是量產車上最早普及的自駕感測器，因為便宜又耐用。</a:t>
             </a:r>
           </a:p>
         </p:txBody>
@@ -6793,7 +6518,7 @@
                 <a:ea typeface="Arial Unicode MS"/>
                 <a:cs typeface="Arial Unicode MS"/>
               </a:rPr>
-              <a:t>先說明一下：雷達的實體照片我沒有找到合適的開放授權版本，所以左邊暫時放圖示。如果老師的車有自動煞車或定速跟車，水箱罩後面或保險桿中間就有一顆，可以自己拍一張換上去——這樣學生更有感。
+              <a:t>我們看三件事。
 </a:t>
             </a:r>
           </a:p>
@@ -6815,7 +6540,7 @@
                 <a:ea typeface="Arial Unicode MS"/>
                 <a:cs typeface="Arial Unicode MS"/>
               </a:rPr>
-              <a:t>影片要看的重點：
+              <a:t>第一，發出去的波和回來的波，動畫會把兩條疊在一起給你看，頻率已經不一樣了。那個差值就是速度。
 </a:t>
             </a:r>
           </a:p>
@@ -6837,7 +6562,7 @@
                 <a:ea typeface="Arial Unicode MS"/>
                 <a:cs typeface="Arial Unicode MS"/>
               </a:rPr>
-              <a:t>第一，發出去的波和回來的波，動畫會把兩條疊在一起給你看，頻率已經不一樣了。那個差值就是速度。
+              <a:t>第二，注意雷達裝在車上的位置。它通常藏在水箱罩後面，因為無線電波可以穿透塑膠，不像相機一定要露出來。這也是為什麼你在路上看不到它。
 </a:t>
             </a:r>
           </a:p>
@@ -6859,7 +6584,7 @@
                 <a:ea typeface="Arial Unicode MS"/>
                 <a:cs typeface="Arial Unicode MS"/>
               </a:rPr>
-              <a:t>第二，注意雷達在車上的位置。它通常藏在水箱罩後面，因為無線電波可以穿透塑膠，不用像相機那樣一定要露出來。這也是為什麼你在路上看不到它。
+              <a:t>第三，看的時候請想一件事：如果那個東西是從你面前橫越過去的，頻率的變化會是多少？
 </a:t>
             </a:r>
           </a:p>
@@ -6881,7 +6606,29 @@
                 <a:ea typeface="Arial Unicode MS"/>
                 <a:cs typeface="Arial Unicode MS"/>
               </a:rPr>
-              <a:t>第三，看完請回想一件事：如果那個東西是橫越過去的，頻率的變化會是多少？
+              <a:t>答案是</a:t>
+            </a:r>
+            <a:r>
+              <a:rPr sz="1200" b="1" lang="zh-TW" dirty="0">
+                <a:solidFill>
+                  <a:srgbClr val="000000"/>
+                </a:solidFill>
+                <a:latin typeface="Arial Unicode MS"/>
+                <a:ea typeface="Arial Unicode MS"/>
+                <a:cs typeface="Arial Unicode MS"/>
+              </a:rPr>
+              <a:t>幾乎沒有變化</a:t>
+            </a:r>
+            <a:r>
+              <a:rPr sz="1200" lang="zh-TW" dirty="0">
+                <a:solidFill>
+                  <a:srgbClr val="000000"/>
+                </a:solidFill>
+                <a:latin typeface="Arial Unicode MS"/>
+                <a:ea typeface="Arial Unicode MS"/>
+                <a:cs typeface="Arial Unicode MS"/>
+              </a:rPr>
+              <a:t>。它明明在動，可是雷達讀到的接近速度接近零。這件事等一下上台操作的時候，大家會親眼看到。
 </a:t>
             </a:r>
           </a:p>
@@ -6903,29 +6650,7 @@
                 <a:ea typeface="Arial Unicode MS"/>
                 <a:cs typeface="Arial Unicode MS"/>
               </a:rPr>
-              <a:t>（預期答案：幾乎沒有變化。這個等一下上台操作時會親眼看到。）
-</a:t>
-            </a:r>
-          </a:p>
-          <a:p>
-            <a:pPr algn="l">
-              <a:lnSpc>
-                <a:spcPct val="115000"/>
-              </a:lnSpc>
-              <a:spcAft>
-                <a:spcPts val="600"/>
-              </a:spcAft>
-            </a:pPr>
-            <a:r>
-              <a:rPr sz="1200" lang="zh-TW" dirty="0">
-                <a:solidFill>
-                  <a:srgbClr val="000000"/>
-                </a:solidFill>
-                <a:latin typeface="Arial Unicode MS"/>
-                <a:ea typeface="Arial Unicode MS"/>
-                <a:cs typeface="Arial Unicode MS"/>
-              </a:rPr>
-              <a:t>（建議播 2–3 分鐘。需要網路。）</a:t>
+              <a:t>我們播兩三分鐘就好。</a:t>
             </a:r>
           </a:p>
         </p:txBody>
@@ -7034,19 +6759,19 @@
                 <a:spcPct val="115000"/>
               </a:lnSpc>
               <a:spcAft>
-                <a:spcPts val="525"/>
+                <a:spcPts val="500"/>
               </a:spcAft>
             </a:pPr>
             <a:r>
-              <a:rPr sz="1050" lang="zh-TW" dirty="0">
-                <a:solidFill>
-                  <a:srgbClr val="000000"/>
-                </a:solidFill>
-                <a:latin typeface="Arial Unicode MS"/>
-                <a:ea typeface="Arial Unicode MS"/>
-                <a:cs typeface="Arial Unicode MS"/>
-              </a:rPr>
-              <a:t>光達和雷達都講完了，用一支兩分半的影片把這兩種放在一起比一次。
+              <a:rPr sz="1000" lang="zh-TW" dirty="0">
+                <a:solidFill>
+                  <a:srgbClr val="000000"/>
+                </a:solidFill>
+                <a:latin typeface="Arial Unicode MS"/>
+                <a:ea typeface="Arial Unicode MS"/>
+                <a:cs typeface="Arial Unicode MS"/>
+              </a:rPr>
+              <a:t>光達和雷達都講完了，我們用一支兩分半的影片，把這兩種放在一起比一次。
 </a:t>
             </a:r>
           </a:p>
@@ -7056,19 +6781,19 @@
                 <a:spcPct val="115000"/>
               </a:lnSpc>
               <a:spcAft>
-                <a:spcPts val="525"/>
+                <a:spcPts val="500"/>
               </a:spcAft>
             </a:pPr>
             <a:r>
-              <a:rPr sz="1050" lang="zh-TW" dirty="0">
-                <a:solidFill>
-                  <a:srgbClr val="000000"/>
-                </a:solidFill>
-                <a:latin typeface="Arial Unicode MS"/>
-                <a:ea typeface="Arial Unicode MS"/>
-                <a:cs typeface="Arial Unicode MS"/>
-              </a:rPr>
-              <a:t>（播放前：英文旁白，只有自動產生的英文字幕。請點齒輪 → 字幕 → 自動翻譯 → 越南文。播到 2:25 可停。需要網路；沒網路就跳過。）
+              <a:rPr sz="1000" lang="zh-TW" dirty="0">
+                <a:solidFill>
+                  <a:srgbClr val="000000"/>
+                </a:solidFill>
+                <a:latin typeface="Arial Unicode MS"/>
+                <a:ea typeface="Arial Unicode MS"/>
+                <a:cs typeface="Arial Unicode MS"/>
+              </a:rPr>
+              <a:t>這支是英文旁白，只有自動產生的英文字幕。請點播放器的齒輪，字幕，自動翻譯，越南文。播到兩分二十五秒就可以停。
 </a:t>
             </a:r>
           </a:p>
@@ -7078,19 +6803,19 @@
                 <a:spcPct val="115000"/>
               </a:lnSpc>
               <a:spcAft>
-                <a:spcPts val="525"/>
+                <a:spcPts val="500"/>
               </a:spcAft>
             </a:pPr>
             <a:r>
-              <a:rPr sz="1050" lang="zh-TW" dirty="0">
-                <a:solidFill>
-                  <a:srgbClr val="000000"/>
-                </a:solidFill>
-                <a:latin typeface="Arial Unicode MS"/>
-                <a:ea typeface="Arial Unicode MS"/>
-                <a:cs typeface="Arial Unicode MS"/>
-              </a:rPr>
-              <a:t>（時間碼，方便中途暫停：0:10 光達怎麼量｜0:38 光達的弱點｜0:53 雷達的強項｜1:14 雷達的限制｜1:28 哪個比較好｜1:51 結論。）
+              <a:rPr sz="1000" lang="zh-TW" dirty="0">
+                <a:solidFill>
+                  <a:srgbClr val="000000"/>
+                </a:solidFill>
+                <a:latin typeface="Arial Unicode MS"/>
+                <a:ea typeface="Arial Unicode MS"/>
+                <a:cs typeface="Arial Unicode MS"/>
+              </a:rPr>
+              <a:t>播之前先給大家一個任務：邊看邊對照剛剛那兩頁的規格，看它講的跟我們講的一不一樣。
 </a:t>
             </a:r>
           </a:p>
@@ -7100,19 +6825,19 @@
                 <a:spcPct val="115000"/>
               </a:lnSpc>
               <a:spcAft>
-                <a:spcPts val="525"/>
+                <a:spcPts val="500"/>
               </a:spcAft>
             </a:pPr>
             <a:r>
-              <a:rPr sz="1050" lang="zh-TW" dirty="0">
-                <a:solidFill>
-                  <a:srgbClr val="000000"/>
-                </a:solidFill>
-                <a:latin typeface="Arial Unicode MS"/>
-                <a:ea typeface="Arial Unicode MS"/>
-                <a:cs typeface="Arial Unicode MS"/>
-              </a:rPr>
-              <a:t>先給任務：邊看邊對照剛剛兩頁規格，它講的跟我們講的一不一樣？
+              <a:rPr sz="1000" lang="zh-TW" dirty="0">
+                <a:solidFill>
+                  <a:srgbClr val="000000"/>
+                </a:solidFill>
+                <a:latin typeface="Arial Unicode MS"/>
+                <a:ea typeface="Arial Unicode MS"/>
+                <a:cs typeface="Arial Unicode MS"/>
+              </a:rPr>
+              <a:t>看完我問三題。
 </a:t>
             </a:r>
           </a:p>
@@ -7122,19 +6847,19 @@
                 <a:spcPct val="115000"/>
               </a:lnSpc>
               <a:spcAft>
-                <a:spcPts val="525"/>
+                <a:spcPts val="500"/>
               </a:spcAft>
             </a:pPr>
             <a:r>
-              <a:rPr sz="1050" lang="zh-TW" dirty="0">
-                <a:solidFill>
-                  <a:srgbClr val="000000"/>
-                </a:solidFill>
-                <a:latin typeface="Arial Unicode MS"/>
-                <a:ea typeface="Arial Unicode MS"/>
-                <a:cs typeface="Arial Unicode MS"/>
-              </a:rPr>
-              <a:t>看完問三題。
+              <a:rPr sz="1000" lang="zh-TW" dirty="0">
+                <a:solidFill>
+                  <a:srgbClr val="000000"/>
+                </a:solidFill>
+                <a:latin typeface="Arial Unicode MS"/>
+                <a:ea typeface="Arial Unicode MS"/>
+                <a:cs typeface="Arial Unicode MS"/>
+              </a:rPr>
+              <a:t>第一，影片說光達的弱點是什麼？答案是怕雨、怕霧、怕雪，還有貴。跟我們第四張講的一樣，第三節我們會用數字把它量出來。
 </a:t>
             </a:r>
           </a:p>
@@ -7144,19 +6869,19 @@
                 <a:spcPct val="115000"/>
               </a:lnSpc>
               <a:spcAft>
-                <a:spcPts val="525"/>
+                <a:spcPts val="500"/>
               </a:spcAft>
             </a:pPr>
             <a:r>
-              <a:rPr sz="1050" lang="zh-TW" dirty="0">
-                <a:solidFill>
-                  <a:srgbClr val="000000"/>
-                </a:solidFill>
-                <a:latin typeface="Arial Unicode MS"/>
-                <a:ea typeface="Arial Unicode MS"/>
-                <a:cs typeface="Arial Unicode MS"/>
-              </a:rPr>
-              <a:t>第一，影片說光達的弱點是什麼？（預期：怕雨霧雪、貴。跟第 4 張一樣，第三節會用數字量。）
+              <a:rPr sz="1000" lang="zh-TW" dirty="0">
+                <a:solidFill>
+                  <a:srgbClr val="000000"/>
+                </a:solidFill>
+                <a:latin typeface="Arial Unicode MS"/>
+                <a:ea typeface="Arial Unicode MS"/>
+                <a:cs typeface="Arial Unicode MS"/>
+              </a:rPr>
+              <a:t>第二，影片裡提到雷達知道前面有東西，可是分不出那是什麼。這句話對應到我們今天哪一個重點？就是那句「量得到距離，不等於知道那是什麼」。等一下上台的時候，大家會看到雷達那張卡上只寫「未分類障礙物」。
 </a:t>
             </a:r>
           </a:p>
@@ -7166,19 +6891,41 @@
                 <a:spcPct val="115000"/>
               </a:lnSpc>
               <a:spcAft>
-                <a:spcPts val="525"/>
+                <a:spcPts val="500"/>
               </a:spcAft>
             </a:pPr>
             <a:r>
-              <a:rPr sz="1050" lang="zh-TW" dirty="0">
-                <a:solidFill>
-                  <a:srgbClr val="000000"/>
-                </a:solidFill>
-                <a:latin typeface="Arial Unicode MS"/>
-                <a:ea typeface="Arial Unicode MS"/>
-                <a:cs typeface="Arial Unicode MS"/>
-              </a:rPr>
-              <a:t>第二，影片提到雷達知道前面有東西，卻分不出那是什麼。這對應今天哪個重點？（預期：量得到距離，不等於知道那是什麼。等一下上台會看到雷達那張卡只寫「未分類障礙物」。）
+              <a:rPr sz="1000" lang="zh-TW" dirty="0">
+                <a:solidFill>
+                  <a:srgbClr val="000000"/>
+                </a:solidFill>
+                <a:latin typeface="Arial Unicode MS"/>
+                <a:ea typeface="Arial Unicode MS"/>
+                <a:cs typeface="Arial Unicode MS"/>
+              </a:rPr>
+              <a:t>第三題最重要：</a:t>
+            </a:r>
+            <a:r>
+              <a:rPr sz="1000" b="1" lang="zh-TW" dirty="0">
+                <a:solidFill>
+                  <a:srgbClr val="000000"/>
+                </a:solidFill>
+                <a:latin typeface="Arial Unicode MS"/>
+                <a:ea typeface="Arial Unicode MS"/>
+                <a:cs typeface="Arial Unicode MS"/>
+              </a:rPr>
+              <a:t>這支影片從頭到尾，沒有提到哪一種感測器？</a:t>
+            </a:r>
+            <a:r>
+              <a:rPr sz="1000" lang="zh-TW" dirty="0">
+                <a:solidFill>
+                  <a:srgbClr val="000000"/>
+                </a:solidFill>
+                <a:latin typeface="Arial Unicode MS"/>
+                <a:ea typeface="Arial Unicode MS"/>
+                <a:cs typeface="Arial Unicode MS"/>
+              </a:rPr>
+              <a:t>
 </a:t>
             </a:r>
           </a:p>
@@ -7188,41 +6935,19 @@
                 <a:spcPct val="115000"/>
               </a:lnSpc>
               <a:spcAft>
-                <a:spcPts val="525"/>
+                <a:spcPts val="500"/>
               </a:spcAft>
             </a:pPr>
             <a:r>
-              <a:rPr sz="1050" lang="zh-TW" dirty="0">
-                <a:solidFill>
-                  <a:srgbClr val="000000"/>
-                </a:solidFill>
-                <a:latin typeface="Arial Unicode MS"/>
-                <a:ea typeface="Arial Unicode MS"/>
-                <a:cs typeface="Arial Unicode MS"/>
-              </a:rPr>
-              <a:t>第三題最重要：</a:t>
-            </a:r>
-            <a:r>
-              <a:rPr sz="1050" b="1" lang="zh-TW" dirty="0">
-                <a:solidFill>
-                  <a:srgbClr val="000000"/>
-                </a:solidFill>
-                <a:latin typeface="Arial Unicode MS"/>
-                <a:ea typeface="Arial Unicode MS"/>
-                <a:cs typeface="Arial Unicode MS"/>
-              </a:rPr>
-              <a:t>這支影片從頭到尾沒提到哪一種感測器？</a:t>
-            </a:r>
-            <a:r>
-              <a:rPr sz="1050" lang="zh-TW" dirty="0">
-                <a:solidFill>
-                  <a:srgbClr val="000000"/>
-                </a:solidFill>
-                <a:latin typeface="Arial Unicode MS"/>
-                <a:ea typeface="Arial Unicode MS"/>
-                <a:cs typeface="Arial Unicode MS"/>
-              </a:rPr>
-              <a:t>（預期：相機。）
+              <a:rPr sz="1000" lang="zh-TW" dirty="0">
+                <a:solidFill>
+                  <a:srgbClr val="000000"/>
+                </a:solidFill>
+                <a:latin typeface="Arial Unicode MS"/>
+                <a:ea typeface="Arial Unicode MS"/>
+                <a:cs typeface="Arial Unicode MS"/>
+              </a:rPr>
+              <a:t>答案是相機。影片說多數自駕車是光達加雷達一起用，這句話不算錯，可是不完整——它漏掉了數量最多、而且唯一讀得出紅綠燈的那一種。
 </a:t>
             </a:r>
           </a:p>
@@ -7232,22 +6957,22 @@
                 <a:spcPct val="115000"/>
               </a:lnSpc>
               <a:spcAft>
-                <a:spcPts val="525"/>
+                <a:spcPts val="500"/>
               </a:spcAft>
             </a:pPr>
             <a:r>
-              <a:rPr sz="1050" lang="zh-TW" dirty="0">
-                <a:solidFill>
-                  <a:srgbClr val="000000"/>
-                </a:solidFill>
-                <a:latin typeface="Arial Unicode MS"/>
-                <a:ea typeface="Arial Unicode MS"/>
-                <a:cs typeface="Arial Unicode MS"/>
-              </a:rPr>
-              <a:t>影片說多數自駕車是光達加雷達一起用，這不算錯，但不完整——它漏掉了數量最多、而且唯一讀得出紅綠燈的那一種。以後看這類科普影片，不只看它講了什麼，也要想它</a:t>
-            </a:r>
-            <a:r>
-              <a:rPr sz="1050" b="1" lang="zh-TW" dirty="0">
+              <a:rPr sz="1000" lang="zh-TW" dirty="0">
+                <a:solidFill>
+                  <a:srgbClr val="000000"/>
+                </a:solidFill>
+                <a:latin typeface="Arial Unicode MS"/>
+                <a:ea typeface="Arial Unicode MS"/>
+                <a:cs typeface="Arial Unicode MS"/>
+              </a:rPr>
+              <a:t>所以以後看這一類的科普影片，不要只看它講了什麼，也要想想它</a:t>
+            </a:r>
+            <a:r>
+              <a:rPr sz="1000" b="1" lang="zh-TW" dirty="0">
                 <a:solidFill>
                   <a:srgbClr val="000000"/>
                 </a:solidFill>
@@ -7258,7 +6983,7 @@
               <a:t>沒講</a:t>
             </a:r>
             <a:r>
-              <a:rPr sz="1050" lang="zh-TW" dirty="0">
+              <a:rPr sz="1000" lang="zh-TW" dirty="0">
                 <a:solidFill>
                   <a:srgbClr val="000000"/>
                 </a:solidFill>
@@ -7276,19 +7001,19 @@
                 <a:spcPct val="115000"/>
               </a:lnSpc>
               <a:spcAft>
-                <a:spcPts val="525"/>
+                <a:spcPts val="500"/>
               </a:spcAft>
             </a:pPr>
             <a:r>
-              <a:rPr sz="1050" lang="zh-TW" dirty="0">
-                <a:solidFill>
-                  <a:srgbClr val="000000"/>
-                </a:solidFill>
-                <a:latin typeface="Arial Unicode MS"/>
-                <a:ea typeface="Arial Unicode MS"/>
-                <a:cs typeface="Arial Unicode MS"/>
-              </a:rPr>
-              <a:t>補充：影片描述的是車頂旋轉式光達，那只是其中一種，下禮拜會看到固定式的。</a:t>
+              <a:rPr sz="1000" lang="zh-TW" dirty="0">
+                <a:solidFill>
+                  <a:srgbClr val="000000"/>
+                </a:solidFill>
+                <a:latin typeface="Arial Unicode MS"/>
+                <a:ea typeface="Arial Unicode MS"/>
+                <a:cs typeface="Arial Unicode MS"/>
+              </a:rPr>
+              <a:t>最後補一句：影片裡描述的是車頂旋轉式的光達，那只是其中一種，下禮拜我們會看到固定式的。</a:t>
             </a:r>
           </a:p>
         </p:txBody>

--- a/第三週(09-24)/第三週_第1節_簡報.pptx
+++ b/第三週(09-24)/第三週_第1節_簡報.pptx
@@ -764,11 +764,11 @@
                 <a:spcPct val="115000"/>
               </a:lnSpc>
               <a:spcAft>
-                <a:spcPts val="600"/>
+                <a:spcPts val="575"/>
               </a:spcAft>
             </a:pPr>
             <a:r>
-              <a:rPr sz="1200" lang="zh-TW" dirty="0">
+              <a:rPr sz="1150" lang="zh-TW" dirty="0">
                 <a:solidFill>
                   <a:srgbClr val="000000"/>
                 </a:solidFill>
@@ -786,11 +786,11 @@
                 <a:spcPct val="115000"/>
               </a:lnSpc>
               <a:spcAft>
-                <a:spcPts val="600"/>
+                <a:spcPts val="575"/>
               </a:spcAft>
             </a:pPr>
             <a:r>
-              <a:rPr sz="1200" lang="zh-TW" dirty="0">
+              <a:rPr sz="1150" lang="zh-TW" dirty="0">
                 <a:solidFill>
                   <a:srgbClr val="000000"/>
                 </a:solidFill>
@@ -808,11 +808,11 @@
                 <a:spcPct val="115000"/>
               </a:lnSpc>
               <a:spcAft>
-                <a:spcPts val="600"/>
+                <a:spcPts val="575"/>
               </a:spcAft>
             </a:pPr>
             <a:r>
-              <a:rPr sz="1200" lang="zh-TW" dirty="0">
+              <a:rPr sz="1150" lang="zh-TW" dirty="0">
                 <a:solidFill>
                   <a:srgbClr val="000000"/>
                 </a:solidFill>
@@ -830,11 +830,11 @@
                 <a:spcPct val="115000"/>
               </a:lnSpc>
               <a:spcAft>
-                <a:spcPts val="600"/>
+                <a:spcPts val="575"/>
               </a:spcAft>
             </a:pPr>
             <a:r>
-              <a:rPr sz="1200" lang="zh-TW" dirty="0">
+              <a:rPr sz="1150" lang="zh-TW" dirty="0">
                 <a:solidFill>
                   <a:srgbClr val="000000"/>
                 </a:solidFill>
@@ -845,7 +845,7 @@
               <a:t>這裡有一個很聰明的工程考量。聲音每秒只走三百四十公尺，比光慢了上百萬倍。量一公尺的距離，來回兩公尺，時間大約是</a:t>
             </a:r>
             <a:r>
-              <a:rPr sz="1200" b="1" lang="zh-TW" dirty="0">
+              <a:rPr sz="1150" b="1" lang="zh-TW" dirty="0">
                 <a:solidFill>
                   <a:srgbClr val="000000"/>
                 </a:solidFill>
@@ -856,7 +856,7 @@
               <a:t>六毫秒</a:t>
             </a:r>
             <a:r>
-              <a:rPr sz="1200" lang="zh-TW" dirty="0">
+              <a:rPr sz="1150" lang="zh-TW" dirty="0">
                 <a:solidFill>
                   <a:srgbClr val="000000"/>
                 </a:solidFill>
@@ -874,11 +874,11 @@
                 <a:spcPct val="115000"/>
               </a:lnSpc>
               <a:spcAft>
-                <a:spcPts val="600"/>
+                <a:spcPts val="575"/>
               </a:spcAft>
             </a:pPr>
             <a:r>
-              <a:rPr sz="1200" b="1" lang="zh-TW" dirty="0">
+              <a:rPr sz="1150" b="1" lang="zh-TW" dirty="0">
                 <a:solidFill>
                   <a:srgbClr val="000000"/>
                 </a:solidFill>
@@ -889,7 +889,7 @@
               <a:t>慢，在這裡反而是優點。</a:t>
             </a:r>
             <a:r>
-              <a:rPr sz="1200" lang="zh-TW" dirty="0">
+              <a:rPr sz="1150" lang="zh-TW" dirty="0">
                 <a:solidFill>
                   <a:srgbClr val="000000"/>
                 </a:solidFill>
@@ -907,19 +907,19 @@
                 <a:spcPct val="115000"/>
               </a:lnSpc>
               <a:spcAft>
-                <a:spcPts val="600"/>
+                <a:spcPts val="575"/>
               </a:spcAft>
             </a:pPr>
             <a:r>
-              <a:rPr sz="1200" lang="zh-TW" dirty="0">
-                <a:solidFill>
-                  <a:srgbClr val="000000"/>
-                </a:solidFill>
-                <a:latin typeface="Arial Unicode MS"/>
-                <a:ea typeface="Arial Unicode MS"/>
-                <a:cs typeface="Arial Unicode MS"/>
-              </a:rPr>
-              <a:t>缺點很明顯：只有幾公尺——量產的停車感測器大約是零點一五到五點五公尺，工具裡預設四點五。聲音在空氣裡衰減得很快，而且會受風和溫度影響——溫度變了聲速就變了，距離就會算錯。
+              <a:rPr sz="1150" lang="zh-TW" dirty="0">
+                <a:solidFill>
+                  <a:srgbClr val="000000"/>
+                </a:solidFill>
+                <a:latin typeface="Arial Unicode MS"/>
+                <a:ea typeface="Arial Unicode MS"/>
+                <a:cs typeface="Arial Unicode MS"/>
+              </a:rPr>
+              <a:t>它的缺點也很明顯，就是只有幾公尺。量產的停車感測器大約是零點一五到五點五公尺，我們工具裡預設四點五。聲音在空氣裡衰減得很快，而且會受風和溫度影響——溫度變了聲速就變了，距離就會算錯。
 </a:t>
             </a:r>
           </a:p>
@@ -929,11 +929,11 @@
                 <a:spcPct val="115000"/>
               </a:lnSpc>
               <a:spcAft>
-                <a:spcPts val="600"/>
+                <a:spcPts val="575"/>
               </a:spcAft>
             </a:pPr>
             <a:r>
-              <a:rPr sz="1200" lang="zh-TW" dirty="0">
+              <a:rPr sz="1150" lang="zh-TW" dirty="0">
                 <a:solidFill>
                   <a:srgbClr val="000000"/>
                 </a:solidFill>
@@ -951,11 +951,11 @@
                 <a:spcPct val="115000"/>
               </a:lnSpc>
               <a:spcAft>
-                <a:spcPts val="600"/>
+                <a:spcPts val="575"/>
               </a:spcAft>
             </a:pPr>
             <a:r>
-              <a:rPr sz="1200" lang="zh-TW" dirty="0">
+              <a:rPr sz="1150" lang="zh-TW" dirty="0">
                 <a:solidFill>
                   <a:srgbClr val="000000"/>
                 </a:solidFill>
@@ -1513,7 +1513,7 @@
                 <a:ea typeface="Arial Unicode MS"/>
                 <a:cs typeface="Arial Unicode MS"/>
               </a:rPr>
-              <a:t>特性是這樣：它給的是</a:t>
+              <a:t>它最特別的地方，是它給的是</a:t>
             </a:r>
             <a:r>
               <a:rPr sz="1050" b="1" lang="zh-TW" dirty="0">
@@ -2305,7 +2305,7 @@
                 <a:ea typeface="Arial Unicode MS"/>
                 <a:cs typeface="Arial Unicode MS"/>
               </a:rPr>
-              <a:t>缺點：第一，解析度低，通常只有三百二乘二百四，跟相機差很多。第二，貴。第三，也是最關鍵的——它讀不出紅綠燈的顏色，也看不到車道標線，因為那些東西跟背景沒有溫差。
+              <a:t>它的缺點有三個。第一，解析度低，通常只有三百二乘二百四，跟相機差很多。第二，貴。第三個最關鍵——它讀不出紅綠燈的顏色，也看不到車道標線，因為那些東西跟背景沒有溫差。
 </a:t>
             </a:r>
           </a:p>
@@ -4582,7 +4582,7 @@
                 <a:ea typeface="Arial Unicode MS"/>
                 <a:cs typeface="Arial Unicode MS"/>
               </a:rPr>
-              <a:t>特性有三個。解析度最高，六種裡面它給的資訊量最大。有顏色，這是它的獨門。而且最便宜，一顆幾百塊到幾千塊。
+              <a:t>它有三個很強的地方。第一，解析度最高，六種裡面它給的資訊量最大。第二，它有顏色，這是它的獨門。第三，它最便宜，一顆幾百塊到幾千塊。
 </a:t>
             </a:r>
           </a:p>
@@ -4626,7 +4626,7 @@
                 <a:ea typeface="Arial Unicode MS"/>
                 <a:cs typeface="Arial Unicode MS"/>
               </a:rPr>
-              <a:t>用途最重要：紅綠燈、速限標誌、車道標線，還有判斷那是人還是車。大家想一想，這些東西有什麼共通點？
+              <a:t>那它在車上拿來做什麼？這一段最重要。它負責讀紅綠燈、讀速限標誌、看車道標線，還有判斷前面那個是人還是車。大家想一想，這幾件事有什麼共通點？
 </a:t>
             </a:r>
           </a:p>
@@ -5253,7 +5253,7 @@
                 <a:ea typeface="Arial Unicode MS"/>
                 <a:cs typeface="Arial Unicode MS"/>
               </a:rPr>
-              <a:t>特性：距離準到公分級，遠比相機準。而且因為它是一顆一顆點打出去的，它直接給你三維的形狀，不用推算。
+              <a:t>它最強的地方是距離很準，準到公分等級，遠比相機準。而且因為它是一顆一顆點打出去的，它直接給你三維的形狀，不用推算。
 </a:t>
             </a:r>
           </a:p>

--- a/第三週(09-24)/第三週_第1節_簡報.pptx
+++ b/第三週(09-24)/第三週_第1節_簡報.pptx
@@ -1128,7 +1128,51 @@
                 <a:ea typeface="Arial Unicode MS"/>
                 <a:cs typeface="Arial Unicode MS"/>
               </a:rPr>
-              <a:t>影片我們看三件事。
+              <a:t>這支影片有十五分鐘，我們不會全部播。</a:t>
+            </a:r>
+            <a:r>
+              <a:rPr sz="1200" b="1" lang="zh-TW" dirty="0">
+                <a:solidFill>
+                  <a:srgbClr val="000000"/>
+                </a:solidFill>
+                <a:latin typeface="Arial Unicode MS"/>
+                <a:ea typeface="Arial Unicode MS"/>
+                <a:cs typeface="Arial Unicode MS"/>
+              </a:rPr>
+              <a:t>一分零五秒到兩分五十秒</a:t>
+            </a:r>
+            <a:r>
+              <a:rPr sz="1200" lang="zh-TW" dirty="0">
+                <a:solidFill>
+                  <a:srgbClr val="000000"/>
+                </a:solidFill>
+                <a:latin typeface="Arial Unicode MS"/>
+                <a:ea typeface="Arial Unicode MS"/>
+                <a:cs typeface="Arial Unicode MS"/>
+              </a:rPr>
+              <a:t>講超音波的原理，</a:t>
+            </a:r>
+            <a:r>
+              <a:rPr sz="1200" b="1" lang="zh-TW" dirty="0">
+                <a:solidFill>
+                  <a:srgbClr val="000000"/>
+                </a:solidFill>
+                <a:latin typeface="Arial Unicode MS"/>
+                <a:ea typeface="Arial Unicode MS"/>
+                <a:cs typeface="Arial Unicode MS"/>
+              </a:rPr>
+              <a:t>五分四十秒到六分十秒</a:t>
+            </a:r>
+            <a:r>
+              <a:rPr sz="1200" lang="zh-TW" dirty="0">
+                <a:solidFill>
+                  <a:srgbClr val="000000"/>
+                </a:solidFill>
+                <a:latin typeface="Arial Unicode MS"/>
+                <a:ea typeface="Arial Unicode MS"/>
+                <a:cs typeface="Arial Unicode MS"/>
+              </a:rPr>
+              <a:t>是實際測試，可以聽到嗶嗶聲愈來愈快。這兩段加起來大約三分鐘。
 </a:t>
             </a:r>
           </a:p>
@@ -1150,7 +1194,7 @@
                 <a:ea typeface="Arial Unicode MS"/>
                 <a:cs typeface="Arial Unicode MS"/>
               </a:rPr>
-              <a:t>第一，數數看一台車裝幾顆。為什麼要好幾顆？因為一顆的視野只有一個錐形，要涵蓋整個車尾，就得排一排。
+              <a:t>我們看三件事。
 </a:t>
             </a:r>
           </a:p>
@@ -1172,7 +1216,7 @@
                 <a:ea typeface="Arial Unicode MS"/>
                 <a:cs typeface="Arial Unicode MS"/>
               </a:rPr>
-              <a:t>第二，注意那個嗶嗶聲。愈近嗶得愈快，那是車子把距離翻譯成你聽得懂的東西。其實螢幕上也會畫出距離，但是聲音不用你低頭去看。
+              <a:t>第一，數數看一台車裝幾顆。為什麼要好幾顆？因為一顆的視野只有一個錐形，要涵蓋整個車尾，就得排一排。
 </a:t>
             </a:r>
           </a:p>
@@ -1194,7 +1238,7 @@
                 <a:ea typeface="Arial Unicode MS"/>
                 <a:cs typeface="Arial Unicode MS"/>
               </a:rPr>
-              <a:t>第三，我給大家一個思考題：為什麼超音波只在停車的時候用，開車的時候不用？
+              <a:t>第二，注意那個嗶嗶聲。愈近嗶得愈快，那是車子把距離翻譯成你聽得懂的東西。其實螢幕上也會畫出距離，但是聲音不用你低頭去看。
 </a:t>
             </a:r>
           </a:p>
@@ -1216,7 +1260,7 @@
                 <a:ea typeface="Arial Unicode MS"/>
                 <a:cs typeface="Arial Unicode MS"/>
               </a:rPr>
-              <a:t>因為它只有幾公尺。時速五十的時候，煞停距離要二十公尺，它根本來不及。這個數字第二節我們會算出來。
+              <a:t>第三，我給大家一個思考題：為什麼超音波只在停車的時候用，開車的時候不用？
 </a:t>
             </a:r>
           </a:p>
@@ -1238,7 +1282,7 @@
                 <a:ea typeface="Arial Unicode MS"/>
                 <a:cs typeface="Arial Unicode MS"/>
               </a:rPr>
-              <a:t>我們播兩三分鐘就好。</a:t>
+              <a:t>因為它只有幾公尺。時速五十的時候，煞停距離要二十公尺，它根本來不及。這個數字第二節我們會算出來。</a:t>
             </a:r>
           </a:p>
         </p:txBody>
@@ -1754,11 +1798,11 @@
                 <a:spcPct val="115000"/>
               </a:lnSpc>
               <a:spcAft>
-                <a:spcPts val="525"/>
+                <a:spcPts val="500"/>
               </a:spcAft>
             </a:pPr>
             <a:r>
-              <a:rPr sz="1050" lang="zh-TW" dirty="0">
+              <a:rPr sz="1000" lang="zh-TW" dirty="0">
                 <a:solidFill>
                   <a:srgbClr val="000000"/>
                 </a:solidFill>
@@ -1769,7 +1813,7 @@
               <a:t>左邊這張是</a:t>
             </a:r>
             <a:r>
-              <a:rPr sz="1050" b="1" lang="zh-TW" dirty="0">
+              <a:rPr sz="1000" b="1" lang="zh-TW" dirty="0">
                 <a:solidFill>
                   <a:srgbClr val="000000"/>
                 </a:solidFill>
@@ -1780,7 +1824,7 @@
               <a:t>車用的 GPS 天線</a:t>
             </a:r>
             <a:r>
-              <a:rPr sz="1050" lang="zh-TW" dirty="0">
+              <a:rPr sz="1000" lang="zh-TW" dirty="0">
                 <a:solidFill>
                   <a:srgbClr val="000000"/>
                 </a:solidFill>
@@ -1798,11 +1842,11 @@
                 <a:spcPct val="115000"/>
               </a:lnSpc>
               <a:spcAft>
-                <a:spcPts val="525"/>
+                <a:spcPts val="500"/>
               </a:spcAft>
             </a:pPr>
             <a:r>
-              <a:rPr sz="1050" lang="zh-TW" dirty="0">
+              <a:rPr sz="1000" lang="zh-TW" dirty="0">
                 <a:solidFill>
                   <a:srgbClr val="000000"/>
                 </a:solidFill>
@@ -1820,19 +1864,19 @@
                 <a:spcPct val="115000"/>
               </a:lnSpc>
               <a:spcAft>
-                <a:spcPts val="525"/>
+                <a:spcPts val="500"/>
               </a:spcAft>
             </a:pPr>
             <a:r>
-              <a:rPr sz="1050" lang="zh-TW" dirty="0">
-                <a:solidFill>
-                  <a:srgbClr val="000000"/>
-                </a:solidFill>
-                <a:latin typeface="Arial Unicode MS"/>
-                <a:ea typeface="Arial Unicode MS"/>
-                <a:cs typeface="Arial Unicode MS"/>
-              </a:rPr>
-              <a:t>影片是 Perimeter Institute 拍的，那是加拿大一間理論物理研究院。他們用實體教具示範三邊測量，講得非常清楚，不熟數學的同學也看得懂。
+              <a:rPr sz="1000" lang="zh-TW" dirty="0">
+                <a:solidFill>
+                  <a:srgbClr val="000000"/>
+                </a:solidFill>
+                <a:latin typeface="Arial Unicode MS"/>
+                <a:ea typeface="Arial Unicode MS"/>
+                <a:cs typeface="Arial Unicode MS"/>
+              </a:rPr>
+              <a:t>影片是 Perimeter Institute 拍的，那是加拿大一間理論物理研究院。他們在一張世界地圖上示範三邊測量：收到一顆衛星的訊號，用畢氏定理算出自己離它多遠，再在地圖上畫一個圈。講得非常清楚，不熟數學的同學也看得懂。
 </a:t>
             </a:r>
           </a:p>
@@ -1842,11 +1886,11 @@
                 <a:spcPct val="115000"/>
               </a:lnSpc>
               <a:spcAft>
-                <a:spcPts val="525"/>
+                <a:spcPts val="500"/>
               </a:spcAft>
             </a:pPr>
             <a:r>
-              <a:rPr sz="1050" lang="zh-TW" dirty="0">
+              <a:rPr sz="1000" lang="zh-TW" dirty="0">
                 <a:solidFill>
                   <a:srgbClr val="000000"/>
                 </a:solidFill>
@@ -1864,19 +1908,19 @@
                 <a:spcPct val="115000"/>
               </a:lnSpc>
               <a:spcAft>
-                <a:spcPts val="525"/>
+                <a:spcPts val="500"/>
               </a:spcAft>
             </a:pPr>
             <a:r>
-              <a:rPr sz="1050" lang="zh-TW" dirty="0">
-                <a:solidFill>
-                  <a:srgbClr val="000000"/>
-                </a:solidFill>
-                <a:latin typeface="Arial Unicode MS"/>
-                <a:ea typeface="Arial Unicode MS"/>
-                <a:cs typeface="Arial Unicode MS"/>
-              </a:rPr>
-              <a:t>一顆衛星，你只知道自己離它多遠，也就是在某一個球面上，可能在地球上的任何地方。
+              <a:rPr sz="1000" lang="zh-TW" dirty="0">
+                <a:solidFill>
+                  <a:srgbClr val="000000"/>
+                </a:solidFill>
+                <a:latin typeface="Arial Unicode MS"/>
+                <a:ea typeface="Arial Unicode MS"/>
+                <a:cs typeface="Arial Unicode MS"/>
+              </a:rPr>
+              <a:t>影片為了好懂，把地球攤平成一張地圖，所以畫出來的是圈；真實情況是立體的球面。這件事我先講，免得等一下混淆。
 </a:t>
             </a:r>
           </a:p>
@@ -1886,19 +1930,19 @@
                 <a:spcPct val="115000"/>
               </a:lnSpc>
               <a:spcAft>
-                <a:spcPts val="525"/>
+                <a:spcPts val="500"/>
               </a:spcAft>
             </a:pPr>
             <a:r>
-              <a:rPr sz="1050" lang="zh-TW" dirty="0">
-                <a:solidFill>
-                  <a:srgbClr val="000000"/>
-                </a:solidFill>
-                <a:latin typeface="Arial Unicode MS"/>
-                <a:ea typeface="Arial Unicode MS"/>
-                <a:cs typeface="Arial Unicode MS"/>
-              </a:rPr>
-              <a:t>兩顆，兩個球面相交，變成一個圓。
+              <a:rPr sz="1000" lang="zh-TW" dirty="0">
+                <a:solidFill>
+                  <a:srgbClr val="000000"/>
+                </a:solidFill>
+                <a:latin typeface="Arial Unicode MS"/>
+                <a:ea typeface="Arial Unicode MS"/>
+                <a:cs typeface="Arial Unicode MS"/>
+              </a:rPr>
+              <a:t>一顆衛星，你只知道自己離它多遠。在地圖上是一個圈，在真實的立體空間裡是一個球面，你可能在上面的任何地方。
 </a:t>
             </a:r>
           </a:p>
@@ -1908,19 +1952,19 @@
                 <a:spcPct val="115000"/>
               </a:lnSpc>
               <a:spcAft>
-                <a:spcPts val="525"/>
+                <a:spcPts val="500"/>
               </a:spcAft>
             </a:pPr>
             <a:r>
-              <a:rPr sz="1050" lang="zh-TW" dirty="0">
-                <a:solidFill>
-                  <a:srgbClr val="000000"/>
-                </a:solidFill>
-                <a:latin typeface="Arial Unicode MS"/>
-                <a:ea typeface="Arial Unicode MS"/>
-                <a:cs typeface="Arial Unicode MS"/>
-              </a:rPr>
-              <a:t>三顆，縮到兩個點，其中一個通常在外太空，可以排除掉。
+              <a:rPr sz="1000" lang="zh-TW" dirty="0">
+                <a:solidFill>
+                  <a:srgbClr val="000000"/>
+                </a:solidFill>
+                <a:latin typeface="Arial Unicode MS"/>
+                <a:ea typeface="Arial Unicode MS"/>
+                <a:cs typeface="Arial Unicode MS"/>
+              </a:rPr>
+              <a:t>兩顆，兩個圈相交，剩下兩個交點。
 </a:t>
             </a:r>
           </a:p>
@@ -1930,19 +1974,19 @@
                 <a:spcPct val="115000"/>
               </a:lnSpc>
               <a:spcAft>
-                <a:spcPts val="525"/>
+                <a:spcPts val="500"/>
               </a:spcAft>
             </a:pPr>
             <a:r>
-              <a:rPr sz="1050" lang="zh-TW" dirty="0">
-                <a:solidFill>
-                  <a:srgbClr val="000000"/>
-                </a:solidFill>
-                <a:latin typeface="Arial Unicode MS"/>
-                <a:ea typeface="Arial Unicode MS"/>
-                <a:cs typeface="Arial Unicode MS"/>
-              </a:rPr>
-              <a:t>四顆，解出唯一的那個點，而且第四顆還順便修正你接收器的時鐘誤差，剛剛那一頁講過這件事。
+              <a:rPr sz="1000" lang="zh-TW" dirty="0">
+                <a:solidFill>
+                  <a:srgbClr val="000000"/>
+                </a:solidFill>
+                <a:latin typeface="Arial Unicode MS"/>
+                <a:ea typeface="Arial Unicode MS"/>
+                <a:cs typeface="Arial Unicode MS"/>
+              </a:rPr>
+              <a:t>三顆，就能定出地圖上的那一個位置。
 </a:t>
             </a:r>
           </a:p>
@@ -1952,11 +1996,33 @@
                 <a:spcPct val="115000"/>
               </a:lnSpc>
               <a:spcAft>
-                <a:spcPts val="525"/>
+                <a:spcPts val="500"/>
               </a:spcAft>
             </a:pPr>
             <a:r>
-              <a:rPr sz="1050" lang="zh-TW" dirty="0">
+              <a:rPr sz="1000" lang="zh-TW" dirty="0">
+                <a:solidFill>
+                  <a:srgbClr val="000000"/>
+                </a:solidFill>
+                <a:latin typeface="Arial Unicode MS"/>
+                <a:ea typeface="Arial Unicode MS"/>
+                <a:cs typeface="Arial Unicode MS"/>
+              </a:rPr>
+              <a:t>到了立體空間還要第四顆，而且第四顆還順便修正你接收器的時鐘誤差，剛剛那一頁講過這件事。
+</a:t>
+            </a:r>
+          </a:p>
+          <a:p>
+            <a:pPr algn="l">
+              <a:lnSpc>
+                <a:spcPct val="115000"/>
+              </a:lnSpc>
+              <a:spcAft>
+                <a:spcPts val="500"/>
+              </a:spcAft>
+            </a:pPr>
+            <a:r>
+              <a:rPr sz="1000" lang="zh-TW" dirty="0">
                 <a:solidFill>
                   <a:srgbClr val="000000"/>
                 </a:solidFill>
@@ -1974,11 +2040,11 @@
                 <a:spcPct val="115000"/>
               </a:lnSpc>
               <a:spcAft>
-                <a:spcPts val="525"/>
+                <a:spcPts val="500"/>
               </a:spcAft>
             </a:pPr>
             <a:r>
-              <a:rPr sz="1050" lang="zh-TW" dirty="0">
+              <a:rPr sz="1000" lang="zh-TW" dirty="0">
                 <a:solidFill>
                   <a:srgbClr val="000000"/>
                 </a:solidFill>
@@ -6484,19 +6550,19 @@
                 <a:spcPct val="115000"/>
               </a:lnSpc>
               <a:spcAft>
-                <a:spcPts val="600"/>
+                <a:spcPts val="500"/>
               </a:spcAft>
             </a:pPr>
             <a:r>
-              <a:rPr sz="1200" lang="zh-TW" dirty="0">
-                <a:solidFill>
-                  <a:srgbClr val="000000"/>
-                </a:solidFill>
-                <a:latin typeface="Arial Unicode MS"/>
-                <a:ea typeface="Arial Unicode MS"/>
-                <a:cs typeface="Arial Unicode MS"/>
-              </a:rPr>
-              <a:t>這一支是雷達的動畫解說。
+              <a:rPr sz="1000" lang="zh-TW" dirty="0">
+                <a:solidFill>
+                  <a:srgbClr val="000000"/>
+                </a:solidFill>
+                <a:latin typeface="Arial Unicode MS"/>
+                <a:ea typeface="Arial Unicode MS"/>
+                <a:cs typeface="Arial Unicode MS"/>
+              </a:rPr>
+              <a:t>這一支是雷達的動畫解說，全長三分二十秒，可以整支播完。
 </a:t>
             </a:r>
           </a:p>
@@ -6506,11 +6572,11 @@
                 <a:spcPct val="115000"/>
               </a:lnSpc>
               <a:spcAft>
-                <a:spcPts val="600"/>
+                <a:spcPts val="500"/>
               </a:spcAft>
             </a:pPr>
             <a:r>
-              <a:rPr sz="1200" lang="zh-TW" dirty="0">
+              <a:rPr sz="1000" lang="zh-TW" dirty="0">
                 <a:solidFill>
                   <a:srgbClr val="000000"/>
                 </a:solidFill>
@@ -6528,19 +6594,19 @@
                 <a:spcPct val="115000"/>
               </a:lnSpc>
               <a:spcAft>
-                <a:spcPts val="600"/>
+                <a:spcPts val="500"/>
               </a:spcAft>
             </a:pPr>
             <a:r>
-              <a:rPr sz="1200" lang="zh-TW" dirty="0">
-                <a:solidFill>
-                  <a:srgbClr val="000000"/>
-                </a:solidFill>
-                <a:latin typeface="Arial Unicode MS"/>
-                <a:ea typeface="Arial Unicode MS"/>
-                <a:cs typeface="Arial Unicode MS"/>
-              </a:rPr>
-              <a:t>第一，發出去的波和回來的波，動畫會把兩條疊在一起給你看，頻率已經不一樣了。那個差值就是速度。
+              <a:rPr sz="1000" lang="zh-TW" dirty="0">
+                <a:solidFill>
+                  <a:srgbClr val="000000"/>
+                </a:solidFill>
+                <a:latin typeface="Arial Unicode MS"/>
+                <a:ea typeface="Arial Unicode MS"/>
+                <a:cs typeface="Arial Unicode MS"/>
+              </a:rPr>
+              <a:t>第一，它把雷達的工作拆成四個步驟：發射一束無線電波、打到前面那台車、彈回來、然後算時間。動畫會一步一步演給大家看。
 </a:t>
             </a:r>
           </a:p>
@@ -6550,19 +6616,19 @@
                 <a:spcPct val="115000"/>
               </a:lnSpc>
               <a:spcAft>
-                <a:spcPts val="600"/>
+                <a:spcPts val="500"/>
               </a:spcAft>
             </a:pPr>
             <a:r>
-              <a:rPr sz="1200" lang="zh-TW" dirty="0">
-                <a:solidFill>
-                  <a:srgbClr val="000000"/>
-                </a:solidFill>
-                <a:latin typeface="Arial Unicode MS"/>
-                <a:ea typeface="Arial Unicode MS"/>
-                <a:cs typeface="Arial Unicode MS"/>
-              </a:rPr>
-              <a:t>第二，注意雷達裝在車上的位置。它通常藏在水箱罩後面，因為無線電波可以穿透塑膠，不像相機一定要露出來。這也是為什麼你在路上看不到它。
+              <a:rPr sz="1000" lang="zh-TW" dirty="0">
+                <a:solidFill>
+                  <a:srgbClr val="000000"/>
+                </a:solidFill>
+                <a:latin typeface="Arial Unicode MS"/>
+                <a:ea typeface="Arial Unicode MS"/>
+                <a:cs typeface="Arial Unicode MS"/>
+              </a:rPr>
+              <a:t>第二，注意它講雷達裝在車上的位置——保險桿、水箱罩，有時候在後視鏡裡面。因為無線電波可以穿透塑膠，不像相機一定要露出來。這也是為什麼你在路上看不到它。
 </a:t>
             </a:r>
           </a:p>
@@ -6572,19 +6638,19 @@
                 <a:spcPct val="115000"/>
               </a:lnSpc>
               <a:spcAft>
-                <a:spcPts val="600"/>
+                <a:spcPts val="500"/>
               </a:spcAft>
             </a:pPr>
             <a:r>
-              <a:rPr sz="1200" lang="zh-TW" dirty="0">
-                <a:solidFill>
-                  <a:srgbClr val="000000"/>
-                </a:solidFill>
-                <a:latin typeface="Arial Unicode MS"/>
-                <a:ea typeface="Arial Unicode MS"/>
-                <a:cs typeface="Arial Unicode MS"/>
-              </a:rPr>
-              <a:t>第三，看的時候請想一件事：如果那個東西是從你面前橫越過去的，頻率的變化會是多少？
+              <a:rPr sz="1000" lang="zh-TW" dirty="0">
+                <a:solidFill>
+                  <a:srgbClr val="000000"/>
+                </a:solidFill>
+                <a:latin typeface="Arial Unicode MS"/>
+                <a:ea typeface="Arial Unicode MS"/>
+                <a:cs typeface="Arial Unicode MS"/>
+              </a:rPr>
+              <a:t>第三，它把雷達分成短距、中距、長距三種，最後還跟熱像和光達比了一次。這一段呼應我們剛剛講的「每一種補另一種的洞」。
 </a:t>
             </a:r>
           </a:p>
@@ -6594,11 +6660,308 @@
                 <a:spcPct val="115000"/>
               </a:lnSpc>
               <a:spcAft>
-                <a:spcPts val="600"/>
+                <a:spcPts val="500"/>
               </a:spcAft>
             </a:pPr>
             <a:r>
-              <a:rPr sz="1200" lang="zh-TW" dirty="0">
+              <a:rPr sz="1000" b="1" lang="zh-TW" dirty="0">
+                <a:solidFill>
+                  <a:srgbClr val="000000"/>
+                </a:solidFill>
+                <a:latin typeface="Arial Unicode MS"/>
+                <a:ea typeface="Arial Unicode MS"/>
+                <a:cs typeface="Arial Unicode MS"/>
+              </a:rPr>
+              <a:t>接下來這件事最重要，請大家聽清楚。</a:t>
+            </a:r>
+            <a:r>
+              <a:rPr sz="1000" lang="zh-TW" dirty="0">
+                <a:solidFill>
+                  <a:srgbClr val="000000"/>
+                </a:solidFill>
+                <a:latin typeface="Arial Unicode MS"/>
+                <a:ea typeface="Arial Unicode MS"/>
+                <a:cs typeface="Arial Unicode MS"/>
+              </a:rPr>
+              <a:t>
+</a:t>
+            </a:r>
+          </a:p>
+          <a:p>
+            <a:pPr algn="l">
+              <a:lnSpc>
+                <a:spcPct val="115000"/>
+              </a:lnSpc>
+              <a:spcAft>
+                <a:spcPts val="500"/>
+              </a:spcAft>
+            </a:pPr>
+            <a:r>
+              <a:rPr sz="1000" lang="zh-TW" dirty="0">
+                <a:solidFill>
+                  <a:srgbClr val="000000"/>
+                </a:solidFill>
+                <a:latin typeface="Arial Unicode MS"/>
+                <a:ea typeface="Arial Unicode MS"/>
+                <a:cs typeface="Arial Unicode MS"/>
+              </a:rPr>
+              <a:t>這支影片有</a:t>
+            </a:r>
+            <a:r>
+              <a:rPr sz="1000" b="1" lang="zh-TW" dirty="0">
+                <a:solidFill>
+                  <a:srgbClr val="000000"/>
+                </a:solidFill>
+                <a:latin typeface="Arial Unicode MS"/>
+                <a:ea typeface="Arial Unicode MS"/>
+                <a:cs typeface="Arial Unicode MS"/>
+              </a:rPr>
+              <a:t>一句話講得不精確</a:t>
+            </a:r>
+            <a:r>
+              <a:rPr sz="1000" lang="zh-TW" dirty="0">
+                <a:solidFill>
+                  <a:srgbClr val="000000"/>
+                </a:solidFill>
+                <a:latin typeface="Arial Unicode MS"/>
+                <a:ea typeface="Arial Unicode MS"/>
+                <a:cs typeface="Arial Unicode MS"/>
+              </a:rPr>
+              <a:t>，跟剛剛那支光達的影片一樣。
+</a:t>
+            </a:r>
+          </a:p>
+          <a:p>
+            <a:pPr algn="l">
+              <a:lnSpc>
+                <a:spcPct val="115000"/>
+              </a:lnSpc>
+              <a:spcAft>
+                <a:spcPts val="500"/>
+              </a:spcAft>
+            </a:pPr>
+            <a:r>
+              <a:rPr sz="1000" lang="zh-TW" dirty="0">
+                <a:solidFill>
+                  <a:srgbClr val="000000"/>
+                </a:solidFill>
+                <a:latin typeface="Arial Unicode MS"/>
+                <a:ea typeface="Arial Unicode MS"/>
+                <a:cs typeface="Arial Unicode MS"/>
+              </a:rPr>
+              <a:t>它說：雷達算出電波來回的</a:t>
+            </a:r>
+            <a:r>
+              <a:rPr sz="1000" b="1" lang="zh-TW" dirty="0">
+                <a:solidFill>
+                  <a:srgbClr val="000000"/>
+                </a:solidFill>
+                <a:latin typeface="Arial Unicode MS"/>
+                <a:ea typeface="Arial Unicode MS"/>
+                <a:cs typeface="Arial Unicode MS"/>
+              </a:rPr>
+              <a:t>時間</a:t>
+            </a:r>
+            <a:r>
+              <a:rPr sz="1000" lang="zh-TW" dirty="0">
+                <a:solidFill>
+                  <a:srgbClr val="000000"/>
+                </a:solidFill>
+                <a:latin typeface="Arial Unicode MS"/>
+                <a:ea typeface="Arial Unicode MS"/>
+                <a:cs typeface="Arial Unicode MS"/>
+              </a:rPr>
+              <a:t>，然後用這個時間得到距離、速度和方向。
+</a:t>
+            </a:r>
+          </a:p>
+          <a:p>
+            <a:pPr algn="l">
+              <a:lnSpc>
+                <a:spcPct val="115000"/>
+              </a:lnSpc>
+              <a:spcAft>
+                <a:spcPts val="500"/>
+              </a:spcAft>
+            </a:pPr>
+            <a:r>
+              <a:rPr sz="1000" lang="zh-TW" dirty="0">
+                <a:solidFill>
+                  <a:srgbClr val="000000"/>
+                </a:solidFill>
+                <a:latin typeface="Arial Unicode MS"/>
+                <a:ea typeface="Arial Unicode MS"/>
+                <a:cs typeface="Arial Unicode MS"/>
+              </a:rPr>
+              <a:t>距離沒問題，時間乘光速再除以二就是距離。可是</a:t>
+            </a:r>
+            <a:r>
+              <a:rPr sz="1000" b="1" lang="zh-TW" dirty="0">
+                <a:solidFill>
+                  <a:srgbClr val="000000"/>
+                </a:solidFill>
+                <a:latin typeface="Arial Unicode MS"/>
+                <a:ea typeface="Arial Unicode MS"/>
+                <a:cs typeface="Arial Unicode MS"/>
+              </a:rPr>
+              <a:t>速度呢</a:t>
+            </a:r>
+            <a:r>
+              <a:rPr sz="1000" lang="zh-TW" dirty="0">
+                <a:solidFill>
+                  <a:srgbClr val="000000"/>
+                </a:solidFill>
+                <a:latin typeface="Arial Unicode MS"/>
+                <a:ea typeface="Arial Unicode MS"/>
+                <a:cs typeface="Arial Unicode MS"/>
+              </a:rPr>
+              <a:t>？
+</a:t>
+            </a:r>
+          </a:p>
+          <a:p>
+            <a:pPr algn="l">
+              <a:lnSpc>
+                <a:spcPct val="115000"/>
+              </a:lnSpc>
+              <a:spcAft>
+                <a:spcPts val="500"/>
+              </a:spcAft>
+            </a:pPr>
+            <a:r>
+              <a:rPr sz="1000" lang="zh-TW" dirty="0">
+                <a:solidFill>
+                  <a:srgbClr val="000000"/>
+                </a:solidFill>
+                <a:latin typeface="Arial Unicode MS"/>
+                <a:ea typeface="Arial Unicode MS"/>
+                <a:cs typeface="Arial Unicode MS"/>
+              </a:rPr>
+              <a:t>光靠一次的時間，是算不出速度的。速度要靠剛剛那一頁講的東西——</a:t>
+            </a:r>
+            <a:r>
+              <a:rPr sz="1000" b="1" lang="zh-TW" dirty="0">
+                <a:solidFill>
+                  <a:srgbClr val="000000"/>
+                </a:solidFill>
+                <a:latin typeface="Arial Unicode MS"/>
+                <a:ea typeface="Arial Unicode MS"/>
+                <a:cs typeface="Arial Unicode MS"/>
+              </a:rPr>
+              <a:t>都卜勒</a:t>
+            </a:r>
+            <a:r>
+              <a:rPr sz="1000" lang="zh-TW" dirty="0">
+                <a:solidFill>
+                  <a:srgbClr val="000000"/>
+                </a:solidFill>
+                <a:latin typeface="Arial Unicode MS"/>
+                <a:ea typeface="Arial Unicode MS"/>
+                <a:cs typeface="Arial Unicode MS"/>
+              </a:rPr>
+              <a:t>，也就是比較回波的頻率和相位。方向也不是時間給的，要靠好幾根天線收到的時間差才推得出來。
+</a:t>
+            </a:r>
+          </a:p>
+          <a:p>
+            <a:pPr algn="l">
+              <a:lnSpc>
+                <a:spcPct val="115000"/>
+              </a:lnSpc>
+              <a:spcAft>
+                <a:spcPts val="500"/>
+              </a:spcAft>
+            </a:pPr>
+            <a:r>
+              <a:rPr sz="1000" lang="zh-TW" dirty="0">
+                <a:solidFill>
+                  <a:srgbClr val="000000"/>
+                </a:solidFill>
+                <a:latin typeface="Arial Unicode MS"/>
+                <a:ea typeface="Arial Unicode MS"/>
+                <a:cs typeface="Arial Unicode MS"/>
+              </a:rPr>
+              <a:t>所以這支影片講的是大概的印象，不是精確的原理。我要各位養成的習慣還是那一句：</a:t>
+            </a:r>
+            <a:r>
+              <a:rPr sz="1000" b="1" lang="zh-TW" dirty="0">
+                <a:solidFill>
+                  <a:srgbClr val="000000"/>
+                </a:solidFill>
+                <a:latin typeface="Arial Unicode MS"/>
+                <a:ea typeface="Arial Unicode MS"/>
+                <a:cs typeface="Arial Unicode MS"/>
+              </a:rPr>
+              <a:t>科普影片不一定每句都對。</a:t>
+            </a:r>
+            <a:r>
+              <a:rPr sz="1000" lang="zh-TW" dirty="0">
+                <a:solidFill>
+                  <a:srgbClr val="000000"/>
+                </a:solidFill>
+                <a:latin typeface="Arial Unicode MS"/>
+                <a:ea typeface="Arial Unicode MS"/>
+                <a:cs typeface="Arial Unicode MS"/>
+              </a:rPr>
+              <a:t>
+</a:t>
+            </a:r>
+          </a:p>
+          <a:p>
+            <a:pPr algn="l">
+              <a:lnSpc>
+                <a:spcPct val="115000"/>
+              </a:lnSpc>
+              <a:spcAft>
+                <a:spcPts val="500"/>
+              </a:spcAft>
+            </a:pPr>
+            <a:r>
+              <a:rPr sz="1000" lang="zh-TW" dirty="0">
+                <a:solidFill>
+                  <a:srgbClr val="000000"/>
+                </a:solidFill>
+                <a:latin typeface="Arial Unicode MS"/>
+                <a:ea typeface="Arial Unicode MS"/>
+                <a:cs typeface="Arial Unicode MS"/>
+              </a:rPr>
+              <a:t>最後留一個問題，等一下操作的時候會用到：如果那個東西是從你面前</a:t>
+            </a:r>
+            <a:r>
+              <a:rPr sz="1000" b="1" lang="zh-TW" dirty="0">
+                <a:solidFill>
+                  <a:srgbClr val="000000"/>
+                </a:solidFill>
+                <a:latin typeface="Arial Unicode MS"/>
+                <a:ea typeface="Arial Unicode MS"/>
+                <a:cs typeface="Arial Unicode MS"/>
+              </a:rPr>
+              <a:t>橫越</a:t>
+            </a:r>
+            <a:r>
+              <a:rPr sz="1000" lang="zh-TW" dirty="0">
+                <a:solidFill>
+                  <a:srgbClr val="000000"/>
+                </a:solidFill>
+                <a:latin typeface="Arial Unicode MS"/>
+                <a:ea typeface="Arial Unicode MS"/>
+                <a:cs typeface="Arial Unicode MS"/>
+              </a:rPr>
+              <a:t>過去的，雷達讀到的接近速度會是多少？
+</a:t>
+            </a:r>
+          </a:p>
+          <a:p>
+            <a:pPr algn="l">
+              <a:lnSpc>
+                <a:spcPct val="115000"/>
+              </a:lnSpc>
+              <a:spcAft>
+                <a:spcPts val="500"/>
+              </a:spcAft>
+            </a:pPr>
+            <a:r>
+              <a:rPr sz="1000" lang="zh-TW" dirty="0">
                 <a:solidFill>
                   <a:srgbClr val="000000"/>
                 </a:solidFill>
@@ -6609,48 +6972,26 @@
               <a:t>答案是</a:t>
             </a:r>
             <a:r>
-              <a:rPr sz="1200" b="1" lang="zh-TW" dirty="0">
-                <a:solidFill>
-                  <a:srgbClr val="000000"/>
-                </a:solidFill>
-                <a:latin typeface="Arial Unicode MS"/>
-                <a:ea typeface="Arial Unicode MS"/>
-                <a:cs typeface="Arial Unicode MS"/>
-              </a:rPr>
-              <a:t>幾乎沒有變化</a:t>
-            </a:r>
-            <a:r>
-              <a:rPr sz="1200" lang="zh-TW" dirty="0">
-                <a:solidFill>
-                  <a:srgbClr val="000000"/>
-                </a:solidFill>
-                <a:latin typeface="Arial Unicode MS"/>
-                <a:ea typeface="Arial Unicode MS"/>
-                <a:cs typeface="Arial Unicode MS"/>
-              </a:rPr>
-              <a:t>。它明明在動，可是雷達讀到的接近速度接近零。這件事等一下上台操作的時候，大家會親眼看到。
-</a:t>
-            </a:r>
-          </a:p>
-          <a:p>
-            <a:pPr algn="l">
-              <a:lnSpc>
-                <a:spcPct val="115000"/>
-              </a:lnSpc>
-              <a:spcAft>
-                <a:spcPts val="600"/>
-              </a:spcAft>
-            </a:pPr>
-            <a:r>
-              <a:rPr sz="1200" lang="zh-TW" dirty="0">
-                <a:solidFill>
-                  <a:srgbClr val="000000"/>
-                </a:solidFill>
-                <a:latin typeface="Arial Unicode MS"/>
-                <a:ea typeface="Arial Unicode MS"/>
-                <a:cs typeface="Arial Unicode MS"/>
-              </a:rPr>
-              <a:t>我們播兩三分鐘就好。</a:t>
+              <a:rPr sz="1000" b="1" lang="zh-TW" dirty="0">
+                <a:solidFill>
+                  <a:srgbClr val="000000"/>
+                </a:solidFill>
+                <a:latin typeface="Arial Unicode MS"/>
+                <a:ea typeface="Arial Unicode MS"/>
+                <a:cs typeface="Arial Unicode MS"/>
+              </a:rPr>
+              <a:t>幾乎是零</a:t>
+            </a:r>
+            <a:r>
+              <a:rPr sz="1000" lang="zh-TW" dirty="0">
+                <a:solidFill>
+                  <a:srgbClr val="000000"/>
+                </a:solidFill>
+                <a:latin typeface="Arial Unicode MS"/>
+                <a:ea typeface="Arial Unicode MS"/>
+                <a:cs typeface="Arial Unicode MS"/>
+              </a:rPr>
+              <a:t>。它明明在動，可是雷達讀到的接近速度接近零。這件事等一下上台操作的時候，大家會親眼看到。</a:t>
             </a:r>
           </a:p>
         </p:txBody>
@@ -24622,7 +24963,7 @@
         <p:spPr>
           <a:xfrm>
             <a:off x="5047488" y="2279756"/>
-            <a:ext cx="3429000" cy="313748"/>
+            <a:ext cx="3429000" cy="456079"/>
           </a:xfrm>
           <a:prstGeom prst="rect">
             <a:avLst/>
@@ -24649,7 +24990,7 @@
                 <a:ea typeface="Arial" pitchFamily="34" charset="-122"/>
                 <a:cs typeface="Arial" pitchFamily="34" charset="-120"/>
               </a:rPr>
-              <a:t>Sóng phát ra và sóng về: tần số đã khác nhau</a:t>
+              <a:t>Bốn bước: phát sóng → chạm vật → vọng về → tính thời gian</a:t>
             </a:r>
             <a:endParaRPr lang="en-US" sz="950" dirty="0"/>
           </a:p>
@@ -24669,7 +25010,7 @@
                 <a:ea typeface="微軟正黑體" pitchFamily="34" charset="-122"/>
                 <a:cs typeface="微軟正黑體" pitchFamily="34" charset="-120"/>
               </a:rPr>
-              <a:t>發出去的波和回來的波：頻率已經不一樣了</a:t>
+              <a:t>四個步驟：發射 → 打到東西 → 彈回來 → 算時間</a:t>
             </a:r>
             <a:endParaRPr lang="en-US" sz="950" dirty="0"/>
           </a:p>
@@ -24683,7 +25024,7 @@
         </p:nvSpPr>
         <p:spPr>
           <a:xfrm>
-            <a:off x="4919472" y="2666656"/>
+            <a:off x="4919472" y="2808987"/>
             <a:ext cx="36576" cy="237744"/>
           </a:xfrm>
           <a:prstGeom prst="rect">
@@ -24703,7 +25044,7 @@
         </p:nvSpPr>
         <p:spPr>
           <a:xfrm>
-            <a:off x="5047488" y="2630080"/>
+            <a:off x="5047488" y="2772411"/>
             <a:ext cx="3429000" cy="456079"/>
           </a:xfrm>
           <a:prstGeom prst="rect">
@@ -24765,7 +25106,7 @@
         </p:nvSpPr>
         <p:spPr>
           <a:xfrm>
-            <a:off x="4919472" y="3159311"/>
+            <a:off x="4919472" y="3301642"/>
             <a:ext cx="36576" cy="237744"/>
           </a:xfrm>
           <a:prstGeom prst="rect">
@@ -24785,8 +25126,8 @@
         </p:nvSpPr>
         <p:spPr>
           <a:xfrm>
-            <a:off x="5047488" y="3122735"/>
-            <a:ext cx="3429000" cy="313748"/>
+            <a:off x="5047488" y="3265066"/>
+            <a:ext cx="3429000" cy="456079"/>
           </a:xfrm>
           <a:prstGeom prst="rect">
             <a:avLst/>
@@ -24813,7 +25154,7 @@
                 <a:ea typeface="Arial" pitchFamily="34" charset="-122"/>
                 <a:cs typeface="Arial" pitchFamily="34" charset="-120"/>
               </a:rPr>
-              <a:t>Xem xong nhớ lại: vật băng ngang thì đọc ra bao nhiêu?</a:t>
+              <a:t>Bẫy: video nói «thời gian cho ra cả tốc độ». Tốc độ thật ra từ đâu?</a:t>
             </a:r>
             <a:endParaRPr lang="en-US" sz="950" dirty="0"/>
           </a:p>
@@ -24833,7 +25174,7 @@
                 <a:ea typeface="微軟正黑體" pitchFamily="34" charset="-122"/>
                 <a:cs typeface="微軟正黑體" pitchFamily="34" charset="-120"/>
               </a:rPr>
-              <a:t>看完回想：橫越的物體會讀到多少？</a:t>
+              <a:t>陷阱：影片說「量時間就得到速度」。速度到底哪裡來的？</a:t>
             </a:r>
             <a:endParaRPr lang="en-US" sz="950" dirty="0"/>
           </a:p>

--- a/第三週(09-24)/第三週_第1節_簡報.pptx
+++ b/第三週(09-24)/第三週_第1節_簡報.pptx
@@ -6650,7 +6650,7 @@
                 <a:ea typeface="Arial Unicode MS"/>
                 <a:cs typeface="Arial Unicode MS"/>
               </a:rPr>
-              <a:t>第三，它把雷達分成短距、中距、長距三種，最後還跟熱像和光達比了一次。這一段呼應我們剛剛講的「每一種補另一種的洞」。
+              <a:t>第三，它把雷達分成短距、中距、長距三種，最後還跟被動紅外線和光達比了一次。被動紅外線就是走廊感應燈那種偵測人體熱訊號的元件，跟我們等一下要講的熱像儀不是同一個東西。這一段呼應我們剛剛講的「每一種補另一種的洞」。
 </a:t>
             </a:r>
           </a:p>

--- a/第三週(09-24)/第三週_第1節_簡報.pptx
+++ b/第三週(09-24)/第三週_第1節_簡報.pptx
@@ -26473,7 +26473,7 @@
                 <a:ea typeface="Arial" pitchFamily="34" charset="-122"/>
                 <a:cs typeface="Arial" pitchFamily="34" charset="-120"/>
               </a:rPr>
-              <a:t>Engineering Decoded　·　2:34</a:t>
+              <a:t>Engineering Decoded　·　2:33</a:t>
             </a:r>
             <a:endParaRPr lang="en-US" sz="900" dirty="0"/>
           </a:p>
